--- a/JanMitra_Presentation.pptx
+++ b/JanMitra_Presentation.pptx
@@ -3148,8 +3148,8 @@
         </p:nvSpPr>
         <p:spPr>
           <a:xfrm>
-            <a:off x="1097280" y="1371600"/>
-            <a:ext cx="9966960" cy="3200400"/>
+            <a:off x="1097280" y="1188720"/>
+            <a:ext cx="9966960" cy="2926080"/>
           </a:xfrm>
           <a:prstGeom prst="rect">
             <a:avLst/>
@@ -3163,20 +3163,20 @@
           <a:lstStyle/>
           <a:p>
             <a:pPr>
-              <a:defRPr sz="1300" b="1">
+              <a:defRPr sz="1200" b="1">
                 <a:solidFill>
                   <a:srgbClr val="F59E0B"/>
                 </a:solidFill>
               </a:defRPr>
             </a:pPr>
             <a:r>
-              <a:t>CIVIC-TECH INNOVATION  •  INDIA / UTTAR PRADESH</a:t>
+              <a:t>CIVIC-TECH INNOVATION  •  INDIA &amp; UTTAR PRADESH PROTOTYPE</a:t>
             </a:r>
           </a:p>
           <a:p>
             <a:pPr>
               <a:spcBef>
-                <a:spcPts val="1200"/>
+                <a:spcPts val="800"/>
               </a:spcBef>
               <a:defRPr sz="4600" b="1">
                 <a:solidFill>
@@ -3191,7 +3191,7 @@
           <a:p>
             <a:pPr>
               <a:spcBef>
-                <a:spcPts val="600"/>
+                <a:spcPts val="400"/>
               </a:spcBef>
               <a:defRPr sz="2000">
                 <a:solidFill>
@@ -3203,6 +3203,21 @@
               <a:t>“Understand. Discover. Apply.”</a:t>
             </a:r>
           </a:p>
+          <a:p>
+            <a:pPr>
+              <a:spcBef>
+                <a:spcPts val="800"/>
+              </a:spcBef>
+              <a:defRPr sz="1400">
+                <a:solidFill>
+                  <a:srgbClr val="CBD5E1"/>
+                </a:solidFill>
+              </a:defRPr>
+            </a:pPr>
+            <a:r>
+              <a:t>A citizen-first digital navigator that turns real-life situations into evidence-backed government action plans.</a:t>
+            </a:r>
+          </a:p>
         </p:txBody>
       </p:sp>
       <p:sp>
@@ -3213,7 +3228,7 @@
         </p:nvSpPr>
         <p:spPr>
           <a:xfrm>
-            <a:off x="1097280" y="4114800"/>
+            <a:off x="1097280" y="4297680"/>
             <a:ext cx="9966960" cy="1645920"/>
           </a:xfrm>
           <a:prstGeom prst="roundRect">
@@ -3258,7 +3273,7 @@
         </p:nvSpPr>
         <p:spPr>
           <a:xfrm>
-            <a:off x="1371600" y="4251960"/>
+            <a:off x="1371600" y="4434840"/>
             <a:ext cx="9418320" cy="1371600"/>
           </a:xfrm>
           <a:prstGeom prst="rect">
@@ -3280,7 +3295,7 @@
               </a:defRPr>
             </a:pPr>
             <a:r>
-              <a:t>THE CORE PHILOSOPHY</a:t>
+              <a:t>THE CORE PRODUCT PHILOSOPHY</a:t>
             </a:r>
           </a:p>
           <a:p>
@@ -3369,8 +3384,8 @@
         </p:nvSpPr>
         <p:spPr>
           <a:xfrm>
-            <a:off x="1097280" y="1371600"/>
-            <a:ext cx="9966960" cy="4114800"/>
+            <a:off x="1097280" y="731520"/>
+            <a:ext cx="9966960" cy="1097280"/>
           </a:xfrm>
           <a:prstGeom prst="rect">
             <a:avLst/>
@@ -3384,29 +3399,29 @@
           <a:lstStyle/>
           <a:p>
             <a:pPr>
-              <a:defRPr sz="1300" b="1">
+              <a:defRPr sz="1200" b="1">
                 <a:solidFill>
                   <a:srgbClr val="F59E0B"/>
                 </a:solidFill>
               </a:defRPr>
             </a:pPr>
             <a:r>
-              <a:t>FROM IDEA TO IMPACT</a:t>
+              <a:t>TRANSFORMATIVE CITIZEN IMPACT</a:t>
             </a:r>
           </a:p>
           <a:p>
             <a:pPr>
               <a:spcBef>
-                <a:spcPts val="800"/>
+                <a:spcPts val="400"/>
               </a:spcBef>
-              <a:defRPr sz="3600" b="1">
+              <a:defRPr sz="3000" b="1">
                 <a:solidFill>
                   <a:srgbClr val="FFFFFF"/>
                 </a:solidFill>
               </a:defRPr>
             </a:pPr>
             <a:r>
-              <a:t>Transforming Public Welfare into an Everyday Reality</a:t>
+              <a:t>From Bureaucratic Maze to Constitutional Dignity</a:t>
             </a:r>
           </a:p>
         </p:txBody>
@@ -3419,7 +3434,435 @@
         </p:nvSpPr>
         <p:spPr>
           <a:xfrm>
-            <a:off x="1097280" y="2926080"/>
+            <a:off x="1097280" y="2011680"/>
+            <a:ext cx="2377440" cy="1463040"/>
+          </a:xfrm>
+          <a:prstGeom prst="roundRect">
+            <a:avLst/>
+          </a:prstGeom>
+          <a:solidFill>
+            <a:srgbClr val="1E293B"/>
+          </a:solidFill>
+          <a:ln>
+            <a:solidFill>
+              <a:srgbClr val="334155"/>
+            </a:solidFill>
+          </a:ln>
+        </p:spPr>
+        <p:style>
+          <a:lnRef idx="1">
+            <a:schemeClr val="accent1"/>
+          </a:lnRef>
+          <a:fillRef idx="3">
+            <a:schemeClr val="accent1"/>
+          </a:fillRef>
+          <a:effectRef idx="2">
+            <a:schemeClr val="accent1"/>
+          </a:effectRef>
+          <a:fontRef idx="minor">
+            <a:schemeClr val="lt1"/>
+          </a:fontRef>
+        </p:style>
+        <p:txBody>
+          <a:bodyPr rtlCol="0" anchor="ctr"/>
+          <a:lstStyle/>
+          <a:p>
+            <a:pPr algn="ctr"/>
+          </a:p>
+        </p:txBody>
+      </p:sp>
+      <p:sp>
+        <p:nvSpPr>
+          <p:cNvPr id="5" name="TextBox 4"/>
+          <p:cNvSpPr txBox="1"/>
+          <p:nvPr/>
+        </p:nvSpPr>
+        <p:spPr>
+          <a:xfrm>
+            <a:off x="1234440" y="2103120"/>
+            <a:ext cx="2103120" cy="1280160"/>
+          </a:xfrm>
+          <a:prstGeom prst="rect">
+            <a:avLst/>
+          </a:prstGeom>
+          <a:noFill/>
+        </p:spPr>
+        <p:txBody>
+          <a:bodyPr wrap="square">
+            <a:spAutoFit/>
+          </a:bodyPr>
+          <a:lstStyle/>
+          <a:p>
+            <a:pPr>
+              <a:defRPr sz="2400" b="1">
+                <a:solidFill>
+                  <a:srgbClr val="F59E0B"/>
+                </a:solidFill>
+              </a:defRPr>
+            </a:pPr>
+            <a:r>
+              <a:t>70%</a:t>
+            </a:r>
+          </a:p>
+          <a:p>
+            <a:pPr>
+              <a:spcBef>
+                <a:spcPts val="200"/>
+              </a:spcBef>
+              <a:defRPr sz="1100" b="1">
+                <a:solidFill>
+                  <a:srgbClr val="FFFFFF"/>
+                </a:solidFill>
+              </a:defRPr>
+            </a:pPr>
+            <a:r>
+              <a:t>Reduction in Application Rejections</a:t>
+            </a:r>
+          </a:p>
+          <a:p>
+            <a:pPr>
+              <a:defRPr sz="950">
+                <a:solidFill>
+                  <a:srgbClr val="94A3B8"/>
+                </a:solidFill>
+              </a:defRPr>
+            </a:pPr>
+            <a:r>
+              <a:t>Right documents prepared before applying</a:t>
+            </a:r>
+          </a:p>
+        </p:txBody>
+      </p:sp>
+      <p:sp>
+        <p:nvSpPr>
+          <p:cNvPr id="6" name="Rounded Rectangle 5"/>
+          <p:cNvSpPr/>
+          <p:nvPr/>
+        </p:nvSpPr>
+        <p:spPr>
+          <a:xfrm>
+            <a:off x="3611880" y="2011680"/>
+            <a:ext cx="2377440" cy="1463040"/>
+          </a:xfrm>
+          <a:prstGeom prst="roundRect">
+            <a:avLst/>
+          </a:prstGeom>
+          <a:solidFill>
+            <a:srgbClr val="1E293B"/>
+          </a:solidFill>
+          <a:ln>
+            <a:solidFill>
+              <a:srgbClr val="334155"/>
+            </a:solidFill>
+          </a:ln>
+        </p:spPr>
+        <p:style>
+          <a:lnRef idx="1">
+            <a:schemeClr val="accent1"/>
+          </a:lnRef>
+          <a:fillRef idx="3">
+            <a:schemeClr val="accent1"/>
+          </a:fillRef>
+          <a:effectRef idx="2">
+            <a:schemeClr val="accent1"/>
+          </a:effectRef>
+          <a:fontRef idx="minor">
+            <a:schemeClr val="lt1"/>
+          </a:fontRef>
+        </p:style>
+        <p:txBody>
+          <a:bodyPr rtlCol="0" anchor="ctr"/>
+          <a:lstStyle/>
+          <a:p>
+            <a:pPr algn="ctr"/>
+          </a:p>
+        </p:txBody>
+      </p:sp>
+      <p:sp>
+        <p:nvSpPr>
+          <p:cNvPr id="7" name="TextBox 6"/>
+          <p:cNvSpPr txBox="1"/>
+          <p:nvPr/>
+        </p:nvSpPr>
+        <p:spPr>
+          <a:xfrm>
+            <a:off x="3749040" y="2103120"/>
+            <a:ext cx="2103120" cy="1280160"/>
+          </a:xfrm>
+          <a:prstGeom prst="rect">
+            <a:avLst/>
+          </a:prstGeom>
+          <a:noFill/>
+        </p:spPr>
+        <p:txBody>
+          <a:bodyPr wrap="square">
+            <a:spAutoFit/>
+          </a:bodyPr>
+          <a:lstStyle/>
+          <a:p>
+            <a:pPr>
+              <a:defRPr sz="2400" b="1">
+                <a:solidFill>
+                  <a:srgbClr val="F59E0B"/>
+                </a:solidFill>
+              </a:defRPr>
+            </a:pPr>
+            <a:r>
+              <a:t>₹5 Lakh+</a:t>
+            </a:r>
+          </a:p>
+          <a:p>
+            <a:pPr>
+              <a:spcBef>
+                <a:spcPts val="200"/>
+              </a:spcBef>
+              <a:defRPr sz="1100" b="1">
+                <a:solidFill>
+                  <a:srgbClr val="FFFFFF"/>
+                </a:solidFill>
+              </a:defRPr>
+            </a:pPr>
+            <a:r>
+              <a:t>Welfare Unlocked per Family</a:t>
+            </a:r>
+          </a:p>
+          <a:p>
+            <a:pPr>
+              <a:defRPr sz="950">
+                <a:solidFill>
+                  <a:srgbClr val="94A3B8"/>
+                </a:solidFill>
+              </a:defRPr>
+            </a:pPr>
+            <a:r>
+              <a:t>Cashless healthcare and fee waivers</a:t>
+            </a:r>
+          </a:p>
+        </p:txBody>
+      </p:sp>
+      <p:sp>
+        <p:nvSpPr>
+          <p:cNvPr id="8" name="Rounded Rectangle 7"/>
+          <p:cNvSpPr/>
+          <p:nvPr/>
+        </p:nvSpPr>
+        <p:spPr>
+          <a:xfrm>
+            <a:off x="6126480" y="2011680"/>
+            <a:ext cx="2377440" cy="1463040"/>
+          </a:xfrm>
+          <a:prstGeom prst="roundRect">
+            <a:avLst/>
+          </a:prstGeom>
+          <a:solidFill>
+            <a:srgbClr val="1E293B"/>
+          </a:solidFill>
+          <a:ln>
+            <a:solidFill>
+              <a:srgbClr val="334155"/>
+            </a:solidFill>
+          </a:ln>
+        </p:spPr>
+        <p:style>
+          <a:lnRef idx="1">
+            <a:schemeClr val="accent1"/>
+          </a:lnRef>
+          <a:fillRef idx="3">
+            <a:schemeClr val="accent1"/>
+          </a:fillRef>
+          <a:effectRef idx="2">
+            <a:schemeClr val="accent1"/>
+          </a:effectRef>
+          <a:fontRef idx="minor">
+            <a:schemeClr val="lt1"/>
+          </a:fontRef>
+        </p:style>
+        <p:txBody>
+          <a:bodyPr rtlCol="0" anchor="ctr"/>
+          <a:lstStyle/>
+          <a:p>
+            <a:pPr algn="ctr"/>
+          </a:p>
+        </p:txBody>
+      </p:sp>
+      <p:sp>
+        <p:nvSpPr>
+          <p:cNvPr id="9" name="TextBox 8"/>
+          <p:cNvSpPr txBox="1"/>
+          <p:nvPr/>
+        </p:nvSpPr>
+        <p:spPr>
+          <a:xfrm>
+            <a:off x="6263640" y="2103120"/>
+            <a:ext cx="2103120" cy="1280160"/>
+          </a:xfrm>
+          <a:prstGeom prst="rect">
+            <a:avLst/>
+          </a:prstGeom>
+          <a:noFill/>
+        </p:spPr>
+        <p:txBody>
+          <a:bodyPr wrap="square">
+            <a:spAutoFit/>
+          </a:bodyPr>
+          <a:lstStyle/>
+          <a:p>
+            <a:pPr>
+              <a:defRPr sz="2400" b="1">
+                <a:solidFill>
+                  <a:srgbClr val="F59E0B"/>
+                </a:solidFill>
+              </a:defRPr>
+            </a:pPr>
+            <a:r>
+              <a:t>100%</a:t>
+            </a:r>
+          </a:p>
+          <a:p>
+            <a:pPr>
+              <a:spcBef>
+                <a:spcPts val="200"/>
+              </a:spcBef>
+              <a:defRPr sz="1100" b="1">
+                <a:solidFill>
+                  <a:srgbClr val="FFFFFF"/>
+                </a:solidFill>
+              </a:defRPr>
+            </a:pPr>
+            <a:r>
+              <a:t>Evidence-First Transparency</a:t>
+            </a:r>
+          </a:p>
+          <a:p>
+            <a:pPr>
+              <a:defRPr sz="950">
+                <a:solidFill>
+                  <a:srgbClr val="94A3B8"/>
+                </a:solidFill>
+              </a:defRPr>
+            </a:pPr>
+            <a:r>
+              <a:t>Zero hallucinated rules or dead URLs</a:t>
+            </a:r>
+          </a:p>
+        </p:txBody>
+      </p:sp>
+      <p:sp>
+        <p:nvSpPr>
+          <p:cNvPr id="10" name="Rounded Rectangle 9"/>
+          <p:cNvSpPr/>
+          <p:nvPr/>
+        </p:nvSpPr>
+        <p:spPr>
+          <a:xfrm>
+            <a:off x="8641080" y="2011680"/>
+            <a:ext cx="2377440" cy="1463040"/>
+          </a:xfrm>
+          <a:prstGeom prst="roundRect">
+            <a:avLst/>
+          </a:prstGeom>
+          <a:solidFill>
+            <a:srgbClr val="1E293B"/>
+          </a:solidFill>
+          <a:ln>
+            <a:solidFill>
+              <a:srgbClr val="334155"/>
+            </a:solidFill>
+          </a:ln>
+        </p:spPr>
+        <p:style>
+          <a:lnRef idx="1">
+            <a:schemeClr val="accent1"/>
+          </a:lnRef>
+          <a:fillRef idx="3">
+            <a:schemeClr val="accent1"/>
+          </a:fillRef>
+          <a:effectRef idx="2">
+            <a:schemeClr val="accent1"/>
+          </a:effectRef>
+          <a:fontRef idx="minor">
+            <a:schemeClr val="lt1"/>
+          </a:fontRef>
+        </p:style>
+        <p:txBody>
+          <a:bodyPr rtlCol="0" anchor="ctr"/>
+          <a:lstStyle/>
+          <a:p>
+            <a:pPr algn="ctr"/>
+          </a:p>
+        </p:txBody>
+      </p:sp>
+      <p:sp>
+        <p:nvSpPr>
+          <p:cNvPr id="11" name="TextBox 10"/>
+          <p:cNvSpPr txBox="1"/>
+          <p:nvPr/>
+        </p:nvSpPr>
+        <p:spPr>
+          <a:xfrm>
+            <a:off x="8778240" y="2103120"/>
+            <a:ext cx="2103120" cy="1280160"/>
+          </a:xfrm>
+          <a:prstGeom prst="rect">
+            <a:avLst/>
+          </a:prstGeom>
+          <a:noFill/>
+        </p:spPr>
+        <p:txBody>
+          <a:bodyPr wrap="square">
+            <a:spAutoFit/>
+          </a:bodyPr>
+          <a:lstStyle/>
+          <a:p>
+            <a:pPr>
+              <a:defRPr sz="2400" b="1">
+                <a:solidFill>
+                  <a:srgbClr val="F59E0B"/>
+                </a:solidFill>
+              </a:defRPr>
+            </a:pPr>
+            <a:r>
+              <a:t>100% Free</a:t>
+            </a:r>
+          </a:p>
+          <a:p>
+            <a:pPr>
+              <a:spcBef>
+                <a:spcPts val="200"/>
+              </a:spcBef>
+              <a:defRPr sz="1100" b="1">
+                <a:solidFill>
+                  <a:srgbClr val="FFFFFF"/>
+                </a:solidFill>
+              </a:defRPr>
+            </a:pPr>
+            <a:r>
+              <a:t>Open Public Interest Tech</a:t>
+            </a:r>
+          </a:p>
+          <a:p>
+            <a:pPr>
+              <a:defRPr sz="950">
+                <a:solidFill>
+                  <a:srgbClr val="94A3B8"/>
+                </a:solidFill>
+              </a:defRPr>
+            </a:pPr>
+            <a:r>
+              <a:t>Zero cloud tracking of citizen credentials</a:t>
+            </a:r>
+          </a:p>
+        </p:txBody>
+      </p:sp>
+      <p:sp>
+        <p:nvSpPr>
+          <p:cNvPr id="12" name="Rounded Rectangle 11"/>
+          <p:cNvSpPr/>
+          <p:nvPr/>
+        </p:nvSpPr>
+        <p:spPr>
+          <a:xfrm>
+            <a:off x="1097280" y="3749039"/>
             <a:ext cx="9966960" cy="1645920"/>
           </a:xfrm>
           <a:prstGeom prst="roundRect">
@@ -3458,13 +3901,13 @@
       </p:sp>
       <p:sp>
         <p:nvSpPr>
-          <p:cNvPr id="5" name="TextBox 4"/>
+          <p:cNvPr id="13" name="TextBox 12"/>
           <p:cNvSpPr txBox="1"/>
           <p:nvPr/>
         </p:nvSpPr>
         <p:spPr>
           <a:xfrm>
-            <a:off x="1371600" y="3108960"/>
+            <a:off x="1371600" y="3931920"/>
             <a:ext cx="9418320" cy="1280160"/>
           </a:xfrm>
           <a:prstGeom prst="rect">
@@ -3493,14 +3936,14 @@
       </p:sp>
       <p:sp>
         <p:nvSpPr>
-          <p:cNvPr id="6" name="TextBox 5"/>
+          <p:cNvPr id="14" name="TextBox 13"/>
           <p:cNvSpPr txBox="1"/>
           <p:nvPr/>
         </p:nvSpPr>
         <p:spPr>
           <a:xfrm>
-            <a:off x="1097280" y="4937760"/>
-            <a:ext cx="9966960" cy="914400"/>
+            <a:off x="1097280" y="5577840"/>
+            <a:ext cx="9966960" cy="731520"/>
           </a:xfrm>
           <a:prstGeom prst="rect">
             <a:avLst/>
@@ -3514,29 +3957,14 @@
           <a:lstStyle/>
           <a:p>
             <a:pPr>
-              <a:defRPr sz="1300" b="1">
+              <a:defRPr sz="1200" b="1">
                 <a:solidFill>
                   <a:srgbClr val="BFDBFE"/>
                 </a:solidFill>
               </a:defRPr>
             </a:pPr>
             <a:r>
-              <a:t>Explore the Live Interactive Prototype:  https://github.com/samenthamassey127-hue/JanMitra</a:t>
-            </a:r>
-          </a:p>
-          <a:p>
-            <a:pPr>
-              <a:spcBef>
-                <a:spcPts val="400"/>
-              </a:spcBef>
-              <a:defRPr sz="1100">
-                <a:solidFill>
-                  <a:srgbClr val="94A3B8"/>
-                </a:solidFill>
-              </a:defRPr>
-            </a:pPr>
-            <a:r>
-              <a:t>JanMitra  •  Citizen-First Civic Intelligence  •  Ready for Pilot Testing</a:t>
+              <a:t>Live Prototype &amp; Code: https://github.com/samenthamassey127-hue/JanMitra</a:t>
             </a:r>
           </a:p>
         </p:txBody>
@@ -3567,7 +3995,7 @@
         </p:nvSpPr>
         <p:spPr>
           <a:xfrm>
-            <a:off x="731520" y="411480"/>
+            <a:off x="731520" y="365760"/>
             <a:ext cx="10698480" cy="320040"/>
           </a:xfrm>
           <a:prstGeom prst="rect">
@@ -3589,7 +4017,7 @@
               </a:defRPr>
             </a:pPr>
             <a:r>
-              <a:t>THE CITIZEN CHALLENGE</a:t>
+              <a:t>THE CITIZEN DILEMMA</a:t>
             </a:r>
           </a:p>
         </p:txBody>
@@ -3602,8 +4030,8 @@
         </p:nvSpPr>
         <p:spPr>
           <a:xfrm>
-            <a:off x="731520" y="731520"/>
-            <a:ext cx="10698480" cy="548640"/>
+            <a:off x="731520" y="685800"/>
+            <a:ext cx="10698480" cy="502920"/>
           </a:xfrm>
           <a:prstGeom prst="rect">
             <a:avLst/>
@@ -3617,14 +4045,14 @@
           <a:lstStyle/>
           <a:p>
             <a:pPr>
-              <a:defRPr sz="2400" b="1">
+              <a:defRPr sz="2200" b="1">
                 <a:solidFill>
                   <a:srgbClr val="0F172A"/>
                 </a:solidFill>
               </a:defRPr>
             </a:pPr>
             <a:r>
-              <a:t>The Administrative Labyrinth Facing Citizens</a:t>
+              <a:t>The Reality of Accessing Government Welfare in India</a:t>
             </a:r>
           </a:p>
         </p:txBody>
@@ -3637,8 +4065,8 @@
         </p:nvSpPr>
         <p:spPr>
           <a:xfrm>
-            <a:off x="731520" y="1280160"/>
-            <a:ext cx="10698480" cy="411480"/>
+            <a:off x="731520" y="1188720"/>
+            <a:ext cx="10698480" cy="365760"/>
           </a:xfrm>
           <a:prstGeom prst="rect">
             <a:avLst/>
@@ -3652,14 +4080,14 @@
           <a:lstStyle/>
           <a:p>
             <a:pPr>
-              <a:defRPr sz="1300">
+              <a:defRPr sz="1200">
                 <a:solidFill>
                   <a:srgbClr val="64748B"/>
                 </a:solidFill>
               </a:defRPr>
             </a:pPr>
             <a:r>
-              <a:t>Why millions of eligible Indians miss out on vital welfare entitlements every year</a:t>
+              <a:t>Why billions in public welfare budgets remain unutilized by the people who need them most</a:t>
             </a:r>
           </a:p>
         </p:txBody>
@@ -3672,8 +4100,8 @@
         </p:nvSpPr>
         <p:spPr>
           <a:xfrm>
-            <a:off x="731520" y="6400800"/>
-            <a:ext cx="10698480" cy="320040"/>
+            <a:off x="731520" y="6446520"/>
+            <a:ext cx="10698480" cy="274320"/>
           </a:xfrm>
           <a:prstGeom prst="rect">
             <a:avLst/>
@@ -3687,7 +4115,7 @@
           <a:lstStyle/>
           <a:p>
             <a:pPr>
-              <a:defRPr sz="1000">
+              <a:defRPr sz="950">
                 <a:solidFill>
                   <a:srgbClr val="94A3B8"/>
                 </a:solidFill>
@@ -3707,8 +4135,8 @@
         </p:nvSpPr>
         <p:spPr>
           <a:xfrm>
-            <a:off x="731520" y="1920240"/>
-            <a:ext cx="5120640" cy="1828800"/>
+            <a:off x="731520" y="1737360"/>
+            <a:ext cx="5120640" cy="1920240"/>
           </a:xfrm>
           <a:prstGeom prst="roundRect">
             <a:avLst/>
@@ -3752,8 +4180,8 @@
         </p:nvSpPr>
         <p:spPr>
           <a:xfrm>
-            <a:off x="1005840" y="2103120"/>
-            <a:ext cx="4572000" cy="1463040"/>
+            <a:off x="1005840" y="1920240"/>
+            <a:ext cx="4572000" cy="1554480"/>
           </a:xfrm>
           <a:prstGeom prst="rect">
             <a:avLst/>
@@ -3767,14 +4195,14 @@
           <a:lstStyle/>
           <a:p>
             <a:pPr>
-              <a:defRPr sz="1600" b="1">
+              <a:defRPr sz="1500" b="1">
                 <a:solidFill>
                   <a:srgbClr val="B91C1C"/>
                 </a:solidFill>
               </a:defRPr>
             </a:pPr>
             <a:r>
-              <a:t>01. The Portal Maze</a:t>
+              <a:t>01. The Portal Maze (1,500+ Schemes)</a:t>
             </a:r>
           </a:p>
           <a:p>
@@ -3782,14 +4210,14 @@
               <a:spcBef>
                 <a:spcPts val="600"/>
               </a:spcBef>
-              <a:defRPr sz="1200">
+              <a:defRPr sz="1150">
                 <a:solidFill>
                   <a:srgbClr val="64748B"/>
                 </a:solidFill>
               </a:defRPr>
             </a:pPr>
             <a:r>
-              <a:t>Over 1,500+ central &amp; state schemes exist, but portals require knowing exact scheme acronyms, departments, and gazette titles before searching.</a:t>
+              <a:t>Schemes are siloed across hundreds of separate department portals. Citizens must already know the scheme acronym (PMAY, MMYSY, NFSA) to search.</a:t>
             </a:r>
           </a:p>
         </p:txBody>
@@ -3802,8 +4230,8 @@
         </p:nvSpPr>
         <p:spPr>
           <a:xfrm>
-            <a:off x="6126480" y="1920240"/>
-            <a:ext cx="5120640" cy="1828800"/>
+            <a:off x="6126480" y="1737360"/>
+            <a:ext cx="5120640" cy="1920240"/>
           </a:xfrm>
           <a:prstGeom prst="roundRect">
             <a:avLst/>
@@ -3847,8 +4275,8 @@
         </p:nvSpPr>
         <p:spPr>
           <a:xfrm>
-            <a:off x="6400800" y="2103120"/>
-            <a:ext cx="4572000" cy="1463040"/>
+            <a:off x="6400800" y="1920240"/>
+            <a:ext cx="4572000" cy="1554480"/>
           </a:xfrm>
           <a:prstGeom prst="rect">
             <a:avLst/>
@@ -3862,14 +4290,14 @@
           <a:lstStyle/>
           <a:p>
             <a:pPr>
-              <a:defRPr sz="1600" b="1">
+              <a:defRPr sz="1500" b="1">
                 <a:solidFill>
                   <a:srgbClr val="B91C1C"/>
                 </a:solidFill>
               </a:defRPr>
             </a:pPr>
             <a:r>
-              <a:t>02. Dense Jargon Barrier</a:t>
+              <a:t>02. Dense Administrative Legalese</a:t>
             </a:r>
           </a:p>
           <a:p>
@@ -3877,14 +4305,14 @@
               <a:spcBef>
                 <a:spcPts val="600"/>
               </a:spcBef>
-              <a:defRPr sz="1200">
+              <a:defRPr sz="1150">
                 <a:solidFill>
                   <a:srgbClr val="64748B"/>
                 </a:solidFill>
               </a:defRPr>
             </a:pPr>
             <a:r>
-              <a:t>Official circulars and notifications use complex administrative legalese (affidavits, revenue codes) that intimidate rural &amp; first-time digital users.</a:t>
+              <a:t>Official government circulars, affidavits, and gazette notices are written in dense bureaucratic prose that excludes first-time digital and rural citizens.</a:t>
             </a:r>
           </a:p>
         </p:txBody>
@@ -3897,8 +4325,8 @@
         </p:nvSpPr>
         <p:spPr>
           <a:xfrm>
-            <a:off x="731520" y="4023360"/>
-            <a:ext cx="5120640" cy="1828800"/>
+            <a:off x="731520" y="3931920"/>
+            <a:ext cx="5120640" cy="1920240"/>
           </a:xfrm>
           <a:prstGeom prst="roundRect">
             <a:avLst/>
@@ -3942,8 +4370,8 @@
         </p:nvSpPr>
         <p:spPr>
           <a:xfrm>
-            <a:off x="1005840" y="4206240"/>
-            <a:ext cx="4572000" cy="1463040"/>
+            <a:off x="1005840" y="4114800"/>
+            <a:ext cx="4572000" cy="1554480"/>
           </a:xfrm>
           <a:prstGeom prst="rect">
             <a:avLst/>
@@ -3957,14 +4385,14 @@
           <a:lstStyle/>
           <a:p>
             <a:pPr>
-              <a:defRPr sz="1600" b="1">
+              <a:defRPr sz="1500" b="1">
                 <a:solidFill>
                   <a:srgbClr val="B91C1C"/>
                 </a:solidFill>
               </a:defRPr>
             </a:pPr>
             <a:r>
-              <a:t>03. Document Dead-Ends</a:t>
+              <a:t>03. Prerequisite Dead-Ends</a:t>
             </a:r>
           </a:p>
           <a:p>
@@ -3972,14 +4400,14 @@
               <a:spcBef>
                 <a:spcPts val="600"/>
               </a:spcBef>
-              <a:defRPr sz="1200">
+              <a:defRPr sz="1150">
                 <a:solidFill>
                   <a:srgbClr val="64748B"/>
                 </a:solidFill>
               </a:defRPr>
             </a:pPr>
             <a:r>
-              <a:t>A citizen applies for Scheme A, only to be rejected weeks later because it secretly required Certificate B, which required Lekhpal inquiry C.</a:t>
+              <a:t>A citizen applies for a scholarship or loan, only to face rejection weeks later because they lacked a prerequisite revenue certificate (e.g. Income or Domicile).</a:t>
             </a:r>
           </a:p>
         </p:txBody>
@@ -3992,8 +4420,8 @@
         </p:nvSpPr>
         <p:spPr>
           <a:xfrm>
-            <a:off x="6126480" y="4023360"/>
-            <a:ext cx="5120640" cy="1828800"/>
+            <a:off x="6126480" y="3931920"/>
+            <a:ext cx="5120640" cy="1920240"/>
           </a:xfrm>
           <a:prstGeom prst="roundRect">
             <a:avLst/>
@@ -4037,8 +4465,8 @@
         </p:nvSpPr>
         <p:spPr>
           <a:xfrm>
-            <a:off x="6400800" y="4206240"/>
-            <a:ext cx="4572000" cy="1463040"/>
+            <a:off x="6400800" y="4114800"/>
+            <a:ext cx="4572000" cy="1554480"/>
           </a:xfrm>
           <a:prstGeom prst="rect">
             <a:avLst/>
@@ -4052,14 +4480,14 @@
           <a:lstStyle/>
           <a:p>
             <a:pPr>
-              <a:defRPr sz="1600" b="1">
+              <a:defRPr sz="1500" b="1">
                 <a:solidFill>
                   <a:srgbClr val="B91C1C"/>
                 </a:solidFill>
               </a:defRPr>
             </a:pPr>
             <a:r>
-              <a:t>04. The Hallucination Deficit</a:t>
+              <a:t>04. The Intermediary Trap</a:t>
             </a:r>
           </a:p>
           <a:p>
@@ -4067,14 +4495,14 @@
               <a:spcBef>
                 <a:spcPts val="600"/>
               </a:spcBef>
-              <a:defRPr sz="1200">
+              <a:defRPr sz="1150">
                 <a:solidFill>
                   <a:srgbClr val="64748B"/>
                 </a:solidFill>
               </a:defRPr>
             </a:pPr>
             <a:r>
-              <a:t>Generic AI chatbots invent non-existent government URLs, hallucinate eligibility criteria, and lack verifiable statutory proof.</a:t>
+              <a:t>Due to confusing procedures and lack of clear guidance, citizens are forced to rely on unverified touts, incurring unnecessary costs and delays.</a:t>
             </a:r>
           </a:p>
         </p:txBody>
@@ -4105,7 +4533,7 @@
         </p:nvSpPr>
         <p:spPr>
           <a:xfrm>
-            <a:off x="731520" y="411480"/>
+            <a:off x="731520" y="365760"/>
             <a:ext cx="10698480" cy="320040"/>
           </a:xfrm>
           <a:prstGeom prst="rect">
@@ -4127,7 +4555,7 @@
               </a:defRPr>
             </a:pPr>
             <a:r>
-              <a:t>THE PARADIGM SHIFT</a:t>
+              <a:t>COMPETITIVE LANDSCAPE &amp; BENCHMARKING</a:t>
             </a:r>
           </a:p>
         </p:txBody>
@@ -4140,8 +4568,8 @@
         </p:nvSpPr>
         <p:spPr>
           <a:xfrm>
-            <a:off x="731520" y="731520"/>
-            <a:ext cx="10698480" cy="548640"/>
+            <a:off x="731520" y="685800"/>
+            <a:ext cx="10698480" cy="502920"/>
           </a:xfrm>
           <a:prstGeom prst="rect">
             <a:avLst/>
@@ -4155,14 +4583,14 @@
           <a:lstStyle/>
           <a:p>
             <a:pPr>
-              <a:defRPr sz="2400" b="1">
+              <a:defRPr sz="2200" b="1">
                 <a:solidFill>
                   <a:srgbClr val="0F172A"/>
                 </a:solidFill>
               </a:defRPr>
             </a:pPr>
             <a:r>
-              <a:t>From 'Which Scheme?' to 'What Are You Trying to Do?'</a:t>
+              <a:t>How JanMitra Compares to Existing Solutions &amp; Generic AI</a:t>
             </a:r>
           </a:p>
         </p:txBody>
@@ -4175,8 +4603,8 @@
         </p:nvSpPr>
         <p:spPr>
           <a:xfrm>
-            <a:off x="731520" y="1280160"/>
-            <a:ext cx="10698480" cy="411480"/>
+            <a:off x="731520" y="1188720"/>
+            <a:ext cx="10698480" cy="365760"/>
           </a:xfrm>
           <a:prstGeom prst="rect">
             <a:avLst/>
@@ -4190,14 +4618,14 @@
           <a:lstStyle/>
           <a:p>
             <a:pPr>
-              <a:defRPr sz="1300">
+              <a:defRPr sz="1200">
                 <a:solidFill>
                   <a:srgbClr val="64748B"/>
                 </a:solidFill>
               </a:defRPr>
             </a:pPr>
             <a:r>
-              <a:t>Flipping government service discovery around the citizen's lived reality</a:t>
+              <a:t>A side-by-side analysis against government portals and generic LLM chatbots</a:t>
             </a:r>
           </a:p>
         </p:txBody>
@@ -4210,8 +4638,8 @@
         </p:nvSpPr>
         <p:spPr>
           <a:xfrm>
-            <a:off x="731520" y="6400800"/>
-            <a:ext cx="10698480" cy="320040"/>
+            <a:off x="731520" y="6446520"/>
+            <a:ext cx="10698480" cy="274320"/>
           </a:xfrm>
           <a:prstGeom prst="rect">
             <a:avLst/>
@@ -4225,7 +4653,7 @@
           <a:lstStyle/>
           <a:p>
             <a:pPr>
-              <a:defRPr sz="1000">
+              <a:defRPr sz="950">
                 <a:solidFill>
                   <a:srgbClr val="94A3B8"/>
                 </a:solidFill>
@@ -4245,8 +4673,8 @@
         </p:nvSpPr>
         <p:spPr>
           <a:xfrm>
-            <a:off x="731520" y="1920240"/>
-            <a:ext cx="5120640" cy="4114800"/>
+            <a:off x="731520" y="1691640"/>
+            <a:ext cx="3474720" cy="4572000"/>
           </a:xfrm>
           <a:prstGeom prst="roundRect">
             <a:avLst/>
@@ -4254,9 +4682,9 @@
           <a:solidFill>
             <a:srgbClr val="FEF2F2"/>
           </a:solidFill>
-          <a:ln>
+          <a:ln w="19050">
             <a:solidFill>
-              <a:srgbClr val="FCA5A5"/>
+              <a:srgbClr val="EF4444"/>
             </a:solidFill>
           </a:ln>
         </p:spPr>
@@ -4290,8 +4718,8 @@
         </p:nvSpPr>
         <p:spPr>
           <a:xfrm>
-            <a:off x="1005840" y="2103120"/>
-            <a:ext cx="4572000" cy="3657600"/>
+            <a:off x="914400" y="1783080"/>
+            <a:ext cx="3108960" cy="4297680"/>
           </a:xfrm>
           <a:prstGeom prst="rect">
             <a:avLst/>
@@ -4305,14 +4733,18 @@
           <a:lstStyle/>
           <a:p>
             <a:pPr>
-              <a:defRPr sz="1200" b="1">
-                <a:solidFill>
-                  <a:srgbClr val="B91C1C"/>
-                </a:solidFill>
-              </a:defRPr>
-            </a:pPr>
-            <a:r>
-              <a:t>TRADITIONAL GOV PORTAL</a:t>
+              <a:defRPr sz="1300" b="1">
+                <a:solidFill>
+                  <a:srgbClr val="EF4444"/>
+                </a:solidFill>
+              </a:defRPr>
+            </a:pPr>
+            <a:r>
+              <a:t>Traditional Gov Portals</a:t>
+            </a:r>
+            <a:br/>
+            <a:r>
+              <a:t>(myScheme, State Portals)</a:t>
             </a:r>
           </a:p>
           <a:p>
@@ -4320,89 +4752,137 @@
               <a:spcBef>
                 <a:spcPts val="400"/>
               </a:spcBef>
-              <a:defRPr sz="1800" b="1">
+              <a:defRPr sz="1000" b="1">
                 <a:solidFill>
                   <a:srgbClr val="0F172A"/>
                 </a:solidFill>
               </a:defRPr>
             </a:pPr>
             <a:r>
-              <a:t>Expects Citizen to Know:</a:t>
+              <a:t>• Starting Point: </a:t>
+            </a:r>
+            <a:r>
+              <a:rPr b="0">
+                <a:solidFill>
+                  <a:srgbClr val="64748B"/>
+                </a:solidFill>
+              </a:rPr>
+              <a:t>Asks for department, scheme name, or form code</a:t>
             </a:r>
           </a:p>
           <a:p>
             <a:pPr>
               <a:spcBef>
-                <a:spcPts val="600"/>
+                <a:spcPts val="400"/>
               </a:spcBef>
-              <a:defRPr sz="1200">
-                <a:solidFill>
-                  <a:srgbClr val="991B1B"/>
-                </a:solidFill>
-              </a:defRPr>
-            </a:pPr>
-            <a:r>
-              <a:t>✗  The exact official scheme name (e.g. MMYSY, NFSA, PMAY-G)</a:t>
+              <a:defRPr sz="1000" b="1">
+                <a:solidFill>
+                  <a:srgbClr val="0F172A"/>
+                </a:solidFill>
+              </a:defRPr>
+            </a:pPr>
+            <a:r>
+              <a:t>• Eligibility Check: </a:t>
+            </a:r>
+            <a:r>
+              <a:rPr b="0">
+                <a:solidFill>
+                  <a:srgbClr val="64748B"/>
+                </a:solidFill>
+              </a:rPr>
+              <a:t>Static forms; user must self-interpret criteria</a:t>
             </a:r>
           </a:p>
           <a:p>
             <a:pPr>
               <a:spcBef>
-                <a:spcPts val="600"/>
+                <a:spcPts val="400"/>
               </a:spcBef>
-              <a:defRPr sz="1200">
-                <a:solidFill>
-                  <a:srgbClr val="991B1B"/>
-                </a:solidFill>
-              </a:defRPr>
-            </a:pPr>
-            <a:r>
-              <a:t>✗  Which specific department administers it</a:t>
+              <a:defRPr sz="1000" b="1">
+                <a:solidFill>
+                  <a:srgbClr val="0F172A"/>
+                </a:solidFill>
+              </a:defRPr>
+            </a:pPr>
+            <a:r>
+              <a:t>• Missing Documents: </a:t>
+            </a:r>
+            <a:r>
+              <a:rPr b="0">
+                <a:solidFill>
+                  <a:srgbClr val="64748B"/>
+                </a:solidFill>
+              </a:rPr>
+              <a:t>Fails silently upon submission with no guidance</a:t>
             </a:r>
           </a:p>
           <a:p>
             <a:pPr>
               <a:spcBef>
-                <a:spcPts val="600"/>
+                <a:spcPts val="400"/>
               </a:spcBef>
-              <a:defRPr sz="1200">
-                <a:solidFill>
-                  <a:srgbClr val="991B1B"/>
-                </a:solidFill>
-              </a:defRPr>
-            </a:pPr>
-            <a:r>
-              <a:t>✗  Which application form code to download</a:t>
+              <a:defRPr sz="1000" b="1">
+                <a:solidFill>
+                  <a:srgbClr val="0F172A"/>
+                </a:solidFill>
+              </a:defRPr>
+            </a:pPr>
+            <a:r>
+              <a:t>• Procedure Guidance: </a:t>
+            </a:r>
+            <a:r>
+              <a:rPr b="0">
+                <a:solidFill>
+                  <a:srgbClr val="64748B"/>
+                </a:solidFill>
+              </a:rPr>
+              <a:t>Gives raw PDF circulars without action steps</a:t>
             </a:r>
           </a:p>
           <a:p>
             <a:pPr>
               <a:spcBef>
-                <a:spcPts val="600"/>
+                <a:spcPts val="400"/>
               </a:spcBef>
-              <a:defRPr sz="1200">
-                <a:solidFill>
-                  <a:srgbClr val="991B1B"/>
-                </a:solidFill>
-              </a:defRPr>
-            </a:pPr>
-            <a:r>
-              <a:t>✗  Which URL portal handles submissions</a:t>
+              <a:defRPr sz="1000" b="1">
+                <a:solidFill>
+                  <a:srgbClr val="0F172A"/>
+                </a:solidFill>
+              </a:defRPr>
+            </a:pPr>
+            <a:r>
+              <a:t>• Service Bridge: </a:t>
+            </a:r>
+            <a:r>
+              <a:rPr b="0">
+                <a:solidFill>
+                  <a:srgbClr val="64748B"/>
+                </a:solidFill>
+              </a:rPr>
+              <a:t>Dead-ends: no link to prerequisite certificates</a:t>
             </a:r>
           </a:p>
           <a:p>
             <a:pPr>
               <a:spcBef>
-                <a:spcPts val="600"/>
+                <a:spcPts val="400"/>
               </a:spcBef>
-              <a:defRPr sz="1200">
-                <a:solidFill>
-                  <a:srgbClr val="991B1B"/>
-                </a:solidFill>
-              </a:defRPr>
-            </a:pPr>
-            <a:r>
-              <a:t>✗  The underlying government hierarchy</a:t>
+              <a:defRPr sz="1000" b="1">
+                <a:solidFill>
+                  <a:srgbClr val="0F172A"/>
+                </a:solidFill>
+              </a:defRPr>
+            </a:pPr>
+            <a:r>
+              <a:t>• Accuracy &amp; Truth: </a:t>
+            </a:r>
+            <a:r>
+              <a:rPr b="0">
+                <a:solidFill>
+                  <a:srgbClr val="64748B"/>
+                </a:solidFill>
+              </a:rPr>
+              <a:t>Official, but buried under bureaucratic jargon</a:t>
             </a:r>
           </a:p>
         </p:txBody>
@@ -4415,18 +4895,18 @@
         </p:nvSpPr>
         <p:spPr>
           <a:xfrm>
-            <a:off x="6217920" y="1920240"/>
-            <a:ext cx="5212080" cy="4114800"/>
+            <a:off x="4343400" y="1691640"/>
+            <a:ext cx="3474720" cy="4572000"/>
           </a:xfrm>
           <a:prstGeom prst="roundRect">
             <a:avLst/>
           </a:prstGeom>
           <a:solidFill>
-            <a:srgbClr val="F0FDF4"/>
+            <a:srgbClr val="FFFBEB"/>
           </a:solidFill>
-          <a:ln>
+          <a:ln w="19050">
             <a:solidFill>
-              <a:srgbClr val="86EFAC"/>
+              <a:srgbClr val="F59E0B"/>
             </a:solidFill>
           </a:ln>
         </p:spPr>
@@ -4460,8 +4940,8 @@
         </p:nvSpPr>
         <p:spPr>
           <a:xfrm>
-            <a:off x="6492240" y="2103120"/>
-            <a:ext cx="4663440" cy="3657600"/>
+            <a:off x="4526280" y="1783080"/>
+            <a:ext cx="3108960" cy="4297680"/>
           </a:xfrm>
           <a:prstGeom prst="rect">
             <a:avLst/>
@@ -4475,14 +4955,18 @@
           <a:lstStyle/>
           <a:p>
             <a:pPr>
-              <a:defRPr sz="1200" b="1">
-                <a:solidFill>
-                  <a:srgbClr val="059669"/>
-                </a:solidFill>
-              </a:defRPr>
-            </a:pPr>
-            <a:r>
-              <a:t>JANMITRA CITIZEN NAVIGATOR</a:t>
+              <a:defRPr sz="1300" b="1">
+                <a:solidFill>
+                  <a:srgbClr val="F59E0B"/>
+                </a:solidFill>
+              </a:defRPr>
+            </a:pPr>
+            <a:r>
+              <a:t>Generic AI Chatbots</a:t>
+            </a:r>
+            <a:br/>
+            <a:r>
+              <a:t>(ChatGPT, Claude, Gemini)</a:t>
             </a:r>
           </a:p>
           <a:p>
@@ -4490,89 +4974,359 @@
               <a:spcBef>
                 <a:spcPts val="400"/>
               </a:spcBef>
-              <a:defRPr sz="1800" b="1">
+              <a:defRPr sz="1000" b="1">
                 <a:solidFill>
                   <a:srgbClr val="0F172A"/>
                 </a:solidFill>
               </a:defRPr>
             </a:pPr>
             <a:r>
-              <a:t>Starts with Citizen's Life Situation:</a:t>
+              <a:t>• Starting Point: </a:t>
+            </a:r>
+            <a:r>
+              <a:rPr b="0">
+                <a:solidFill>
+                  <a:srgbClr val="64748B"/>
+                </a:solidFill>
+              </a:rPr>
+              <a:t>Open chat box (unstructured text prompt)</a:t>
             </a:r>
           </a:p>
           <a:p>
             <a:pPr>
               <a:spcBef>
-                <a:spcPts val="600"/>
+                <a:spcPts val="400"/>
               </a:spcBef>
-              <a:defRPr sz="1200">
-                <a:solidFill>
-                  <a:srgbClr val="166534"/>
-                </a:solidFill>
-              </a:defRPr>
-            </a:pPr>
-            <a:r>
-              <a:t>✓  “I am a 20yr B.Tech student in Lucknow needing fee help”</a:t>
+              <a:defRPr sz="1000" b="1">
+                <a:solidFill>
+                  <a:srgbClr val="0F172A"/>
+                </a:solidFill>
+              </a:defRPr>
+            </a:pPr>
+            <a:r>
+              <a:t>• Eligibility Check: </a:t>
+            </a:r>
+            <a:r>
+              <a:rPr b="0">
+                <a:solidFill>
+                  <a:srgbClr val="64748B"/>
+                </a:solidFill>
+              </a:rPr>
+              <a:t>Subjective guesses; cannot verify revenue rules</a:t>
             </a:r>
           </a:p>
           <a:p>
             <a:pPr>
               <a:spcBef>
-                <a:spcPts val="600"/>
+                <a:spcPts val="400"/>
               </a:spcBef>
-              <a:defRPr sz="1200">
-                <a:solidFill>
-                  <a:srgbClr val="166534"/>
-                </a:solidFill>
-              </a:defRPr>
-            </a:pPr>
-            <a:r>
-              <a:t>✓  “My elderly parent is retired and needs monthly support”</a:t>
+              <a:defRPr sz="1000" b="1">
+                <a:solidFill>
+                  <a:srgbClr val="0F172A"/>
+                </a:solidFill>
+              </a:defRPr>
+            </a:pPr>
+            <a:r>
+              <a:t>• Missing Documents: </a:t>
+            </a:r>
+            <a:r>
+              <a:rPr b="0">
+                <a:solidFill>
+                  <a:srgbClr val="64748B"/>
+                </a:solidFill>
+              </a:rPr>
+              <a:t>Cannot inspect or validate citizen credential vault</a:t>
             </a:r>
           </a:p>
           <a:p>
             <a:pPr>
               <a:spcBef>
-                <a:spcPts val="600"/>
+                <a:spcPts val="400"/>
               </a:spcBef>
-              <a:defRPr sz="1200">
-                <a:solidFill>
-                  <a:srgbClr val="166534"/>
-                </a:solidFill>
-              </a:defRPr>
-            </a:pPr>
-            <a:r>
-              <a:t>✓  “I need an official Income Certificate for college”</a:t>
+              <a:defRPr sz="1000" b="1">
+                <a:solidFill>
+                  <a:srgbClr val="0F172A"/>
+                </a:solidFill>
+              </a:defRPr>
+            </a:pPr>
+            <a:r>
+              <a:t>• Procedure Guidance: </a:t>
+            </a:r>
+            <a:r>
+              <a:rPr b="0">
+                <a:solidFill>
+                  <a:srgbClr val="64748B"/>
+                </a:solidFill>
+              </a:rPr>
+              <a:t>Hallucinates steps, deadlines, and portal URLs</a:t>
             </a:r>
           </a:p>
           <a:p>
             <a:pPr>
               <a:spcBef>
-                <a:spcPts val="600"/>
+                <a:spcPts val="400"/>
               </a:spcBef>
-              <a:defRPr sz="1200">
-                <a:solidFill>
-                  <a:srgbClr val="166534"/>
-                </a:solidFill>
-              </a:defRPr>
-            </a:pPr>
-            <a:r>
-              <a:t>✓  Extracts editable demographic attribute chips automatically</a:t>
+              <a:defRPr sz="1000" b="1">
+                <a:solidFill>
+                  <a:srgbClr val="0F172A"/>
+                </a:solidFill>
+              </a:defRPr>
+            </a:pPr>
+            <a:r>
+              <a:t>• Service Bridge: </a:t>
+            </a:r>
+            <a:r>
+              <a:rPr b="0">
+                <a:solidFill>
+                  <a:srgbClr val="64748B"/>
+                </a:solidFill>
+              </a:rPr>
+              <a:t>No concept of dependency trees or tracking</a:t>
             </a:r>
           </a:p>
           <a:p>
             <a:pPr>
               <a:spcBef>
-                <a:spcPts val="600"/>
+                <a:spcPts val="400"/>
               </a:spcBef>
-              <a:defRPr sz="1200">
-                <a:solidFill>
-                  <a:srgbClr val="166534"/>
-                </a:solidFill>
-              </a:defRPr>
-            </a:pPr>
-            <a:r>
-              <a:t>✓  Generates evidence-backed action roadmap with 0 guesswork</a:t>
+              <a:defRPr sz="1000" b="1">
+                <a:solidFill>
+                  <a:srgbClr val="0F172A"/>
+                </a:solidFill>
+              </a:defRPr>
+            </a:pPr>
+            <a:r>
+              <a:t>• Accuracy &amp; Truth: </a:t>
+            </a:r>
+            <a:r>
+              <a:rPr b="0">
+                <a:solidFill>
+                  <a:srgbClr val="64748B"/>
+                </a:solidFill>
+              </a:rPr>
+              <a:t>High risk of hallucination; zero legal accountability</a:t>
+            </a:r>
+          </a:p>
+        </p:txBody>
+      </p:sp>
+      <p:sp>
+        <p:nvSpPr>
+          <p:cNvPr id="10" name="Rounded Rectangle 9"/>
+          <p:cNvSpPr/>
+          <p:nvPr/>
+        </p:nvSpPr>
+        <p:spPr>
+          <a:xfrm>
+            <a:off x="7955280" y="1691640"/>
+            <a:ext cx="3474720" cy="4572000"/>
+          </a:xfrm>
+          <a:prstGeom prst="roundRect">
+            <a:avLst/>
+          </a:prstGeom>
+          <a:solidFill>
+            <a:srgbClr val="F0FDF4"/>
+          </a:solidFill>
+          <a:ln w="19050">
+            <a:solidFill>
+              <a:srgbClr val="059669"/>
+            </a:solidFill>
+          </a:ln>
+        </p:spPr>
+        <p:style>
+          <a:lnRef idx="1">
+            <a:schemeClr val="accent1"/>
+          </a:lnRef>
+          <a:fillRef idx="3">
+            <a:schemeClr val="accent1"/>
+          </a:fillRef>
+          <a:effectRef idx="2">
+            <a:schemeClr val="accent1"/>
+          </a:effectRef>
+          <a:fontRef idx="minor">
+            <a:schemeClr val="lt1"/>
+          </a:fontRef>
+        </p:style>
+        <p:txBody>
+          <a:bodyPr rtlCol="0" anchor="ctr"/>
+          <a:lstStyle/>
+          <a:p>
+            <a:pPr algn="ctr"/>
+          </a:p>
+        </p:txBody>
+      </p:sp>
+      <p:sp>
+        <p:nvSpPr>
+          <p:cNvPr id="11" name="TextBox 10"/>
+          <p:cNvSpPr txBox="1"/>
+          <p:nvPr/>
+        </p:nvSpPr>
+        <p:spPr>
+          <a:xfrm>
+            <a:off x="8138160" y="1783080"/>
+            <a:ext cx="3108960" cy="4297680"/>
+          </a:xfrm>
+          <a:prstGeom prst="rect">
+            <a:avLst/>
+          </a:prstGeom>
+          <a:noFill/>
+        </p:spPr>
+        <p:txBody>
+          <a:bodyPr wrap="square">
+            <a:spAutoFit/>
+          </a:bodyPr>
+          <a:lstStyle/>
+          <a:p>
+            <a:pPr>
+              <a:defRPr sz="1300" b="1">
+                <a:solidFill>
+                  <a:srgbClr val="059669"/>
+                </a:solidFill>
+              </a:defRPr>
+            </a:pPr>
+            <a:r>
+              <a:t>JanMitra Civic Navigator</a:t>
+            </a:r>
+            <a:br/>
+            <a:r>
+              <a:t>(Our Innovation)</a:t>
+            </a:r>
+          </a:p>
+          <a:p>
+            <a:pPr>
+              <a:spcBef>
+                <a:spcPts val="400"/>
+              </a:spcBef>
+              <a:defRPr sz="1000" b="1">
+                <a:solidFill>
+                  <a:srgbClr val="0F172A"/>
+                </a:solidFill>
+              </a:defRPr>
+            </a:pPr>
+            <a:r>
+              <a:t>• Starting Point: </a:t>
+            </a:r>
+            <a:r>
+              <a:rPr b="0">
+                <a:solidFill>
+                  <a:srgbClr val="64748B"/>
+                </a:solidFill>
+              </a:rPr>
+              <a:t>Life Situation: “What are you trying to do?”</a:t>
+            </a:r>
+          </a:p>
+          <a:p>
+            <a:pPr>
+              <a:spcBef>
+                <a:spcPts val="400"/>
+              </a:spcBef>
+              <a:defRPr sz="1000" b="1">
+                <a:solidFill>
+                  <a:srgbClr val="0F172A"/>
+                </a:solidFill>
+              </a:defRPr>
+            </a:pPr>
+            <a:r>
+              <a:t>• Eligibility Check: </a:t>
+            </a:r>
+            <a:r>
+              <a:rPr b="0">
+                <a:solidFill>
+                  <a:srgbClr val="64748B"/>
+                </a:solidFill>
+              </a:rPr>
+              <a:t>Deterministic Rule Engine (Age, Income, Domicile)</a:t>
+            </a:r>
+          </a:p>
+          <a:p>
+            <a:pPr>
+              <a:spcBef>
+                <a:spcPts val="400"/>
+              </a:spcBef>
+              <a:defRPr sz="1000" b="1">
+                <a:solidFill>
+                  <a:srgbClr val="0F172A"/>
+                </a:solidFill>
+              </a:defRPr>
+            </a:pPr>
+            <a:r>
+              <a:t>• Missing Documents: </a:t>
+            </a:r>
+            <a:r>
+              <a:rPr b="0">
+                <a:solidFill>
+                  <a:srgbClr val="64748B"/>
+                </a:solidFill>
+              </a:rPr>
+              <a:t>Signature 'What Am I Missing?' gap quantifier</a:t>
+            </a:r>
+          </a:p>
+          <a:p>
+            <a:pPr>
+              <a:spcBef>
+                <a:spcPts val="400"/>
+              </a:spcBef>
+              <a:defRPr sz="1000" b="1">
+                <a:solidFill>
+                  <a:srgbClr val="0F172A"/>
+                </a:solidFill>
+              </a:defRPr>
+            </a:pPr>
+            <a:r>
+              <a:t>• Procedure Guidance: </a:t>
+            </a:r>
+            <a:r>
+              <a:rPr b="0">
+                <a:solidFill>
+                  <a:srgbClr val="64748B"/>
+                </a:solidFill>
+              </a:rPr>
+              <a:t>6-Step interactive timelines with fees &amp; SLAs</a:t>
+            </a:r>
+          </a:p>
+          <a:p>
+            <a:pPr>
+              <a:spcBef>
+                <a:spcPts val="400"/>
+              </a:spcBef>
+              <a:defRPr sz="1000" b="1">
+                <a:solidFill>
+                  <a:srgbClr val="0F172A"/>
+                </a:solidFill>
+              </a:defRPr>
+            </a:pPr>
+            <a:r>
+              <a:t>• Service Bridge: </a:t>
+            </a:r>
+            <a:r>
+              <a:rPr b="0">
+                <a:solidFill>
+                  <a:srgbClr val="64748B"/>
+                </a:solidFill>
+              </a:rPr>
+              <a:t>1-Click bridge resolving prerequisite certificates</a:t>
+            </a:r>
+          </a:p>
+          <a:p>
+            <a:pPr>
+              <a:spcBef>
+                <a:spcPts val="400"/>
+              </a:spcBef>
+              <a:defRPr sz="1000" b="1">
+                <a:solidFill>
+                  <a:srgbClr val="0F172A"/>
+                </a:solidFill>
+              </a:defRPr>
+            </a:pPr>
+            <a:r>
+              <a:t>• Accuracy &amp; Truth: </a:t>
+            </a:r>
+            <a:r>
+              <a:rPr b="0">
+                <a:solidFill>
+                  <a:srgbClr val="64748B"/>
+                </a:solidFill>
+              </a:rPr>
+              <a:t>Evidence-First: every claim cited to official gazette</a:t>
             </a:r>
           </a:p>
         </p:txBody>
@@ -4603,7 +5357,7 @@
         </p:nvSpPr>
         <p:spPr>
           <a:xfrm>
-            <a:off x="731520" y="411480"/>
+            <a:off x="731520" y="365760"/>
             <a:ext cx="10698480" cy="320040"/>
           </a:xfrm>
           <a:prstGeom prst="rect">
@@ -4625,7 +5379,7 @@
               </a:defRPr>
             </a:pPr>
             <a:r>
-              <a:t>FROM IDEA TO IMPACT</a:t>
+              <a:t>THE PARADIGM SHIFT</a:t>
             </a:r>
           </a:p>
         </p:txBody>
@@ -4638,8 +5392,8 @@
         </p:nvSpPr>
         <p:spPr>
           <a:xfrm>
-            <a:off x="731520" y="731520"/>
-            <a:ext cx="10698480" cy="548640"/>
+            <a:off x="731520" y="685800"/>
+            <a:ext cx="10698480" cy="502920"/>
           </a:xfrm>
           <a:prstGeom prst="rect">
             <a:avLst/>
@@ -4653,14 +5407,14 @@
           <a:lstStyle/>
           <a:p>
             <a:pPr>
-              <a:defRPr sz="2400" b="1">
+              <a:defRPr sz="2200" b="1">
                 <a:solidFill>
                   <a:srgbClr val="0F172A"/>
                 </a:solidFill>
               </a:defRPr>
             </a:pPr>
             <a:r>
-              <a:t>The 8-Stage Fundamental Citizen Action Loop</a:t>
+              <a:t>From Administrative Silos to Citizen Life Situations</a:t>
             </a:r>
           </a:p>
         </p:txBody>
@@ -4673,8 +5427,8 @@
         </p:nvSpPr>
         <p:spPr>
           <a:xfrm>
-            <a:off x="731520" y="1280160"/>
-            <a:ext cx="10698480" cy="411480"/>
+            <a:off x="731520" y="1188720"/>
+            <a:ext cx="10698480" cy="365760"/>
           </a:xfrm>
           <a:prstGeom prst="rect">
             <a:avLst/>
@@ -4688,14 +5442,14 @@
           <a:lstStyle/>
           <a:p>
             <a:pPr>
-              <a:defRPr sz="1300">
+              <a:defRPr sz="1200">
                 <a:solidFill>
                   <a:srgbClr val="64748B"/>
                 </a:solidFill>
               </a:defRPr>
             </a:pPr>
             <a:r>
-              <a:t>Transforming ambiguous citizen life dilemmas into completed government sanctions</a:t>
+              <a:t>Organizing public services around human goals rather than bureaucratic hierarchy</a:t>
             </a:r>
           </a:p>
         </p:txBody>
@@ -4708,8 +5462,8 @@
         </p:nvSpPr>
         <p:spPr>
           <a:xfrm>
-            <a:off x="731520" y="6400800"/>
-            <a:ext cx="10698480" cy="320040"/>
+            <a:off x="731520" y="6446520"/>
+            <a:ext cx="10698480" cy="274320"/>
           </a:xfrm>
           <a:prstGeom prst="rect">
             <a:avLst/>
@@ -4723,7 +5477,7 @@
           <a:lstStyle/>
           <a:p>
             <a:pPr>
-              <a:defRPr sz="1000">
+              <a:defRPr sz="950">
                 <a:solidFill>
                   <a:srgbClr val="94A3B8"/>
                 </a:solidFill>
@@ -4743,14 +5497,14 @@
         </p:nvSpPr>
         <p:spPr>
           <a:xfrm>
-            <a:off x="731520" y="1920240"/>
-            <a:ext cx="2560320" cy="1828800"/>
+            <a:off x="731520" y="1828800"/>
+            <a:ext cx="2011680" cy="1188720"/>
           </a:xfrm>
           <a:prstGeom prst="roundRect">
             <a:avLst/>
           </a:prstGeom>
           <a:solidFill>
-            <a:srgbClr val="F8FAFC"/>
+            <a:srgbClr val="FFFFFF"/>
           </a:solidFill>
           <a:ln>
             <a:solidFill>
@@ -4788,8 +5542,8 @@
         </p:nvSpPr>
         <p:spPr>
           <a:xfrm>
-            <a:off x="914400" y="2057400"/>
-            <a:ext cx="2194560" cy="1554480"/>
+            <a:off x="868680" y="1920240"/>
+            <a:ext cx="1737360" cy="1005840"/>
           </a:xfrm>
           <a:prstGeom prst="rect">
             <a:avLst/>
@@ -4803,44 +5557,29 @@
           <a:lstStyle/>
           <a:p>
             <a:pPr>
-              <a:defRPr sz="1000" b="1">
-                <a:solidFill>
-                  <a:srgbClr val="D97706"/>
-                </a:solidFill>
-              </a:defRPr>
-            </a:pPr>
-            <a:r>
-              <a:t>STEP 01</a:t>
+              <a:defRPr sz="1300" b="1">
+                <a:solidFill>
+                  <a:srgbClr val="1E3A8A"/>
+                </a:solidFill>
+              </a:defRPr>
+            </a:pPr>
+            <a:r>
+              <a:t>🎓 Education</a:t>
             </a:r>
           </a:p>
           <a:p>
             <a:pPr>
               <a:spcBef>
-                <a:spcPts val="400"/>
+                <a:spcPts val="200"/>
               </a:spcBef>
-              <a:defRPr sz="1500" b="1">
-                <a:solidFill>
-                  <a:srgbClr val="0F172A"/>
-                </a:solidFill>
-              </a:defRPr>
-            </a:pPr>
-            <a:r>
-              <a:t>My Situation</a:t>
-            </a:r>
-          </a:p>
-          <a:p>
-            <a:pPr>
-              <a:spcBef>
-                <a:spcPts val="400"/>
-              </a:spcBef>
-              <a:defRPr sz="1100">
+              <a:defRPr sz="950">
                 <a:solidFill>
                   <a:srgbClr val="64748B"/>
                 </a:solidFill>
               </a:defRPr>
             </a:pPr>
             <a:r>
-              <a:t>Everyday citizen words</a:t>
+              <a:t>Scholarships &amp; fee assistance</a:t>
             </a:r>
           </a:p>
         </p:txBody>
@@ -4853,14 +5592,14 @@
         </p:nvSpPr>
         <p:spPr>
           <a:xfrm>
-            <a:off x="3429000" y="1920240"/>
-            <a:ext cx="2560320" cy="1828800"/>
+            <a:off x="2889504" y="1828800"/>
+            <a:ext cx="2011680" cy="1188720"/>
           </a:xfrm>
           <a:prstGeom prst="roundRect">
             <a:avLst/>
           </a:prstGeom>
           <a:solidFill>
-            <a:srgbClr val="F8FAFC"/>
+            <a:srgbClr val="FFFFFF"/>
           </a:solidFill>
           <a:ln>
             <a:solidFill>
@@ -4898,8 +5637,8 @@
         </p:nvSpPr>
         <p:spPr>
           <a:xfrm>
-            <a:off x="3611880" y="2057400"/>
-            <a:ext cx="2194560" cy="1554480"/>
+            <a:off x="3026664" y="1920240"/>
+            <a:ext cx="1737360" cy="1005840"/>
           </a:xfrm>
           <a:prstGeom prst="rect">
             <a:avLst/>
@@ -4913,44 +5652,29 @@
           <a:lstStyle/>
           <a:p>
             <a:pPr>
-              <a:defRPr sz="1000" b="1">
-                <a:solidFill>
-                  <a:srgbClr val="D97706"/>
-                </a:solidFill>
-              </a:defRPr>
-            </a:pPr>
-            <a:r>
-              <a:t>STEP 02</a:t>
+              <a:defRPr sz="1300" b="1">
+                <a:solidFill>
+                  <a:srgbClr val="1E3A8A"/>
+                </a:solidFill>
+              </a:defRPr>
+            </a:pPr>
+            <a:r>
+              <a:t>💰 Financial</a:t>
             </a:r>
           </a:p>
           <a:p>
             <a:pPr>
               <a:spcBef>
-                <a:spcPts val="400"/>
+                <a:spcPts val="200"/>
               </a:spcBef>
-              <a:defRPr sz="1500" b="1">
-                <a:solidFill>
-                  <a:srgbClr val="0F172A"/>
-                </a:solidFill>
-              </a:defRPr>
-            </a:pPr>
-            <a:r>
-              <a:t>What Can I Get?</a:t>
-            </a:r>
-          </a:p>
-          <a:p>
-            <a:pPr>
-              <a:spcBef>
-                <a:spcPts val="400"/>
-              </a:spcBef>
-              <a:defRPr sz="1100">
+              <a:defRPr sz="950">
                 <a:solidFill>
                   <a:srgbClr val="64748B"/>
                 </a:solidFill>
               </a:defRPr>
             </a:pPr>
             <a:r>
-              <a:t>Relevant benefits discovered</a:t>
+              <a:t>Assistance for low-income families</a:t>
             </a:r>
           </a:p>
         </p:txBody>
@@ -4963,14 +5687,14 @@
         </p:nvSpPr>
         <p:spPr>
           <a:xfrm>
-            <a:off x="6126480" y="1920240"/>
-            <a:ext cx="2560320" cy="1828800"/>
+            <a:off x="5047488" y="1828800"/>
+            <a:ext cx="2011680" cy="1188720"/>
           </a:xfrm>
           <a:prstGeom prst="roundRect">
             <a:avLst/>
           </a:prstGeom>
           <a:solidFill>
-            <a:srgbClr val="F8FAFC"/>
+            <a:srgbClr val="FFFFFF"/>
           </a:solidFill>
           <a:ln>
             <a:solidFill>
@@ -5008,8 +5732,8 @@
         </p:nvSpPr>
         <p:spPr>
           <a:xfrm>
-            <a:off x="6309360" y="2057400"/>
-            <a:ext cx="2194560" cy="1554480"/>
+            <a:off x="5184648" y="1920240"/>
+            <a:ext cx="1737360" cy="1005840"/>
           </a:xfrm>
           <a:prstGeom prst="rect">
             <a:avLst/>
@@ -5023,44 +5747,29 @@
           <a:lstStyle/>
           <a:p>
             <a:pPr>
-              <a:defRPr sz="1000" b="1">
-                <a:solidFill>
-                  <a:srgbClr val="D97706"/>
-                </a:solidFill>
-              </a:defRPr>
-            </a:pPr>
-            <a:r>
-              <a:t>STEP 03</a:t>
+              <a:defRPr sz="1300" b="1">
+                <a:solidFill>
+                  <a:srgbClr val="1E3A8A"/>
+                </a:solidFill>
+              </a:defRPr>
+            </a:pPr>
+            <a:r>
+              <a:t>👴 Senior Citizens</a:t>
             </a:r>
           </a:p>
           <a:p>
             <a:pPr>
               <a:spcBef>
-                <a:spcPts val="400"/>
+                <a:spcPts val="200"/>
               </a:spcBef>
-              <a:defRPr sz="1500" b="1">
-                <a:solidFill>
-                  <a:srgbClr val="0F172A"/>
-                </a:solidFill>
-              </a:defRPr>
-            </a:pPr>
-            <a:r>
-              <a:t>Why Qualify?</a:t>
-            </a:r>
-          </a:p>
-          <a:p>
-            <a:pPr>
-              <a:spcBef>
-                <a:spcPts val="400"/>
-              </a:spcBef>
-              <a:defRPr sz="1100">
+              <a:defRPr sz="950">
                 <a:solidFill>
                   <a:srgbClr val="64748B"/>
                 </a:solidFill>
               </a:defRPr>
             </a:pPr>
             <a:r>
-              <a:t>Evidence-based rule match</a:t>
+              <a:t>Pensions &amp; healthcare coverage</a:t>
             </a:r>
           </a:p>
         </p:txBody>
@@ -5073,14 +5782,14 @@
         </p:nvSpPr>
         <p:spPr>
           <a:xfrm>
-            <a:off x="8823960" y="1920240"/>
-            <a:ext cx="2560320" cy="1828800"/>
+            <a:off x="7205472" y="1828800"/>
+            <a:ext cx="2011680" cy="1188720"/>
           </a:xfrm>
           <a:prstGeom prst="roundRect">
             <a:avLst/>
           </a:prstGeom>
           <a:solidFill>
-            <a:srgbClr val="F8FAFC"/>
+            <a:srgbClr val="FFFFFF"/>
           </a:solidFill>
           <a:ln>
             <a:solidFill>
@@ -5118,8 +5827,8 @@
         </p:nvSpPr>
         <p:spPr>
           <a:xfrm>
-            <a:off x="9006840" y="2057400"/>
-            <a:ext cx="2194560" cy="1554480"/>
+            <a:off x="7342632" y="1920240"/>
+            <a:ext cx="1737360" cy="1005840"/>
           </a:xfrm>
           <a:prstGeom prst="rect">
             <a:avLst/>
@@ -5133,44 +5842,29 @@
           <a:lstStyle/>
           <a:p>
             <a:pPr>
-              <a:defRPr sz="1000" b="1">
-                <a:solidFill>
-                  <a:srgbClr val="D97706"/>
-                </a:solidFill>
-              </a:defRPr>
-            </a:pPr>
-            <a:r>
-              <a:t>STEP 04</a:t>
+              <a:defRPr sz="1300" b="1">
+                <a:solidFill>
+                  <a:srgbClr val="1E3A8A"/>
+                </a:solidFill>
+              </a:defRPr>
+            </a:pPr>
+            <a:r>
+              <a:t>🏥 Healthcare</a:t>
             </a:r>
           </a:p>
           <a:p>
             <a:pPr>
               <a:spcBef>
-                <a:spcPts val="400"/>
+                <a:spcPts val="200"/>
               </a:spcBef>
-              <a:defRPr sz="1500" b="1">
-                <a:solidFill>
-                  <a:srgbClr val="0F172A"/>
-                </a:solidFill>
-              </a:defRPr>
-            </a:pPr>
-            <a:r>
-              <a:t>What Am I Missing?</a:t>
-            </a:r>
-          </a:p>
-          <a:p>
-            <a:pPr>
-              <a:spcBef>
-                <a:spcPts val="400"/>
-              </a:spcBef>
-              <a:defRPr sz="1100">
+              <a:defRPr sz="950">
                 <a:solidFill>
                   <a:srgbClr val="64748B"/>
                 </a:solidFill>
               </a:defRPr>
             </a:pPr>
             <a:r>
-              <a:t>Clear identification of gaps</a:t>
+              <a:t>Cashless treatment &amp; Ayushman Bharat</a:t>
             </a:r>
           </a:p>
         </p:txBody>
@@ -5183,14 +5877,14 @@
         </p:nvSpPr>
         <p:spPr>
           <a:xfrm>
-            <a:off x="731520" y="4023360"/>
-            <a:ext cx="2560320" cy="1828800"/>
+            <a:off x="9363456" y="1828800"/>
+            <a:ext cx="2011680" cy="1188720"/>
           </a:xfrm>
           <a:prstGeom prst="roundRect">
             <a:avLst/>
           </a:prstGeom>
           <a:solidFill>
-            <a:srgbClr val="F8FAFC"/>
+            <a:srgbClr val="FFFFFF"/>
           </a:solidFill>
           <a:ln>
             <a:solidFill>
@@ -5228,8 +5922,8 @@
         </p:nvSpPr>
         <p:spPr>
           <a:xfrm>
-            <a:off x="914400" y="4160520"/>
-            <a:ext cx="2194560" cy="1554480"/>
+            <a:off x="9500616" y="1920240"/>
+            <a:ext cx="1737360" cy="1005840"/>
           </a:xfrm>
           <a:prstGeom prst="rect">
             <a:avLst/>
@@ -5243,44 +5937,29 @@
           <a:lstStyle/>
           <a:p>
             <a:pPr>
-              <a:defRPr sz="1000" b="1">
-                <a:solidFill>
-                  <a:srgbClr val="D97706"/>
-                </a:solidFill>
-              </a:defRPr>
-            </a:pPr>
-            <a:r>
-              <a:t>STEP 05</a:t>
+              <a:defRPr sz="1300" b="1">
+                <a:solidFill>
+                  <a:srgbClr val="1E3A8A"/>
+                </a:solidFill>
+              </a:defRPr>
+            </a:pPr>
+            <a:r>
+              <a:t>🏠 Housing</a:t>
             </a:r>
           </a:p>
           <a:p>
             <a:pPr>
               <a:spcBef>
-                <a:spcPts val="400"/>
+                <a:spcPts val="200"/>
               </a:spcBef>
-              <a:defRPr sz="1500" b="1">
-                <a:solidFill>
-                  <a:srgbClr val="0F172A"/>
-                </a:solidFill>
-              </a:defRPr>
-            </a:pPr>
-            <a:r>
-              <a:t>What Docs Needed?</a:t>
-            </a:r>
-          </a:p>
-          <a:p>
-            <a:pPr>
-              <a:spcBef>
-                <a:spcPts val="400"/>
-              </a:spcBef>
-              <a:defRPr sz="1100">
+              <a:defRPr sz="950">
                 <a:solidFill>
                   <a:srgbClr val="64748B"/>
                 </a:solidFill>
               </a:defRPr>
             </a:pPr>
             <a:r>
-              <a:t>Vault &amp; criteria audit</a:t>
+              <a:t>PMAY pucca house grants</a:t>
             </a:r>
           </a:p>
         </p:txBody>
@@ -5293,14 +5972,14 @@
         </p:nvSpPr>
         <p:spPr>
           <a:xfrm>
-            <a:off x="3429000" y="4023360"/>
-            <a:ext cx="2560320" cy="1828800"/>
+            <a:off x="731520" y="3200400"/>
+            <a:ext cx="2011680" cy="1188720"/>
           </a:xfrm>
           <a:prstGeom prst="roundRect">
             <a:avLst/>
           </a:prstGeom>
           <a:solidFill>
-            <a:srgbClr val="F8FAFC"/>
+            <a:srgbClr val="FFFFFF"/>
           </a:solidFill>
           <a:ln>
             <a:solidFill>
@@ -5338,8 +6017,8 @@
         </p:nvSpPr>
         <p:spPr>
           <a:xfrm>
-            <a:off x="3611880" y="4160520"/>
-            <a:ext cx="2194560" cy="1554480"/>
+            <a:off x="868680" y="3291840"/>
+            <a:ext cx="1737360" cy="1005840"/>
           </a:xfrm>
           <a:prstGeom prst="rect">
             <a:avLst/>
@@ -5353,44 +6032,29 @@
           <a:lstStyle/>
           <a:p>
             <a:pPr>
-              <a:defRPr sz="1000" b="1">
-                <a:solidFill>
-                  <a:srgbClr val="D97706"/>
-                </a:solidFill>
-              </a:defRPr>
-            </a:pPr>
-            <a:r>
-              <a:t>STEP 06</a:t>
+              <a:defRPr sz="1300" b="1">
+                <a:solidFill>
+                  <a:srgbClr val="1E3A8A"/>
+                </a:solidFill>
+              </a:defRPr>
+            </a:pPr>
+            <a:r>
+              <a:t>💼 Employment</a:t>
             </a:r>
           </a:p>
           <a:p>
             <a:pPr>
               <a:spcBef>
-                <a:spcPts val="400"/>
+                <a:spcPts val="200"/>
               </a:spcBef>
-              <a:defRPr sz="1500" b="1">
-                <a:solidFill>
-                  <a:srgbClr val="0F172A"/>
-                </a:solidFill>
-              </a:defRPr>
-            </a:pPr>
-            <a:r>
-              <a:t>How Do I Get Them?</a:t>
-            </a:r>
-          </a:p>
-          <a:p>
-            <a:pPr>
-              <a:spcBef>
-                <a:spcPts val="400"/>
-              </a:spcBef>
-              <a:defRPr sz="1100">
+              <a:defRPr sz="950">
                 <a:solidFill>
                   <a:srgbClr val="64748B"/>
                 </a:solidFill>
               </a:defRPr>
             </a:pPr>
             <a:r>
-              <a:t>Direct service integration</a:t>
+              <a:t>Worker benefits &amp; skill training</a:t>
             </a:r>
           </a:p>
         </p:txBody>
@@ -5403,14 +6067,14 @@
         </p:nvSpPr>
         <p:spPr>
           <a:xfrm>
-            <a:off x="6126480" y="4023360"/>
-            <a:ext cx="2560320" cy="1828800"/>
+            <a:off x="2889504" y="3200400"/>
+            <a:ext cx="2011680" cy="1188720"/>
           </a:xfrm>
           <a:prstGeom prst="roundRect">
             <a:avLst/>
           </a:prstGeom>
           <a:solidFill>
-            <a:srgbClr val="F8FAFC"/>
+            <a:srgbClr val="FFFFFF"/>
           </a:solidFill>
           <a:ln>
             <a:solidFill>
@@ -5448,8 +6112,8 @@
         </p:nvSpPr>
         <p:spPr>
           <a:xfrm>
-            <a:off x="6309360" y="4160520"/>
-            <a:ext cx="2194560" cy="1554480"/>
+            <a:off x="3026664" y="3291840"/>
+            <a:ext cx="1737360" cy="1005840"/>
           </a:xfrm>
           <a:prstGeom prst="rect">
             <a:avLst/>
@@ -5463,44 +6127,29 @@
           <a:lstStyle/>
           <a:p>
             <a:pPr>
-              <a:defRPr sz="1000" b="1">
-                <a:solidFill>
-                  <a:srgbClr val="D97706"/>
-                </a:solidFill>
-              </a:defRPr>
-            </a:pPr>
-            <a:r>
-              <a:t>STEP 07</a:t>
+              <a:defRPr sz="1300" b="1">
+                <a:solidFill>
+                  <a:srgbClr val="1E3A8A"/>
+                </a:solidFill>
+              </a:defRPr>
+            </a:pPr>
+            <a:r>
+              <a:t>🪪 Certificates</a:t>
             </a:r>
           </a:p>
           <a:p>
             <a:pPr>
               <a:spcBef>
-                <a:spcPts val="400"/>
+                <a:spcPts val="200"/>
               </a:spcBef>
-              <a:defRPr sz="1500" b="1">
-                <a:solidFill>
-                  <a:srgbClr val="0F172A"/>
-                </a:solidFill>
-              </a:defRPr>
-            </a:pPr>
-            <a:r>
-              <a:t>What Next?</a:t>
-            </a:r>
-          </a:p>
-          <a:p>
-            <a:pPr>
-              <a:spcBef>
-                <a:spcPts val="400"/>
-              </a:spcBef>
-              <a:defRPr sz="1100">
+              <a:defRPr sz="950">
                 <a:solidFill>
                   <a:srgbClr val="64748B"/>
                 </a:solidFill>
               </a:defRPr>
             </a:pPr>
             <a:r>
-              <a:t>Immediate single next action</a:t>
+              <a:t>Income, domicile, caste certificates</a:t>
             </a:r>
           </a:p>
         </p:txBody>
@@ -5513,14 +6162,14 @@
         </p:nvSpPr>
         <p:spPr>
           <a:xfrm>
-            <a:off x="8823960" y="4023360"/>
-            <a:ext cx="2560320" cy="1828800"/>
+            <a:off x="5047488" y="3200400"/>
+            <a:ext cx="2011680" cy="1188720"/>
           </a:xfrm>
           <a:prstGeom prst="roundRect">
             <a:avLst/>
           </a:prstGeom>
           <a:solidFill>
-            <a:srgbClr val="F8FAFC"/>
+            <a:srgbClr val="FFFFFF"/>
           </a:solidFill>
           <a:ln>
             <a:solidFill>
@@ -5558,8 +6207,8 @@
         </p:nvSpPr>
         <p:spPr>
           <a:xfrm>
-            <a:off x="9006840" y="4160520"/>
-            <a:ext cx="2194560" cy="1554480"/>
+            <a:off x="5184648" y="3291840"/>
+            <a:ext cx="1737360" cy="1005840"/>
           </a:xfrm>
           <a:prstGeom prst="rect">
             <a:avLst/>
@@ -5573,44 +6222,329 @@
           <a:lstStyle/>
           <a:p>
             <a:pPr>
-              <a:defRPr sz="1000" b="1">
+              <a:defRPr sz="1300" b="1">
+                <a:solidFill>
+                  <a:srgbClr val="1E3A8A"/>
+                </a:solidFill>
+              </a:defRPr>
+            </a:pPr>
+            <a:r>
+              <a:t>🌾 Agriculture</a:t>
+            </a:r>
+          </a:p>
+          <a:p>
+            <a:pPr>
+              <a:spcBef>
+                <a:spcPts val="200"/>
+              </a:spcBef>
+              <a:defRPr sz="950">
+                <a:solidFill>
+                  <a:srgbClr val="64748B"/>
+                </a:solidFill>
+              </a:defRPr>
+            </a:pPr>
+            <a:r>
+              <a:t>PM-Kisan &amp; farmer support</a:t>
+            </a:r>
+          </a:p>
+        </p:txBody>
+      </p:sp>
+      <p:sp>
+        <p:nvSpPr>
+          <p:cNvPr id="22" name="Rounded Rectangle 21"/>
+          <p:cNvSpPr/>
+          <p:nvPr/>
+        </p:nvSpPr>
+        <p:spPr>
+          <a:xfrm>
+            <a:off x="7205472" y="3200400"/>
+            <a:ext cx="2011680" cy="1188720"/>
+          </a:xfrm>
+          <a:prstGeom prst="roundRect">
+            <a:avLst/>
+          </a:prstGeom>
+          <a:solidFill>
+            <a:srgbClr val="FFFFFF"/>
+          </a:solidFill>
+          <a:ln>
+            <a:solidFill>
+              <a:srgbClr val="E2E8F0"/>
+            </a:solidFill>
+          </a:ln>
+        </p:spPr>
+        <p:style>
+          <a:lnRef idx="1">
+            <a:schemeClr val="accent1"/>
+          </a:lnRef>
+          <a:fillRef idx="3">
+            <a:schemeClr val="accent1"/>
+          </a:fillRef>
+          <a:effectRef idx="2">
+            <a:schemeClr val="accent1"/>
+          </a:effectRef>
+          <a:fontRef idx="minor">
+            <a:schemeClr val="lt1"/>
+          </a:fontRef>
+        </p:style>
+        <p:txBody>
+          <a:bodyPr rtlCol="0" anchor="ctr"/>
+          <a:lstStyle/>
+          <a:p>
+            <a:pPr algn="ctr"/>
+          </a:p>
+        </p:txBody>
+      </p:sp>
+      <p:sp>
+        <p:nvSpPr>
+          <p:cNvPr id="23" name="TextBox 22"/>
+          <p:cNvSpPr txBox="1"/>
+          <p:nvPr/>
+        </p:nvSpPr>
+        <p:spPr>
+          <a:xfrm>
+            <a:off x="7342632" y="3291840"/>
+            <a:ext cx="1737360" cy="1005840"/>
+          </a:xfrm>
+          <a:prstGeom prst="rect">
+            <a:avLst/>
+          </a:prstGeom>
+          <a:noFill/>
+        </p:spPr>
+        <p:txBody>
+          <a:bodyPr wrap="square">
+            <a:spAutoFit/>
+          </a:bodyPr>
+          <a:lstStyle/>
+          <a:p>
+            <a:pPr>
+              <a:defRPr sz="1300" b="1">
+                <a:solidFill>
+                  <a:srgbClr val="1E3A8A"/>
+                </a:solidFill>
+              </a:defRPr>
+            </a:pPr>
+            <a:r>
+              <a:t>🚀 Business</a:t>
+            </a:r>
+          </a:p>
+          <a:p>
+            <a:pPr>
+              <a:spcBef>
+                <a:spcPts val="200"/>
+              </a:spcBef>
+              <a:defRPr sz="950">
+                <a:solidFill>
+                  <a:srgbClr val="64748B"/>
+                </a:solidFill>
+              </a:defRPr>
+            </a:pPr>
+            <a:r>
+              <a:t>Subsidized loans &amp; PMEGP</a:t>
+            </a:r>
+          </a:p>
+        </p:txBody>
+      </p:sp>
+      <p:sp>
+        <p:nvSpPr>
+          <p:cNvPr id="24" name="Rounded Rectangle 23"/>
+          <p:cNvSpPr/>
+          <p:nvPr/>
+        </p:nvSpPr>
+        <p:spPr>
+          <a:xfrm>
+            <a:off x="9363456" y="3200400"/>
+            <a:ext cx="2011680" cy="1188720"/>
+          </a:xfrm>
+          <a:prstGeom prst="roundRect">
+            <a:avLst/>
+          </a:prstGeom>
+          <a:solidFill>
+            <a:srgbClr val="FFFFFF"/>
+          </a:solidFill>
+          <a:ln>
+            <a:solidFill>
+              <a:srgbClr val="E2E8F0"/>
+            </a:solidFill>
+          </a:ln>
+        </p:spPr>
+        <p:style>
+          <a:lnRef idx="1">
+            <a:schemeClr val="accent1"/>
+          </a:lnRef>
+          <a:fillRef idx="3">
+            <a:schemeClr val="accent1"/>
+          </a:fillRef>
+          <a:effectRef idx="2">
+            <a:schemeClr val="accent1"/>
+          </a:effectRef>
+          <a:fontRef idx="minor">
+            <a:schemeClr val="lt1"/>
+          </a:fontRef>
+        </p:style>
+        <p:txBody>
+          <a:bodyPr rtlCol="0" anchor="ctr"/>
+          <a:lstStyle/>
+          <a:p>
+            <a:pPr algn="ctr"/>
+          </a:p>
+        </p:txBody>
+      </p:sp>
+      <p:sp>
+        <p:nvSpPr>
+          <p:cNvPr id="25" name="TextBox 24"/>
+          <p:cNvSpPr txBox="1"/>
+          <p:nvPr/>
+        </p:nvSpPr>
+        <p:spPr>
+          <a:xfrm>
+            <a:off x="9500616" y="3291840"/>
+            <a:ext cx="1737360" cy="1005840"/>
+          </a:xfrm>
+          <a:prstGeom prst="rect">
+            <a:avLst/>
+          </a:prstGeom>
+          <a:noFill/>
+        </p:spPr>
+        <p:txBody>
+          <a:bodyPr wrap="square">
+            <a:spAutoFit/>
+          </a:bodyPr>
+          <a:lstStyle/>
+          <a:p>
+            <a:pPr>
+              <a:defRPr sz="1300" b="1">
+                <a:solidFill>
+                  <a:srgbClr val="1E3A8A"/>
+                </a:solidFill>
+              </a:defRPr>
+            </a:pPr>
+            <a:r>
+              <a:t>❓ I'm Not Sure</a:t>
+            </a:r>
+          </a:p>
+          <a:p>
+            <a:pPr>
+              <a:spcBef>
+                <a:spcPts val="200"/>
+              </a:spcBef>
+              <a:defRPr sz="950">
+                <a:solidFill>
+                  <a:srgbClr val="64748B"/>
+                </a:solidFill>
+              </a:defRPr>
+            </a:pPr>
+            <a:r>
+              <a:t>Guided diagnostic wizard</a:t>
+            </a:r>
+          </a:p>
+        </p:txBody>
+      </p:sp>
+      <p:sp>
+        <p:nvSpPr>
+          <p:cNvPr id="26" name="Rounded Rectangle 25"/>
+          <p:cNvSpPr/>
+          <p:nvPr/>
+        </p:nvSpPr>
+        <p:spPr>
+          <a:xfrm>
+            <a:off x="731520" y="4846320"/>
+            <a:ext cx="10698480" cy="1371600"/>
+          </a:xfrm>
+          <a:prstGeom prst="roundRect">
+            <a:avLst/>
+          </a:prstGeom>
+          <a:solidFill>
+            <a:srgbClr val="F0F4FF"/>
+          </a:solidFill>
+          <a:ln>
+            <a:solidFill>
+              <a:srgbClr val="BFDBFE"/>
+            </a:solidFill>
+          </a:ln>
+        </p:spPr>
+        <p:style>
+          <a:lnRef idx="1">
+            <a:schemeClr val="accent1"/>
+          </a:lnRef>
+          <a:fillRef idx="3">
+            <a:schemeClr val="accent1"/>
+          </a:fillRef>
+          <a:effectRef idx="2">
+            <a:schemeClr val="accent1"/>
+          </a:effectRef>
+          <a:fontRef idx="minor">
+            <a:schemeClr val="lt1"/>
+          </a:fontRef>
+        </p:style>
+        <p:txBody>
+          <a:bodyPr rtlCol="0" anchor="ctr"/>
+          <a:lstStyle/>
+          <a:p>
+            <a:pPr algn="ctr"/>
+          </a:p>
+        </p:txBody>
+      </p:sp>
+      <p:sp>
+        <p:nvSpPr>
+          <p:cNvPr id="27" name="TextBox 26"/>
+          <p:cNvSpPr txBox="1"/>
+          <p:nvPr/>
+        </p:nvSpPr>
+        <p:spPr>
+          <a:xfrm>
+            <a:off x="914400" y="4937760"/>
+            <a:ext cx="10332720" cy="1188720"/>
+          </a:xfrm>
+          <a:prstGeom prst="rect">
+            <a:avLst/>
+          </a:prstGeom>
+          <a:noFill/>
+        </p:spPr>
+        <p:txBody>
+          <a:bodyPr wrap="square">
+            <a:spAutoFit/>
+          </a:bodyPr>
+          <a:lstStyle/>
+          <a:p>
+            <a:pPr>
+              <a:defRPr sz="1100" b="1">
+                <a:solidFill>
+                  <a:srgbClr val="1E3A8A"/>
+                </a:solidFill>
+              </a:defRPr>
+            </a:pPr>
+            <a:r>
+              <a:t>CONVERSATIONAL EXTRACTION EXAMPLE:</a:t>
+            </a:r>
+          </a:p>
+          <a:p>
+            <a:pPr>
+              <a:spcBef>
+                <a:spcPts val="300"/>
+              </a:spcBef>
+              <a:defRPr sz="1200" b="1">
+                <a:solidFill>
+                  <a:srgbClr val="0F172A"/>
+                </a:solidFill>
+              </a:defRPr>
+            </a:pPr>
+            <a:r>
+              <a:t>Citizen Input: “I'm a 20-year-old B.Tech student from Lucknow. Family income is ₹2.5 lakh and I need fee assistance.”</a:t>
+            </a:r>
+          </a:p>
+          <a:p>
+            <a:pPr>
+              <a:spcBef>
+                <a:spcPts val="300"/>
+              </a:spcBef>
+              <a:defRPr sz="1200" b="1">
                 <a:solidFill>
                   <a:srgbClr val="D97706"/>
                 </a:solidFill>
               </a:defRPr>
             </a:pPr>
             <a:r>
-              <a:t>STEP 08</a:t>
-            </a:r>
-          </a:p>
-          <a:p>
-            <a:pPr>
-              <a:spcBef>
-                <a:spcPts val="400"/>
-              </a:spcBef>
-              <a:defRPr sz="1500" b="1">
-                <a:solidFill>
-                  <a:srgbClr val="0F172A"/>
-                </a:solidFill>
-              </a:defRPr>
-            </a:pPr>
-            <a:r>
-              <a:t>Track Journey</a:t>
-            </a:r>
-          </a:p>
-          <a:p>
-            <a:pPr>
-              <a:spcBef>
-                <a:spcPts val="400"/>
-              </a:spcBef>
-              <a:defRPr sz="1100">
-                <a:solidFill>
-                  <a:srgbClr val="64748B"/>
-                </a:solidFill>
-              </a:defRPr>
-            </a:pPr>
-            <a:r>
-              <a:t>Status &amp; milestone logs</a:t>
+              <a:t>➔ Extracted Profile Chips: [20 years ×]  [Lucknow, UP ×]  [B.Tech ×]  [Student ×]  [₹2.5L Income ×]  [OBC ×]</a:t>
             </a:r>
           </a:p>
         </p:txBody>
@@ -5641,7 +6575,7 @@
         </p:nvSpPr>
         <p:spPr>
           <a:xfrm>
-            <a:off x="731520" y="411480"/>
+            <a:off x="731520" y="365760"/>
             <a:ext cx="10698480" cy="320040"/>
           </a:xfrm>
           <a:prstGeom prst="rect">
@@ -5663,7 +6597,7 @@
               </a:defRPr>
             </a:pPr>
             <a:r>
-              <a:t>PRODUCT CAPABILITIES</a:t>
+              <a:t>FROM IDEA TO IMPACT</a:t>
             </a:r>
           </a:p>
         </p:txBody>
@@ -5676,8 +6610,8 @@
         </p:nvSpPr>
         <p:spPr>
           <a:xfrm>
-            <a:off x="731520" y="731520"/>
-            <a:ext cx="10698480" cy="548640"/>
+            <a:off x="731520" y="685800"/>
+            <a:ext cx="10698480" cy="502920"/>
           </a:xfrm>
           <a:prstGeom prst="rect">
             <a:avLst/>
@@ -5691,14 +6625,14 @@
           <a:lstStyle/>
           <a:p>
             <a:pPr>
-              <a:defRPr sz="2400" b="1">
+              <a:defRPr sz="2200" b="1">
                 <a:solidFill>
                   <a:srgbClr val="0F172A"/>
                 </a:solidFill>
               </a:defRPr>
             </a:pPr>
             <a:r>
-              <a:t>Core Platform Features &amp; Intelligence Layer</a:t>
+              <a:t>The 8-Stage Fundamental Citizen Action Loop</a:t>
             </a:r>
           </a:p>
         </p:txBody>
@@ -5711,8 +6645,8 @@
         </p:nvSpPr>
         <p:spPr>
           <a:xfrm>
-            <a:off x="731520" y="1280160"/>
-            <a:ext cx="10698480" cy="411480"/>
+            <a:off x="731520" y="1188720"/>
+            <a:ext cx="10698480" cy="365760"/>
           </a:xfrm>
           <a:prstGeom prst="rect">
             <a:avLst/>
@@ -5726,14 +6660,14 @@
           <a:lstStyle/>
           <a:p>
             <a:pPr>
-              <a:defRPr sz="1300">
+              <a:defRPr sz="1200">
                 <a:solidFill>
                   <a:srgbClr val="64748B"/>
                 </a:solidFill>
               </a:defRPr>
             </a:pPr>
             <a:r>
-              <a:t>Engineered to deliver intuitive, accessible, and truthful citizen navigation</a:t>
+              <a:t>The complete journey from citizen problem to approved government disbursement</a:t>
             </a:r>
           </a:p>
         </p:txBody>
@@ -5746,8 +6680,8 @@
         </p:nvSpPr>
         <p:spPr>
           <a:xfrm>
-            <a:off x="731520" y="6400800"/>
-            <a:ext cx="10698480" cy="320040"/>
+            <a:off x="731520" y="6446520"/>
+            <a:ext cx="10698480" cy="274320"/>
           </a:xfrm>
           <a:prstGeom prst="rect">
             <a:avLst/>
@@ -5761,7 +6695,7 @@
           <a:lstStyle/>
           <a:p>
             <a:pPr>
-              <a:defRPr sz="1000">
+              <a:defRPr sz="950">
                 <a:solidFill>
                   <a:srgbClr val="94A3B8"/>
                 </a:solidFill>
@@ -5781,14 +6715,14 @@
         </p:nvSpPr>
         <p:spPr>
           <a:xfrm>
-            <a:off x="731520" y="1920240"/>
-            <a:ext cx="3429000" cy="1920240"/>
+            <a:off x="731520" y="1737360"/>
+            <a:ext cx="2560320" cy="1828800"/>
           </a:xfrm>
           <a:prstGeom prst="roundRect">
             <a:avLst/>
           </a:prstGeom>
           <a:solidFill>
-            <a:srgbClr val="FFFFFF"/>
+            <a:srgbClr val="F8FAFC"/>
           </a:solidFill>
           <a:ln>
             <a:solidFill>
@@ -5826,8 +6760,8 @@
         </p:nvSpPr>
         <p:spPr>
           <a:xfrm>
-            <a:off x="914400" y="2057400"/>
-            <a:ext cx="3063240" cy="1645920"/>
+            <a:off x="914400" y="1874520"/>
+            <a:ext cx="2194560" cy="1554480"/>
           </a:xfrm>
           <a:prstGeom prst="rect">
             <a:avLst/>
@@ -5841,14 +6775,29 @@
           <a:lstStyle/>
           <a:p>
             <a:pPr>
-              <a:defRPr sz="1400" b="1">
-                <a:solidFill>
-                  <a:srgbClr val="1E3A8A"/>
-                </a:solidFill>
-              </a:defRPr>
-            </a:pPr>
-            <a:r>
-              <a:t>Conversational Discovery</a:t>
+              <a:defRPr sz="1000" b="1">
+                <a:solidFill>
+                  <a:srgbClr val="D97706"/>
+                </a:solidFill>
+              </a:defRPr>
+            </a:pPr>
+            <a:r>
+              <a:t>STAGE 01</a:t>
+            </a:r>
+          </a:p>
+          <a:p>
+            <a:pPr>
+              <a:spcBef>
+                <a:spcPts val="400"/>
+              </a:spcBef>
+              <a:defRPr sz="1500" b="1">
+                <a:solidFill>
+                  <a:srgbClr val="0F172A"/>
+                </a:solidFill>
+              </a:defRPr>
+            </a:pPr>
+            <a:r>
+              <a:t>My Situation</a:t>
             </a:r>
           </a:p>
           <a:p>
@@ -5863,7 +6812,7 @@
               </a:defRPr>
             </a:pPr>
             <a:r>
-              <a:t>Extracts structured profile chips from plain human sentences. Progressive micro-questioning asks 1-2 missing parameters rather than long 15-question forms.</a:t>
+              <a:t>Everyday citizen words</a:t>
             </a:r>
           </a:p>
         </p:txBody>
@@ -5876,14 +6825,14 @@
         </p:nvSpPr>
         <p:spPr>
           <a:xfrm>
-            <a:off x="4343400" y="1920240"/>
-            <a:ext cx="3429000" cy="1920240"/>
+            <a:off x="3429000" y="1737360"/>
+            <a:ext cx="2560320" cy="1828800"/>
           </a:xfrm>
           <a:prstGeom prst="roundRect">
             <a:avLst/>
           </a:prstGeom>
           <a:solidFill>
-            <a:srgbClr val="FFFFFF"/>
+            <a:srgbClr val="F8FAFC"/>
           </a:solidFill>
           <a:ln>
             <a:solidFill>
@@ -5921,8 +6870,8 @@
         </p:nvSpPr>
         <p:spPr>
           <a:xfrm>
-            <a:off x="4526280" y="2057400"/>
-            <a:ext cx="3063240" cy="1645920"/>
+            <a:off x="3611880" y="1874520"/>
+            <a:ext cx="2194560" cy="1554480"/>
           </a:xfrm>
           <a:prstGeom prst="rect">
             <a:avLst/>
@@ -5936,14 +6885,29 @@
           <a:lstStyle/>
           <a:p>
             <a:pPr>
-              <a:defRPr sz="1400" b="1">
-                <a:solidFill>
-                  <a:srgbClr val="1E3A8A"/>
-                </a:solidFill>
-              </a:defRPr>
-            </a:pPr>
-            <a:r>
-              <a:t>“What Am I Missing?” Feature</a:t>
+              <a:defRPr sz="1000" b="1">
+                <a:solidFill>
+                  <a:srgbClr val="D97706"/>
+                </a:solidFill>
+              </a:defRPr>
+            </a:pPr>
+            <a:r>
+              <a:t>STAGE 02</a:t>
+            </a:r>
+          </a:p>
+          <a:p>
+            <a:pPr>
+              <a:spcBef>
+                <a:spcPts val="400"/>
+              </a:spcBef>
+              <a:defRPr sz="1500" b="1">
+                <a:solidFill>
+                  <a:srgbClr val="0F172A"/>
+                </a:solidFill>
+              </a:defRPr>
+            </a:pPr>
+            <a:r>
+              <a:t>What Can I Get?</a:t>
             </a:r>
           </a:p>
           <a:p>
@@ -5958,7 +6922,7 @@
               </a:defRPr>
             </a:pPr>
             <a:r>
-              <a:t>One of JanMitra's most important capabilities: quantifies progress (e.g. 4/6 criteria met) and creates a 1-click bridge to obtain missing certificates.</a:t>
+              <a:t>Relevant benefits discovered</a:t>
             </a:r>
           </a:p>
         </p:txBody>
@@ -5971,14 +6935,14 @@
         </p:nvSpPr>
         <p:spPr>
           <a:xfrm>
-            <a:off x="7955280" y="1920240"/>
-            <a:ext cx="3429000" cy="1920240"/>
+            <a:off x="6126480" y="1737360"/>
+            <a:ext cx="2560320" cy="1828800"/>
           </a:xfrm>
           <a:prstGeom prst="roundRect">
             <a:avLst/>
           </a:prstGeom>
           <a:solidFill>
-            <a:srgbClr val="FFFFFF"/>
+            <a:srgbClr val="F8FAFC"/>
           </a:solidFill>
           <a:ln>
             <a:solidFill>
@@ -6016,8 +6980,8 @@
         </p:nvSpPr>
         <p:spPr>
           <a:xfrm>
-            <a:off x="8138160" y="2057400"/>
-            <a:ext cx="3063240" cy="1645920"/>
+            <a:off x="6309360" y="1874520"/>
+            <a:ext cx="2194560" cy="1554480"/>
           </a:xfrm>
           <a:prstGeom prst="rect">
             <a:avLst/>
@@ -6031,14 +6995,29 @@
           <a:lstStyle/>
           <a:p>
             <a:pPr>
-              <a:defRPr sz="1400" b="1">
-                <a:solidFill>
-                  <a:srgbClr val="1E3A8A"/>
-                </a:solidFill>
-              </a:defRPr>
-            </a:pPr>
-            <a:r>
-              <a:t>Government Service Navigator</a:t>
+              <a:defRPr sz="1000" b="1">
+                <a:solidFill>
+                  <a:srgbClr val="D97706"/>
+                </a:solidFill>
+              </a:defRPr>
+            </a:pPr>
+            <a:r>
+              <a:t>STAGE 03</a:t>
+            </a:r>
+          </a:p>
+          <a:p>
+            <a:pPr>
+              <a:spcBef>
+                <a:spcPts val="400"/>
+              </a:spcBef>
+              <a:defRPr sz="1500" b="1">
+                <a:solidFill>
+                  <a:srgbClr val="0F172A"/>
+                </a:solidFill>
+              </a:defRPr>
+            </a:pPr>
+            <a:r>
+              <a:t>Why Qualify?</a:t>
             </a:r>
           </a:p>
           <a:p>
@@ -6053,7 +7032,7 @@
               </a:defRPr>
             </a:pPr>
             <a:r>
-              <a:t>Deep-dive procedural timelines for public services (Aay Praman Patra, Niwas, Ration Card), covering exact fees (₹15), SLAs, and Lekhpal field checks.</a:t>
+              <a:t>Evidence-based rule match</a:t>
             </a:r>
           </a:p>
         </p:txBody>
@@ -6066,14 +7045,14 @@
         </p:nvSpPr>
         <p:spPr>
           <a:xfrm>
-            <a:off x="731520" y="4023360"/>
-            <a:ext cx="3429000" cy="1920240"/>
+            <a:off x="8823960" y="1737360"/>
+            <a:ext cx="2560320" cy="1828800"/>
           </a:xfrm>
           <a:prstGeom prst="roundRect">
             <a:avLst/>
           </a:prstGeom>
           <a:solidFill>
-            <a:srgbClr val="FFFFFF"/>
+            <a:srgbClr val="F8FAFC"/>
           </a:solidFill>
           <a:ln>
             <a:solidFill>
@@ -6111,8 +7090,8 @@
         </p:nvSpPr>
         <p:spPr>
           <a:xfrm>
-            <a:off x="914400" y="4160520"/>
-            <a:ext cx="3063240" cy="1645920"/>
+            <a:off x="9006840" y="1874520"/>
+            <a:ext cx="2194560" cy="1554480"/>
           </a:xfrm>
           <a:prstGeom prst="rect">
             <a:avLst/>
@@ -6126,14 +7105,29 @@
           <a:lstStyle/>
           <a:p>
             <a:pPr>
-              <a:defRPr sz="1400" b="1">
-                <a:solidFill>
-                  <a:srgbClr val="1E3A8A"/>
-                </a:solidFill>
-              </a:defRPr>
-            </a:pPr>
-            <a:r>
-              <a:t>Document Intelligence Locker</a:t>
+              <a:defRPr sz="1000" b="1">
+                <a:solidFill>
+                  <a:srgbClr val="D97706"/>
+                </a:solidFill>
+              </a:defRPr>
+            </a:pPr>
+            <a:r>
+              <a:t>STAGE 04</a:t>
+            </a:r>
+          </a:p>
+          <a:p>
+            <a:pPr>
+              <a:spcBef>
+                <a:spcPts val="400"/>
+              </a:spcBef>
+              <a:defRPr sz="1500" b="1">
+                <a:solidFill>
+                  <a:srgbClr val="0F172A"/>
+                </a:solidFill>
+              </a:defRPr>
+            </a:pPr>
+            <a:r>
+              <a:t>What Am I Missing?</a:t>
             </a:r>
           </a:p>
           <a:p>
@@ -6148,7 +7142,7 @@
               </a:defRPr>
             </a:pPr>
             <a:r>
-              <a:t>Digital vault storing credentials with status indicators (Available, Expired, Missing). Simulated OCR scan evaluates readiness without making false legal claims.</a:t>
+              <a:t>Clear identification of gaps</a:t>
             </a:r>
           </a:p>
         </p:txBody>
@@ -6161,14 +7155,14 @@
         </p:nvSpPr>
         <p:spPr>
           <a:xfrm>
-            <a:off x="4343400" y="4023360"/>
-            <a:ext cx="3429000" cy="1920240"/>
+            <a:off x="731520" y="3840479"/>
+            <a:ext cx="2560320" cy="1828800"/>
           </a:xfrm>
           <a:prstGeom prst="roundRect">
             <a:avLst/>
           </a:prstGeom>
           <a:solidFill>
-            <a:srgbClr val="FFFFFF"/>
+            <a:srgbClr val="F8FAFC"/>
           </a:solidFill>
           <a:ln>
             <a:solidFill>
@@ -6206,8 +7200,8 @@
         </p:nvSpPr>
         <p:spPr>
           <a:xfrm>
-            <a:off x="4526280" y="4160520"/>
-            <a:ext cx="3063240" cy="1645920"/>
+            <a:off x="914400" y="3977639"/>
+            <a:ext cx="2194560" cy="1554480"/>
           </a:xfrm>
           <a:prstGeom prst="rect">
             <a:avLst/>
@@ -6221,14 +7215,29 @@
           <a:lstStyle/>
           <a:p>
             <a:pPr>
-              <a:defRPr sz="1400" b="1">
-                <a:solidFill>
-                  <a:srgbClr val="1E3A8A"/>
-                </a:solidFill>
-              </a:defRPr>
-            </a:pPr>
-            <a:r>
-              <a:t>“Explain This” AI Simplifier</a:t>
+              <a:defRPr sz="1000" b="1">
+                <a:solidFill>
+                  <a:srgbClr val="D97706"/>
+                </a:solidFill>
+              </a:defRPr>
+            </a:pPr>
+            <a:r>
+              <a:t>STAGE 05</a:t>
+            </a:r>
+          </a:p>
+          <a:p>
+            <a:pPr>
+              <a:spcBef>
+                <a:spcPts val="400"/>
+              </a:spcBef>
+              <a:defRPr sz="1500" b="1">
+                <a:solidFill>
+                  <a:srgbClr val="0F172A"/>
+                </a:solidFill>
+              </a:defRPr>
+            </a:pPr>
+            <a:r>
+              <a:t>What Docs Needed?</a:t>
             </a:r>
           </a:p>
           <a:p>
@@ -6243,7 +7252,7 @@
               </a:defRPr>
             </a:pPr>
             <a:r>
-              <a:t>Converts dense gazette orders and circular clauses into: (1) Simple language, (2) Action checklist, (3) Common rejection traps, (4) Official source citation.</a:t>
+              <a:t>Vault &amp; criteria audit</a:t>
             </a:r>
           </a:p>
         </p:txBody>
@@ -6256,14 +7265,14 @@
         </p:nvSpPr>
         <p:spPr>
           <a:xfrm>
-            <a:off x="7955280" y="4023360"/>
-            <a:ext cx="3429000" cy="1920240"/>
+            <a:off x="3429000" y="3840479"/>
+            <a:ext cx="2560320" cy="1828800"/>
           </a:xfrm>
           <a:prstGeom prst="roundRect">
             <a:avLst/>
           </a:prstGeom>
           <a:solidFill>
-            <a:srgbClr val="FFFFFF"/>
+            <a:srgbClr val="F8FAFC"/>
           </a:solidFill>
           <a:ln>
             <a:solidFill>
@@ -6301,8 +7310,8 @@
         </p:nvSpPr>
         <p:spPr>
           <a:xfrm>
-            <a:off x="8138160" y="4160520"/>
-            <a:ext cx="3063240" cy="1645920"/>
+            <a:off x="3611880" y="3977639"/>
+            <a:ext cx="2194560" cy="1554480"/>
           </a:xfrm>
           <a:prstGeom prst="rect">
             <a:avLst/>
@@ -6316,14 +7325,29 @@
           <a:lstStyle/>
           <a:p>
             <a:pPr>
-              <a:defRPr sz="1400" b="1">
-                <a:solidFill>
-                  <a:srgbClr val="1E3A8A"/>
-                </a:solidFill>
-              </a:defRPr>
-            </a:pPr>
-            <a:r>
-              <a:t>Multilingual &amp; Accessible UX</a:t>
+              <a:defRPr sz="1000" b="1">
+                <a:solidFill>
+                  <a:srgbClr val="D97706"/>
+                </a:solidFill>
+              </a:defRPr>
+            </a:pPr>
+            <a:r>
+              <a:t>STAGE 06</a:t>
+            </a:r>
+          </a:p>
+          <a:p>
+            <a:pPr>
+              <a:spcBef>
+                <a:spcPts val="400"/>
+              </a:spcBef>
+              <a:defRPr sz="1500" b="1">
+                <a:solidFill>
+                  <a:srgbClr val="0F172A"/>
+                </a:solidFill>
+              </a:defRPr>
+            </a:pPr>
+            <a:r>
+              <a:t>How Do I Get Them?</a:t>
             </a:r>
           </a:p>
           <a:p>
@@ -6338,7 +7362,307 @@
               </a:defRPr>
             </a:pPr>
             <a:r>
-              <a:t>Seamless switching between English &amp; Hindi, voice input simulation, high-contrast readable cards, and mobile-first responsive architecture.</a:t>
+              <a:t>Direct service integration</a:t>
+            </a:r>
+          </a:p>
+        </p:txBody>
+      </p:sp>
+      <p:sp>
+        <p:nvSpPr>
+          <p:cNvPr id="18" name="Rounded Rectangle 17"/>
+          <p:cNvSpPr/>
+          <p:nvPr/>
+        </p:nvSpPr>
+        <p:spPr>
+          <a:xfrm>
+            <a:off x="6126480" y="3840479"/>
+            <a:ext cx="2560320" cy="1828800"/>
+          </a:xfrm>
+          <a:prstGeom prst="roundRect">
+            <a:avLst/>
+          </a:prstGeom>
+          <a:solidFill>
+            <a:srgbClr val="F8FAFC"/>
+          </a:solidFill>
+          <a:ln>
+            <a:solidFill>
+              <a:srgbClr val="E2E8F0"/>
+            </a:solidFill>
+          </a:ln>
+        </p:spPr>
+        <p:style>
+          <a:lnRef idx="1">
+            <a:schemeClr val="accent1"/>
+          </a:lnRef>
+          <a:fillRef idx="3">
+            <a:schemeClr val="accent1"/>
+          </a:fillRef>
+          <a:effectRef idx="2">
+            <a:schemeClr val="accent1"/>
+          </a:effectRef>
+          <a:fontRef idx="minor">
+            <a:schemeClr val="lt1"/>
+          </a:fontRef>
+        </p:style>
+        <p:txBody>
+          <a:bodyPr rtlCol="0" anchor="ctr"/>
+          <a:lstStyle/>
+          <a:p>
+            <a:pPr algn="ctr"/>
+          </a:p>
+        </p:txBody>
+      </p:sp>
+      <p:sp>
+        <p:nvSpPr>
+          <p:cNvPr id="19" name="TextBox 18"/>
+          <p:cNvSpPr txBox="1"/>
+          <p:nvPr/>
+        </p:nvSpPr>
+        <p:spPr>
+          <a:xfrm>
+            <a:off x="6309360" y="3977639"/>
+            <a:ext cx="2194560" cy="1554480"/>
+          </a:xfrm>
+          <a:prstGeom prst="rect">
+            <a:avLst/>
+          </a:prstGeom>
+          <a:noFill/>
+        </p:spPr>
+        <p:txBody>
+          <a:bodyPr wrap="square">
+            <a:spAutoFit/>
+          </a:bodyPr>
+          <a:lstStyle/>
+          <a:p>
+            <a:pPr>
+              <a:defRPr sz="1000" b="1">
+                <a:solidFill>
+                  <a:srgbClr val="D97706"/>
+                </a:solidFill>
+              </a:defRPr>
+            </a:pPr>
+            <a:r>
+              <a:t>STAGE 07</a:t>
+            </a:r>
+          </a:p>
+          <a:p>
+            <a:pPr>
+              <a:spcBef>
+                <a:spcPts val="400"/>
+              </a:spcBef>
+              <a:defRPr sz="1500" b="1">
+                <a:solidFill>
+                  <a:srgbClr val="0F172A"/>
+                </a:solidFill>
+              </a:defRPr>
+            </a:pPr>
+            <a:r>
+              <a:t>What Next?</a:t>
+            </a:r>
+          </a:p>
+          <a:p>
+            <a:pPr>
+              <a:spcBef>
+                <a:spcPts val="400"/>
+              </a:spcBef>
+              <a:defRPr sz="1100">
+                <a:solidFill>
+                  <a:srgbClr val="64748B"/>
+                </a:solidFill>
+              </a:defRPr>
+            </a:pPr>
+            <a:r>
+              <a:t>Immediate single next action</a:t>
+            </a:r>
+          </a:p>
+        </p:txBody>
+      </p:sp>
+      <p:sp>
+        <p:nvSpPr>
+          <p:cNvPr id="20" name="Rounded Rectangle 19"/>
+          <p:cNvSpPr/>
+          <p:nvPr/>
+        </p:nvSpPr>
+        <p:spPr>
+          <a:xfrm>
+            <a:off x="8823960" y="3840479"/>
+            <a:ext cx="2560320" cy="1828800"/>
+          </a:xfrm>
+          <a:prstGeom prst="roundRect">
+            <a:avLst/>
+          </a:prstGeom>
+          <a:solidFill>
+            <a:srgbClr val="F8FAFC"/>
+          </a:solidFill>
+          <a:ln>
+            <a:solidFill>
+              <a:srgbClr val="E2E8F0"/>
+            </a:solidFill>
+          </a:ln>
+        </p:spPr>
+        <p:style>
+          <a:lnRef idx="1">
+            <a:schemeClr val="accent1"/>
+          </a:lnRef>
+          <a:fillRef idx="3">
+            <a:schemeClr val="accent1"/>
+          </a:fillRef>
+          <a:effectRef idx="2">
+            <a:schemeClr val="accent1"/>
+          </a:effectRef>
+          <a:fontRef idx="minor">
+            <a:schemeClr val="lt1"/>
+          </a:fontRef>
+        </p:style>
+        <p:txBody>
+          <a:bodyPr rtlCol="0" anchor="ctr"/>
+          <a:lstStyle/>
+          <a:p>
+            <a:pPr algn="ctr"/>
+          </a:p>
+        </p:txBody>
+      </p:sp>
+      <p:sp>
+        <p:nvSpPr>
+          <p:cNvPr id="21" name="TextBox 20"/>
+          <p:cNvSpPr txBox="1"/>
+          <p:nvPr/>
+        </p:nvSpPr>
+        <p:spPr>
+          <a:xfrm>
+            <a:off x="9006840" y="3977639"/>
+            <a:ext cx="2194560" cy="1554480"/>
+          </a:xfrm>
+          <a:prstGeom prst="rect">
+            <a:avLst/>
+          </a:prstGeom>
+          <a:noFill/>
+        </p:spPr>
+        <p:txBody>
+          <a:bodyPr wrap="square">
+            <a:spAutoFit/>
+          </a:bodyPr>
+          <a:lstStyle/>
+          <a:p>
+            <a:pPr>
+              <a:defRPr sz="1000" b="1">
+                <a:solidFill>
+                  <a:srgbClr val="D97706"/>
+                </a:solidFill>
+              </a:defRPr>
+            </a:pPr>
+            <a:r>
+              <a:t>STAGE 08</a:t>
+            </a:r>
+          </a:p>
+          <a:p>
+            <a:pPr>
+              <a:spcBef>
+                <a:spcPts val="400"/>
+              </a:spcBef>
+              <a:defRPr sz="1500" b="1">
+                <a:solidFill>
+                  <a:srgbClr val="0F172A"/>
+                </a:solidFill>
+              </a:defRPr>
+            </a:pPr>
+            <a:r>
+              <a:t>Track Journey</a:t>
+            </a:r>
+          </a:p>
+          <a:p>
+            <a:pPr>
+              <a:spcBef>
+                <a:spcPts val="400"/>
+              </a:spcBef>
+              <a:defRPr sz="1100">
+                <a:solidFill>
+                  <a:srgbClr val="64748B"/>
+                </a:solidFill>
+              </a:defRPr>
+            </a:pPr>
+            <a:r>
+              <a:t>Status &amp; milestone logs</a:t>
+            </a:r>
+          </a:p>
+        </p:txBody>
+      </p:sp>
+      <p:sp>
+        <p:nvSpPr>
+          <p:cNvPr id="22" name="Rounded Rectangle 21"/>
+          <p:cNvSpPr/>
+          <p:nvPr/>
+        </p:nvSpPr>
+        <p:spPr>
+          <a:xfrm>
+            <a:off x="731520" y="5577840"/>
+            <a:ext cx="10698480" cy="685800"/>
+          </a:xfrm>
+          <a:prstGeom prst="roundRect">
+            <a:avLst/>
+          </a:prstGeom>
+          <a:solidFill>
+            <a:srgbClr val="F0FDF4"/>
+          </a:solidFill>
+          <a:ln>
+            <a:solidFill>
+              <a:srgbClr val="86EFAC"/>
+            </a:solidFill>
+          </a:ln>
+        </p:spPr>
+        <p:style>
+          <a:lnRef idx="1">
+            <a:schemeClr val="accent1"/>
+          </a:lnRef>
+          <a:fillRef idx="3">
+            <a:schemeClr val="accent1"/>
+          </a:fillRef>
+          <a:effectRef idx="2">
+            <a:schemeClr val="accent1"/>
+          </a:effectRef>
+          <a:fontRef idx="minor">
+            <a:schemeClr val="lt1"/>
+          </a:fontRef>
+        </p:style>
+        <p:txBody>
+          <a:bodyPr rtlCol="0" anchor="ctr"/>
+          <a:lstStyle/>
+          <a:p>
+            <a:pPr algn="ctr"/>
+          </a:p>
+        </p:txBody>
+      </p:sp>
+      <p:sp>
+        <p:nvSpPr>
+          <p:cNvPr id="23" name="TextBox 22"/>
+          <p:cNvSpPr txBox="1"/>
+          <p:nvPr/>
+        </p:nvSpPr>
+        <p:spPr>
+          <a:xfrm>
+            <a:off x="822960" y="5623560"/>
+            <a:ext cx="10515600" cy="594360"/>
+          </a:xfrm>
+          <a:prstGeom prst="rect">
+            <a:avLst/>
+          </a:prstGeom>
+          <a:noFill/>
+        </p:spPr>
+        <p:txBody>
+          <a:bodyPr wrap="none">
+            <a:spAutoFit/>
+          </a:bodyPr>
+          <a:lstStyle/>
+          <a:p>
+            <a:pPr>
+              <a:defRPr sz="1050" b="1">
+                <a:solidFill>
+                  <a:srgbClr val="059669"/>
+                </a:solidFill>
+              </a:defRPr>
+            </a:pPr>
+            <a:r>
+              <a:t>ANSWERS 5 ESSENTIAL CITIZEN QUESTIONS:  1. What is relevant?  •  2. Why qualify?  •  3. What is missing?  •  4. What exact steps?  •  5. What do I do next?</a:t>
             </a:r>
           </a:p>
         </p:txBody>
@@ -6369,7 +7693,7 @@
         </p:nvSpPr>
         <p:spPr>
           <a:xfrm>
-            <a:off x="731520" y="411480"/>
+            <a:off x="731520" y="365760"/>
             <a:ext cx="10698480" cy="320040"/>
           </a:xfrm>
           <a:prstGeom prst="rect">
@@ -6391,7 +7715,7 @@
               </a:defRPr>
             </a:pPr>
             <a:r>
-              <a:t>COMPETITIVE DIFFERENTIATOR</a:t>
+              <a:t>PROTOTYPE CAPABILITIES</a:t>
             </a:r>
           </a:p>
         </p:txBody>
@@ -6404,8 +7728,8 @@
         </p:nvSpPr>
         <p:spPr>
           <a:xfrm>
-            <a:off x="731520" y="731520"/>
-            <a:ext cx="10698480" cy="548640"/>
+            <a:off x="731520" y="685800"/>
+            <a:ext cx="10698480" cy="502920"/>
           </a:xfrm>
           <a:prstGeom prst="rect">
             <a:avLst/>
@@ -6419,14 +7743,14 @@
           <a:lstStyle/>
           <a:p>
             <a:pPr>
-              <a:defRPr sz="2400" b="1">
+              <a:defRPr sz="2200" b="1">
                 <a:solidFill>
                   <a:srgbClr val="0F172A"/>
                 </a:solidFill>
               </a:defRPr>
             </a:pPr>
             <a:r>
-              <a:t>Why JanMitra Is Fundamentally Different</a:t>
+              <a:t>Core Platform Features &amp; Functionality</a:t>
             </a:r>
           </a:p>
         </p:txBody>
@@ -6439,8 +7763,8 @@
         </p:nvSpPr>
         <p:spPr>
           <a:xfrm>
-            <a:off x="731520" y="1280160"/>
-            <a:ext cx="10698480" cy="411480"/>
+            <a:off x="731520" y="1188720"/>
+            <a:ext cx="10698480" cy="365760"/>
           </a:xfrm>
           <a:prstGeom prst="rect">
             <a:avLst/>
@@ -6454,14 +7778,14 @@
           <a:lstStyle/>
           <a:p>
             <a:pPr>
-              <a:defRPr sz="1300">
+              <a:defRPr sz="1200">
                 <a:solidFill>
                   <a:srgbClr val="64748B"/>
                 </a:solidFill>
               </a:defRPr>
             </a:pPr>
             <a:r>
-              <a:t>Beyond generic AI chatbots and outdated government web portals</a:t>
+              <a:t>Engineered for high trust, intuitive clarity, and zero bureaucratic friction</a:t>
             </a:r>
           </a:p>
         </p:txBody>
@@ -6474,8 +7798,8 @@
         </p:nvSpPr>
         <p:spPr>
           <a:xfrm>
-            <a:off x="731520" y="6400800"/>
-            <a:ext cx="10698480" cy="320040"/>
+            <a:off x="731520" y="6446520"/>
+            <a:ext cx="10698480" cy="274320"/>
           </a:xfrm>
           <a:prstGeom prst="rect">
             <a:avLst/>
@@ -6489,7 +7813,7 @@
           <a:lstStyle/>
           <a:p>
             <a:pPr>
-              <a:defRPr sz="1000">
+              <a:defRPr sz="950">
                 <a:solidFill>
                   <a:srgbClr val="94A3B8"/>
                 </a:solidFill>
@@ -6509,14 +7833,14 @@
         </p:nvSpPr>
         <p:spPr>
           <a:xfrm>
-            <a:off x="731520" y="1920240"/>
-            <a:ext cx="5120640" cy="1828800"/>
+            <a:off x="731520" y="1737360"/>
+            <a:ext cx="3429000" cy="1920240"/>
           </a:xfrm>
           <a:prstGeom prst="roundRect">
             <a:avLst/>
           </a:prstGeom>
           <a:solidFill>
-            <a:srgbClr val="F8FAFC"/>
+            <a:srgbClr val="FFFFFF"/>
           </a:solidFill>
           <a:ln>
             <a:solidFill>
@@ -6554,8 +7878,8 @@
         </p:nvSpPr>
         <p:spPr>
           <a:xfrm>
-            <a:off x="1005840" y="2103120"/>
-            <a:ext cx="4572000" cy="1463040"/>
+            <a:off x="914400" y="1874520"/>
+            <a:ext cx="3063240" cy="1645920"/>
           </a:xfrm>
           <a:prstGeom prst="rect">
             <a:avLst/>
@@ -6569,29 +7893,29 @@
           <a:lstStyle/>
           <a:p>
             <a:pPr>
-              <a:defRPr sz="1600" b="1">
-                <a:solidFill>
-                  <a:srgbClr val="D97706"/>
-                </a:solidFill>
-              </a:defRPr>
-            </a:pPr>
-            <a:r>
-              <a:t>Deterministic + LLM Hybrid</a:t>
+              <a:defRPr sz="1400" b="1">
+                <a:solidFill>
+                  <a:srgbClr val="1E3A8A"/>
+                </a:solidFill>
+              </a:defRPr>
+            </a:pPr>
+            <a:r>
+              <a:t>Conversational Discovery</a:t>
             </a:r>
           </a:p>
           <a:p>
             <a:pPr>
               <a:spcBef>
-                <a:spcPts val="600"/>
+                <a:spcPts val="400"/>
               </a:spcBef>
-              <a:defRPr sz="1200">
+              <a:defRPr sz="1100">
                 <a:solidFill>
                   <a:srgbClr val="64748B"/>
                 </a:solidFill>
               </a:defRPr>
             </a:pPr>
             <a:r>
-              <a:t>NOT a ChatGPT wrapper. Deterministic rule-scoring handles schemes, criteria, and fees with mathematical certainty; LLM handles natural language translation and explanation only.</a:t>
+              <a:t>Extracts structured profile chips from plain human sentences. Progressive micro-questioning asks 1-2 missing parameters rather than long 15-question forms.</a:t>
             </a:r>
           </a:p>
         </p:txBody>
@@ -6604,14 +7928,14 @@
         </p:nvSpPr>
         <p:spPr>
           <a:xfrm>
-            <a:off x="6126480" y="1920240"/>
-            <a:ext cx="5120640" cy="1828800"/>
+            <a:off x="4343400" y="1737360"/>
+            <a:ext cx="3429000" cy="1920240"/>
           </a:xfrm>
           <a:prstGeom prst="roundRect">
             <a:avLst/>
           </a:prstGeom>
           <a:solidFill>
-            <a:srgbClr val="F8FAFC"/>
+            <a:srgbClr val="FFFFFF"/>
           </a:solidFill>
           <a:ln>
             <a:solidFill>
@@ -6649,8 +7973,8 @@
         </p:nvSpPr>
         <p:spPr>
           <a:xfrm>
-            <a:off x="6400800" y="2103120"/>
-            <a:ext cx="4572000" cy="1463040"/>
+            <a:off x="4526280" y="1874520"/>
+            <a:ext cx="3063240" cy="1645920"/>
           </a:xfrm>
           <a:prstGeom prst="rect">
             <a:avLst/>
@@ -6664,29 +7988,29 @@
           <a:lstStyle/>
           <a:p>
             <a:pPr>
-              <a:defRPr sz="1600" b="1">
-                <a:solidFill>
-                  <a:srgbClr val="D97706"/>
-                </a:solidFill>
-              </a:defRPr>
-            </a:pPr>
-            <a:r>
-              <a:t>Evidence-First Provenance</a:t>
+              <a:defRPr sz="1400" b="1">
+                <a:solidFill>
+                  <a:srgbClr val="1E3A8A"/>
+                </a:solidFill>
+              </a:defRPr>
+            </a:pPr>
+            <a:r>
+              <a:t>“What Am I Missing?” Feature</a:t>
             </a:r>
           </a:p>
           <a:p>
             <a:pPr>
               <a:spcBef>
-                <a:spcPts val="600"/>
+                <a:spcPts val="400"/>
               </a:spcBef>
-              <a:defRPr sz="1200">
+              <a:defRPr sz="1100">
                 <a:solidFill>
                   <a:srgbClr val="64748B"/>
                 </a:solidFill>
               </a:defRPr>
             </a:pPr>
             <a:r>
-              <a:t>Every procedural assertion is anchored to an official department, gazette notification number, and verified audit date with a “Why is JanMitra saying this?” inspection drawer.</a:t>
+              <a:t>One of JanMitra's most important capabilities: quantifies progress (e.g. 4/6 criteria met) and creates a 1-click bridge to obtain missing certificates.</a:t>
             </a:r>
           </a:p>
         </p:txBody>
@@ -6699,14 +8023,14 @@
         </p:nvSpPr>
         <p:spPr>
           <a:xfrm>
-            <a:off x="731520" y="4023360"/>
-            <a:ext cx="5120640" cy="1828800"/>
+            <a:off x="7955280" y="1737360"/>
+            <a:ext cx="3429000" cy="1920240"/>
           </a:xfrm>
           <a:prstGeom prst="roundRect">
             <a:avLst/>
           </a:prstGeom>
           <a:solidFill>
-            <a:srgbClr val="F8FAFC"/>
+            <a:srgbClr val="FFFFFF"/>
           </a:solidFill>
           <a:ln>
             <a:solidFill>
@@ -6744,8 +8068,8 @@
         </p:nvSpPr>
         <p:spPr>
           <a:xfrm>
-            <a:off x="1005840" y="4206240"/>
-            <a:ext cx="4572000" cy="1463040"/>
+            <a:off x="8138160" y="1874520"/>
+            <a:ext cx="3063240" cy="1645920"/>
           </a:xfrm>
           <a:prstGeom prst="rect">
             <a:avLst/>
@@ -6759,29 +8083,29 @@
           <a:lstStyle/>
           <a:p>
             <a:pPr>
-              <a:defRPr sz="1600" b="1">
-                <a:solidFill>
-                  <a:srgbClr val="D97706"/>
-                </a:solidFill>
-              </a:defRPr>
-            </a:pPr>
-            <a:r>
-              <a:t>Service Dependency Graph</a:t>
+              <a:defRPr sz="1400" b="1">
+                <a:solidFill>
+                  <a:srgbClr val="1E3A8A"/>
+                </a:solidFill>
+              </a:defRPr>
+            </a:pPr>
+            <a:r>
+              <a:t>Government Service Navigator</a:t>
             </a:r>
           </a:p>
           <a:p>
             <a:pPr>
               <a:spcBef>
-                <a:spcPts val="600"/>
+                <a:spcPts val="400"/>
               </a:spcBef>
-              <a:defRPr sz="1200">
+              <a:defRPr sz="1100">
                 <a:solidFill>
                   <a:srgbClr val="64748B"/>
                 </a:solidFill>
               </a:defRPr>
             </a:pPr>
             <a:r>
-              <a:t>Visual hierarchy mapping prerequisite chains (e.g., Scholarship -&gt; Income Certificate -&gt; Lekhpal Inquiry -&gt; Salary Slips) so citizens resolve roadblocks before applying.</a:t>
+              <a:t>Deep-dive procedural timelines for public services (Aay Praman Patra, Niwas, Ration Card), covering exact fees (₹15), SLAs, and Lekhpal field checks.</a:t>
             </a:r>
           </a:p>
         </p:txBody>
@@ -6794,14 +8118,14 @@
         </p:nvSpPr>
         <p:spPr>
           <a:xfrm>
-            <a:off x="6126480" y="4023360"/>
-            <a:ext cx="5120640" cy="1828800"/>
+            <a:off x="731520" y="3840479"/>
+            <a:ext cx="3429000" cy="1920240"/>
           </a:xfrm>
           <a:prstGeom prst="roundRect">
             <a:avLst/>
           </a:prstGeom>
           <a:solidFill>
-            <a:srgbClr val="F8FAFC"/>
+            <a:srgbClr val="FFFFFF"/>
           </a:solidFill>
           <a:ln>
             <a:solidFill>
@@ -6839,8 +8163,8 @@
         </p:nvSpPr>
         <p:spPr>
           <a:xfrm>
-            <a:off x="6400800" y="4206240"/>
-            <a:ext cx="4572000" cy="1463040"/>
+            <a:off x="914400" y="3977639"/>
+            <a:ext cx="3063240" cy="1645920"/>
           </a:xfrm>
           <a:prstGeom prst="rect">
             <a:avLst/>
@@ -6854,29 +8178,219 @@
           <a:lstStyle/>
           <a:p>
             <a:pPr>
-              <a:defRPr sz="1600" b="1">
-                <a:solidFill>
-                  <a:srgbClr val="D97706"/>
-                </a:solidFill>
-              </a:defRPr>
-            </a:pPr>
-            <a:r>
-              <a:t>Cautious Trust &amp; Safety UX</a:t>
+              <a:defRPr sz="1400" b="1">
+                <a:solidFill>
+                  <a:srgbClr val="1E3A8A"/>
+                </a:solidFill>
+              </a:defRPr>
+            </a:pPr>
+            <a:r>
+              <a:t>Document Intelligence Locker</a:t>
             </a:r>
           </a:p>
           <a:p>
             <a:pPr>
               <a:spcBef>
-                <a:spcPts val="600"/>
+                <a:spcPts val="400"/>
               </a:spcBef>
-              <a:defRPr sz="1200">
+              <a:defRPr sz="1100">
                 <a:solidFill>
                   <a:srgbClr val="64748B"/>
                 </a:solidFill>
               </a:defRPr>
             </a:pPr>
             <a:r>
-              <a:t>Never claims 'JanMitra approved you' or guarantees legal status. Uses transparent phrasing: 'Potentially eligible based on provided info. Authorities make final decisions.'</a:t>
+              <a:t>Digital vault storing credentials with status indicators (Available, Expired, Missing). Simulated OCR scan evaluates readiness without making false legal claims.</a:t>
+            </a:r>
+          </a:p>
+        </p:txBody>
+      </p:sp>
+      <p:sp>
+        <p:nvSpPr>
+          <p:cNvPr id="14" name="Rounded Rectangle 13"/>
+          <p:cNvSpPr/>
+          <p:nvPr/>
+        </p:nvSpPr>
+        <p:spPr>
+          <a:xfrm>
+            <a:off x="4343400" y="3840479"/>
+            <a:ext cx="3429000" cy="1920240"/>
+          </a:xfrm>
+          <a:prstGeom prst="roundRect">
+            <a:avLst/>
+          </a:prstGeom>
+          <a:solidFill>
+            <a:srgbClr val="FFFFFF"/>
+          </a:solidFill>
+          <a:ln>
+            <a:solidFill>
+              <a:srgbClr val="E2E8F0"/>
+            </a:solidFill>
+          </a:ln>
+        </p:spPr>
+        <p:style>
+          <a:lnRef idx="1">
+            <a:schemeClr val="accent1"/>
+          </a:lnRef>
+          <a:fillRef idx="3">
+            <a:schemeClr val="accent1"/>
+          </a:fillRef>
+          <a:effectRef idx="2">
+            <a:schemeClr val="accent1"/>
+          </a:effectRef>
+          <a:fontRef idx="minor">
+            <a:schemeClr val="lt1"/>
+          </a:fontRef>
+        </p:style>
+        <p:txBody>
+          <a:bodyPr rtlCol="0" anchor="ctr"/>
+          <a:lstStyle/>
+          <a:p>
+            <a:pPr algn="ctr"/>
+          </a:p>
+        </p:txBody>
+      </p:sp>
+      <p:sp>
+        <p:nvSpPr>
+          <p:cNvPr id="15" name="TextBox 14"/>
+          <p:cNvSpPr txBox="1"/>
+          <p:nvPr/>
+        </p:nvSpPr>
+        <p:spPr>
+          <a:xfrm>
+            <a:off x="4526280" y="3977639"/>
+            <a:ext cx="3063240" cy="1645920"/>
+          </a:xfrm>
+          <a:prstGeom prst="rect">
+            <a:avLst/>
+          </a:prstGeom>
+          <a:noFill/>
+        </p:spPr>
+        <p:txBody>
+          <a:bodyPr wrap="square">
+            <a:spAutoFit/>
+          </a:bodyPr>
+          <a:lstStyle/>
+          <a:p>
+            <a:pPr>
+              <a:defRPr sz="1400" b="1">
+                <a:solidFill>
+                  <a:srgbClr val="1E3A8A"/>
+                </a:solidFill>
+              </a:defRPr>
+            </a:pPr>
+            <a:r>
+              <a:t>“Explain This” AI Simplifier</a:t>
+            </a:r>
+          </a:p>
+          <a:p>
+            <a:pPr>
+              <a:spcBef>
+                <a:spcPts val="400"/>
+              </a:spcBef>
+              <a:defRPr sz="1100">
+                <a:solidFill>
+                  <a:srgbClr val="64748B"/>
+                </a:solidFill>
+              </a:defRPr>
+            </a:pPr>
+            <a:r>
+              <a:t>Converts dense gazette orders and circular clauses into: (1) Simple language, (2) Action checklist, (3) Common rejection traps, (4) Official source citation.</a:t>
+            </a:r>
+          </a:p>
+        </p:txBody>
+      </p:sp>
+      <p:sp>
+        <p:nvSpPr>
+          <p:cNvPr id="16" name="Rounded Rectangle 15"/>
+          <p:cNvSpPr/>
+          <p:nvPr/>
+        </p:nvSpPr>
+        <p:spPr>
+          <a:xfrm>
+            <a:off x="7955280" y="3840479"/>
+            <a:ext cx="3429000" cy="1920240"/>
+          </a:xfrm>
+          <a:prstGeom prst="roundRect">
+            <a:avLst/>
+          </a:prstGeom>
+          <a:solidFill>
+            <a:srgbClr val="FFFFFF"/>
+          </a:solidFill>
+          <a:ln>
+            <a:solidFill>
+              <a:srgbClr val="E2E8F0"/>
+            </a:solidFill>
+          </a:ln>
+        </p:spPr>
+        <p:style>
+          <a:lnRef idx="1">
+            <a:schemeClr val="accent1"/>
+          </a:lnRef>
+          <a:fillRef idx="3">
+            <a:schemeClr val="accent1"/>
+          </a:fillRef>
+          <a:effectRef idx="2">
+            <a:schemeClr val="accent1"/>
+          </a:effectRef>
+          <a:fontRef idx="minor">
+            <a:schemeClr val="lt1"/>
+          </a:fontRef>
+        </p:style>
+        <p:txBody>
+          <a:bodyPr rtlCol="0" anchor="ctr"/>
+          <a:lstStyle/>
+          <a:p>
+            <a:pPr algn="ctr"/>
+          </a:p>
+        </p:txBody>
+      </p:sp>
+      <p:sp>
+        <p:nvSpPr>
+          <p:cNvPr id="17" name="TextBox 16"/>
+          <p:cNvSpPr txBox="1"/>
+          <p:nvPr/>
+        </p:nvSpPr>
+        <p:spPr>
+          <a:xfrm>
+            <a:off x="8138160" y="3977639"/>
+            <a:ext cx="3063240" cy="1645920"/>
+          </a:xfrm>
+          <a:prstGeom prst="rect">
+            <a:avLst/>
+          </a:prstGeom>
+          <a:noFill/>
+        </p:spPr>
+        <p:txBody>
+          <a:bodyPr wrap="square">
+            <a:spAutoFit/>
+          </a:bodyPr>
+          <a:lstStyle/>
+          <a:p>
+            <a:pPr>
+              <a:defRPr sz="1400" b="1">
+                <a:solidFill>
+                  <a:srgbClr val="1E3A8A"/>
+                </a:solidFill>
+              </a:defRPr>
+            </a:pPr>
+            <a:r>
+              <a:t>Multilingual &amp; Accessible UX</a:t>
+            </a:r>
+          </a:p>
+          <a:p>
+            <a:pPr>
+              <a:spcBef>
+                <a:spcPts val="400"/>
+              </a:spcBef>
+              <a:defRPr sz="1100">
+                <a:solidFill>
+                  <a:srgbClr val="64748B"/>
+                </a:solidFill>
+              </a:defRPr>
+            </a:pPr>
+            <a:r>
+              <a:t>Seamless switching between English &amp; Hindi, voice input simulation, high-contrast readable cards, and mobile-first responsive architecture.</a:t>
             </a:r>
           </a:p>
         </p:txBody>
@@ -6907,7 +8421,7 @@
         </p:nvSpPr>
         <p:spPr>
           <a:xfrm>
-            <a:off x="731520" y="411480"/>
+            <a:off x="731520" y="365760"/>
             <a:ext cx="10698480" cy="320040"/>
           </a:xfrm>
           <a:prstGeom prst="rect">
@@ -6942,8 +8456,8 @@
         </p:nvSpPr>
         <p:spPr>
           <a:xfrm>
-            <a:off x="731520" y="731520"/>
-            <a:ext cx="10698480" cy="548640"/>
+            <a:off x="731520" y="685800"/>
+            <a:ext cx="10698480" cy="502920"/>
           </a:xfrm>
           <a:prstGeom prst="rect">
             <a:avLst/>
@@ -6957,7 +8471,7 @@
           <a:lstStyle/>
           <a:p>
             <a:pPr>
-              <a:defRPr sz="2400" b="1">
+              <a:defRPr sz="2200" b="1">
                 <a:solidFill>
                   <a:srgbClr val="0F172A"/>
                 </a:solidFill>
@@ -6977,8 +8491,8 @@
         </p:nvSpPr>
         <p:spPr>
           <a:xfrm>
-            <a:off x="731520" y="1280160"/>
-            <a:ext cx="10698480" cy="411480"/>
+            <a:off x="731520" y="1188720"/>
+            <a:ext cx="10698480" cy="365760"/>
           </a:xfrm>
           <a:prstGeom prst="rect">
             <a:avLst/>
@@ -6992,14 +8506,14 @@
           <a:lstStyle/>
           <a:p>
             <a:pPr>
-              <a:defRPr sz="1300">
+              <a:defRPr sz="1200">
                 <a:solidFill>
                   <a:srgbClr val="64748B"/>
                 </a:solidFill>
               </a:defRPr>
             </a:pPr>
             <a:r>
-              <a:t>Designed for extreme performance, zero server bottlenecks, and data sovereignty</a:t>
+              <a:t>Engineered for speed, mathematical correctness, and complete citizen data sovereignty</a:t>
             </a:r>
           </a:p>
         </p:txBody>
@@ -7012,8 +8526,8 @@
         </p:nvSpPr>
         <p:spPr>
           <a:xfrm>
-            <a:off x="731520" y="6400800"/>
-            <a:ext cx="10698480" cy="320040"/>
+            <a:off x="731520" y="6446520"/>
+            <a:ext cx="10698480" cy="274320"/>
           </a:xfrm>
           <a:prstGeom prst="rect">
             <a:avLst/>
@@ -7027,7 +8541,7 @@
           <a:lstStyle/>
           <a:p>
             <a:pPr>
-              <a:defRPr sz="1000">
+              <a:defRPr sz="950">
                 <a:solidFill>
                   <a:srgbClr val="94A3B8"/>
                 </a:solidFill>
@@ -7047,8 +8561,8 @@
         </p:nvSpPr>
         <p:spPr>
           <a:xfrm>
-            <a:off x="731520" y="1920240"/>
-            <a:ext cx="10698480" cy="914400"/>
+            <a:off x="731520" y="1737360"/>
+            <a:ext cx="10698480" cy="960120"/>
           </a:xfrm>
           <a:prstGeom prst="roundRect">
             <a:avLst/>
@@ -7092,7 +8606,7 @@
         </p:nvSpPr>
         <p:spPr>
           <a:xfrm>
-            <a:off x="914400" y="2029968"/>
+            <a:off x="914400" y="1847088"/>
             <a:ext cx="10332720" cy="731520"/>
           </a:xfrm>
           <a:prstGeom prst="rect">
@@ -7107,7 +8621,7 @@
           <a:lstStyle/>
           <a:p>
             <a:pPr>
-              <a:defRPr sz="1400" b="1">
+              <a:defRPr sz="1300" b="1">
                 <a:solidFill>
                   <a:srgbClr val="1E3A8A"/>
                 </a:solidFill>
@@ -7147,8 +8661,8 @@
         </p:nvSpPr>
         <p:spPr>
           <a:xfrm>
-            <a:off x="731520" y="2971800"/>
-            <a:ext cx="10698480" cy="914400"/>
+            <a:off x="731520" y="2834639"/>
+            <a:ext cx="10698480" cy="960120"/>
           </a:xfrm>
           <a:prstGeom prst="roundRect">
             <a:avLst/>
@@ -7192,7 +8706,7 @@
         </p:nvSpPr>
         <p:spPr>
           <a:xfrm>
-            <a:off x="914400" y="3081528"/>
+            <a:off x="914400" y="2944367"/>
             <a:ext cx="10332720" cy="731520"/>
           </a:xfrm>
           <a:prstGeom prst="rect">
@@ -7207,7 +8721,7 @@
           <a:lstStyle/>
           <a:p>
             <a:pPr>
-              <a:defRPr sz="1400" b="1">
+              <a:defRPr sz="1300" b="1">
                 <a:solidFill>
                   <a:srgbClr val="1E3A8A"/>
                 </a:solidFill>
@@ -7234,7 +8748,7 @@
               </a:defRPr>
             </a:pPr>
             <a:r>
-              <a:t>Evaluates multi-variable eligibility rules (Age, Domicile, Income caps, Social Category, Land records) in real time.</a:t>
+              <a:t>Evaluates multi-variable eligibility rules (Age, Domicile, Income caps, Social Category, Land records) in real time with zero hallucination.</a:t>
             </a:r>
           </a:p>
         </p:txBody>
@@ -7247,8 +8761,8 @@
         </p:nvSpPr>
         <p:spPr>
           <a:xfrm>
-            <a:off x="731520" y="4023360"/>
-            <a:ext cx="10698480" cy="914400"/>
+            <a:off x="731520" y="3931920"/>
+            <a:ext cx="10698480" cy="960120"/>
           </a:xfrm>
           <a:prstGeom prst="roundRect">
             <a:avLst/>
@@ -7292,7 +8806,7 @@
         </p:nvSpPr>
         <p:spPr>
           <a:xfrm>
-            <a:off x="914400" y="4133088"/>
+            <a:off x="914400" y="4041648"/>
             <a:ext cx="10332720" cy="731520"/>
           </a:xfrm>
           <a:prstGeom prst="rect">
@@ -7307,7 +8821,7 @@
           <a:lstStyle/>
           <a:p>
             <a:pPr>
-              <a:defRPr sz="1400" b="1">
+              <a:defRPr sz="1300" b="1">
                 <a:solidFill>
                   <a:srgbClr val="1E3A8A"/>
                 </a:solidFill>
@@ -7334,7 +8848,7 @@
               </a:defRPr>
             </a:pPr>
             <a:r>
-              <a:t>Translates dense circular excerpts into 4-step human checklists with zero hallucination guardrails.</a:t>
+              <a:t>Translates dense circular excerpts into 4-step human checklists with strict anti-hallucination guardrails.</a:t>
             </a:r>
           </a:p>
         </p:txBody>
@@ -7347,8 +8861,8 @@
         </p:nvSpPr>
         <p:spPr>
           <a:xfrm>
-            <a:off x="731520" y="5074920"/>
-            <a:ext cx="10698480" cy="914400"/>
+            <a:off x="731520" y="5029200"/>
+            <a:ext cx="10698480" cy="960120"/>
           </a:xfrm>
           <a:prstGeom prst="roundRect">
             <a:avLst/>
@@ -7392,7 +8906,7 @@
         </p:nvSpPr>
         <p:spPr>
           <a:xfrm>
-            <a:off x="914400" y="5184648"/>
+            <a:off x="914400" y="5138928"/>
             <a:ext cx="10332720" cy="731520"/>
           </a:xfrm>
           <a:prstGeom prst="rect">
@@ -7407,7 +8921,7 @@
           <a:lstStyle/>
           <a:p>
             <a:pPr>
-              <a:defRPr sz="1400" b="1">
+              <a:defRPr sz="1300" b="1">
                 <a:solidFill>
                   <a:srgbClr val="1E3A8A"/>
                 </a:solidFill>
@@ -7465,7 +8979,7 @@
         </p:nvSpPr>
         <p:spPr>
           <a:xfrm>
-            <a:off x="731520" y="411480"/>
+            <a:off x="731520" y="365760"/>
             <a:ext cx="10698480" cy="320040"/>
           </a:xfrm>
           <a:prstGeom prst="rect">
@@ -7487,7 +9001,7 @@
               </a:defRPr>
             </a:pPr>
             <a:r>
-              <a:t>IMPLEMENTATION ROADMAP</a:t>
+              <a:t>TRUST &amp; VERIFICATION ENGINE</a:t>
             </a:r>
           </a:p>
         </p:txBody>
@@ -7500,8 +9014,8 @@
         </p:nvSpPr>
         <p:spPr>
           <a:xfrm>
-            <a:off x="731520" y="731520"/>
-            <a:ext cx="10698480" cy="548640"/>
+            <a:off x="731520" y="685800"/>
+            <a:ext cx="10698480" cy="502920"/>
           </a:xfrm>
           <a:prstGeom prst="rect">
             <a:avLst/>
@@ -7515,14 +9029,14 @@
           <a:lstStyle/>
           <a:p>
             <a:pPr>
-              <a:defRPr sz="2400" b="1">
+              <a:defRPr sz="2200" b="1">
                 <a:solidFill>
                   <a:srgbClr val="0F172A"/>
                 </a:solidFill>
               </a:defRPr>
             </a:pPr>
             <a:r>
-              <a:t>Feasibility, Integration &amp; Scalability</a:t>
+              <a:t>Evidence-First Provenance &amp; Dependency Graphs</a:t>
             </a:r>
           </a:p>
         </p:txBody>
@@ -7535,8 +9049,8 @@
         </p:nvSpPr>
         <p:spPr>
           <a:xfrm>
-            <a:off x="731520" y="1280160"/>
-            <a:ext cx="10698480" cy="411480"/>
+            <a:off x="731520" y="1188720"/>
+            <a:ext cx="10698480" cy="365760"/>
           </a:xfrm>
           <a:prstGeom prst="rect">
             <a:avLst/>
@@ -7550,14 +9064,14 @@
           <a:lstStyle/>
           <a:p>
             <a:pPr>
-              <a:defRPr sz="1300">
+              <a:defRPr sz="1200">
                 <a:solidFill>
                   <a:srgbClr val="64748B"/>
                 </a:solidFill>
               </a:defRPr>
             </a:pPr>
             <a:r>
-              <a:t>Phased deployment strategy from state pilot to nationwide citizen platform</a:t>
+              <a:t>How JanMitra guarantees absolute accuracy without misleading citizens</a:t>
             </a:r>
           </a:p>
         </p:txBody>
@@ -7570,8 +9084,8 @@
         </p:nvSpPr>
         <p:spPr>
           <a:xfrm>
-            <a:off x="731520" y="6400800"/>
-            <a:ext cx="10698480" cy="320040"/>
+            <a:off x="731520" y="6446520"/>
+            <a:ext cx="10698480" cy="274320"/>
           </a:xfrm>
           <a:prstGeom prst="rect">
             <a:avLst/>
@@ -7585,7 +9099,7 @@
           <a:lstStyle/>
           <a:p>
             <a:pPr>
-              <a:defRPr sz="1000">
+              <a:defRPr sz="950">
                 <a:solidFill>
                   <a:srgbClr val="94A3B8"/>
                 </a:solidFill>
@@ -7605,8 +9119,8 @@
         </p:nvSpPr>
         <p:spPr>
           <a:xfrm>
-            <a:off x="731520" y="1920240"/>
-            <a:ext cx="5120640" cy="1828800"/>
+            <a:off x="731520" y="1737360"/>
+            <a:ext cx="5120640" cy="1920240"/>
           </a:xfrm>
           <a:prstGeom prst="roundRect">
             <a:avLst/>
@@ -7650,8 +9164,8 @@
         </p:nvSpPr>
         <p:spPr>
           <a:xfrm>
-            <a:off x="1005840" y="2103120"/>
-            <a:ext cx="4572000" cy="1463040"/>
+            <a:off x="1005840" y="1920240"/>
+            <a:ext cx="4572000" cy="1554480"/>
           </a:xfrm>
           <a:prstGeom prst="rect">
             <a:avLst/>
@@ -7667,12 +9181,12 @@
             <a:pPr>
               <a:defRPr sz="1500" b="1">
                 <a:solidFill>
-                  <a:srgbClr val="059669"/>
-                </a:solidFill>
-              </a:defRPr>
-            </a:pPr>
-            <a:r>
-              <a:t>Phase 1: Working Prototype (Current)</a:t>
+                  <a:srgbClr val="D97706"/>
+                </a:solidFill>
+              </a:defRPr>
+            </a:pPr>
+            <a:r>
+              <a:t>“Why is JanMitra saying this?” Provenance</a:t>
             </a:r>
           </a:p>
           <a:p>
@@ -7680,14 +9194,14 @@
               <a:spcBef>
                 <a:spcPts val="600"/>
               </a:spcBef>
-              <a:defRPr sz="1200">
+              <a:defRPr sz="1150">
                 <a:solidFill>
                   <a:srgbClr val="64748B"/>
                 </a:solidFill>
               </a:defRPr>
             </a:pPr>
             <a:r>
-              <a:t>Completed high-fidelity system covering 12+ UP/Central schemes, 8+ public services, 16+ documents, and 4 test drive scenarios with zero build errors.</a:t>
+              <a:t>Every procedural statement and eligibility rule contains an expandable audit drawer citing: (1) Issuing Government Department, (2) Gazette Notification Number, (3) Date Published, and (4) Last Verified Audit Date.</a:t>
             </a:r>
           </a:p>
         </p:txBody>
@@ -7700,8 +9214,8 @@
         </p:nvSpPr>
         <p:spPr>
           <a:xfrm>
-            <a:off x="6126480" y="1920240"/>
-            <a:ext cx="5120640" cy="1828800"/>
+            <a:off x="6126480" y="1737360"/>
+            <a:ext cx="5120640" cy="1920240"/>
           </a:xfrm>
           <a:prstGeom prst="roundRect">
             <a:avLst/>
@@ -7745,8 +9259,8 @@
         </p:nvSpPr>
         <p:spPr>
           <a:xfrm>
-            <a:off x="6400800" y="2103120"/>
-            <a:ext cx="4572000" cy="1463040"/>
+            <a:off x="6400800" y="1920240"/>
+            <a:ext cx="4572000" cy="1554480"/>
           </a:xfrm>
           <a:prstGeom prst="rect">
             <a:avLst/>
@@ -7762,12 +9276,12 @@
             <a:pPr>
               <a:defRPr sz="1500" b="1">
                 <a:solidFill>
-                  <a:srgbClr val="059669"/>
-                </a:solidFill>
-              </a:defRPr>
-            </a:pPr>
-            <a:r>
-              <a:t>Phase 2: Digital Public Infrastructure (DPI)</a:t>
+                  <a:srgbClr val="D97706"/>
+                </a:solidFill>
+              </a:defRPr>
+            </a:pPr>
+            <a:r>
+              <a:t>Government Service Dependency Graph</a:t>
             </a:r>
           </a:p>
           <a:p>
@@ -7775,14 +9289,14 @@
               <a:spcBef>
                 <a:spcPts val="600"/>
               </a:spcBef>
-              <a:defRPr sz="1200">
+              <a:defRPr sz="1150">
                 <a:solidFill>
                   <a:srgbClr val="64748B"/>
                 </a:solidFill>
               </a:defRPr>
             </a:pPr>
             <a:r>
-              <a:t>Integrate with India Stack APIs: DigiLocker document fetch, UMANG public service registry, MeriPehchaan (National SSO), and UP eDistrict webhooks.</a:t>
+              <a:t>Visual interactive hierarchy mapping hidden prerequisite chains (e.g. UP Scholarship requires Income Certificate which requires Lekhpal field check). Citizens clear roadblocks before submitting.</a:t>
             </a:r>
           </a:p>
         </p:txBody>
@@ -7795,8 +9309,8 @@
         </p:nvSpPr>
         <p:spPr>
           <a:xfrm>
-            <a:off x="731520" y="4023360"/>
-            <a:ext cx="5120640" cy="1828800"/>
+            <a:off x="731520" y="3931920"/>
+            <a:ext cx="5120640" cy="1920240"/>
           </a:xfrm>
           <a:prstGeom prst="roundRect">
             <a:avLst/>
@@ -7840,8 +9354,8 @@
         </p:nvSpPr>
         <p:spPr>
           <a:xfrm>
-            <a:off x="1005840" y="4206240"/>
-            <a:ext cx="4572000" cy="1463040"/>
+            <a:off x="1005840" y="4114800"/>
+            <a:ext cx="4572000" cy="1554480"/>
           </a:xfrm>
           <a:prstGeom prst="rect">
             <a:avLst/>
@@ -7857,12 +9371,12 @@
             <a:pPr>
               <a:defRPr sz="1500" b="1">
                 <a:solidFill>
-                  <a:srgbClr val="059669"/>
-                </a:solidFill>
-              </a:defRPr>
-            </a:pPr>
-            <a:r>
-              <a:t>Phase 3: Assisted Physical Access</a:t>
+                  <a:srgbClr val="D97706"/>
+                </a:solidFill>
+              </a:defRPr>
+            </a:pPr>
+            <a:r>
+              <a:t>Responsible Legal Guardrails</a:t>
             </a:r>
           </a:p>
           <a:p>
@@ -7870,14 +9384,14 @@
               <a:spcBef>
                 <a:spcPts val="600"/>
               </a:spcBef>
-              <a:defRPr sz="1200">
+              <a:defRPr sz="1150">
                 <a:solidFill>
                   <a:srgbClr val="64748B"/>
                 </a:solidFill>
               </a:defRPr>
             </a:pPr>
             <a:r>
-              <a:t>Operator-assisted mode for Common Service Center (CSC) / Jan Seva Kendra operators and Village Development Officers (VDOs) at the Gram Panchayat level.</a:t>
+              <a:t>Strict ethical UX: Never displays 'JanMitra approved you'. Uses transparent statutory phrasing: 'Your information appears consistent with published criteria. Authorities make final decisions.'</a:t>
             </a:r>
           </a:p>
         </p:txBody>
@@ -7890,8 +9404,8 @@
         </p:nvSpPr>
         <p:spPr>
           <a:xfrm>
-            <a:off x="6126480" y="4023360"/>
-            <a:ext cx="5120640" cy="1828800"/>
+            <a:off x="6126480" y="3931920"/>
+            <a:ext cx="5120640" cy="1920240"/>
           </a:xfrm>
           <a:prstGeom prst="roundRect">
             <a:avLst/>
@@ -7935,8 +9449,8 @@
         </p:nvSpPr>
         <p:spPr>
           <a:xfrm>
-            <a:off x="6400800" y="4206240"/>
-            <a:ext cx="4572000" cy="1463040"/>
+            <a:off x="6400800" y="4114800"/>
+            <a:ext cx="4572000" cy="1554480"/>
           </a:xfrm>
           <a:prstGeom prst="rect">
             <a:avLst/>
@@ -7952,12 +9466,12 @@
             <a:pPr>
               <a:defRPr sz="1500" b="1">
                 <a:solidFill>
-                  <a:srgbClr val="059669"/>
-                </a:solidFill>
-              </a:defRPr>
-            </a:pPr>
-            <a:r>
-              <a:t>Cost &amp; Infrastructure Scalability</a:t>
+                  <a:srgbClr val="D97706"/>
+                </a:solidFill>
+              </a:defRPr>
+            </a:pPr>
+            <a:r>
+              <a:t>Zero Document Fabrication</a:t>
             </a:r>
           </a:p>
           <a:p>
@@ -7965,14 +9479,14 @@
               <a:spcBef>
                 <a:spcPts val="600"/>
               </a:spcBef>
-              <a:defRPr sz="1200">
+              <a:defRPr sz="1150">
                 <a:solidFill>
                   <a:srgbClr val="64748B"/>
                 </a:solidFill>
               </a:defRPr>
             </a:pPr>
             <a:r>
-              <a:t>Static edge-hosted architecture delivers near-zero server maintenance costs. Scalable to millions of concurrent citizens with sub-50ms latency.</a:t>
+              <a:t>Locker conducts preliminary formatting checks only. Never claims to legally certify documents, preserving state sovereignty and citizen trust.</a:t>
             </a:r>
           </a:p>
         </p:txBody>
@@ -8003,7 +9517,7 @@
         </p:nvSpPr>
         <p:spPr>
           <a:xfrm>
-            <a:off x="731520" y="411480"/>
+            <a:off x="731520" y="365760"/>
             <a:ext cx="10698480" cy="320040"/>
           </a:xfrm>
           <a:prstGeom prst="rect">
@@ -8025,7 +9539,7 @@
               </a:defRPr>
             </a:pPr>
             <a:r>
-              <a:t>TRANSFORMATIVE IMPACT</a:t>
+              <a:t>IMPLEMENTATION ROADMAP</a:t>
             </a:r>
           </a:p>
         </p:txBody>
@@ -8038,8 +9552,8 @@
         </p:nvSpPr>
         <p:spPr>
           <a:xfrm>
-            <a:off x="731520" y="731520"/>
-            <a:ext cx="10698480" cy="548640"/>
+            <a:off x="731520" y="685800"/>
+            <a:ext cx="10698480" cy="502920"/>
           </a:xfrm>
           <a:prstGeom prst="rect">
             <a:avLst/>
@@ -8053,14 +9567,14 @@
           <a:lstStyle/>
           <a:p>
             <a:pPr>
-              <a:defRPr sz="2400" b="1">
+              <a:defRPr sz="2200" b="1">
                 <a:solidFill>
                   <a:srgbClr val="0F172A"/>
                 </a:solidFill>
               </a:defRPr>
             </a:pPr>
             <a:r>
-              <a:t>Measurable Benefits for Citizens &amp; Administration</a:t>
+              <a:t>Feasibility, India Stack Integration &amp; National Scale</a:t>
             </a:r>
           </a:p>
         </p:txBody>
@@ -8073,8 +9587,8 @@
         </p:nvSpPr>
         <p:spPr>
           <a:xfrm>
-            <a:off x="731520" y="1280160"/>
-            <a:ext cx="10698480" cy="411480"/>
+            <a:off x="731520" y="1188720"/>
+            <a:ext cx="10698480" cy="365760"/>
           </a:xfrm>
           <a:prstGeom prst="rect">
             <a:avLst/>
@@ -8088,14 +9602,14 @@
           <a:lstStyle/>
           <a:p>
             <a:pPr>
-              <a:defRPr sz="1300">
+              <a:defRPr sz="1200">
                 <a:solidFill>
                   <a:srgbClr val="64748B"/>
                 </a:solidFill>
               </a:defRPr>
             </a:pPr>
             <a:r>
-              <a:t>Bridging the last-mile delivery gap between public intent and real-world benefit</a:t>
+              <a:t>Phased deployment strategy from Uttar Pradesh pilot to national citizen infrastructure</a:t>
             </a:r>
           </a:p>
         </p:txBody>
@@ -8108,8 +9622,8 @@
         </p:nvSpPr>
         <p:spPr>
           <a:xfrm>
-            <a:off x="731520" y="6400800"/>
-            <a:ext cx="10698480" cy="320040"/>
+            <a:off x="731520" y="6446520"/>
+            <a:ext cx="10698480" cy="274320"/>
           </a:xfrm>
           <a:prstGeom prst="rect">
             <a:avLst/>
@@ -8123,7 +9637,7 @@
           <a:lstStyle/>
           <a:p>
             <a:pPr>
-              <a:defRPr sz="1000">
+              <a:defRPr sz="950">
                 <a:solidFill>
                   <a:srgbClr val="94A3B8"/>
                 </a:solidFill>
@@ -8143,8 +9657,8 @@
         </p:nvSpPr>
         <p:spPr>
           <a:xfrm>
-            <a:off x="731520" y="1920240"/>
-            <a:ext cx="5120640" cy="1828800"/>
+            <a:off x="731520" y="1737360"/>
+            <a:ext cx="5120640" cy="1920240"/>
           </a:xfrm>
           <a:prstGeom prst="roundRect">
             <a:avLst/>
@@ -8188,8 +9702,8 @@
         </p:nvSpPr>
         <p:spPr>
           <a:xfrm>
-            <a:off x="1005840" y="2103120"/>
-            <a:ext cx="4572000" cy="1463040"/>
+            <a:off x="1005840" y="1920240"/>
+            <a:ext cx="4572000" cy="1554480"/>
           </a:xfrm>
           <a:prstGeom prst="rect">
             <a:avLst/>
@@ -8205,12 +9719,12 @@
             <a:pPr>
               <a:defRPr sz="1500" b="1">
                 <a:solidFill>
-                  <a:srgbClr val="1E3A8A"/>
-                </a:solidFill>
-              </a:defRPr>
-            </a:pPr>
-            <a:r>
-              <a:t>70% Drop in Application Rejections</a:t>
+                  <a:srgbClr val="059669"/>
+                </a:solidFill>
+              </a:defRPr>
+            </a:pPr>
+            <a:r>
+              <a:t>Phase 1: Working Prototype (Current)</a:t>
             </a:r>
           </a:p>
           <a:p>
@@ -8218,14 +9732,14 @@
               <a:spcBef>
                 <a:spcPts val="600"/>
               </a:spcBef>
-              <a:defRPr sz="1200">
+              <a:defRPr sz="1150">
                 <a:solidFill>
                   <a:srgbClr val="64748B"/>
                 </a:solidFill>
               </a:defRPr>
             </a:pPr>
             <a:r>
-              <a:t>Pre-application checklist and prerequisite dependency checks ensure applications are filed with 100% compliant documents, eliminating Lekhpal query delays.</a:t>
+              <a:t>Completed high-fidelity system covering 12+ UP/Central schemes, 8+ public services, 16+ documents, and 4 test drive scenarios with zero build errors.</a:t>
             </a:r>
           </a:p>
         </p:txBody>
@@ -8238,8 +9752,8 @@
         </p:nvSpPr>
         <p:spPr>
           <a:xfrm>
-            <a:off x="6126480" y="1920240"/>
-            <a:ext cx="5120640" cy="1828800"/>
+            <a:off x="6126480" y="1737360"/>
+            <a:ext cx="5120640" cy="1920240"/>
           </a:xfrm>
           <a:prstGeom prst="roundRect">
             <a:avLst/>
@@ -8283,8 +9797,8 @@
         </p:nvSpPr>
         <p:spPr>
           <a:xfrm>
-            <a:off x="6400800" y="2103120"/>
-            <a:ext cx="4572000" cy="1463040"/>
+            <a:off x="6400800" y="1920240"/>
+            <a:ext cx="4572000" cy="1554480"/>
           </a:xfrm>
           <a:prstGeom prst="rect">
             <a:avLst/>
@@ -8300,12 +9814,12 @@
             <a:pPr>
               <a:defRPr sz="1500" b="1">
                 <a:solidFill>
-                  <a:srgbClr val="1E3A8A"/>
-                </a:solidFill>
-              </a:defRPr>
-            </a:pPr>
-            <a:r>
-              <a:t>Dismantling the Information Asymmetry</a:t>
+                  <a:srgbClr val="059669"/>
+                </a:solidFill>
+              </a:defRPr>
+            </a:pPr>
+            <a:r>
+              <a:t>Phase 2: Digital Public Infrastructure (DPI)</a:t>
             </a:r>
           </a:p>
           <a:p>
@@ -8313,14 +9827,14 @@
               <a:spcBef>
                 <a:spcPts val="600"/>
               </a:spcBef>
-              <a:defRPr sz="1200">
+              <a:defRPr sz="1150">
                 <a:solidFill>
                   <a:srgbClr val="64748B"/>
                 </a:solidFill>
               </a:defRPr>
             </a:pPr>
             <a:r>
-              <a:t>Uncovers life-changing benefits (e.g. ₹5L PM-JAY health cover, ₹85k scholarship fee reimbursement, ₹1,000/mo pensions) that citizens never knew they were entitled to.</a:t>
+              <a:t>Integrate with India Stack APIs: DigiLocker document fetch, UMANG public service registry, MeriPehchaan (National SSO), and UP eDistrict webhooks.</a:t>
             </a:r>
           </a:p>
         </p:txBody>
@@ -8333,8 +9847,8 @@
         </p:nvSpPr>
         <p:spPr>
           <a:xfrm>
-            <a:off x="731520" y="4023360"/>
-            <a:ext cx="5120640" cy="1828800"/>
+            <a:off x="731520" y="3931920"/>
+            <a:ext cx="5120640" cy="1920240"/>
           </a:xfrm>
           <a:prstGeom prst="roundRect">
             <a:avLst/>
@@ -8378,8 +9892,8 @@
         </p:nvSpPr>
         <p:spPr>
           <a:xfrm>
-            <a:off x="1005840" y="4206240"/>
-            <a:ext cx="4572000" cy="1463040"/>
+            <a:off x="1005840" y="4114800"/>
+            <a:ext cx="4572000" cy="1554480"/>
           </a:xfrm>
           <a:prstGeom prst="rect">
             <a:avLst/>
@@ -8395,12 +9909,12 @@
             <a:pPr>
               <a:defRPr sz="1500" b="1">
                 <a:solidFill>
-                  <a:srgbClr val="1E3A8A"/>
-                </a:solidFill>
-              </a:defRPr>
-            </a:pPr>
-            <a:r>
-              <a:t>Empowerment for Rural &amp; First-Time Users</a:t>
+                  <a:srgbClr val="059669"/>
+                </a:solidFill>
+              </a:defRPr>
+            </a:pPr>
+            <a:r>
+              <a:t>Phase 3: Assisted Physical Access</a:t>
             </a:r>
           </a:p>
           <a:p>
@@ -8408,14 +9922,14 @@
               <a:spcBef>
                 <a:spcPts val="600"/>
               </a:spcBef>
-              <a:defRPr sz="1200">
+              <a:defRPr sz="1150">
                 <a:solidFill>
                   <a:srgbClr val="64748B"/>
                 </a:solidFill>
               </a:defRPr>
             </a:pPr>
             <a:r>
-              <a:t>Bilingual interfaces in Hindi and English with voice simulation make complex public administration intuitive for non-tech-savvy and rural citizens.</a:t>
+              <a:t>Operator-assisted mode for Common Service Center (CSC) / Jan Seva Kendra operators and Village Development Officers (VDOs) at the Gram Panchayat level.</a:t>
             </a:r>
           </a:p>
         </p:txBody>
@@ -8428,8 +9942,8 @@
         </p:nvSpPr>
         <p:spPr>
           <a:xfrm>
-            <a:off x="6126480" y="4023360"/>
-            <a:ext cx="5120640" cy="1828800"/>
+            <a:off x="6126480" y="3931920"/>
+            <a:ext cx="5120640" cy="1920240"/>
           </a:xfrm>
           <a:prstGeom prst="roundRect">
             <a:avLst/>
@@ -8473,8 +9987,8 @@
         </p:nvSpPr>
         <p:spPr>
           <a:xfrm>
-            <a:off x="6400800" y="4206240"/>
-            <a:ext cx="4572000" cy="1463040"/>
+            <a:off x="6400800" y="4114800"/>
+            <a:ext cx="4572000" cy="1554480"/>
           </a:xfrm>
           <a:prstGeom prst="rect">
             <a:avLst/>
@@ -8490,12 +10004,12 @@
             <a:pPr>
               <a:defRPr sz="1500" b="1">
                 <a:solidFill>
-                  <a:srgbClr val="1E3A8A"/>
-                </a:solidFill>
-              </a:defRPr>
-            </a:pPr>
-            <a:r>
-              <a:t>Administrative Relief for Government</a:t>
+                  <a:srgbClr val="059669"/>
+                </a:solidFill>
+              </a:defRPr>
+            </a:pPr>
+            <a:r>
+              <a:t>Cost &amp; Infrastructure Scalability</a:t>
             </a:r>
           </a:p>
           <a:p>
@@ -8503,14 +10017,14 @@
               <a:spcBef>
                 <a:spcPts val="600"/>
               </a:spcBef>
-              <a:defRPr sz="1200">
+              <a:defRPr sz="1150">
                 <a:solidFill>
                   <a:srgbClr val="64748B"/>
                 </a:solidFill>
               </a:defRPr>
             </a:pPr>
             <a:r>
-              <a:t>Reduces repetitive counter inquiries at Tehsils and Block Development Offices, streamlining public service delivery under the Right to Public Services Act.</a:t>
+              <a:t>Static edge-hosted architecture delivers near-zero server maintenance costs. Scalable to millions of concurrent citizens with sub-50ms latency.</a:t>
             </a:r>
           </a:p>
         </p:txBody>

--- a/JanMitra_Presentation.pptx
+++ b/JanMitra_Presentation.pptx
@@ -12,9 +12,6 @@
     <p:sldId id="260" r:id="rId11"/>
     <p:sldId id="261" r:id="rId12"/>
     <p:sldId id="262" r:id="rId13"/>
-    <p:sldId id="263" r:id="rId14"/>
-    <p:sldId id="264" r:id="rId15"/>
-    <p:sldId id="265" r:id="rId16"/>
   </p:sldIdLst>
   <p:sldSz cx="12191695" cy="6858000" type="screen4x3"/>
   <p:notesSz cx="6858000" cy="9144000"/>
@@ -3148,7 +3145,7 @@
         </p:nvSpPr>
         <p:spPr>
           <a:xfrm>
-            <a:off x="1097280" y="1188720"/>
+            <a:off x="1097280" y="1097280"/>
             <a:ext cx="9966960" cy="2926080"/>
           </a:xfrm>
           <a:prstGeom prst="rect">
@@ -3215,7 +3212,7 @@
               </a:defRPr>
             </a:pPr>
             <a:r>
-              <a:t>A citizen-first digital navigator that turns real-life situations into evidence-backed government action plans.</a:t>
+              <a:t>A personalized civic navigation platform that transforms everyday citizen problems into evidence-backed government action plans.</a:t>
             </a:r>
           </a:p>
         </p:txBody>
@@ -3311,660 +3308,6 @@
             </a:pPr>
             <a:r>
               <a:t>“Citizens should not need to understand the architecture of government in order to access government services.”</a:t>
-            </a:r>
-          </a:p>
-        </p:txBody>
-      </p:sp>
-    </p:spTree>
-  </p:cSld>
-  <p:clrMapOvr>
-    <a:masterClrMapping/>
-  </p:clrMapOvr>
-</p:sld>
-</file>
-
-<file path=ppt/slides/slide10.xml><?xml version="1.0" encoding="utf-8"?>
-<p:sld xmlns:a="http://schemas.openxmlformats.org/drawingml/2006/main" xmlns:p="http://schemas.openxmlformats.org/presentationml/2006/main" xmlns:r="http://schemas.openxmlformats.org/officeDocument/2006/relationships">
-  <p:cSld>
-    <p:spTree>
-      <p:nvGrpSpPr>
-        <p:cNvPr id="1" name=""/>
-        <p:cNvGrpSpPr/>
-        <p:nvPr/>
-      </p:nvGrpSpPr>
-      <p:grpSpPr/>
-      <p:sp>
-        <p:nvSpPr>
-          <p:cNvPr id="2" name="Rectangle 1"/>
-          <p:cNvSpPr/>
-          <p:nvPr/>
-        </p:nvSpPr>
-        <p:spPr>
-          <a:xfrm>
-            <a:off x="0" y="0"/>
-            <a:ext cx="12191695" cy="6858000"/>
-          </a:xfrm>
-          <a:prstGeom prst="rect">
-            <a:avLst/>
-          </a:prstGeom>
-          <a:solidFill>
-            <a:srgbClr val="0F172A"/>
-          </a:solidFill>
-          <a:ln>
-            <a:noFill/>
-          </a:ln>
-        </p:spPr>
-        <p:style>
-          <a:lnRef idx="1">
-            <a:schemeClr val="accent1"/>
-          </a:lnRef>
-          <a:fillRef idx="3">
-            <a:schemeClr val="accent1"/>
-          </a:fillRef>
-          <a:effectRef idx="2">
-            <a:schemeClr val="accent1"/>
-          </a:effectRef>
-          <a:fontRef idx="minor">
-            <a:schemeClr val="lt1"/>
-          </a:fontRef>
-        </p:style>
-        <p:txBody>
-          <a:bodyPr rtlCol="0" anchor="ctr"/>
-          <a:lstStyle/>
-          <a:p>
-            <a:pPr algn="ctr"/>
-          </a:p>
-        </p:txBody>
-      </p:sp>
-      <p:sp>
-        <p:nvSpPr>
-          <p:cNvPr id="3" name="TextBox 2"/>
-          <p:cNvSpPr txBox="1"/>
-          <p:nvPr/>
-        </p:nvSpPr>
-        <p:spPr>
-          <a:xfrm>
-            <a:off x="1097280" y="731520"/>
-            <a:ext cx="9966960" cy="1097280"/>
-          </a:xfrm>
-          <a:prstGeom prst="rect">
-            <a:avLst/>
-          </a:prstGeom>
-          <a:noFill/>
-        </p:spPr>
-        <p:txBody>
-          <a:bodyPr wrap="square">
-            <a:spAutoFit/>
-          </a:bodyPr>
-          <a:lstStyle/>
-          <a:p>
-            <a:pPr>
-              <a:defRPr sz="1200" b="1">
-                <a:solidFill>
-                  <a:srgbClr val="F59E0B"/>
-                </a:solidFill>
-              </a:defRPr>
-            </a:pPr>
-            <a:r>
-              <a:t>TRANSFORMATIVE CITIZEN IMPACT</a:t>
-            </a:r>
-          </a:p>
-          <a:p>
-            <a:pPr>
-              <a:spcBef>
-                <a:spcPts val="400"/>
-              </a:spcBef>
-              <a:defRPr sz="3000" b="1">
-                <a:solidFill>
-                  <a:srgbClr val="FFFFFF"/>
-                </a:solidFill>
-              </a:defRPr>
-            </a:pPr>
-            <a:r>
-              <a:t>From Bureaucratic Maze to Constitutional Dignity</a:t>
-            </a:r>
-          </a:p>
-        </p:txBody>
-      </p:sp>
-      <p:sp>
-        <p:nvSpPr>
-          <p:cNvPr id="4" name="Rounded Rectangle 3"/>
-          <p:cNvSpPr/>
-          <p:nvPr/>
-        </p:nvSpPr>
-        <p:spPr>
-          <a:xfrm>
-            <a:off x="1097280" y="2011680"/>
-            <a:ext cx="2377440" cy="1463040"/>
-          </a:xfrm>
-          <a:prstGeom prst="roundRect">
-            <a:avLst/>
-          </a:prstGeom>
-          <a:solidFill>
-            <a:srgbClr val="1E293B"/>
-          </a:solidFill>
-          <a:ln>
-            <a:solidFill>
-              <a:srgbClr val="334155"/>
-            </a:solidFill>
-          </a:ln>
-        </p:spPr>
-        <p:style>
-          <a:lnRef idx="1">
-            <a:schemeClr val="accent1"/>
-          </a:lnRef>
-          <a:fillRef idx="3">
-            <a:schemeClr val="accent1"/>
-          </a:fillRef>
-          <a:effectRef idx="2">
-            <a:schemeClr val="accent1"/>
-          </a:effectRef>
-          <a:fontRef idx="minor">
-            <a:schemeClr val="lt1"/>
-          </a:fontRef>
-        </p:style>
-        <p:txBody>
-          <a:bodyPr rtlCol="0" anchor="ctr"/>
-          <a:lstStyle/>
-          <a:p>
-            <a:pPr algn="ctr"/>
-          </a:p>
-        </p:txBody>
-      </p:sp>
-      <p:sp>
-        <p:nvSpPr>
-          <p:cNvPr id="5" name="TextBox 4"/>
-          <p:cNvSpPr txBox="1"/>
-          <p:nvPr/>
-        </p:nvSpPr>
-        <p:spPr>
-          <a:xfrm>
-            <a:off x="1234440" y="2103120"/>
-            <a:ext cx="2103120" cy="1280160"/>
-          </a:xfrm>
-          <a:prstGeom prst="rect">
-            <a:avLst/>
-          </a:prstGeom>
-          <a:noFill/>
-        </p:spPr>
-        <p:txBody>
-          <a:bodyPr wrap="square">
-            <a:spAutoFit/>
-          </a:bodyPr>
-          <a:lstStyle/>
-          <a:p>
-            <a:pPr>
-              <a:defRPr sz="2400" b="1">
-                <a:solidFill>
-                  <a:srgbClr val="F59E0B"/>
-                </a:solidFill>
-              </a:defRPr>
-            </a:pPr>
-            <a:r>
-              <a:t>70%</a:t>
-            </a:r>
-          </a:p>
-          <a:p>
-            <a:pPr>
-              <a:spcBef>
-                <a:spcPts val="200"/>
-              </a:spcBef>
-              <a:defRPr sz="1100" b="1">
-                <a:solidFill>
-                  <a:srgbClr val="FFFFFF"/>
-                </a:solidFill>
-              </a:defRPr>
-            </a:pPr>
-            <a:r>
-              <a:t>Reduction in Application Rejections</a:t>
-            </a:r>
-          </a:p>
-          <a:p>
-            <a:pPr>
-              <a:defRPr sz="950">
-                <a:solidFill>
-                  <a:srgbClr val="94A3B8"/>
-                </a:solidFill>
-              </a:defRPr>
-            </a:pPr>
-            <a:r>
-              <a:t>Right documents prepared before applying</a:t>
-            </a:r>
-          </a:p>
-        </p:txBody>
-      </p:sp>
-      <p:sp>
-        <p:nvSpPr>
-          <p:cNvPr id="6" name="Rounded Rectangle 5"/>
-          <p:cNvSpPr/>
-          <p:nvPr/>
-        </p:nvSpPr>
-        <p:spPr>
-          <a:xfrm>
-            <a:off x="3611880" y="2011680"/>
-            <a:ext cx="2377440" cy="1463040"/>
-          </a:xfrm>
-          <a:prstGeom prst="roundRect">
-            <a:avLst/>
-          </a:prstGeom>
-          <a:solidFill>
-            <a:srgbClr val="1E293B"/>
-          </a:solidFill>
-          <a:ln>
-            <a:solidFill>
-              <a:srgbClr val="334155"/>
-            </a:solidFill>
-          </a:ln>
-        </p:spPr>
-        <p:style>
-          <a:lnRef idx="1">
-            <a:schemeClr val="accent1"/>
-          </a:lnRef>
-          <a:fillRef idx="3">
-            <a:schemeClr val="accent1"/>
-          </a:fillRef>
-          <a:effectRef idx="2">
-            <a:schemeClr val="accent1"/>
-          </a:effectRef>
-          <a:fontRef idx="minor">
-            <a:schemeClr val="lt1"/>
-          </a:fontRef>
-        </p:style>
-        <p:txBody>
-          <a:bodyPr rtlCol="0" anchor="ctr"/>
-          <a:lstStyle/>
-          <a:p>
-            <a:pPr algn="ctr"/>
-          </a:p>
-        </p:txBody>
-      </p:sp>
-      <p:sp>
-        <p:nvSpPr>
-          <p:cNvPr id="7" name="TextBox 6"/>
-          <p:cNvSpPr txBox="1"/>
-          <p:nvPr/>
-        </p:nvSpPr>
-        <p:spPr>
-          <a:xfrm>
-            <a:off x="3749040" y="2103120"/>
-            <a:ext cx="2103120" cy="1280160"/>
-          </a:xfrm>
-          <a:prstGeom prst="rect">
-            <a:avLst/>
-          </a:prstGeom>
-          <a:noFill/>
-        </p:spPr>
-        <p:txBody>
-          <a:bodyPr wrap="square">
-            <a:spAutoFit/>
-          </a:bodyPr>
-          <a:lstStyle/>
-          <a:p>
-            <a:pPr>
-              <a:defRPr sz="2400" b="1">
-                <a:solidFill>
-                  <a:srgbClr val="F59E0B"/>
-                </a:solidFill>
-              </a:defRPr>
-            </a:pPr>
-            <a:r>
-              <a:t>₹5 Lakh+</a:t>
-            </a:r>
-          </a:p>
-          <a:p>
-            <a:pPr>
-              <a:spcBef>
-                <a:spcPts val="200"/>
-              </a:spcBef>
-              <a:defRPr sz="1100" b="1">
-                <a:solidFill>
-                  <a:srgbClr val="FFFFFF"/>
-                </a:solidFill>
-              </a:defRPr>
-            </a:pPr>
-            <a:r>
-              <a:t>Welfare Unlocked per Family</a:t>
-            </a:r>
-          </a:p>
-          <a:p>
-            <a:pPr>
-              <a:defRPr sz="950">
-                <a:solidFill>
-                  <a:srgbClr val="94A3B8"/>
-                </a:solidFill>
-              </a:defRPr>
-            </a:pPr>
-            <a:r>
-              <a:t>Cashless healthcare and fee waivers</a:t>
-            </a:r>
-          </a:p>
-        </p:txBody>
-      </p:sp>
-      <p:sp>
-        <p:nvSpPr>
-          <p:cNvPr id="8" name="Rounded Rectangle 7"/>
-          <p:cNvSpPr/>
-          <p:nvPr/>
-        </p:nvSpPr>
-        <p:spPr>
-          <a:xfrm>
-            <a:off x="6126480" y="2011680"/>
-            <a:ext cx="2377440" cy="1463040"/>
-          </a:xfrm>
-          <a:prstGeom prst="roundRect">
-            <a:avLst/>
-          </a:prstGeom>
-          <a:solidFill>
-            <a:srgbClr val="1E293B"/>
-          </a:solidFill>
-          <a:ln>
-            <a:solidFill>
-              <a:srgbClr val="334155"/>
-            </a:solidFill>
-          </a:ln>
-        </p:spPr>
-        <p:style>
-          <a:lnRef idx="1">
-            <a:schemeClr val="accent1"/>
-          </a:lnRef>
-          <a:fillRef idx="3">
-            <a:schemeClr val="accent1"/>
-          </a:fillRef>
-          <a:effectRef idx="2">
-            <a:schemeClr val="accent1"/>
-          </a:effectRef>
-          <a:fontRef idx="minor">
-            <a:schemeClr val="lt1"/>
-          </a:fontRef>
-        </p:style>
-        <p:txBody>
-          <a:bodyPr rtlCol="0" anchor="ctr"/>
-          <a:lstStyle/>
-          <a:p>
-            <a:pPr algn="ctr"/>
-          </a:p>
-        </p:txBody>
-      </p:sp>
-      <p:sp>
-        <p:nvSpPr>
-          <p:cNvPr id="9" name="TextBox 8"/>
-          <p:cNvSpPr txBox="1"/>
-          <p:nvPr/>
-        </p:nvSpPr>
-        <p:spPr>
-          <a:xfrm>
-            <a:off x="6263640" y="2103120"/>
-            <a:ext cx="2103120" cy="1280160"/>
-          </a:xfrm>
-          <a:prstGeom prst="rect">
-            <a:avLst/>
-          </a:prstGeom>
-          <a:noFill/>
-        </p:spPr>
-        <p:txBody>
-          <a:bodyPr wrap="square">
-            <a:spAutoFit/>
-          </a:bodyPr>
-          <a:lstStyle/>
-          <a:p>
-            <a:pPr>
-              <a:defRPr sz="2400" b="1">
-                <a:solidFill>
-                  <a:srgbClr val="F59E0B"/>
-                </a:solidFill>
-              </a:defRPr>
-            </a:pPr>
-            <a:r>
-              <a:t>100%</a:t>
-            </a:r>
-          </a:p>
-          <a:p>
-            <a:pPr>
-              <a:spcBef>
-                <a:spcPts val="200"/>
-              </a:spcBef>
-              <a:defRPr sz="1100" b="1">
-                <a:solidFill>
-                  <a:srgbClr val="FFFFFF"/>
-                </a:solidFill>
-              </a:defRPr>
-            </a:pPr>
-            <a:r>
-              <a:t>Evidence-First Transparency</a:t>
-            </a:r>
-          </a:p>
-          <a:p>
-            <a:pPr>
-              <a:defRPr sz="950">
-                <a:solidFill>
-                  <a:srgbClr val="94A3B8"/>
-                </a:solidFill>
-              </a:defRPr>
-            </a:pPr>
-            <a:r>
-              <a:t>Zero hallucinated rules or dead URLs</a:t>
-            </a:r>
-          </a:p>
-        </p:txBody>
-      </p:sp>
-      <p:sp>
-        <p:nvSpPr>
-          <p:cNvPr id="10" name="Rounded Rectangle 9"/>
-          <p:cNvSpPr/>
-          <p:nvPr/>
-        </p:nvSpPr>
-        <p:spPr>
-          <a:xfrm>
-            <a:off x="8641080" y="2011680"/>
-            <a:ext cx="2377440" cy="1463040"/>
-          </a:xfrm>
-          <a:prstGeom prst="roundRect">
-            <a:avLst/>
-          </a:prstGeom>
-          <a:solidFill>
-            <a:srgbClr val="1E293B"/>
-          </a:solidFill>
-          <a:ln>
-            <a:solidFill>
-              <a:srgbClr val="334155"/>
-            </a:solidFill>
-          </a:ln>
-        </p:spPr>
-        <p:style>
-          <a:lnRef idx="1">
-            <a:schemeClr val="accent1"/>
-          </a:lnRef>
-          <a:fillRef idx="3">
-            <a:schemeClr val="accent1"/>
-          </a:fillRef>
-          <a:effectRef idx="2">
-            <a:schemeClr val="accent1"/>
-          </a:effectRef>
-          <a:fontRef idx="minor">
-            <a:schemeClr val="lt1"/>
-          </a:fontRef>
-        </p:style>
-        <p:txBody>
-          <a:bodyPr rtlCol="0" anchor="ctr"/>
-          <a:lstStyle/>
-          <a:p>
-            <a:pPr algn="ctr"/>
-          </a:p>
-        </p:txBody>
-      </p:sp>
-      <p:sp>
-        <p:nvSpPr>
-          <p:cNvPr id="11" name="TextBox 10"/>
-          <p:cNvSpPr txBox="1"/>
-          <p:nvPr/>
-        </p:nvSpPr>
-        <p:spPr>
-          <a:xfrm>
-            <a:off x="8778240" y="2103120"/>
-            <a:ext cx="2103120" cy="1280160"/>
-          </a:xfrm>
-          <a:prstGeom prst="rect">
-            <a:avLst/>
-          </a:prstGeom>
-          <a:noFill/>
-        </p:spPr>
-        <p:txBody>
-          <a:bodyPr wrap="square">
-            <a:spAutoFit/>
-          </a:bodyPr>
-          <a:lstStyle/>
-          <a:p>
-            <a:pPr>
-              <a:defRPr sz="2400" b="1">
-                <a:solidFill>
-                  <a:srgbClr val="F59E0B"/>
-                </a:solidFill>
-              </a:defRPr>
-            </a:pPr>
-            <a:r>
-              <a:t>100% Free</a:t>
-            </a:r>
-          </a:p>
-          <a:p>
-            <a:pPr>
-              <a:spcBef>
-                <a:spcPts val="200"/>
-              </a:spcBef>
-              <a:defRPr sz="1100" b="1">
-                <a:solidFill>
-                  <a:srgbClr val="FFFFFF"/>
-                </a:solidFill>
-              </a:defRPr>
-            </a:pPr>
-            <a:r>
-              <a:t>Open Public Interest Tech</a:t>
-            </a:r>
-          </a:p>
-          <a:p>
-            <a:pPr>
-              <a:defRPr sz="950">
-                <a:solidFill>
-                  <a:srgbClr val="94A3B8"/>
-                </a:solidFill>
-              </a:defRPr>
-            </a:pPr>
-            <a:r>
-              <a:t>Zero cloud tracking of citizen credentials</a:t>
-            </a:r>
-          </a:p>
-        </p:txBody>
-      </p:sp>
-      <p:sp>
-        <p:nvSpPr>
-          <p:cNvPr id="12" name="Rounded Rectangle 11"/>
-          <p:cNvSpPr/>
-          <p:nvPr/>
-        </p:nvSpPr>
-        <p:spPr>
-          <a:xfrm>
-            <a:off x="1097280" y="3749039"/>
-            <a:ext cx="9966960" cy="1645920"/>
-          </a:xfrm>
-          <a:prstGeom prst="roundRect">
-            <a:avLst/>
-          </a:prstGeom>
-          <a:solidFill>
-            <a:srgbClr val="1E293B"/>
-          </a:solidFill>
-          <a:ln w="19050">
-            <a:solidFill>
-              <a:srgbClr val="D97706"/>
-            </a:solidFill>
-          </a:ln>
-        </p:spPr>
-        <p:style>
-          <a:lnRef idx="1">
-            <a:schemeClr val="accent1"/>
-          </a:lnRef>
-          <a:fillRef idx="3">
-            <a:schemeClr val="accent1"/>
-          </a:fillRef>
-          <a:effectRef idx="2">
-            <a:schemeClr val="accent1"/>
-          </a:effectRef>
-          <a:fontRef idx="minor">
-            <a:schemeClr val="lt1"/>
-          </a:fontRef>
-        </p:style>
-        <p:txBody>
-          <a:bodyPr rtlCol="0" anchor="ctr"/>
-          <a:lstStyle/>
-          <a:p>
-            <a:pPr algn="ctr"/>
-          </a:p>
-        </p:txBody>
-      </p:sp>
-      <p:sp>
-        <p:nvSpPr>
-          <p:cNvPr id="13" name="TextBox 12"/>
-          <p:cNvSpPr txBox="1"/>
-          <p:nvPr/>
-        </p:nvSpPr>
-        <p:spPr>
-          <a:xfrm>
-            <a:off x="1371600" y="3931920"/>
-            <a:ext cx="9418320" cy="1280160"/>
-          </a:xfrm>
-          <a:prstGeom prst="rect">
-            <a:avLst/>
-          </a:prstGeom>
-          <a:noFill/>
-        </p:spPr>
-        <p:txBody>
-          <a:bodyPr wrap="square">
-            <a:spAutoFit/>
-          </a:bodyPr>
-          <a:lstStyle/>
-          <a:p>
-            <a:pPr>
-              <a:defRPr sz="1700" b="1">
-                <a:solidFill>
-                  <a:srgbClr val="FFFFFF"/>
-                </a:solidFill>
-              </a:defRPr>
-            </a:pPr>
-            <a:r>
-              <a:t>“When public services become as simple to understand as sending a text message, government welfare transforms from an elusive bureaucratic maze into a lived constitutional right for every citizen.”</a:t>
-            </a:r>
-          </a:p>
-        </p:txBody>
-      </p:sp>
-      <p:sp>
-        <p:nvSpPr>
-          <p:cNvPr id="14" name="TextBox 13"/>
-          <p:cNvSpPr txBox="1"/>
-          <p:nvPr/>
-        </p:nvSpPr>
-        <p:spPr>
-          <a:xfrm>
-            <a:off x="1097280" y="5577840"/>
-            <a:ext cx="9966960" cy="731520"/>
-          </a:xfrm>
-          <a:prstGeom prst="rect">
-            <a:avLst/>
-          </a:prstGeom>
-          <a:noFill/>
-        </p:spPr>
-        <p:txBody>
-          <a:bodyPr wrap="square">
-            <a:spAutoFit/>
-          </a:bodyPr>
-          <a:lstStyle/>
-          <a:p>
-            <a:pPr>
-              <a:defRPr sz="1200" b="1">
-                <a:solidFill>
-                  <a:srgbClr val="BFDBFE"/>
-                </a:solidFill>
-              </a:defRPr>
-            </a:pPr>
-            <a:r>
-              <a:t>Live Prototype &amp; Code: https://github.com/samenthamassey127-hue/JanMitra</a:t>
             </a:r>
           </a:p>
         </p:txBody>
@@ -4017,7 +3360,7 @@
               </a:defRPr>
             </a:pPr>
             <a:r>
-              <a:t>THE CITIZEN DILEMMA</a:t>
+              <a:t>THE CITIZEN CHALLENGE</a:t>
             </a:r>
           </a:p>
         </p:txBody>
@@ -4087,7 +3430,7 @@
               </a:defRPr>
             </a:pPr>
             <a:r>
-              <a:t>Why billions in public welfare budgets remain unutilized by the people who need them most</a:t>
+              <a:t>Why billions in public welfare budgets remain unutilized by eligible citizens</a:t>
             </a:r>
           </a:p>
         </p:txBody>
@@ -4122,7 +3465,7 @@
               </a:defRPr>
             </a:pPr>
             <a:r>
-              <a:t>JanMitra: Understand. Discover. Apply.  |  Slide 2 of 10</a:t>
+              <a:t>JanMitra: Understand. Discover. Apply.  |  Slide 2 of 7</a:t>
             </a:r>
           </a:p>
         </p:txBody>
@@ -4312,7 +3655,7 @@
               </a:defRPr>
             </a:pPr>
             <a:r>
-              <a:t>Official government circulars, affidavits, and gazette notices are written in dense bureaucratic prose that excludes first-time digital and rural citizens.</a:t>
+              <a:t>Official circulars, affidavits, and gazette notices are written in dense bureaucratic prose that excludes first-time digital and rural citizens.</a:t>
             </a:r>
           </a:p>
         </p:txBody>
@@ -4487,7 +3830,7 @@
               </a:defRPr>
             </a:pPr>
             <a:r>
-              <a:t>04. The Intermediary Trap</a:t>
+              <a:t>04. The Intermediary &amp; Hallucination Trap</a:t>
             </a:r>
           </a:p>
           <a:p>
@@ -4502,7 +3845,7 @@
               </a:defRPr>
             </a:pPr>
             <a:r>
-              <a:t>Due to confusing procedures and lack of clear guidance, citizens are forced to rely on unverified touts, incurring unnecessary costs and delays.</a:t>
+              <a:t>Citizens are forced to rely on unverified touts, while generic AI chatbots hallucinate fake URLs, wrong deadlines, and non-existent rules.</a:t>
             </a:r>
           </a:p>
         </p:txBody>
@@ -4555,7 +3898,7 @@
               </a:defRPr>
             </a:pPr>
             <a:r>
-              <a:t>COMPETITIVE LANDSCAPE &amp; BENCHMARKING</a:t>
+              <a:t>COMPETITIVE BENCHMARKING</a:t>
             </a:r>
           </a:p>
         </p:txBody>
@@ -4590,7 +3933,7 @@
               </a:defRPr>
             </a:pPr>
             <a:r>
-              <a:t>How JanMitra Compares to Existing Solutions &amp; Generic AI</a:t>
+              <a:t>Traditional Portals vs. Generic AI vs. JanMitra</a:t>
             </a:r>
           </a:p>
         </p:txBody>
@@ -4625,7 +3968,7 @@
               </a:defRPr>
             </a:pPr>
             <a:r>
-              <a:t>A side-by-side analysis against government portals and generic LLM chatbots</a:t>
+              <a:t>Why JanMitra is fundamentally superior to both search portals and generic AI chatbots</a:t>
             </a:r>
           </a:p>
         </p:txBody>
@@ -4660,7 +4003,7 @@
               </a:defRPr>
             </a:pPr>
             <a:r>
-              <a:t>JanMitra: Understand. Discover. Apply.  |  Slide 3 of 10</a:t>
+              <a:t>JanMitra: Understand. Discover. Apply.  |  Slide 3 of 7</a:t>
             </a:r>
           </a:p>
         </p:txBody>
@@ -4750,9 +4093,9 @@
           <a:p>
             <a:pPr>
               <a:spcBef>
-                <a:spcPts val="400"/>
+                <a:spcPts val="300"/>
               </a:spcBef>
-              <a:defRPr sz="1000" b="1">
+              <a:defRPr sz="950" b="1">
                 <a:solidFill>
                   <a:srgbClr val="0F172A"/>
                 </a:solidFill>
@@ -4773,9 +4116,9 @@
           <a:p>
             <a:pPr>
               <a:spcBef>
-                <a:spcPts val="400"/>
+                <a:spcPts val="300"/>
               </a:spcBef>
-              <a:defRPr sz="1000" b="1">
+              <a:defRPr sz="950" b="1">
                 <a:solidFill>
                   <a:srgbClr val="0F172A"/>
                 </a:solidFill>
@@ -4796,9 +4139,9 @@
           <a:p>
             <a:pPr>
               <a:spcBef>
-                <a:spcPts val="400"/>
+                <a:spcPts val="300"/>
               </a:spcBef>
-              <a:defRPr sz="1000" b="1">
+              <a:defRPr sz="950" b="1">
                 <a:solidFill>
                   <a:srgbClr val="0F172A"/>
                 </a:solidFill>
@@ -4819,9 +4162,9 @@
           <a:p>
             <a:pPr>
               <a:spcBef>
-                <a:spcPts val="400"/>
+                <a:spcPts val="300"/>
               </a:spcBef>
-              <a:defRPr sz="1000" b="1">
+              <a:defRPr sz="950" b="1">
                 <a:solidFill>
                   <a:srgbClr val="0F172A"/>
                 </a:solidFill>
@@ -4842,9 +4185,9 @@
           <a:p>
             <a:pPr>
               <a:spcBef>
-                <a:spcPts val="400"/>
+                <a:spcPts val="300"/>
               </a:spcBef>
-              <a:defRPr sz="1000" b="1">
+              <a:defRPr sz="950" b="1">
                 <a:solidFill>
                   <a:srgbClr val="0F172A"/>
                 </a:solidFill>
@@ -4865,16 +4208,16 @@
           <a:p>
             <a:pPr>
               <a:spcBef>
-                <a:spcPts val="400"/>
+                <a:spcPts val="300"/>
               </a:spcBef>
-              <a:defRPr sz="1000" b="1">
+              <a:defRPr sz="950" b="1">
                 <a:solidFill>
                   <a:srgbClr val="0F172A"/>
                 </a:solidFill>
               </a:defRPr>
             </a:pPr>
             <a:r>
-              <a:t>• Accuracy &amp; Truth: </a:t>
+              <a:t>• Accuracy &amp; Trust: </a:t>
             </a:r>
             <a:r>
               <a:rPr b="0">
@@ -4883,6 +4226,29 @@
                 </a:solidFill>
               </a:rPr>
               <a:t>Official, but buried under bureaucratic jargon</a:t>
+            </a:r>
+          </a:p>
+          <a:p>
+            <a:pPr>
+              <a:spcBef>
+                <a:spcPts val="300"/>
+              </a:spcBef>
+              <a:defRPr sz="950" b="1">
+                <a:solidFill>
+                  <a:srgbClr val="0F172A"/>
+                </a:solidFill>
+              </a:defRPr>
+            </a:pPr>
+            <a:r>
+              <a:t>• User Privacy: </a:t>
+            </a:r>
+            <a:r>
+              <a:rPr b="0">
+                <a:solidFill>
+                  <a:srgbClr val="64748B"/>
+                </a:solidFill>
+              </a:rPr>
+              <a:t>Centralized storage prone to server bottlenecks</a:t>
             </a:r>
           </a:p>
         </p:txBody>
@@ -4972,9 +4338,9 @@
           <a:p>
             <a:pPr>
               <a:spcBef>
-                <a:spcPts val="400"/>
+                <a:spcPts val="300"/>
               </a:spcBef>
-              <a:defRPr sz="1000" b="1">
+              <a:defRPr sz="950" b="1">
                 <a:solidFill>
                   <a:srgbClr val="0F172A"/>
                 </a:solidFill>
@@ -4995,9 +4361,9 @@
           <a:p>
             <a:pPr>
               <a:spcBef>
-                <a:spcPts val="400"/>
+                <a:spcPts val="300"/>
               </a:spcBef>
-              <a:defRPr sz="1000" b="1">
+              <a:defRPr sz="950" b="1">
                 <a:solidFill>
                   <a:srgbClr val="0F172A"/>
                 </a:solidFill>
@@ -5018,9 +4384,9 @@
           <a:p>
             <a:pPr>
               <a:spcBef>
-                <a:spcPts val="400"/>
+                <a:spcPts val="300"/>
               </a:spcBef>
-              <a:defRPr sz="1000" b="1">
+              <a:defRPr sz="950" b="1">
                 <a:solidFill>
                   <a:srgbClr val="0F172A"/>
                 </a:solidFill>
@@ -5041,9 +4407,9 @@
           <a:p>
             <a:pPr>
               <a:spcBef>
-                <a:spcPts val="400"/>
+                <a:spcPts val="300"/>
               </a:spcBef>
-              <a:defRPr sz="1000" b="1">
+              <a:defRPr sz="950" b="1">
                 <a:solidFill>
                   <a:srgbClr val="0F172A"/>
                 </a:solidFill>
@@ -5064,9 +4430,9 @@
           <a:p>
             <a:pPr>
               <a:spcBef>
-                <a:spcPts val="400"/>
+                <a:spcPts val="300"/>
               </a:spcBef>
-              <a:defRPr sz="1000" b="1">
+              <a:defRPr sz="950" b="1">
                 <a:solidFill>
                   <a:srgbClr val="0F172A"/>
                 </a:solidFill>
@@ -5087,16 +4453,16 @@
           <a:p>
             <a:pPr>
               <a:spcBef>
-                <a:spcPts val="400"/>
+                <a:spcPts val="300"/>
               </a:spcBef>
-              <a:defRPr sz="1000" b="1">
+              <a:defRPr sz="950" b="1">
                 <a:solidFill>
                   <a:srgbClr val="0F172A"/>
                 </a:solidFill>
               </a:defRPr>
             </a:pPr>
             <a:r>
-              <a:t>• Accuracy &amp; Truth: </a:t>
+              <a:t>• Accuracy &amp; Trust: </a:t>
             </a:r>
             <a:r>
               <a:rPr b="0">
@@ -5104,7 +4470,30 @@
                   <a:srgbClr val="64748B"/>
                 </a:solidFill>
               </a:rPr>
-              <a:t>High risk of hallucination; zero legal accountability</a:t>
+              <a:t>High hallucination risk; zero legal accountability</a:t>
+            </a:r>
+          </a:p>
+          <a:p>
+            <a:pPr>
+              <a:spcBef>
+                <a:spcPts val="300"/>
+              </a:spcBef>
+              <a:defRPr sz="950" b="1">
+                <a:solidFill>
+                  <a:srgbClr val="0F172A"/>
+                </a:solidFill>
+              </a:defRPr>
+            </a:pPr>
+            <a:r>
+              <a:t>• User Privacy: </a:t>
+            </a:r>
+            <a:r>
+              <a:rPr b="0">
+                <a:solidFill>
+                  <a:srgbClr val="64748B"/>
+                </a:solidFill>
+              </a:rPr>
+              <a:t>Transmits sensitive citizen records to cloud AI</a:t>
             </a:r>
           </a:p>
         </p:txBody>
@@ -5194,9 +4583,9 @@
           <a:p>
             <a:pPr>
               <a:spcBef>
-                <a:spcPts val="400"/>
+                <a:spcPts val="300"/>
               </a:spcBef>
-              <a:defRPr sz="1000" b="1">
+              <a:defRPr sz="950" b="1">
                 <a:solidFill>
                   <a:srgbClr val="0F172A"/>
                 </a:solidFill>
@@ -5217,9 +4606,9 @@
           <a:p>
             <a:pPr>
               <a:spcBef>
-                <a:spcPts val="400"/>
+                <a:spcPts val="300"/>
               </a:spcBef>
-              <a:defRPr sz="1000" b="1">
+              <a:defRPr sz="950" b="1">
                 <a:solidFill>
                   <a:srgbClr val="0F172A"/>
                 </a:solidFill>
@@ -5240,9 +4629,9 @@
           <a:p>
             <a:pPr>
               <a:spcBef>
-                <a:spcPts val="400"/>
+                <a:spcPts val="300"/>
               </a:spcBef>
-              <a:defRPr sz="1000" b="1">
+              <a:defRPr sz="950" b="1">
                 <a:solidFill>
                   <a:srgbClr val="0F172A"/>
                 </a:solidFill>
@@ -5263,9 +4652,9 @@
           <a:p>
             <a:pPr>
               <a:spcBef>
-                <a:spcPts val="400"/>
+                <a:spcPts val="300"/>
               </a:spcBef>
-              <a:defRPr sz="1000" b="1">
+              <a:defRPr sz="950" b="1">
                 <a:solidFill>
                   <a:srgbClr val="0F172A"/>
                 </a:solidFill>
@@ -5286,9 +4675,9 @@
           <a:p>
             <a:pPr>
               <a:spcBef>
-                <a:spcPts val="400"/>
+                <a:spcPts val="300"/>
               </a:spcBef>
-              <a:defRPr sz="1000" b="1">
+              <a:defRPr sz="950" b="1">
                 <a:solidFill>
                   <a:srgbClr val="0F172A"/>
                 </a:solidFill>
@@ -5309,16 +4698,16 @@
           <a:p>
             <a:pPr>
               <a:spcBef>
-                <a:spcPts val="400"/>
+                <a:spcPts val="300"/>
               </a:spcBef>
-              <a:defRPr sz="1000" b="1">
+              <a:defRPr sz="950" b="1">
                 <a:solidFill>
                   <a:srgbClr val="0F172A"/>
                 </a:solidFill>
               </a:defRPr>
             </a:pPr>
             <a:r>
-              <a:t>• Accuracy &amp; Truth: </a:t>
+              <a:t>• Accuracy &amp; Trust: </a:t>
             </a:r>
             <a:r>
               <a:rPr b="0">
@@ -5327,6 +4716,29 @@
                 </a:solidFill>
               </a:rPr>
               <a:t>Evidence-First: every claim cited to official gazette</a:t>
+            </a:r>
+          </a:p>
+          <a:p>
+            <a:pPr>
+              <a:spcBef>
+                <a:spcPts val="300"/>
+              </a:spcBef>
+              <a:defRPr sz="950" b="1">
+                <a:solidFill>
+                  <a:srgbClr val="0F172A"/>
+                </a:solidFill>
+              </a:defRPr>
+            </a:pPr>
+            <a:r>
+              <a:t>• User Privacy: </a:t>
+            </a:r>
+            <a:r>
+              <a:rPr b="0">
+                <a:solidFill>
+                  <a:srgbClr val="64748B"/>
+                </a:solidFill>
+              </a:rPr>
+              <a:t>100% Client-Side Local Vault with instant wipe</a:t>
             </a:r>
           </a:p>
         </p:txBody>
@@ -5379,7 +4791,7 @@
               </a:defRPr>
             </a:pPr>
             <a:r>
-              <a:t>THE PARADIGM SHIFT</a:t>
+              <a:t>FROM IDEA TO IMPACT</a:t>
             </a:r>
           </a:p>
         </p:txBody>
@@ -5414,7 +4826,7 @@
               </a:defRPr>
             </a:pPr>
             <a:r>
-              <a:t>From Administrative Silos to Citizen Life Situations</a:t>
+              <a:t>The Paradigm Shift &amp; The 8-Stage Action Loop</a:t>
             </a:r>
           </a:p>
         </p:txBody>
@@ -5449,7 +4861,7 @@
               </a:defRPr>
             </a:pPr>
             <a:r>
-              <a:t>Organizing public services around human goals rather than bureaucratic hierarchy</a:t>
+              <a:t>Transforming ambiguous citizen dilemmas into completed government sanctions</a:t>
             </a:r>
           </a:p>
         </p:txBody>
@@ -5484,7 +4896,7 @@
               </a:defRPr>
             </a:pPr>
             <a:r>
-              <a:t>JanMitra: Understand. Discover. Apply.  |  Slide 4 of 10</a:t>
+              <a:t>JanMitra: Understand. Discover. Apply.  |  Slide 4 of 7</a:t>
             </a:r>
           </a:p>
         </p:txBody>
@@ -5497,958 +4909,8 @@
         </p:nvSpPr>
         <p:spPr>
           <a:xfrm>
-            <a:off x="731520" y="1828800"/>
-            <a:ext cx="2011680" cy="1188720"/>
-          </a:xfrm>
-          <a:prstGeom prst="roundRect">
-            <a:avLst/>
-          </a:prstGeom>
-          <a:solidFill>
-            <a:srgbClr val="FFFFFF"/>
-          </a:solidFill>
-          <a:ln>
-            <a:solidFill>
-              <a:srgbClr val="E2E8F0"/>
-            </a:solidFill>
-          </a:ln>
-        </p:spPr>
-        <p:style>
-          <a:lnRef idx="1">
-            <a:schemeClr val="accent1"/>
-          </a:lnRef>
-          <a:fillRef idx="3">
-            <a:schemeClr val="accent1"/>
-          </a:fillRef>
-          <a:effectRef idx="2">
-            <a:schemeClr val="accent1"/>
-          </a:effectRef>
-          <a:fontRef idx="minor">
-            <a:schemeClr val="lt1"/>
-          </a:fontRef>
-        </p:style>
-        <p:txBody>
-          <a:bodyPr rtlCol="0" anchor="ctr"/>
-          <a:lstStyle/>
-          <a:p>
-            <a:pPr algn="ctr"/>
-          </a:p>
-        </p:txBody>
-      </p:sp>
-      <p:sp>
-        <p:nvSpPr>
-          <p:cNvPr id="7" name="TextBox 6"/>
-          <p:cNvSpPr txBox="1"/>
-          <p:nvPr/>
-        </p:nvSpPr>
-        <p:spPr>
-          <a:xfrm>
-            <a:off x="868680" y="1920240"/>
-            <a:ext cx="1737360" cy="1005840"/>
-          </a:xfrm>
-          <a:prstGeom prst="rect">
-            <a:avLst/>
-          </a:prstGeom>
-          <a:noFill/>
-        </p:spPr>
-        <p:txBody>
-          <a:bodyPr wrap="square">
-            <a:spAutoFit/>
-          </a:bodyPr>
-          <a:lstStyle/>
-          <a:p>
-            <a:pPr>
-              <a:defRPr sz="1300" b="1">
-                <a:solidFill>
-                  <a:srgbClr val="1E3A8A"/>
-                </a:solidFill>
-              </a:defRPr>
-            </a:pPr>
-            <a:r>
-              <a:t>🎓 Education</a:t>
-            </a:r>
-          </a:p>
-          <a:p>
-            <a:pPr>
-              <a:spcBef>
-                <a:spcPts val="200"/>
-              </a:spcBef>
-              <a:defRPr sz="950">
-                <a:solidFill>
-                  <a:srgbClr val="64748B"/>
-                </a:solidFill>
-              </a:defRPr>
-            </a:pPr>
-            <a:r>
-              <a:t>Scholarships &amp; fee assistance</a:t>
-            </a:r>
-          </a:p>
-        </p:txBody>
-      </p:sp>
-      <p:sp>
-        <p:nvSpPr>
-          <p:cNvPr id="8" name="Rounded Rectangle 7"/>
-          <p:cNvSpPr/>
-          <p:nvPr/>
-        </p:nvSpPr>
-        <p:spPr>
-          <a:xfrm>
-            <a:off x="2889504" y="1828800"/>
-            <a:ext cx="2011680" cy="1188720"/>
-          </a:xfrm>
-          <a:prstGeom prst="roundRect">
-            <a:avLst/>
-          </a:prstGeom>
-          <a:solidFill>
-            <a:srgbClr val="FFFFFF"/>
-          </a:solidFill>
-          <a:ln>
-            <a:solidFill>
-              <a:srgbClr val="E2E8F0"/>
-            </a:solidFill>
-          </a:ln>
-        </p:spPr>
-        <p:style>
-          <a:lnRef idx="1">
-            <a:schemeClr val="accent1"/>
-          </a:lnRef>
-          <a:fillRef idx="3">
-            <a:schemeClr val="accent1"/>
-          </a:fillRef>
-          <a:effectRef idx="2">
-            <a:schemeClr val="accent1"/>
-          </a:effectRef>
-          <a:fontRef idx="minor">
-            <a:schemeClr val="lt1"/>
-          </a:fontRef>
-        </p:style>
-        <p:txBody>
-          <a:bodyPr rtlCol="0" anchor="ctr"/>
-          <a:lstStyle/>
-          <a:p>
-            <a:pPr algn="ctr"/>
-          </a:p>
-        </p:txBody>
-      </p:sp>
-      <p:sp>
-        <p:nvSpPr>
-          <p:cNvPr id="9" name="TextBox 8"/>
-          <p:cNvSpPr txBox="1"/>
-          <p:nvPr/>
-        </p:nvSpPr>
-        <p:spPr>
-          <a:xfrm>
-            <a:off x="3026664" y="1920240"/>
-            <a:ext cx="1737360" cy="1005840"/>
-          </a:xfrm>
-          <a:prstGeom prst="rect">
-            <a:avLst/>
-          </a:prstGeom>
-          <a:noFill/>
-        </p:spPr>
-        <p:txBody>
-          <a:bodyPr wrap="square">
-            <a:spAutoFit/>
-          </a:bodyPr>
-          <a:lstStyle/>
-          <a:p>
-            <a:pPr>
-              <a:defRPr sz="1300" b="1">
-                <a:solidFill>
-                  <a:srgbClr val="1E3A8A"/>
-                </a:solidFill>
-              </a:defRPr>
-            </a:pPr>
-            <a:r>
-              <a:t>💰 Financial</a:t>
-            </a:r>
-          </a:p>
-          <a:p>
-            <a:pPr>
-              <a:spcBef>
-                <a:spcPts val="200"/>
-              </a:spcBef>
-              <a:defRPr sz="950">
-                <a:solidFill>
-                  <a:srgbClr val="64748B"/>
-                </a:solidFill>
-              </a:defRPr>
-            </a:pPr>
-            <a:r>
-              <a:t>Assistance for low-income families</a:t>
-            </a:r>
-          </a:p>
-        </p:txBody>
-      </p:sp>
-      <p:sp>
-        <p:nvSpPr>
-          <p:cNvPr id="10" name="Rounded Rectangle 9"/>
-          <p:cNvSpPr/>
-          <p:nvPr/>
-        </p:nvSpPr>
-        <p:spPr>
-          <a:xfrm>
-            <a:off x="5047488" y="1828800"/>
-            <a:ext cx="2011680" cy="1188720"/>
-          </a:xfrm>
-          <a:prstGeom prst="roundRect">
-            <a:avLst/>
-          </a:prstGeom>
-          <a:solidFill>
-            <a:srgbClr val="FFFFFF"/>
-          </a:solidFill>
-          <a:ln>
-            <a:solidFill>
-              <a:srgbClr val="E2E8F0"/>
-            </a:solidFill>
-          </a:ln>
-        </p:spPr>
-        <p:style>
-          <a:lnRef idx="1">
-            <a:schemeClr val="accent1"/>
-          </a:lnRef>
-          <a:fillRef idx="3">
-            <a:schemeClr val="accent1"/>
-          </a:fillRef>
-          <a:effectRef idx="2">
-            <a:schemeClr val="accent1"/>
-          </a:effectRef>
-          <a:fontRef idx="minor">
-            <a:schemeClr val="lt1"/>
-          </a:fontRef>
-        </p:style>
-        <p:txBody>
-          <a:bodyPr rtlCol="0" anchor="ctr"/>
-          <a:lstStyle/>
-          <a:p>
-            <a:pPr algn="ctr"/>
-          </a:p>
-        </p:txBody>
-      </p:sp>
-      <p:sp>
-        <p:nvSpPr>
-          <p:cNvPr id="11" name="TextBox 10"/>
-          <p:cNvSpPr txBox="1"/>
-          <p:nvPr/>
-        </p:nvSpPr>
-        <p:spPr>
-          <a:xfrm>
-            <a:off x="5184648" y="1920240"/>
-            <a:ext cx="1737360" cy="1005840"/>
-          </a:xfrm>
-          <a:prstGeom prst="rect">
-            <a:avLst/>
-          </a:prstGeom>
-          <a:noFill/>
-        </p:spPr>
-        <p:txBody>
-          <a:bodyPr wrap="square">
-            <a:spAutoFit/>
-          </a:bodyPr>
-          <a:lstStyle/>
-          <a:p>
-            <a:pPr>
-              <a:defRPr sz="1300" b="1">
-                <a:solidFill>
-                  <a:srgbClr val="1E3A8A"/>
-                </a:solidFill>
-              </a:defRPr>
-            </a:pPr>
-            <a:r>
-              <a:t>👴 Senior Citizens</a:t>
-            </a:r>
-          </a:p>
-          <a:p>
-            <a:pPr>
-              <a:spcBef>
-                <a:spcPts val="200"/>
-              </a:spcBef>
-              <a:defRPr sz="950">
-                <a:solidFill>
-                  <a:srgbClr val="64748B"/>
-                </a:solidFill>
-              </a:defRPr>
-            </a:pPr>
-            <a:r>
-              <a:t>Pensions &amp; healthcare coverage</a:t>
-            </a:r>
-          </a:p>
-        </p:txBody>
-      </p:sp>
-      <p:sp>
-        <p:nvSpPr>
-          <p:cNvPr id="12" name="Rounded Rectangle 11"/>
-          <p:cNvSpPr/>
-          <p:nvPr/>
-        </p:nvSpPr>
-        <p:spPr>
-          <a:xfrm>
-            <a:off x="7205472" y="1828800"/>
-            <a:ext cx="2011680" cy="1188720"/>
-          </a:xfrm>
-          <a:prstGeom prst="roundRect">
-            <a:avLst/>
-          </a:prstGeom>
-          <a:solidFill>
-            <a:srgbClr val="FFFFFF"/>
-          </a:solidFill>
-          <a:ln>
-            <a:solidFill>
-              <a:srgbClr val="E2E8F0"/>
-            </a:solidFill>
-          </a:ln>
-        </p:spPr>
-        <p:style>
-          <a:lnRef idx="1">
-            <a:schemeClr val="accent1"/>
-          </a:lnRef>
-          <a:fillRef idx="3">
-            <a:schemeClr val="accent1"/>
-          </a:fillRef>
-          <a:effectRef idx="2">
-            <a:schemeClr val="accent1"/>
-          </a:effectRef>
-          <a:fontRef idx="minor">
-            <a:schemeClr val="lt1"/>
-          </a:fontRef>
-        </p:style>
-        <p:txBody>
-          <a:bodyPr rtlCol="0" anchor="ctr"/>
-          <a:lstStyle/>
-          <a:p>
-            <a:pPr algn="ctr"/>
-          </a:p>
-        </p:txBody>
-      </p:sp>
-      <p:sp>
-        <p:nvSpPr>
-          <p:cNvPr id="13" name="TextBox 12"/>
-          <p:cNvSpPr txBox="1"/>
-          <p:nvPr/>
-        </p:nvSpPr>
-        <p:spPr>
-          <a:xfrm>
-            <a:off x="7342632" y="1920240"/>
-            <a:ext cx="1737360" cy="1005840"/>
-          </a:xfrm>
-          <a:prstGeom prst="rect">
-            <a:avLst/>
-          </a:prstGeom>
-          <a:noFill/>
-        </p:spPr>
-        <p:txBody>
-          <a:bodyPr wrap="square">
-            <a:spAutoFit/>
-          </a:bodyPr>
-          <a:lstStyle/>
-          <a:p>
-            <a:pPr>
-              <a:defRPr sz="1300" b="1">
-                <a:solidFill>
-                  <a:srgbClr val="1E3A8A"/>
-                </a:solidFill>
-              </a:defRPr>
-            </a:pPr>
-            <a:r>
-              <a:t>🏥 Healthcare</a:t>
-            </a:r>
-          </a:p>
-          <a:p>
-            <a:pPr>
-              <a:spcBef>
-                <a:spcPts val="200"/>
-              </a:spcBef>
-              <a:defRPr sz="950">
-                <a:solidFill>
-                  <a:srgbClr val="64748B"/>
-                </a:solidFill>
-              </a:defRPr>
-            </a:pPr>
-            <a:r>
-              <a:t>Cashless treatment &amp; Ayushman Bharat</a:t>
-            </a:r>
-          </a:p>
-        </p:txBody>
-      </p:sp>
-      <p:sp>
-        <p:nvSpPr>
-          <p:cNvPr id="14" name="Rounded Rectangle 13"/>
-          <p:cNvSpPr/>
-          <p:nvPr/>
-        </p:nvSpPr>
-        <p:spPr>
-          <a:xfrm>
-            <a:off x="9363456" y="1828800"/>
-            <a:ext cx="2011680" cy="1188720"/>
-          </a:xfrm>
-          <a:prstGeom prst="roundRect">
-            <a:avLst/>
-          </a:prstGeom>
-          <a:solidFill>
-            <a:srgbClr val="FFFFFF"/>
-          </a:solidFill>
-          <a:ln>
-            <a:solidFill>
-              <a:srgbClr val="E2E8F0"/>
-            </a:solidFill>
-          </a:ln>
-        </p:spPr>
-        <p:style>
-          <a:lnRef idx="1">
-            <a:schemeClr val="accent1"/>
-          </a:lnRef>
-          <a:fillRef idx="3">
-            <a:schemeClr val="accent1"/>
-          </a:fillRef>
-          <a:effectRef idx="2">
-            <a:schemeClr val="accent1"/>
-          </a:effectRef>
-          <a:fontRef idx="minor">
-            <a:schemeClr val="lt1"/>
-          </a:fontRef>
-        </p:style>
-        <p:txBody>
-          <a:bodyPr rtlCol="0" anchor="ctr"/>
-          <a:lstStyle/>
-          <a:p>
-            <a:pPr algn="ctr"/>
-          </a:p>
-        </p:txBody>
-      </p:sp>
-      <p:sp>
-        <p:nvSpPr>
-          <p:cNvPr id="15" name="TextBox 14"/>
-          <p:cNvSpPr txBox="1"/>
-          <p:nvPr/>
-        </p:nvSpPr>
-        <p:spPr>
-          <a:xfrm>
-            <a:off x="9500616" y="1920240"/>
-            <a:ext cx="1737360" cy="1005840"/>
-          </a:xfrm>
-          <a:prstGeom prst="rect">
-            <a:avLst/>
-          </a:prstGeom>
-          <a:noFill/>
-        </p:spPr>
-        <p:txBody>
-          <a:bodyPr wrap="square">
-            <a:spAutoFit/>
-          </a:bodyPr>
-          <a:lstStyle/>
-          <a:p>
-            <a:pPr>
-              <a:defRPr sz="1300" b="1">
-                <a:solidFill>
-                  <a:srgbClr val="1E3A8A"/>
-                </a:solidFill>
-              </a:defRPr>
-            </a:pPr>
-            <a:r>
-              <a:t>🏠 Housing</a:t>
-            </a:r>
-          </a:p>
-          <a:p>
-            <a:pPr>
-              <a:spcBef>
-                <a:spcPts val="200"/>
-              </a:spcBef>
-              <a:defRPr sz="950">
-                <a:solidFill>
-                  <a:srgbClr val="64748B"/>
-                </a:solidFill>
-              </a:defRPr>
-            </a:pPr>
-            <a:r>
-              <a:t>PMAY pucca house grants</a:t>
-            </a:r>
-          </a:p>
-        </p:txBody>
-      </p:sp>
-      <p:sp>
-        <p:nvSpPr>
-          <p:cNvPr id="16" name="Rounded Rectangle 15"/>
-          <p:cNvSpPr/>
-          <p:nvPr/>
-        </p:nvSpPr>
-        <p:spPr>
-          <a:xfrm>
-            <a:off x="731520" y="3200400"/>
-            <a:ext cx="2011680" cy="1188720"/>
-          </a:xfrm>
-          <a:prstGeom prst="roundRect">
-            <a:avLst/>
-          </a:prstGeom>
-          <a:solidFill>
-            <a:srgbClr val="FFFFFF"/>
-          </a:solidFill>
-          <a:ln>
-            <a:solidFill>
-              <a:srgbClr val="E2E8F0"/>
-            </a:solidFill>
-          </a:ln>
-        </p:spPr>
-        <p:style>
-          <a:lnRef idx="1">
-            <a:schemeClr val="accent1"/>
-          </a:lnRef>
-          <a:fillRef idx="3">
-            <a:schemeClr val="accent1"/>
-          </a:fillRef>
-          <a:effectRef idx="2">
-            <a:schemeClr val="accent1"/>
-          </a:effectRef>
-          <a:fontRef idx="minor">
-            <a:schemeClr val="lt1"/>
-          </a:fontRef>
-        </p:style>
-        <p:txBody>
-          <a:bodyPr rtlCol="0" anchor="ctr"/>
-          <a:lstStyle/>
-          <a:p>
-            <a:pPr algn="ctr"/>
-          </a:p>
-        </p:txBody>
-      </p:sp>
-      <p:sp>
-        <p:nvSpPr>
-          <p:cNvPr id="17" name="TextBox 16"/>
-          <p:cNvSpPr txBox="1"/>
-          <p:nvPr/>
-        </p:nvSpPr>
-        <p:spPr>
-          <a:xfrm>
-            <a:off x="868680" y="3291840"/>
-            <a:ext cx="1737360" cy="1005840"/>
-          </a:xfrm>
-          <a:prstGeom prst="rect">
-            <a:avLst/>
-          </a:prstGeom>
-          <a:noFill/>
-        </p:spPr>
-        <p:txBody>
-          <a:bodyPr wrap="square">
-            <a:spAutoFit/>
-          </a:bodyPr>
-          <a:lstStyle/>
-          <a:p>
-            <a:pPr>
-              <a:defRPr sz="1300" b="1">
-                <a:solidFill>
-                  <a:srgbClr val="1E3A8A"/>
-                </a:solidFill>
-              </a:defRPr>
-            </a:pPr>
-            <a:r>
-              <a:t>💼 Employment</a:t>
-            </a:r>
-          </a:p>
-          <a:p>
-            <a:pPr>
-              <a:spcBef>
-                <a:spcPts val="200"/>
-              </a:spcBef>
-              <a:defRPr sz="950">
-                <a:solidFill>
-                  <a:srgbClr val="64748B"/>
-                </a:solidFill>
-              </a:defRPr>
-            </a:pPr>
-            <a:r>
-              <a:t>Worker benefits &amp; skill training</a:t>
-            </a:r>
-          </a:p>
-        </p:txBody>
-      </p:sp>
-      <p:sp>
-        <p:nvSpPr>
-          <p:cNvPr id="18" name="Rounded Rectangle 17"/>
-          <p:cNvSpPr/>
-          <p:nvPr/>
-        </p:nvSpPr>
-        <p:spPr>
-          <a:xfrm>
-            <a:off x="2889504" y="3200400"/>
-            <a:ext cx="2011680" cy="1188720"/>
-          </a:xfrm>
-          <a:prstGeom prst="roundRect">
-            <a:avLst/>
-          </a:prstGeom>
-          <a:solidFill>
-            <a:srgbClr val="FFFFFF"/>
-          </a:solidFill>
-          <a:ln>
-            <a:solidFill>
-              <a:srgbClr val="E2E8F0"/>
-            </a:solidFill>
-          </a:ln>
-        </p:spPr>
-        <p:style>
-          <a:lnRef idx="1">
-            <a:schemeClr val="accent1"/>
-          </a:lnRef>
-          <a:fillRef idx="3">
-            <a:schemeClr val="accent1"/>
-          </a:fillRef>
-          <a:effectRef idx="2">
-            <a:schemeClr val="accent1"/>
-          </a:effectRef>
-          <a:fontRef idx="minor">
-            <a:schemeClr val="lt1"/>
-          </a:fontRef>
-        </p:style>
-        <p:txBody>
-          <a:bodyPr rtlCol="0" anchor="ctr"/>
-          <a:lstStyle/>
-          <a:p>
-            <a:pPr algn="ctr"/>
-          </a:p>
-        </p:txBody>
-      </p:sp>
-      <p:sp>
-        <p:nvSpPr>
-          <p:cNvPr id="19" name="TextBox 18"/>
-          <p:cNvSpPr txBox="1"/>
-          <p:nvPr/>
-        </p:nvSpPr>
-        <p:spPr>
-          <a:xfrm>
-            <a:off x="3026664" y="3291840"/>
-            <a:ext cx="1737360" cy="1005840"/>
-          </a:xfrm>
-          <a:prstGeom prst="rect">
-            <a:avLst/>
-          </a:prstGeom>
-          <a:noFill/>
-        </p:spPr>
-        <p:txBody>
-          <a:bodyPr wrap="square">
-            <a:spAutoFit/>
-          </a:bodyPr>
-          <a:lstStyle/>
-          <a:p>
-            <a:pPr>
-              <a:defRPr sz="1300" b="1">
-                <a:solidFill>
-                  <a:srgbClr val="1E3A8A"/>
-                </a:solidFill>
-              </a:defRPr>
-            </a:pPr>
-            <a:r>
-              <a:t>🪪 Certificates</a:t>
-            </a:r>
-          </a:p>
-          <a:p>
-            <a:pPr>
-              <a:spcBef>
-                <a:spcPts val="200"/>
-              </a:spcBef>
-              <a:defRPr sz="950">
-                <a:solidFill>
-                  <a:srgbClr val="64748B"/>
-                </a:solidFill>
-              </a:defRPr>
-            </a:pPr>
-            <a:r>
-              <a:t>Income, domicile, caste certificates</a:t>
-            </a:r>
-          </a:p>
-        </p:txBody>
-      </p:sp>
-      <p:sp>
-        <p:nvSpPr>
-          <p:cNvPr id="20" name="Rounded Rectangle 19"/>
-          <p:cNvSpPr/>
-          <p:nvPr/>
-        </p:nvSpPr>
-        <p:spPr>
-          <a:xfrm>
-            <a:off x="5047488" y="3200400"/>
-            <a:ext cx="2011680" cy="1188720"/>
-          </a:xfrm>
-          <a:prstGeom prst="roundRect">
-            <a:avLst/>
-          </a:prstGeom>
-          <a:solidFill>
-            <a:srgbClr val="FFFFFF"/>
-          </a:solidFill>
-          <a:ln>
-            <a:solidFill>
-              <a:srgbClr val="E2E8F0"/>
-            </a:solidFill>
-          </a:ln>
-        </p:spPr>
-        <p:style>
-          <a:lnRef idx="1">
-            <a:schemeClr val="accent1"/>
-          </a:lnRef>
-          <a:fillRef idx="3">
-            <a:schemeClr val="accent1"/>
-          </a:fillRef>
-          <a:effectRef idx="2">
-            <a:schemeClr val="accent1"/>
-          </a:effectRef>
-          <a:fontRef idx="minor">
-            <a:schemeClr val="lt1"/>
-          </a:fontRef>
-        </p:style>
-        <p:txBody>
-          <a:bodyPr rtlCol="0" anchor="ctr"/>
-          <a:lstStyle/>
-          <a:p>
-            <a:pPr algn="ctr"/>
-          </a:p>
-        </p:txBody>
-      </p:sp>
-      <p:sp>
-        <p:nvSpPr>
-          <p:cNvPr id="21" name="TextBox 20"/>
-          <p:cNvSpPr txBox="1"/>
-          <p:nvPr/>
-        </p:nvSpPr>
-        <p:spPr>
-          <a:xfrm>
-            <a:off x="5184648" y="3291840"/>
-            <a:ext cx="1737360" cy="1005840"/>
-          </a:xfrm>
-          <a:prstGeom prst="rect">
-            <a:avLst/>
-          </a:prstGeom>
-          <a:noFill/>
-        </p:spPr>
-        <p:txBody>
-          <a:bodyPr wrap="square">
-            <a:spAutoFit/>
-          </a:bodyPr>
-          <a:lstStyle/>
-          <a:p>
-            <a:pPr>
-              <a:defRPr sz="1300" b="1">
-                <a:solidFill>
-                  <a:srgbClr val="1E3A8A"/>
-                </a:solidFill>
-              </a:defRPr>
-            </a:pPr>
-            <a:r>
-              <a:t>🌾 Agriculture</a:t>
-            </a:r>
-          </a:p>
-          <a:p>
-            <a:pPr>
-              <a:spcBef>
-                <a:spcPts val="200"/>
-              </a:spcBef>
-              <a:defRPr sz="950">
-                <a:solidFill>
-                  <a:srgbClr val="64748B"/>
-                </a:solidFill>
-              </a:defRPr>
-            </a:pPr>
-            <a:r>
-              <a:t>PM-Kisan &amp; farmer support</a:t>
-            </a:r>
-          </a:p>
-        </p:txBody>
-      </p:sp>
-      <p:sp>
-        <p:nvSpPr>
-          <p:cNvPr id="22" name="Rounded Rectangle 21"/>
-          <p:cNvSpPr/>
-          <p:nvPr/>
-        </p:nvSpPr>
-        <p:spPr>
-          <a:xfrm>
-            <a:off x="7205472" y="3200400"/>
-            <a:ext cx="2011680" cy="1188720"/>
-          </a:xfrm>
-          <a:prstGeom prst="roundRect">
-            <a:avLst/>
-          </a:prstGeom>
-          <a:solidFill>
-            <a:srgbClr val="FFFFFF"/>
-          </a:solidFill>
-          <a:ln>
-            <a:solidFill>
-              <a:srgbClr val="E2E8F0"/>
-            </a:solidFill>
-          </a:ln>
-        </p:spPr>
-        <p:style>
-          <a:lnRef idx="1">
-            <a:schemeClr val="accent1"/>
-          </a:lnRef>
-          <a:fillRef idx="3">
-            <a:schemeClr val="accent1"/>
-          </a:fillRef>
-          <a:effectRef idx="2">
-            <a:schemeClr val="accent1"/>
-          </a:effectRef>
-          <a:fontRef idx="minor">
-            <a:schemeClr val="lt1"/>
-          </a:fontRef>
-        </p:style>
-        <p:txBody>
-          <a:bodyPr rtlCol="0" anchor="ctr"/>
-          <a:lstStyle/>
-          <a:p>
-            <a:pPr algn="ctr"/>
-          </a:p>
-        </p:txBody>
-      </p:sp>
-      <p:sp>
-        <p:nvSpPr>
-          <p:cNvPr id="23" name="TextBox 22"/>
-          <p:cNvSpPr txBox="1"/>
-          <p:nvPr/>
-        </p:nvSpPr>
-        <p:spPr>
-          <a:xfrm>
-            <a:off x="7342632" y="3291840"/>
-            <a:ext cx="1737360" cy="1005840"/>
-          </a:xfrm>
-          <a:prstGeom prst="rect">
-            <a:avLst/>
-          </a:prstGeom>
-          <a:noFill/>
-        </p:spPr>
-        <p:txBody>
-          <a:bodyPr wrap="square">
-            <a:spAutoFit/>
-          </a:bodyPr>
-          <a:lstStyle/>
-          <a:p>
-            <a:pPr>
-              <a:defRPr sz="1300" b="1">
-                <a:solidFill>
-                  <a:srgbClr val="1E3A8A"/>
-                </a:solidFill>
-              </a:defRPr>
-            </a:pPr>
-            <a:r>
-              <a:t>🚀 Business</a:t>
-            </a:r>
-          </a:p>
-          <a:p>
-            <a:pPr>
-              <a:spcBef>
-                <a:spcPts val="200"/>
-              </a:spcBef>
-              <a:defRPr sz="950">
-                <a:solidFill>
-                  <a:srgbClr val="64748B"/>
-                </a:solidFill>
-              </a:defRPr>
-            </a:pPr>
-            <a:r>
-              <a:t>Subsidized loans &amp; PMEGP</a:t>
-            </a:r>
-          </a:p>
-        </p:txBody>
-      </p:sp>
-      <p:sp>
-        <p:nvSpPr>
-          <p:cNvPr id="24" name="Rounded Rectangle 23"/>
-          <p:cNvSpPr/>
-          <p:nvPr/>
-        </p:nvSpPr>
-        <p:spPr>
-          <a:xfrm>
-            <a:off x="9363456" y="3200400"/>
-            <a:ext cx="2011680" cy="1188720"/>
-          </a:xfrm>
-          <a:prstGeom prst="roundRect">
-            <a:avLst/>
-          </a:prstGeom>
-          <a:solidFill>
-            <a:srgbClr val="FFFFFF"/>
-          </a:solidFill>
-          <a:ln>
-            <a:solidFill>
-              <a:srgbClr val="E2E8F0"/>
-            </a:solidFill>
-          </a:ln>
-        </p:spPr>
-        <p:style>
-          <a:lnRef idx="1">
-            <a:schemeClr val="accent1"/>
-          </a:lnRef>
-          <a:fillRef idx="3">
-            <a:schemeClr val="accent1"/>
-          </a:fillRef>
-          <a:effectRef idx="2">
-            <a:schemeClr val="accent1"/>
-          </a:effectRef>
-          <a:fontRef idx="minor">
-            <a:schemeClr val="lt1"/>
-          </a:fontRef>
-        </p:style>
-        <p:txBody>
-          <a:bodyPr rtlCol="0" anchor="ctr"/>
-          <a:lstStyle/>
-          <a:p>
-            <a:pPr algn="ctr"/>
-          </a:p>
-        </p:txBody>
-      </p:sp>
-      <p:sp>
-        <p:nvSpPr>
-          <p:cNvPr id="25" name="TextBox 24"/>
-          <p:cNvSpPr txBox="1"/>
-          <p:nvPr/>
-        </p:nvSpPr>
-        <p:spPr>
-          <a:xfrm>
-            <a:off x="9500616" y="3291840"/>
-            <a:ext cx="1737360" cy="1005840"/>
-          </a:xfrm>
-          <a:prstGeom prst="rect">
-            <a:avLst/>
-          </a:prstGeom>
-          <a:noFill/>
-        </p:spPr>
-        <p:txBody>
-          <a:bodyPr wrap="square">
-            <a:spAutoFit/>
-          </a:bodyPr>
-          <a:lstStyle/>
-          <a:p>
-            <a:pPr>
-              <a:defRPr sz="1300" b="1">
-                <a:solidFill>
-                  <a:srgbClr val="1E3A8A"/>
-                </a:solidFill>
-              </a:defRPr>
-            </a:pPr>
-            <a:r>
-              <a:t>❓ I'm Not Sure</a:t>
-            </a:r>
-          </a:p>
-          <a:p>
-            <a:pPr>
-              <a:spcBef>
-                <a:spcPts val="200"/>
-              </a:spcBef>
-              <a:defRPr sz="950">
-                <a:solidFill>
-                  <a:srgbClr val="64748B"/>
-                </a:solidFill>
-              </a:defRPr>
-            </a:pPr>
-            <a:r>
-              <a:t>Guided diagnostic wizard</a:t>
-            </a:r>
-          </a:p>
-        </p:txBody>
-      </p:sp>
-      <p:sp>
-        <p:nvSpPr>
-          <p:cNvPr id="26" name="Rounded Rectangle 25"/>
-          <p:cNvSpPr/>
-          <p:nvPr/>
-        </p:nvSpPr>
-        <p:spPr>
-          <a:xfrm>
-            <a:off x="731520" y="4846320"/>
-            <a:ext cx="10698480" cy="1371600"/>
+            <a:off x="731520" y="1691640"/>
+            <a:ext cx="10698480" cy="1280160"/>
           </a:xfrm>
           <a:prstGeom prst="roundRect">
             <a:avLst/>
@@ -6486,14 +4948,14 @@
       </p:sp>
       <p:sp>
         <p:nvSpPr>
-          <p:cNvPr id="27" name="TextBox 26"/>
+          <p:cNvPr id="7" name="TextBox 6"/>
           <p:cNvSpPr txBox="1"/>
           <p:nvPr/>
         </p:nvSpPr>
         <p:spPr>
           <a:xfrm>
-            <a:off x="914400" y="4937760"/>
-            <a:ext cx="10332720" cy="1188720"/>
+            <a:off x="914400" y="1783080"/>
+            <a:ext cx="10332720" cy="1097280"/>
           </a:xfrm>
           <a:prstGeom prst="rect">
             <a:avLst/>
@@ -6514,37 +4976,893 @@
               </a:defRPr>
             </a:pPr>
             <a:r>
-              <a:t>CONVERSATIONAL EXTRACTION EXAMPLE:</a:t>
+              <a:t>THE PARADIGM SHIFT: START WITH THE HUMAN PROBLEM</a:t>
             </a:r>
           </a:p>
           <a:p>
             <a:pPr>
               <a:spcBef>
-                <a:spcPts val="300"/>
+                <a:spcPts val="200"/>
               </a:spcBef>
-              <a:defRPr sz="1200" b="1">
+              <a:defRPr sz="1300" b="1">
                 <a:solidFill>
                   <a:srgbClr val="0F172A"/>
                 </a:solidFill>
               </a:defRPr>
             </a:pPr>
             <a:r>
-              <a:t>Citizen Input: “I'm a 20-year-old B.Tech student from Lucknow. Family income is ₹2.5 lakh and I need fee assistance.”</a:t>
+              <a:t>Instead of: “Which department or scheme code are you looking for?” ➔ JanMitra asks: “What are you trying to do?”</a:t>
             </a:r>
           </a:p>
           <a:p>
             <a:pPr>
               <a:spcBef>
-                <a:spcPts val="300"/>
+                <a:spcPts val="200"/>
               </a:spcBef>
-              <a:defRPr sz="1200" b="1">
+              <a:defRPr sz="1100">
                 <a:solidFill>
                   <a:srgbClr val="D97706"/>
                 </a:solidFill>
               </a:defRPr>
             </a:pPr>
             <a:r>
-              <a:t>➔ Extracted Profile Chips: [20 years ×]  [Lucknow, UP ×]  [B.Tech ×]  [Student ×]  [₹2.5L Income ×]  [OBC ×]</a:t>
+              <a:t>Example: “I'm a 20yr student in Lucknow, family income ₹2.5L, seeking fee support” ➔ Extracted Chips: [20 yrs ×] [Lucknow ×] [B.Tech ×] [₹2.5L ×]</a:t>
+            </a:r>
+          </a:p>
+        </p:txBody>
+      </p:sp>
+      <p:sp>
+        <p:nvSpPr>
+          <p:cNvPr id="8" name="Rounded Rectangle 7"/>
+          <p:cNvSpPr/>
+          <p:nvPr/>
+        </p:nvSpPr>
+        <p:spPr>
+          <a:xfrm>
+            <a:off x="731520" y="3154680"/>
+            <a:ext cx="2560320" cy="1371600"/>
+          </a:xfrm>
+          <a:prstGeom prst="roundRect">
+            <a:avLst/>
+          </a:prstGeom>
+          <a:solidFill>
+            <a:srgbClr val="F8FAFC"/>
+          </a:solidFill>
+          <a:ln>
+            <a:solidFill>
+              <a:srgbClr val="E2E8F0"/>
+            </a:solidFill>
+          </a:ln>
+        </p:spPr>
+        <p:style>
+          <a:lnRef idx="1">
+            <a:schemeClr val="accent1"/>
+          </a:lnRef>
+          <a:fillRef idx="3">
+            <a:schemeClr val="accent1"/>
+          </a:fillRef>
+          <a:effectRef idx="2">
+            <a:schemeClr val="accent1"/>
+          </a:effectRef>
+          <a:fontRef idx="minor">
+            <a:schemeClr val="lt1"/>
+          </a:fontRef>
+        </p:style>
+        <p:txBody>
+          <a:bodyPr rtlCol="0" anchor="ctr"/>
+          <a:lstStyle/>
+          <a:p>
+            <a:pPr algn="ctr"/>
+          </a:p>
+        </p:txBody>
+      </p:sp>
+      <p:sp>
+        <p:nvSpPr>
+          <p:cNvPr id="9" name="TextBox 8"/>
+          <p:cNvSpPr txBox="1"/>
+          <p:nvPr/>
+        </p:nvSpPr>
+        <p:spPr>
+          <a:xfrm>
+            <a:off x="914400" y="3264408"/>
+            <a:ext cx="2194560" cy="1097280"/>
+          </a:xfrm>
+          <a:prstGeom prst="rect">
+            <a:avLst/>
+          </a:prstGeom>
+          <a:noFill/>
+        </p:spPr>
+        <p:txBody>
+          <a:bodyPr wrap="square">
+            <a:spAutoFit/>
+          </a:bodyPr>
+          <a:lstStyle/>
+          <a:p>
+            <a:pPr>
+              <a:defRPr sz="950" b="1">
+                <a:solidFill>
+                  <a:srgbClr val="D97706"/>
+                </a:solidFill>
+              </a:defRPr>
+            </a:pPr>
+            <a:r>
+              <a:t>STAGE 01</a:t>
+            </a:r>
+          </a:p>
+          <a:p>
+            <a:pPr>
+              <a:spcBef>
+                <a:spcPts val="200"/>
+              </a:spcBef>
+              <a:defRPr sz="1350" b="1">
+                <a:solidFill>
+                  <a:srgbClr val="0F172A"/>
+                </a:solidFill>
+              </a:defRPr>
+            </a:pPr>
+            <a:r>
+              <a:t>My Situation</a:t>
+            </a:r>
+          </a:p>
+          <a:p>
+            <a:pPr>
+              <a:defRPr sz="1000">
+                <a:solidFill>
+                  <a:srgbClr val="64748B"/>
+                </a:solidFill>
+              </a:defRPr>
+            </a:pPr>
+            <a:r>
+              <a:t>Human words</a:t>
+            </a:r>
+          </a:p>
+        </p:txBody>
+      </p:sp>
+      <p:sp>
+        <p:nvSpPr>
+          <p:cNvPr id="10" name="Rounded Rectangle 9"/>
+          <p:cNvSpPr/>
+          <p:nvPr/>
+        </p:nvSpPr>
+        <p:spPr>
+          <a:xfrm>
+            <a:off x="3429000" y="3154680"/>
+            <a:ext cx="2560320" cy="1371600"/>
+          </a:xfrm>
+          <a:prstGeom prst="roundRect">
+            <a:avLst/>
+          </a:prstGeom>
+          <a:solidFill>
+            <a:srgbClr val="F8FAFC"/>
+          </a:solidFill>
+          <a:ln>
+            <a:solidFill>
+              <a:srgbClr val="E2E8F0"/>
+            </a:solidFill>
+          </a:ln>
+        </p:spPr>
+        <p:style>
+          <a:lnRef idx="1">
+            <a:schemeClr val="accent1"/>
+          </a:lnRef>
+          <a:fillRef idx="3">
+            <a:schemeClr val="accent1"/>
+          </a:fillRef>
+          <a:effectRef idx="2">
+            <a:schemeClr val="accent1"/>
+          </a:effectRef>
+          <a:fontRef idx="minor">
+            <a:schemeClr val="lt1"/>
+          </a:fontRef>
+        </p:style>
+        <p:txBody>
+          <a:bodyPr rtlCol="0" anchor="ctr"/>
+          <a:lstStyle/>
+          <a:p>
+            <a:pPr algn="ctr"/>
+          </a:p>
+        </p:txBody>
+      </p:sp>
+      <p:sp>
+        <p:nvSpPr>
+          <p:cNvPr id="11" name="TextBox 10"/>
+          <p:cNvSpPr txBox="1"/>
+          <p:nvPr/>
+        </p:nvSpPr>
+        <p:spPr>
+          <a:xfrm>
+            <a:off x="3611880" y="3264408"/>
+            <a:ext cx="2194560" cy="1097280"/>
+          </a:xfrm>
+          <a:prstGeom prst="rect">
+            <a:avLst/>
+          </a:prstGeom>
+          <a:noFill/>
+        </p:spPr>
+        <p:txBody>
+          <a:bodyPr wrap="square">
+            <a:spAutoFit/>
+          </a:bodyPr>
+          <a:lstStyle/>
+          <a:p>
+            <a:pPr>
+              <a:defRPr sz="950" b="1">
+                <a:solidFill>
+                  <a:srgbClr val="D97706"/>
+                </a:solidFill>
+              </a:defRPr>
+            </a:pPr>
+            <a:r>
+              <a:t>STAGE 02</a:t>
+            </a:r>
+          </a:p>
+          <a:p>
+            <a:pPr>
+              <a:spcBef>
+                <a:spcPts val="200"/>
+              </a:spcBef>
+              <a:defRPr sz="1350" b="1">
+                <a:solidFill>
+                  <a:srgbClr val="0F172A"/>
+                </a:solidFill>
+              </a:defRPr>
+            </a:pPr>
+            <a:r>
+              <a:t>What Can I Get?</a:t>
+            </a:r>
+          </a:p>
+          <a:p>
+            <a:pPr>
+              <a:defRPr sz="1000">
+                <a:solidFill>
+                  <a:srgbClr val="64748B"/>
+                </a:solidFill>
+              </a:defRPr>
+            </a:pPr>
+            <a:r>
+              <a:t>Relevant benefits</a:t>
+            </a:r>
+          </a:p>
+        </p:txBody>
+      </p:sp>
+      <p:sp>
+        <p:nvSpPr>
+          <p:cNvPr id="12" name="Rounded Rectangle 11"/>
+          <p:cNvSpPr/>
+          <p:nvPr/>
+        </p:nvSpPr>
+        <p:spPr>
+          <a:xfrm>
+            <a:off x="6126480" y="3154680"/>
+            <a:ext cx="2560320" cy="1371600"/>
+          </a:xfrm>
+          <a:prstGeom prst="roundRect">
+            <a:avLst/>
+          </a:prstGeom>
+          <a:solidFill>
+            <a:srgbClr val="F8FAFC"/>
+          </a:solidFill>
+          <a:ln>
+            <a:solidFill>
+              <a:srgbClr val="E2E8F0"/>
+            </a:solidFill>
+          </a:ln>
+        </p:spPr>
+        <p:style>
+          <a:lnRef idx="1">
+            <a:schemeClr val="accent1"/>
+          </a:lnRef>
+          <a:fillRef idx="3">
+            <a:schemeClr val="accent1"/>
+          </a:fillRef>
+          <a:effectRef idx="2">
+            <a:schemeClr val="accent1"/>
+          </a:effectRef>
+          <a:fontRef idx="minor">
+            <a:schemeClr val="lt1"/>
+          </a:fontRef>
+        </p:style>
+        <p:txBody>
+          <a:bodyPr rtlCol="0" anchor="ctr"/>
+          <a:lstStyle/>
+          <a:p>
+            <a:pPr algn="ctr"/>
+          </a:p>
+        </p:txBody>
+      </p:sp>
+      <p:sp>
+        <p:nvSpPr>
+          <p:cNvPr id="13" name="TextBox 12"/>
+          <p:cNvSpPr txBox="1"/>
+          <p:nvPr/>
+        </p:nvSpPr>
+        <p:spPr>
+          <a:xfrm>
+            <a:off x="6309360" y="3264408"/>
+            <a:ext cx="2194560" cy="1097280"/>
+          </a:xfrm>
+          <a:prstGeom prst="rect">
+            <a:avLst/>
+          </a:prstGeom>
+          <a:noFill/>
+        </p:spPr>
+        <p:txBody>
+          <a:bodyPr wrap="square">
+            <a:spAutoFit/>
+          </a:bodyPr>
+          <a:lstStyle/>
+          <a:p>
+            <a:pPr>
+              <a:defRPr sz="950" b="1">
+                <a:solidFill>
+                  <a:srgbClr val="D97706"/>
+                </a:solidFill>
+              </a:defRPr>
+            </a:pPr>
+            <a:r>
+              <a:t>STAGE 03</a:t>
+            </a:r>
+          </a:p>
+          <a:p>
+            <a:pPr>
+              <a:spcBef>
+                <a:spcPts val="200"/>
+              </a:spcBef>
+              <a:defRPr sz="1350" b="1">
+                <a:solidFill>
+                  <a:srgbClr val="0F172A"/>
+                </a:solidFill>
+              </a:defRPr>
+            </a:pPr>
+            <a:r>
+              <a:t>Why Qualify?</a:t>
+            </a:r>
+          </a:p>
+          <a:p>
+            <a:pPr>
+              <a:defRPr sz="1000">
+                <a:solidFill>
+                  <a:srgbClr val="64748B"/>
+                </a:solidFill>
+              </a:defRPr>
+            </a:pPr>
+            <a:r>
+              <a:t>Rule criteria match</a:t>
+            </a:r>
+          </a:p>
+        </p:txBody>
+      </p:sp>
+      <p:sp>
+        <p:nvSpPr>
+          <p:cNvPr id="14" name="Rounded Rectangle 13"/>
+          <p:cNvSpPr/>
+          <p:nvPr/>
+        </p:nvSpPr>
+        <p:spPr>
+          <a:xfrm>
+            <a:off x="8823960" y="3154680"/>
+            <a:ext cx="2560320" cy="1371600"/>
+          </a:xfrm>
+          <a:prstGeom prst="roundRect">
+            <a:avLst/>
+          </a:prstGeom>
+          <a:solidFill>
+            <a:srgbClr val="F8FAFC"/>
+          </a:solidFill>
+          <a:ln>
+            <a:solidFill>
+              <a:srgbClr val="E2E8F0"/>
+            </a:solidFill>
+          </a:ln>
+        </p:spPr>
+        <p:style>
+          <a:lnRef idx="1">
+            <a:schemeClr val="accent1"/>
+          </a:lnRef>
+          <a:fillRef idx="3">
+            <a:schemeClr val="accent1"/>
+          </a:fillRef>
+          <a:effectRef idx="2">
+            <a:schemeClr val="accent1"/>
+          </a:effectRef>
+          <a:fontRef idx="minor">
+            <a:schemeClr val="lt1"/>
+          </a:fontRef>
+        </p:style>
+        <p:txBody>
+          <a:bodyPr rtlCol="0" anchor="ctr"/>
+          <a:lstStyle/>
+          <a:p>
+            <a:pPr algn="ctr"/>
+          </a:p>
+        </p:txBody>
+      </p:sp>
+      <p:sp>
+        <p:nvSpPr>
+          <p:cNvPr id="15" name="TextBox 14"/>
+          <p:cNvSpPr txBox="1"/>
+          <p:nvPr/>
+        </p:nvSpPr>
+        <p:spPr>
+          <a:xfrm>
+            <a:off x="9006840" y="3264408"/>
+            <a:ext cx="2194560" cy="1097280"/>
+          </a:xfrm>
+          <a:prstGeom prst="rect">
+            <a:avLst/>
+          </a:prstGeom>
+          <a:noFill/>
+        </p:spPr>
+        <p:txBody>
+          <a:bodyPr wrap="square">
+            <a:spAutoFit/>
+          </a:bodyPr>
+          <a:lstStyle/>
+          <a:p>
+            <a:pPr>
+              <a:defRPr sz="950" b="1">
+                <a:solidFill>
+                  <a:srgbClr val="D97706"/>
+                </a:solidFill>
+              </a:defRPr>
+            </a:pPr>
+            <a:r>
+              <a:t>STAGE 04</a:t>
+            </a:r>
+          </a:p>
+          <a:p>
+            <a:pPr>
+              <a:spcBef>
+                <a:spcPts val="200"/>
+              </a:spcBef>
+              <a:defRPr sz="1350" b="1">
+                <a:solidFill>
+                  <a:srgbClr val="0F172A"/>
+                </a:solidFill>
+              </a:defRPr>
+            </a:pPr>
+            <a:r>
+              <a:t>What Missing?</a:t>
+            </a:r>
+          </a:p>
+          <a:p>
+            <a:pPr>
+              <a:defRPr sz="1000">
+                <a:solidFill>
+                  <a:srgbClr val="64748B"/>
+                </a:solidFill>
+              </a:defRPr>
+            </a:pPr>
+            <a:r>
+              <a:t>Identify gaps</a:t>
+            </a:r>
+          </a:p>
+        </p:txBody>
+      </p:sp>
+      <p:sp>
+        <p:nvSpPr>
+          <p:cNvPr id="16" name="Rounded Rectangle 15"/>
+          <p:cNvSpPr/>
+          <p:nvPr/>
+        </p:nvSpPr>
+        <p:spPr>
+          <a:xfrm>
+            <a:off x="731520" y="4709160"/>
+            <a:ext cx="2560320" cy="1371600"/>
+          </a:xfrm>
+          <a:prstGeom prst="roundRect">
+            <a:avLst/>
+          </a:prstGeom>
+          <a:solidFill>
+            <a:srgbClr val="F8FAFC"/>
+          </a:solidFill>
+          <a:ln>
+            <a:solidFill>
+              <a:srgbClr val="E2E8F0"/>
+            </a:solidFill>
+          </a:ln>
+        </p:spPr>
+        <p:style>
+          <a:lnRef idx="1">
+            <a:schemeClr val="accent1"/>
+          </a:lnRef>
+          <a:fillRef idx="3">
+            <a:schemeClr val="accent1"/>
+          </a:fillRef>
+          <a:effectRef idx="2">
+            <a:schemeClr val="accent1"/>
+          </a:effectRef>
+          <a:fontRef idx="minor">
+            <a:schemeClr val="lt1"/>
+          </a:fontRef>
+        </p:style>
+        <p:txBody>
+          <a:bodyPr rtlCol="0" anchor="ctr"/>
+          <a:lstStyle/>
+          <a:p>
+            <a:pPr algn="ctr"/>
+          </a:p>
+        </p:txBody>
+      </p:sp>
+      <p:sp>
+        <p:nvSpPr>
+          <p:cNvPr id="17" name="TextBox 16"/>
+          <p:cNvSpPr txBox="1"/>
+          <p:nvPr/>
+        </p:nvSpPr>
+        <p:spPr>
+          <a:xfrm>
+            <a:off x="914400" y="4818888"/>
+            <a:ext cx="2194560" cy="1097280"/>
+          </a:xfrm>
+          <a:prstGeom prst="rect">
+            <a:avLst/>
+          </a:prstGeom>
+          <a:noFill/>
+        </p:spPr>
+        <p:txBody>
+          <a:bodyPr wrap="square">
+            <a:spAutoFit/>
+          </a:bodyPr>
+          <a:lstStyle/>
+          <a:p>
+            <a:pPr>
+              <a:defRPr sz="950" b="1">
+                <a:solidFill>
+                  <a:srgbClr val="D97706"/>
+                </a:solidFill>
+              </a:defRPr>
+            </a:pPr>
+            <a:r>
+              <a:t>STAGE 05</a:t>
+            </a:r>
+          </a:p>
+          <a:p>
+            <a:pPr>
+              <a:spcBef>
+                <a:spcPts val="200"/>
+              </a:spcBef>
+              <a:defRPr sz="1350" b="1">
+                <a:solidFill>
+                  <a:srgbClr val="0F172A"/>
+                </a:solidFill>
+              </a:defRPr>
+            </a:pPr>
+            <a:r>
+              <a:t>Docs Needed?</a:t>
+            </a:r>
+          </a:p>
+          <a:p>
+            <a:pPr>
+              <a:defRPr sz="1000">
+                <a:solidFill>
+                  <a:srgbClr val="64748B"/>
+                </a:solidFill>
+              </a:defRPr>
+            </a:pPr>
+            <a:r>
+              <a:t>Locker audit</a:t>
+            </a:r>
+          </a:p>
+        </p:txBody>
+      </p:sp>
+      <p:sp>
+        <p:nvSpPr>
+          <p:cNvPr id="18" name="Rounded Rectangle 17"/>
+          <p:cNvSpPr/>
+          <p:nvPr/>
+        </p:nvSpPr>
+        <p:spPr>
+          <a:xfrm>
+            <a:off x="3429000" y="4709160"/>
+            <a:ext cx="2560320" cy="1371600"/>
+          </a:xfrm>
+          <a:prstGeom prst="roundRect">
+            <a:avLst/>
+          </a:prstGeom>
+          <a:solidFill>
+            <a:srgbClr val="F8FAFC"/>
+          </a:solidFill>
+          <a:ln>
+            <a:solidFill>
+              <a:srgbClr val="E2E8F0"/>
+            </a:solidFill>
+          </a:ln>
+        </p:spPr>
+        <p:style>
+          <a:lnRef idx="1">
+            <a:schemeClr val="accent1"/>
+          </a:lnRef>
+          <a:fillRef idx="3">
+            <a:schemeClr val="accent1"/>
+          </a:fillRef>
+          <a:effectRef idx="2">
+            <a:schemeClr val="accent1"/>
+          </a:effectRef>
+          <a:fontRef idx="minor">
+            <a:schemeClr val="lt1"/>
+          </a:fontRef>
+        </p:style>
+        <p:txBody>
+          <a:bodyPr rtlCol="0" anchor="ctr"/>
+          <a:lstStyle/>
+          <a:p>
+            <a:pPr algn="ctr"/>
+          </a:p>
+        </p:txBody>
+      </p:sp>
+      <p:sp>
+        <p:nvSpPr>
+          <p:cNvPr id="19" name="TextBox 18"/>
+          <p:cNvSpPr txBox="1"/>
+          <p:nvPr/>
+        </p:nvSpPr>
+        <p:spPr>
+          <a:xfrm>
+            <a:off x="3611880" y="4818888"/>
+            <a:ext cx="2194560" cy="1097280"/>
+          </a:xfrm>
+          <a:prstGeom prst="rect">
+            <a:avLst/>
+          </a:prstGeom>
+          <a:noFill/>
+        </p:spPr>
+        <p:txBody>
+          <a:bodyPr wrap="square">
+            <a:spAutoFit/>
+          </a:bodyPr>
+          <a:lstStyle/>
+          <a:p>
+            <a:pPr>
+              <a:defRPr sz="950" b="1">
+                <a:solidFill>
+                  <a:srgbClr val="D97706"/>
+                </a:solidFill>
+              </a:defRPr>
+            </a:pPr>
+            <a:r>
+              <a:t>STAGE 06</a:t>
+            </a:r>
+          </a:p>
+          <a:p>
+            <a:pPr>
+              <a:spcBef>
+                <a:spcPts val="200"/>
+              </a:spcBef>
+              <a:defRPr sz="1350" b="1">
+                <a:solidFill>
+                  <a:srgbClr val="0F172A"/>
+                </a:solidFill>
+              </a:defRPr>
+            </a:pPr>
+            <a:r>
+              <a:t>How Get Them?</a:t>
+            </a:r>
+          </a:p>
+          <a:p>
+            <a:pPr>
+              <a:defRPr sz="1000">
+                <a:solidFill>
+                  <a:srgbClr val="64748B"/>
+                </a:solidFill>
+              </a:defRPr>
+            </a:pPr>
+            <a:r>
+              <a:t>Service bridge</a:t>
+            </a:r>
+          </a:p>
+        </p:txBody>
+      </p:sp>
+      <p:sp>
+        <p:nvSpPr>
+          <p:cNvPr id="20" name="Rounded Rectangle 19"/>
+          <p:cNvSpPr/>
+          <p:nvPr/>
+        </p:nvSpPr>
+        <p:spPr>
+          <a:xfrm>
+            <a:off x="6126480" y="4709160"/>
+            <a:ext cx="2560320" cy="1371600"/>
+          </a:xfrm>
+          <a:prstGeom prst="roundRect">
+            <a:avLst/>
+          </a:prstGeom>
+          <a:solidFill>
+            <a:srgbClr val="F8FAFC"/>
+          </a:solidFill>
+          <a:ln>
+            <a:solidFill>
+              <a:srgbClr val="E2E8F0"/>
+            </a:solidFill>
+          </a:ln>
+        </p:spPr>
+        <p:style>
+          <a:lnRef idx="1">
+            <a:schemeClr val="accent1"/>
+          </a:lnRef>
+          <a:fillRef idx="3">
+            <a:schemeClr val="accent1"/>
+          </a:fillRef>
+          <a:effectRef idx="2">
+            <a:schemeClr val="accent1"/>
+          </a:effectRef>
+          <a:fontRef idx="minor">
+            <a:schemeClr val="lt1"/>
+          </a:fontRef>
+        </p:style>
+        <p:txBody>
+          <a:bodyPr rtlCol="0" anchor="ctr"/>
+          <a:lstStyle/>
+          <a:p>
+            <a:pPr algn="ctr"/>
+          </a:p>
+        </p:txBody>
+      </p:sp>
+      <p:sp>
+        <p:nvSpPr>
+          <p:cNvPr id="21" name="TextBox 20"/>
+          <p:cNvSpPr txBox="1"/>
+          <p:nvPr/>
+        </p:nvSpPr>
+        <p:spPr>
+          <a:xfrm>
+            <a:off x="6309360" y="4818888"/>
+            <a:ext cx="2194560" cy="1097280"/>
+          </a:xfrm>
+          <a:prstGeom prst="rect">
+            <a:avLst/>
+          </a:prstGeom>
+          <a:noFill/>
+        </p:spPr>
+        <p:txBody>
+          <a:bodyPr wrap="square">
+            <a:spAutoFit/>
+          </a:bodyPr>
+          <a:lstStyle/>
+          <a:p>
+            <a:pPr>
+              <a:defRPr sz="950" b="1">
+                <a:solidFill>
+                  <a:srgbClr val="D97706"/>
+                </a:solidFill>
+              </a:defRPr>
+            </a:pPr>
+            <a:r>
+              <a:t>STAGE 07</a:t>
+            </a:r>
+          </a:p>
+          <a:p>
+            <a:pPr>
+              <a:spcBef>
+                <a:spcPts val="200"/>
+              </a:spcBef>
+              <a:defRPr sz="1350" b="1">
+                <a:solidFill>
+                  <a:srgbClr val="0F172A"/>
+                </a:solidFill>
+              </a:defRPr>
+            </a:pPr>
+            <a:r>
+              <a:t>What Next?</a:t>
+            </a:r>
+          </a:p>
+          <a:p>
+            <a:pPr>
+              <a:defRPr sz="1000">
+                <a:solidFill>
+                  <a:srgbClr val="64748B"/>
+                </a:solidFill>
+              </a:defRPr>
+            </a:pPr>
+            <a:r>
+              <a:t>Immediate action</a:t>
+            </a:r>
+          </a:p>
+        </p:txBody>
+      </p:sp>
+      <p:sp>
+        <p:nvSpPr>
+          <p:cNvPr id="22" name="Rounded Rectangle 21"/>
+          <p:cNvSpPr/>
+          <p:nvPr/>
+        </p:nvSpPr>
+        <p:spPr>
+          <a:xfrm>
+            <a:off x="8823960" y="4709160"/>
+            <a:ext cx="2560320" cy="1371600"/>
+          </a:xfrm>
+          <a:prstGeom prst="roundRect">
+            <a:avLst/>
+          </a:prstGeom>
+          <a:solidFill>
+            <a:srgbClr val="F8FAFC"/>
+          </a:solidFill>
+          <a:ln>
+            <a:solidFill>
+              <a:srgbClr val="E2E8F0"/>
+            </a:solidFill>
+          </a:ln>
+        </p:spPr>
+        <p:style>
+          <a:lnRef idx="1">
+            <a:schemeClr val="accent1"/>
+          </a:lnRef>
+          <a:fillRef idx="3">
+            <a:schemeClr val="accent1"/>
+          </a:fillRef>
+          <a:effectRef idx="2">
+            <a:schemeClr val="accent1"/>
+          </a:effectRef>
+          <a:fontRef idx="minor">
+            <a:schemeClr val="lt1"/>
+          </a:fontRef>
+        </p:style>
+        <p:txBody>
+          <a:bodyPr rtlCol="0" anchor="ctr"/>
+          <a:lstStyle/>
+          <a:p>
+            <a:pPr algn="ctr"/>
+          </a:p>
+        </p:txBody>
+      </p:sp>
+      <p:sp>
+        <p:nvSpPr>
+          <p:cNvPr id="23" name="TextBox 22"/>
+          <p:cNvSpPr txBox="1"/>
+          <p:nvPr/>
+        </p:nvSpPr>
+        <p:spPr>
+          <a:xfrm>
+            <a:off x="9006840" y="4818888"/>
+            <a:ext cx="2194560" cy="1097280"/>
+          </a:xfrm>
+          <a:prstGeom prst="rect">
+            <a:avLst/>
+          </a:prstGeom>
+          <a:noFill/>
+        </p:spPr>
+        <p:txBody>
+          <a:bodyPr wrap="square">
+            <a:spAutoFit/>
+          </a:bodyPr>
+          <a:lstStyle/>
+          <a:p>
+            <a:pPr>
+              <a:defRPr sz="950" b="1">
+                <a:solidFill>
+                  <a:srgbClr val="D97706"/>
+                </a:solidFill>
+              </a:defRPr>
+            </a:pPr>
+            <a:r>
+              <a:t>STAGE 08</a:t>
+            </a:r>
+          </a:p>
+          <a:p>
+            <a:pPr>
+              <a:spcBef>
+                <a:spcPts val="200"/>
+              </a:spcBef>
+              <a:defRPr sz="1350" b="1">
+                <a:solidFill>
+                  <a:srgbClr val="0F172A"/>
+                </a:solidFill>
+              </a:defRPr>
+            </a:pPr>
+            <a:r>
+              <a:t>Track Journey</a:t>
+            </a:r>
+          </a:p>
+          <a:p>
+            <a:pPr>
+              <a:defRPr sz="1000">
+                <a:solidFill>
+                  <a:srgbClr val="64748B"/>
+                </a:solidFill>
+              </a:defRPr>
+            </a:pPr>
+            <a:r>
+              <a:t>Lifecycle logs</a:t>
             </a:r>
           </a:p>
         </p:txBody>
@@ -6597,7 +5915,7 @@
               </a:defRPr>
             </a:pPr>
             <a:r>
-              <a:t>FROM IDEA TO IMPACT</a:t>
+              <a:t>PROTOTYPE CAPABILITIES</a:t>
             </a:r>
           </a:p>
         </p:txBody>
@@ -6632,7 +5950,7 @@
               </a:defRPr>
             </a:pPr>
             <a:r>
-              <a:t>The 8-Stage Fundamental Citizen Action Loop</a:t>
+              <a:t>Core Platform Features &amp; Live User Workflows</a:t>
             </a:r>
           </a:p>
         </p:txBody>
@@ -6667,7 +5985,7 @@
               </a:defRPr>
             </a:pPr>
             <a:r>
-              <a:t>The complete journey from citizen problem to approved government disbursement</a:t>
+              <a:t>Demonstrated and tested across 12+ schemes, 8+ public services, and 16+ credentials</a:t>
             </a:r>
           </a:p>
         </p:txBody>
@@ -6702,7 +6020,7 @@
               </a:defRPr>
             </a:pPr>
             <a:r>
-              <a:t>JanMitra: Understand. Discover. Apply.  |  Slide 5 of 10</a:t>
+              <a:t>JanMitra: Understand. Discover. Apply.  |  Slide 5 of 7</a:t>
             </a:r>
           </a:p>
         </p:txBody>
@@ -6716,13 +6034,13 @@
         <p:spPr>
           <a:xfrm>
             <a:off x="731520" y="1737360"/>
-            <a:ext cx="2560320" cy="1828800"/>
+            <a:ext cx="3429000" cy="1920240"/>
           </a:xfrm>
           <a:prstGeom prst="roundRect">
             <a:avLst/>
           </a:prstGeom>
           <a:solidFill>
-            <a:srgbClr val="F8FAFC"/>
+            <a:srgbClr val="FFFFFF"/>
           </a:solidFill>
           <a:ln>
             <a:solidFill>
@@ -6761,7 +6079,7 @@
         <p:spPr>
           <a:xfrm>
             <a:off x="914400" y="1874520"/>
-            <a:ext cx="2194560" cy="1554480"/>
+            <a:ext cx="3063240" cy="1645920"/>
           </a:xfrm>
           <a:prstGeom prst="rect">
             <a:avLst/>
@@ -6775,29 +6093,14 @@
           <a:lstStyle/>
           <a:p>
             <a:pPr>
-              <a:defRPr sz="1000" b="1">
-                <a:solidFill>
-                  <a:srgbClr val="D97706"/>
-                </a:solidFill>
-              </a:defRPr>
-            </a:pPr>
-            <a:r>
-              <a:t>STAGE 01</a:t>
-            </a:r>
-          </a:p>
-          <a:p>
-            <a:pPr>
-              <a:spcBef>
-                <a:spcPts val="400"/>
-              </a:spcBef>
-              <a:defRPr sz="1500" b="1">
-                <a:solidFill>
-                  <a:srgbClr val="0F172A"/>
-                </a:solidFill>
-              </a:defRPr>
-            </a:pPr>
-            <a:r>
-              <a:t>My Situation</a:t>
+              <a:defRPr sz="1400" b="1">
+                <a:solidFill>
+                  <a:srgbClr val="1E3A8A"/>
+                </a:solidFill>
+              </a:defRPr>
+            </a:pPr>
+            <a:r>
+              <a:t>Conversational Discovery</a:t>
             </a:r>
           </a:p>
           <a:p>
@@ -6812,7 +6115,7 @@
               </a:defRPr>
             </a:pPr>
             <a:r>
-              <a:t>Everyday citizen words</a:t>
+              <a:t>Progressive micro-questioning extracts structured profile chips from natural text without overwhelming users with 15-field forms.</a:t>
             </a:r>
           </a:p>
         </p:txBody>
@@ -6825,14 +6128,14 @@
         </p:nvSpPr>
         <p:spPr>
           <a:xfrm>
-            <a:off x="3429000" y="1737360"/>
-            <a:ext cx="2560320" cy="1828800"/>
+            <a:off x="4343400" y="1737360"/>
+            <a:ext cx="3429000" cy="1920240"/>
           </a:xfrm>
           <a:prstGeom prst="roundRect">
             <a:avLst/>
           </a:prstGeom>
           <a:solidFill>
-            <a:srgbClr val="F8FAFC"/>
+            <a:srgbClr val="FFFFFF"/>
           </a:solidFill>
           <a:ln>
             <a:solidFill>
@@ -6870,8 +6173,8 @@
         </p:nvSpPr>
         <p:spPr>
           <a:xfrm>
-            <a:off x="3611880" y="1874520"/>
-            <a:ext cx="2194560" cy="1554480"/>
+            <a:off x="4526280" y="1874520"/>
+            <a:ext cx="3063240" cy="1645920"/>
           </a:xfrm>
           <a:prstGeom prst="rect">
             <a:avLst/>
@@ -6885,29 +6188,14 @@
           <a:lstStyle/>
           <a:p>
             <a:pPr>
-              <a:defRPr sz="1000" b="1">
-                <a:solidFill>
-                  <a:srgbClr val="D97706"/>
-                </a:solidFill>
-              </a:defRPr>
-            </a:pPr>
-            <a:r>
-              <a:t>STAGE 02</a:t>
-            </a:r>
-          </a:p>
-          <a:p>
-            <a:pPr>
-              <a:spcBef>
-                <a:spcPts val="400"/>
-              </a:spcBef>
-              <a:defRPr sz="1500" b="1">
-                <a:solidFill>
-                  <a:srgbClr val="0F172A"/>
-                </a:solidFill>
-              </a:defRPr>
-            </a:pPr>
-            <a:r>
-              <a:t>What Can I Get?</a:t>
+              <a:defRPr sz="1400" b="1">
+                <a:solidFill>
+                  <a:srgbClr val="1E3A8A"/>
+                </a:solidFill>
+              </a:defRPr>
+            </a:pPr>
+            <a:r>
+              <a:t>“What Am I Missing?” Engine</a:t>
             </a:r>
           </a:p>
           <a:p>
@@ -6922,7 +6210,7 @@
               </a:defRPr>
             </a:pPr>
             <a:r>
-              <a:t>Relevant benefits discovered</a:t>
+              <a:t>The core differentiator: quantifies readiness (e.g. 4/6 criteria met) and creates a 1-click bridge to obtain missing certificates.</a:t>
             </a:r>
           </a:p>
         </p:txBody>
@@ -6935,14 +6223,14 @@
         </p:nvSpPr>
         <p:spPr>
           <a:xfrm>
-            <a:off x="6126480" y="1737360"/>
-            <a:ext cx="2560320" cy="1828800"/>
+            <a:off x="7955280" y="1737360"/>
+            <a:ext cx="3429000" cy="1920240"/>
           </a:xfrm>
           <a:prstGeom prst="roundRect">
             <a:avLst/>
           </a:prstGeom>
           <a:solidFill>
-            <a:srgbClr val="F8FAFC"/>
+            <a:srgbClr val="FFFFFF"/>
           </a:solidFill>
           <a:ln>
             <a:solidFill>
@@ -6980,8 +6268,8 @@
         </p:nvSpPr>
         <p:spPr>
           <a:xfrm>
-            <a:off x="6309360" y="1874520"/>
-            <a:ext cx="2194560" cy="1554480"/>
+            <a:off x="8138160" y="1874520"/>
+            <a:ext cx="3063240" cy="1645920"/>
           </a:xfrm>
           <a:prstGeom prst="rect">
             <a:avLst/>
@@ -6995,29 +6283,14 @@
           <a:lstStyle/>
           <a:p>
             <a:pPr>
-              <a:defRPr sz="1000" b="1">
-                <a:solidFill>
-                  <a:srgbClr val="D97706"/>
-                </a:solidFill>
-              </a:defRPr>
-            </a:pPr>
-            <a:r>
-              <a:t>STAGE 03</a:t>
-            </a:r>
-          </a:p>
-          <a:p>
-            <a:pPr>
-              <a:spcBef>
-                <a:spcPts val="400"/>
-              </a:spcBef>
-              <a:defRPr sz="1500" b="1">
-                <a:solidFill>
-                  <a:srgbClr val="0F172A"/>
-                </a:solidFill>
-              </a:defRPr>
-            </a:pPr>
-            <a:r>
-              <a:t>Why Qualify?</a:t>
+              <a:defRPr sz="1400" b="1">
+                <a:solidFill>
+                  <a:srgbClr val="1E3A8A"/>
+                </a:solidFill>
+              </a:defRPr>
+            </a:pPr>
+            <a:r>
+              <a:t>Government Service Navigator</a:t>
             </a:r>
           </a:p>
           <a:p>
@@ -7032,7 +6305,7 @@
               </a:defRPr>
             </a:pPr>
             <a:r>
-              <a:t>Evidence-based rule match</a:t>
+              <a:t>Step-by-step procedural timelines for public certificates (Income, Domicile, Caste), showing exact fees (₹15), SLAs, and Lekhpal field checks.</a:t>
             </a:r>
           </a:p>
         </p:txBody>
@@ -7045,14 +6318,14 @@
         </p:nvSpPr>
         <p:spPr>
           <a:xfrm>
-            <a:off x="8823960" y="1737360"/>
-            <a:ext cx="2560320" cy="1828800"/>
+            <a:off x="731520" y="3840479"/>
+            <a:ext cx="3429000" cy="1920240"/>
           </a:xfrm>
           <a:prstGeom prst="roundRect">
             <a:avLst/>
           </a:prstGeom>
           <a:solidFill>
-            <a:srgbClr val="F8FAFC"/>
+            <a:srgbClr val="FFFFFF"/>
           </a:solidFill>
           <a:ln>
             <a:solidFill>
@@ -7090,8 +6363,8 @@
         </p:nvSpPr>
         <p:spPr>
           <a:xfrm>
-            <a:off x="9006840" y="1874520"/>
-            <a:ext cx="2194560" cy="1554480"/>
+            <a:off x="914400" y="3977639"/>
+            <a:ext cx="3063240" cy="1645920"/>
           </a:xfrm>
           <a:prstGeom prst="rect">
             <a:avLst/>
@@ -7105,29 +6378,14 @@
           <a:lstStyle/>
           <a:p>
             <a:pPr>
-              <a:defRPr sz="1000" b="1">
-                <a:solidFill>
-                  <a:srgbClr val="D97706"/>
-                </a:solidFill>
-              </a:defRPr>
-            </a:pPr>
-            <a:r>
-              <a:t>STAGE 04</a:t>
-            </a:r>
-          </a:p>
-          <a:p>
-            <a:pPr>
-              <a:spcBef>
-                <a:spcPts val="400"/>
-              </a:spcBef>
-              <a:defRPr sz="1500" b="1">
-                <a:solidFill>
-                  <a:srgbClr val="0F172A"/>
-                </a:solidFill>
-              </a:defRPr>
-            </a:pPr>
-            <a:r>
-              <a:t>What Am I Missing?</a:t>
+              <a:defRPr sz="1400" b="1">
+                <a:solidFill>
+                  <a:srgbClr val="1E3A8A"/>
+                </a:solidFill>
+              </a:defRPr>
+            </a:pPr>
+            <a:r>
+              <a:t>Document Intelligence Locker</a:t>
             </a:r>
           </a:p>
           <a:p>
@@ -7142,7 +6400,7 @@
               </a:defRPr>
             </a:pPr>
             <a:r>
-              <a:t>Clear identification of gaps</a:t>
+              <a:t>Digital vault storing credentials with status indicators (Available, Expired, Missing) and simulated preliminary OCR format checks.</a:t>
             </a:r>
           </a:p>
         </p:txBody>
@@ -7155,14 +6413,14 @@
         </p:nvSpPr>
         <p:spPr>
           <a:xfrm>
-            <a:off x="731520" y="3840479"/>
-            <a:ext cx="2560320" cy="1828800"/>
+            <a:off x="4343400" y="3840479"/>
+            <a:ext cx="3429000" cy="1920240"/>
           </a:xfrm>
           <a:prstGeom prst="roundRect">
             <a:avLst/>
           </a:prstGeom>
           <a:solidFill>
-            <a:srgbClr val="F8FAFC"/>
+            <a:srgbClr val="FFFFFF"/>
           </a:solidFill>
           <a:ln>
             <a:solidFill>
@@ -7200,8 +6458,8 @@
         </p:nvSpPr>
         <p:spPr>
           <a:xfrm>
-            <a:off x="914400" y="3977639"/>
-            <a:ext cx="2194560" cy="1554480"/>
+            <a:off x="4526280" y="3977639"/>
+            <a:ext cx="3063240" cy="1645920"/>
           </a:xfrm>
           <a:prstGeom prst="rect">
             <a:avLst/>
@@ -7215,29 +6473,14 @@
           <a:lstStyle/>
           <a:p>
             <a:pPr>
-              <a:defRPr sz="1000" b="1">
-                <a:solidFill>
-                  <a:srgbClr val="D97706"/>
-                </a:solidFill>
-              </a:defRPr>
-            </a:pPr>
-            <a:r>
-              <a:t>STAGE 05</a:t>
-            </a:r>
-          </a:p>
-          <a:p>
-            <a:pPr>
-              <a:spcBef>
-                <a:spcPts val="400"/>
-              </a:spcBef>
-              <a:defRPr sz="1500" b="1">
-                <a:solidFill>
-                  <a:srgbClr val="0F172A"/>
-                </a:solidFill>
-              </a:defRPr>
-            </a:pPr>
-            <a:r>
-              <a:t>What Docs Needed?</a:t>
+              <a:defRPr sz="1400" b="1">
+                <a:solidFill>
+                  <a:srgbClr val="1E3A8A"/>
+                </a:solidFill>
+              </a:defRPr>
+            </a:pPr>
+            <a:r>
+              <a:t>“Explain This” AI Simplifier</a:t>
             </a:r>
           </a:p>
           <a:p>
@@ -7252,7 +6495,7 @@
               </a:defRPr>
             </a:pPr>
             <a:r>
-              <a:t>Vault &amp; criteria audit</a:t>
+              <a:t>Converts dense gazette orders into: (1) Simple language, (2) Action checklist, (3) Common rejection traps, (4) Official source citation.</a:t>
             </a:r>
           </a:p>
         </p:txBody>
@@ -7265,14 +6508,14 @@
         </p:nvSpPr>
         <p:spPr>
           <a:xfrm>
-            <a:off x="3429000" y="3840479"/>
-            <a:ext cx="2560320" cy="1828800"/>
+            <a:off x="7955280" y="3840479"/>
+            <a:ext cx="3429000" cy="1920240"/>
           </a:xfrm>
           <a:prstGeom prst="roundRect">
             <a:avLst/>
           </a:prstGeom>
           <a:solidFill>
-            <a:srgbClr val="F8FAFC"/>
+            <a:srgbClr val="FFFFFF"/>
           </a:solidFill>
           <a:ln>
             <a:solidFill>
@@ -7310,8 +6553,8 @@
         </p:nvSpPr>
         <p:spPr>
           <a:xfrm>
-            <a:off x="3611880" y="3977639"/>
-            <a:ext cx="2194560" cy="1554480"/>
+            <a:off x="8138160" y="3977639"/>
+            <a:ext cx="3063240" cy="1645920"/>
           </a:xfrm>
           <a:prstGeom prst="rect">
             <a:avLst/>
@@ -7325,29 +6568,14 @@
           <a:lstStyle/>
           <a:p>
             <a:pPr>
-              <a:defRPr sz="1000" b="1">
-                <a:solidFill>
-                  <a:srgbClr val="D97706"/>
-                </a:solidFill>
-              </a:defRPr>
-            </a:pPr>
-            <a:r>
-              <a:t>STAGE 06</a:t>
-            </a:r>
-          </a:p>
-          <a:p>
-            <a:pPr>
-              <a:spcBef>
-                <a:spcPts val="400"/>
-              </a:spcBef>
-              <a:defRPr sz="1500" b="1">
-                <a:solidFill>
-                  <a:srgbClr val="0F172A"/>
-                </a:solidFill>
-              </a:defRPr>
-            </a:pPr>
-            <a:r>
-              <a:t>How Do I Get Them?</a:t>
+              <a:defRPr sz="1400" b="1">
+                <a:solidFill>
+                  <a:srgbClr val="1E3A8A"/>
+                </a:solidFill>
+              </a:defRPr>
+            </a:pPr>
+            <a:r>
+              <a:t>Multilingual &amp; Accessible UX</a:t>
             </a:r>
           </a:p>
           <a:p>
@@ -7362,307 +6590,7 @@
               </a:defRPr>
             </a:pPr>
             <a:r>
-              <a:t>Direct service integration</a:t>
-            </a:r>
-          </a:p>
-        </p:txBody>
-      </p:sp>
-      <p:sp>
-        <p:nvSpPr>
-          <p:cNvPr id="18" name="Rounded Rectangle 17"/>
-          <p:cNvSpPr/>
-          <p:nvPr/>
-        </p:nvSpPr>
-        <p:spPr>
-          <a:xfrm>
-            <a:off x="6126480" y="3840479"/>
-            <a:ext cx="2560320" cy="1828800"/>
-          </a:xfrm>
-          <a:prstGeom prst="roundRect">
-            <a:avLst/>
-          </a:prstGeom>
-          <a:solidFill>
-            <a:srgbClr val="F8FAFC"/>
-          </a:solidFill>
-          <a:ln>
-            <a:solidFill>
-              <a:srgbClr val="E2E8F0"/>
-            </a:solidFill>
-          </a:ln>
-        </p:spPr>
-        <p:style>
-          <a:lnRef idx="1">
-            <a:schemeClr val="accent1"/>
-          </a:lnRef>
-          <a:fillRef idx="3">
-            <a:schemeClr val="accent1"/>
-          </a:fillRef>
-          <a:effectRef idx="2">
-            <a:schemeClr val="accent1"/>
-          </a:effectRef>
-          <a:fontRef idx="minor">
-            <a:schemeClr val="lt1"/>
-          </a:fontRef>
-        </p:style>
-        <p:txBody>
-          <a:bodyPr rtlCol="0" anchor="ctr"/>
-          <a:lstStyle/>
-          <a:p>
-            <a:pPr algn="ctr"/>
-          </a:p>
-        </p:txBody>
-      </p:sp>
-      <p:sp>
-        <p:nvSpPr>
-          <p:cNvPr id="19" name="TextBox 18"/>
-          <p:cNvSpPr txBox="1"/>
-          <p:nvPr/>
-        </p:nvSpPr>
-        <p:spPr>
-          <a:xfrm>
-            <a:off x="6309360" y="3977639"/>
-            <a:ext cx="2194560" cy="1554480"/>
-          </a:xfrm>
-          <a:prstGeom prst="rect">
-            <a:avLst/>
-          </a:prstGeom>
-          <a:noFill/>
-        </p:spPr>
-        <p:txBody>
-          <a:bodyPr wrap="square">
-            <a:spAutoFit/>
-          </a:bodyPr>
-          <a:lstStyle/>
-          <a:p>
-            <a:pPr>
-              <a:defRPr sz="1000" b="1">
-                <a:solidFill>
-                  <a:srgbClr val="D97706"/>
-                </a:solidFill>
-              </a:defRPr>
-            </a:pPr>
-            <a:r>
-              <a:t>STAGE 07</a:t>
-            </a:r>
-          </a:p>
-          <a:p>
-            <a:pPr>
-              <a:spcBef>
-                <a:spcPts val="400"/>
-              </a:spcBef>
-              <a:defRPr sz="1500" b="1">
-                <a:solidFill>
-                  <a:srgbClr val="0F172A"/>
-                </a:solidFill>
-              </a:defRPr>
-            </a:pPr>
-            <a:r>
-              <a:t>What Next?</a:t>
-            </a:r>
-          </a:p>
-          <a:p>
-            <a:pPr>
-              <a:spcBef>
-                <a:spcPts val="400"/>
-              </a:spcBef>
-              <a:defRPr sz="1100">
-                <a:solidFill>
-                  <a:srgbClr val="64748B"/>
-                </a:solidFill>
-              </a:defRPr>
-            </a:pPr>
-            <a:r>
-              <a:t>Immediate single next action</a:t>
-            </a:r>
-          </a:p>
-        </p:txBody>
-      </p:sp>
-      <p:sp>
-        <p:nvSpPr>
-          <p:cNvPr id="20" name="Rounded Rectangle 19"/>
-          <p:cNvSpPr/>
-          <p:nvPr/>
-        </p:nvSpPr>
-        <p:spPr>
-          <a:xfrm>
-            <a:off x="8823960" y="3840479"/>
-            <a:ext cx="2560320" cy="1828800"/>
-          </a:xfrm>
-          <a:prstGeom prst="roundRect">
-            <a:avLst/>
-          </a:prstGeom>
-          <a:solidFill>
-            <a:srgbClr val="F8FAFC"/>
-          </a:solidFill>
-          <a:ln>
-            <a:solidFill>
-              <a:srgbClr val="E2E8F0"/>
-            </a:solidFill>
-          </a:ln>
-        </p:spPr>
-        <p:style>
-          <a:lnRef idx="1">
-            <a:schemeClr val="accent1"/>
-          </a:lnRef>
-          <a:fillRef idx="3">
-            <a:schemeClr val="accent1"/>
-          </a:fillRef>
-          <a:effectRef idx="2">
-            <a:schemeClr val="accent1"/>
-          </a:effectRef>
-          <a:fontRef idx="minor">
-            <a:schemeClr val="lt1"/>
-          </a:fontRef>
-        </p:style>
-        <p:txBody>
-          <a:bodyPr rtlCol="0" anchor="ctr"/>
-          <a:lstStyle/>
-          <a:p>
-            <a:pPr algn="ctr"/>
-          </a:p>
-        </p:txBody>
-      </p:sp>
-      <p:sp>
-        <p:nvSpPr>
-          <p:cNvPr id="21" name="TextBox 20"/>
-          <p:cNvSpPr txBox="1"/>
-          <p:nvPr/>
-        </p:nvSpPr>
-        <p:spPr>
-          <a:xfrm>
-            <a:off x="9006840" y="3977639"/>
-            <a:ext cx="2194560" cy="1554480"/>
-          </a:xfrm>
-          <a:prstGeom prst="rect">
-            <a:avLst/>
-          </a:prstGeom>
-          <a:noFill/>
-        </p:spPr>
-        <p:txBody>
-          <a:bodyPr wrap="square">
-            <a:spAutoFit/>
-          </a:bodyPr>
-          <a:lstStyle/>
-          <a:p>
-            <a:pPr>
-              <a:defRPr sz="1000" b="1">
-                <a:solidFill>
-                  <a:srgbClr val="D97706"/>
-                </a:solidFill>
-              </a:defRPr>
-            </a:pPr>
-            <a:r>
-              <a:t>STAGE 08</a:t>
-            </a:r>
-          </a:p>
-          <a:p>
-            <a:pPr>
-              <a:spcBef>
-                <a:spcPts val="400"/>
-              </a:spcBef>
-              <a:defRPr sz="1500" b="1">
-                <a:solidFill>
-                  <a:srgbClr val="0F172A"/>
-                </a:solidFill>
-              </a:defRPr>
-            </a:pPr>
-            <a:r>
-              <a:t>Track Journey</a:t>
-            </a:r>
-          </a:p>
-          <a:p>
-            <a:pPr>
-              <a:spcBef>
-                <a:spcPts val="400"/>
-              </a:spcBef>
-              <a:defRPr sz="1100">
-                <a:solidFill>
-                  <a:srgbClr val="64748B"/>
-                </a:solidFill>
-              </a:defRPr>
-            </a:pPr>
-            <a:r>
-              <a:t>Status &amp; milestone logs</a:t>
-            </a:r>
-          </a:p>
-        </p:txBody>
-      </p:sp>
-      <p:sp>
-        <p:nvSpPr>
-          <p:cNvPr id="22" name="Rounded Rectangle 21"/>
-          <p:cNvSpPr/>
-          <p:nvPr/>
-        </p:nvSpPr>
-        <p:spPr>
-          <a:xfrm>
-            <a:off x="731520" y="5577840"/>
-            <a:ext cx="10698480" cy="685800"/>
-          </a:xfrm>
-          <a:prstGeom prst="roundRect">
-            <a:avLst/>
-          </a:prstGeom>
-          <a:solidFill>
-            <a:srgbClr val="F0FDF4"/>
-          </a:solidFill>
-          <a:ln>
-            <a:solidFill>
-              <a:srgbClr val="86EFAC"/>
-            </a:solidFill>
-          </a:ln>
-        </p:spPr>
-        <p:style>
-          <a:lnRef idx="1">
-            <a:schemeClr val="accent1"/>
-          </a:lnRef>
-          <a:fillRef idx="3">
-            <a:schemeClr val="accent1"/>
-          </a:fillRef>
-          <a:effectRef idx="2">
-            <a:schemeClr val="accent1"/>
-          </a:effectRef>
-          <a:fontRef idx="minor">
-            <a:schemeClr val="lt1"/>
-          </a:fontRef>
-        </p:style>
-        <p:txBody>
-          <a:bodyPr rtlCol="0" anchor="ctr"/>
-          <a:lstStyle/>
-          <a:p>
-            <a:pPr algn="ctr"/>
-          </a:p>
-        </p:txBody>
-      </p:sp>
-      <p:sp>
-        <p:nvSpPr>
-          <p:cNvPr id="23" name="TextBox 22"/>
-          <p:cNvSpPr txBox="1"/>
-          <p:nvPr/>
-        </p:nvSpPr>
-        <p:spPr>
-          <a:xfrm>
-            <a:off x="822960" y="5623560"/>
-            <a:ext cx="10515600" cy="594360"/>
-          </a:xfrm>
-          <a:prstGeom prst="rect">
-            <a:avLst/>
-          </a:prstGeom>
-          <a:noFill/>
-        </p:spPr>
-        <p:txBody>
-          <a:bodyPr wrap="none">
-            <a:spAutoFit/>
-          </a:bodyPr>
-          <a:lstStyle/>
-          <a:p>
-            <a:pPr>
-              <a:defRPr sz="1050" b="1">
-                <a:solidFill>
-                  <a:srgbClr val="059669"/>
-                </a:solidFill>
-              </a:defRPr>
-            </a:pPr>
-            <a:r>
-              <a:t>ANSWERS 5 ESSENTIAL CITIZEN QUESTIONS:  1. What is relevant?  •  2. Why qualify?  •  3. What is missing?  •  4. What exact steps?  •  5. What do I do next?</a:t>
+              <a:t>Seamless switching between English &amp; Hindi, voice input simulation, high-contrast readable cards, and mobile-first responsive bottom navigation.</a:t>
             </a:r>
           </a:p>
         </p:txBody>
@@ -7715,7 +6643,7 @@
               </a:defRPr>
             </a:pPr>
             <a:r>
-              <a:t>PROTOTYPE CAPABILITIES</a:t>
+              <a:t>ARCHITECTURE &amp; TRUST ENGINE</a:t>
             </a:r>
           </a:p>
         </p:txBody>
@@ -7750,7 +6678,7 @@
               </a:defRPr>
             </a:pPr>
             <a:r>
-              <a:t>Core Platform Features &amp; Functionality</a:t>
+              <a:t>Technical Stack, Evidence-First Provenance &amp; DPI Integration</a:t>
             </a:r>
           </a:p>
         </p:txBody>
@@ -7785,7 +6713,7 @@
               </a:defRPr>
             </a:pPr>
             <a:r>
-              <a:t>Engineered for high trust, intuitive clarity, and zero bureaucratic friction</a:t>
+              <a:t>Engineered for speed, mathematical correctness, privacy sovereignty, and national scale</a:t>
             </a:r>
           </a:p>
         </p:txBody>
@@ -7820,7 +6748,7 @@
               </a:defRPr>
             </a:pPr>
             <a:r>
-              <a:t>JanMitra: Understand. Discover. Apply.  |  Slide 6 of 10</a:t>
+              <a:t>JanMitra: Understand. Discover. Apply.  |  Slide 6 of 7</a:t>
             </a:r>
           </a:p>
         </p:txBody>
@@ -7834,13 +6762,13 @@
         <p:spPr>
           <a:xfrm>
             <a:off x="731520" y="1737360"/>
-            <a:ext cx="3429000" cy="1920240"/>
+            <a:ext cx="5120640" cy="1920240"/>
           </a:xfrm>
           <a:prstGeom prst="roundRect">
             <a:avLst/>
           </a:prstGeom>
           <a:solidFill>
-            <a:srgbClr val="FFFFFF"/>
+            <a:srgbClr val="F8FAFC"/>
           </a:solidFill>
           <a:ln>
             <a:solidFill>
@@ -7878,8 +6806,8 @@
         </p:nvSpPr>
         <p:spPr>
           <a:xfrm>
-            <a:off x="914400" y="1874520"/>
-            <a:ext cx="3063240" cy="1645920"/>
+            <a:off x="1005840" y="1874520"/>
+            <a:ext cx="4572000" cy="1645920"/>
           </a:xfrm>
           <a:prstGeom prst="rect">
             <a:avLst/>
@@ -7893,14 +6821,14 @@
           <a:lstStyle/>
           <a:p>
             <a:pPr>
-              <a:defRPr sz="1400" b="1">
-                <a:solidFill>
-                  <a:srgbClr val="1E3A8A"/>
-                </a:solidFill>
-              </a:defRPr>
-            </a:pPr>
-            <a:r>
-              <a:t>Conversational Discovery</a:t>
+              <a:defRPr sz="1450" b="1">
+                <a:solidFill>
+                  <a:srgbClr val="D97706"/>
+                </a:solidFill>
+              </a:defRPr>
+            </a:pPr>
+            <a:r>
+              <a:t>Technical Stack &amp; Architecture</a:t>
             </a:r>
           </a:p>
           <a:p>
@@ -7908,14 +6836,26 @@
               <a:spcBef>
                 <a:spcPts val="400"/>
               </a:spcBef>
-              <a:defRPr sz="1100">
+              <a:defRPr sz="1050">
                 <a:solidFill>
                   <a:srgbClr val="64748B"/>
                 </a:solidFill>
               </a:defRPr>
             </a:pPr>
             <a:r>
-              <a:t>Extracts structured profile chips from plain human sentences. Progressive micro-questioning asks 1-2 missing parameters rather than long 15-question forms.</a:t>
+              <a:t>• React 18 + TypeScript + Vite + Tailwind CSS</a:t>
+            </a:r>
+            <a:br/>
+            <a:r>
+              <a:t>• Deterministic Matching Engine: Real-time rule evaluation (Age, Income, Domicile)</a:t>
+            </a:r>
+            <a:br/>
+            <a:r>
+              <a:t>• Constrained Statutory NLP for plain-language translations</a:t>
+            </a:r>
+            <a:br/>
+            <a:r>
+              <a:t>• Sub-second latency with responsive mobile-first bottom navigation</a:t>
             </a:r>
           </a:p>
         </p:txBody>
@@ -7928,14 +6868,14 @@
         </p:nvSpPr>
         <p:spPr>
           <a:xfrm>
-            <a:off x="4343400" y="1737360"/>
-            <a:ext cx="3429000" cy="1920240"/>
+            <a:off x="6126480" y="1737360"/>
+            <a:ext cx="5120640" cy="1920240"/>
           </a:xfrm>
           <a:prstGeom prst="roundRect">
             <a:avLst/>
           </a:prstGeom>
           <a:solidFill>
-            <a:srgbClr val="FFFFFF"/>
+            <a:srgbClr val="F8FAFC"/>
           </a:solidFill>
           <a:ln>
             <a:solidFill>
@@ -7973,8 +6913,8 @@
         </p:nvSpPr>
         <p:spPr>
           <a:xfrm>
-            <a:off x="4526280" y="1874520"/>
-            <a:ext cx="3063240" cy="1645920"/>
+            <a:off x="6400800" y="1874520"/>
+            <a:ext cx="4572000" cy="1645920"/>
           </a:xfrm>
           <a:prstGeom prst="rect">
             <a:avLst/>
@@ -7988,14 +6928,14 @@
           <a:lstStyle/>
           <a:p>
             <a:pPr>
-              <a:defRPr sz="1400" b="1">
-                <a:solidFill>
-                  <a:srgbClr val="1E3A8A"/>
-                </a:solidFill>
-              </a:defRPr>
-            </a:pPr>
-            <a:r>
-              <a:t>“What Am I Missing?” Feature</a:t>
+              <a:defRPr sz="1450" b="1">
+                <a:solidFill>
+                  <a:srgbClr val="D97706"/>
+                </a:solidFill>
+              </a:defRPr>
+            </a:pPr>
+            <a:r>
+              <a:t>Citizen Data Sovereignty (Privacy-First)</a:t>
             </a:r>
           </a:p>
           <a:p>
@@ -8003,14 +6943,26 @@
               <a:spcBef>
                 <a:spcPts val="400"/>
               </a:spcBef>
-              <a:defRPr sz="1100">
+              <a:defRPr sz="1050">
                 <a:solidFill>
                   <a:srgbClr val="64748B"/>
                 </a:solidFill>
               </a:defRPr>
             </a:pPr>
             <a:r>
-              <a:t>One of JanMitra's most important capabilities: quantifies progress (e.g. 4/6 criteria met) and creates a 1-click bridge to obtain missing certificates.</a:t>
+              <a:t>• 100% Client-Side Local Vault (LocalStorage)</a:t>
+            </a:r>
+            <a:br/>
+            <a:r>
+              <a:t>• Zero cloud tracking or monetization of citizen documents</a:t>
+            </a:r>
+            <a:br/>
+            <a:r>
+              <a:t>• 1-Click JSON Vault Data Export for citizen records</a:t>
+            </a:r>
+            <a:br/>
+            <a:r>
+              <a:t>• Instant complete data wipe button on device</a:t>
             </a:r>
           </a:p>
         </p:txBody>
@@ -8023,14 +6975,14 @@
         </p:nvSpPr>
         <p:spPr>
           <a:xfrm>
-            <a:off x="7955280" y="1737360"/>
-            <a:ext cx="3429000" cy="1920240"/>
+            <a:off x="731520" y="3931920"/>
+            <a:ext cx="5120640" cy="1920240"/>
           </a:xfrm>
           <a:prstGeom prst="roundRect">
             <a:avLst/>
           </a:prstGeom>
           <a:solidFill>
-            <a:srgbClr val="FFFFFF"/>
+            <a:srgbClr val="F8FAFC"/>
           </a:solidFill>
           <a:ln>
             <a:solidFill>
@@ -8068,8 +7020,8 @@
         </p:nvSpPr>
         <p:spPr>
           <a:xfrm>
-            <a:off x="8138160" y="1874520"/>
-            <a:ext cx="3063240" cy="1645920"/>
+            <a:off x="1005840" y="4069080"/>
+            <a:ext cx="4572000" cy="1645920"/>
           </a:xfrm>
           <a:prstGeom prst="rect">
             <a:avLst/>
@@ -8083,14 +7035,14 @@
           <a:lstStyle/>
           <a:p>
             <a:pPr>
-              <a:defRPr sz="1400" b="1">
-                <a:solidFill>
-                  <a:srgbClr val="1E3A8A"/>
-                </a:solidFill>
-              </a:defRPr>
-            </a:pPr>
-            <a:r>
-              <a:t>Government Service Navigator</a:t>
+              <a:defRPr sz="1450" b="1">
+                <a:solidFill>
+                  <a:srgbClr val="D97706"/>
+                </a:solidFill>
+              </a:defRPr>
+            </a:pPr>
+            <a:r>
+              <a:t>Evidence-First Provenance &amp; Trust</a:t>
             </a:r>
           </a:p>
           <a:p>
@@ -8098,14 +7050,26 @@
               <a:spcBef>
                 <a:spcPts val="400"/>
               </a:spcBef>
-              <a:defRPr sz="1100">
+              <a:defRPr sz="1050">
                 <a:solidFill>
                   <a:srgbClr val="64748B"/>
                 </a:solidFill>
               </a:defRPr>
             </a:pPr>
             <a:r>
-              <a:t>Deep-dive procedural timelines for public services (Aay Praman Patra, Niwas, Ration Card), covering exact fees (₹15), SLAs, and Lekhpal field checks.</a:t>
+              <a:t>• “Why is JanMitra saying this?” expandable audit drawers</a:t>
+            </a:r>
+            <a:br/>
+            <a:r>
+              <a:t>• Every claim cites Issuing Department, Gazette Order &amp; Date</a:t>
+            </a:r>
+            <a:br/>
+            <a:r>
+              <a:t>• Service Dependency Graph mapping prerequisite chains</a:t>
+            </a:r>
+            <a:br/>
+            <a:r>
+              <a:t>• Strict ethical UX: Never falsely claims 'JanMitra approved you'</a:t>
             </a:r>
           </a:p>
         </p:txBody>
@@ -8118,14 +7082,14 @@
         </p:nvSpPr>
         <p:spPr>
           <a:xfrm>
-            <a:off x="731520" y="3840479"/>
-            <a:ext cx="3429000" cy="1920240"/>
+            <a:off x="6126480" y="3931920"/>
+            <a:ext cx="5120640" cy="1920240"/>
           </a:xfrm>
           <a:prstGeom prst="roundRect">
             <a:avLst/>
           </a:prstGeom>
           <a:solidFill>
-            <a:srgbClr val="FFFFFF"/>
+            <a:srgbClr val="F8FAFC"/>
           </a:solidFill>
           <a:ln>
             <a:solidFill>
@@ -8163,8 +7127,8 @@
         </p:nvSpPr>
         <p:spPr>
           <a:xfrm>
-            <a:off x="914400" y="3977639"/>
-            <a:ext cx="3063240" cy="1645920"/>
+            <a:off x="6400800" y="4069080"/>
+            <a:ext cx="4572000" cy="1645920"/>
           </a:xfrm>
           <a:prstGeom prst="rect">
             <a:avLst/>
@@ -8178,14 +7142,14 @@
           <a:lstStyle/>
           <a:p>
             <a:pPr>
-              <a:defRPr sz="1400" b="1">
-                <a:solidFill>
-                  <a:srgbClr val="1E3A8A"/>
-                </a:solidFill>
-              </a:defRPr>
-            </a:pPr>
-            <a:r>
-              <a:t>Document Intelligence Locker</a:t>
+              <a:defRPr sz="1450" b="1">
+                <a:solidFill>
+                  <a:srgbClr val="D97706"/>
+                </a:solidFill>
+              </a:defRPr>
+            </a:pPr>
+            <a:r>
+              <a:t>Feasibility &amp; India Stack Roadmap</a:t>
             </a:r>
           </a:p>
           <a:p>
@@ -8193,204 +7157,26 @@
               <a:spcBef>
                 <a:spcPts val="400"/>
               </a:spcBef>
-              <a:defRPr sz="1100">
+              <a:defRPr sz="1050">
                 <a:solidFill>
                   <a:srgbClr val="64748B"/>
                 </a:solidFill>
               </a:defRPr>
             </a:pPr>
             <a:r>
-              <a:t>Digital vault storing credentials with status indicators (Available, Expired, Missing). Simulated OCR scan evaluates readiness without making false legal claims.</a:t>
-            </a:r>
-          </a:p>
-        </p:txBody>
-      </p:sp>
-      <p:sp>
-        <p:nvSpPr>
-          <p:cNvPr id="14" name="Rounded Rectangle 13"/>
-          <p:cNvSpPr/>
-          <p:nvPr/>
-        </p:nvSpPr>
-        <p:spPr>
-          <a:xfrm>
-            <a:off x="4343400" y="3840479"/>
-            <a:ext cx="3429000" cy="1920240"/>
-          </a:xfrm>
-          <a:prstGeom prst="roundRect">
-            <a:avLst/>
-          </a:prstGeom>
-          <a:solidFill>
-            <a:srgbClr val="FFFFFF"/>
-          </a:solidFill>
-          <a:ln>
-            <a:solidFill>
-              <a:srgbClr val="E2E8F0"/>
-            </a:solidFill>
-          </a:ln>
-        </p:spPr>
-        <p:style>
-          <a:lnRef idx="1">
-            <a:schemeClr val="accent1"/>
-          </a:lnRef>
-          <a:fillRef idx="3">
-            <a:schemeClr val="accent1"/>
-          </a:fillRef>
-          <a:effectRef idx="2">
-            <a:schemeClr val="accent1"/>
-          </a:effectRef>
-          <a:fontRef idx="minor">
-            <a:schemeClr val="lt1"/>
-          </a:fontRef>
-        </p:style>
-        <p:txBody>
-          <a:bodyPr rtlCol="0" anchor="ctr"/>
-          <a:lstStyle/>
-          <a:p>
-            <a:pPr algn="ctr"/>
-          </a:p>
-        </p:txBody>
-      </p:sp>
-      <p:sp>
-        <p:nvSpPr>
-          <p:cNvPr id="15" name="TextBox 14"/>
-          <p:cNvSpPr txBox="1"/>
-          <p:nvPr/>
-        </p:nvSpPr>
-        <p:spPr>
-          <a:xfrm>
-            <a:off x="4526280" y="3977639"/>
-            <a:ext cx="3063240" cy="1645920"/>
-          </a:xfrm>
-          <a:prstGeom prst="rect">
-            <a:avLst/>
-          </a:prstGeom>
-          <a:noFill/>
-        </p:spPr>
-        <p:txBody>
-          <a:bodyPr wrap="square">
-            <a:spAutoFit/>
-          </a:bodyPr>
-          <a:lstStyle/>
-          <a:p>
-            <a:pPr>
-              <a:defRPr sz="1400" b="1">
-                <a:solidFill>
-                  <a:srgbClr val="1E3A8A"/>
-                </a:solidFill>
-              </a:defRPr>
-            </a:pPr>
-            <a:r>
-              <a:t>“Explain This” AI Simplifier</a:t>
-            </a:r>
-          </a:p>
-          <a:p>
-            <a:pPr>
-              <a:spcBef>
-                <a:spcPts val="400"/>
-              </a:spcBef>
-              <a:defRPr sz="1100">
-                <a:solidFill>
-                  <a:srgbClr val="64748B"/>
-                </a:solidFill>
-              </a:defRPr>
-            </a:pPr>
-            <a:r>
-              <a:t>Converts dense gazette orders and circular clauses into: (1) Simple language, (2) Action checklist, (3) Common rejection traps, (4) Official source citation.</a:t>
-            </a:r>
-          </a:p>
-        </p:txBody>
-      </p:sp>
-      <p:sp>
-        <p:nvSpPr>
-          <p:cNvPr id="16" name="Rounded Rectangle 15"/>
-          <p:cNvSpPr/>
-          <p:nvPr/>
-        </p:nvSpPr>
-        <p:spPr>
-          <a:xfrm>
-            <a:off x="7955280" y="3840479"/>
-            <a:ext cx="3429000" cy="1920240"/>
-          </a:xfrm>
-          <a:prstGeom prst="roundRect">
-            <a:avLst/>
-          </a:prstGeom>
-          <a:solidFill>
-            <a:srgbClr val="FFFFFF"/>
-          </a:solidFill>
-          <a:ln>
-            <a:solidFill>
-              <a:srgbClr val="E2E8F0"/>
-            </a:solidFill>
-          </a:ln>
-        </p:spPr>
-        <p:style>
-          <a:lnRef idx="1">
-            <a:schemeClr val="accent1"/>
-          </a:lnRef>
-          <a:fillRef idx="3">
-            <a:schemeClr val="accent1"/>
-          </a:fillRef>
-          <a:effectRef idx="2">
-            <a:schemeClr val="accent1"/>
-          </a:effectRef>
-          <a:fontRef idx="minor">
-            <a:schemeClr val="lt1"/>
-          </a:fontRef>
-        </p:style>
-        <p:txBody>
-          <a:bodyPr rtlCol="0" anchor="ctr"/>
-          <a:lstStyle/>
-          <a:p>
-            <a:pPr algn="ctr"/>
-          </a:p>
-        </p:txBody>
-      </p:sp>
-      <p:sp>
-        <p:nvSpPr>
-          <p:cNvPr id="17" name="TextBox 16"/>
-          <p:cNvSpPr txBox="1"/>
-          <p:nvPr/>
-        </p:nvSpPr>
-        <p:spPr>
-          <a:xfrm>
-            <a:off x="8138160" y="3977639"/>
-            <a:ext cx="3063240" cy="1645920"/>
-          </a:xfrm>
-          <a:prstGeom prst="rect">
-            <a:avLst/>
-          </a:prstGeom>
-          <a:noFill/>
-        </p:spPr>
-        <p:txBody>
-          <a:bodyPr wrap="square">
-            <a:spAutoFit/>
-          </a:bodyPr>
-          <a:lstStyle/>
-          <a:p>
-            <a:pPr>
-              <a:defRPr sz="1400" b="1">
-                <a:solidFill>
-                  <a:srgbClr val="1E3A8A"/>
-                </a:solidFill>
-              </a:defRPr>
-            </a:pPr>
-            <a:r>
-              <a:t>Multilingual &amp; Accessible UX</a:t>
-            </a:r>
-          </a:p>
-          <a:p>
-            <a:pPr>
-              <a:spcBef>
-                <a:spcPts val="400"/>
-              </a:spcBef>
-              <a:defRPr sz="1100">
-                <a:solidFill>
-                  <a:srgbClr val="64748B"/>
-                </a:solidFill>
-              </a:defRPr>
-            </a:pPr>
-            <a:r>
-              <a:t>Seamless switching between English &amp; Hindi, voice input simulation, high-contrast readable cards, and mobile-first responsive architecture.</a:t>
+              <a:t>• Phase 1 (Complete): 12 schemes, 8 services, 4 live scenarios</a:t>
+            </a:r>
+            <a:br/>
+            <a:r>
+              <a:t>• Phase 2 (DPI Integration): DigiLocker fetch &amp; UMANG registry</a:t>
+            </a:r>
+            <a:br/>
+            <a:r>
+              <a:t>• Phase 3 (Assisted Access): CSC / Jan Seva Kendra operator mode</a:t>
+            </a:r>
+            <a:br/>
+            <a:r>
+              <a:t>• Zero-Server Overhead: Edge-hosted static architecture</a:t>
             </a:r>
           </a:p>
         </p:txBody>
@@ -8415,165 +7201,23 @@
       <p:grpSpPr/>
       <p:sp>
         <p:nvSpPr>
-          <p:cNvPr id="2" name="TextBox 1"/>
-          <p:cNvSpPr txBox="1"/>
-          <p:nvPr/>
-        </p:nvSpPr>
-        <p:spPr>
-          <a:xfrm>
-            <a:off x="731520" y="365760"/>
-            <a:ext cx="10698480" cy="320040"/>
+          <p:cNvPr id="2" name="Rectangle 1"/>
+          <p:cNvSpPr/>
+          <p:nvPr/>
+        </p:nvSpPr>
+        <p:spPr>
+          <a:xfrm>
+            <a:off x="0" y="0"/>
+            <a:ext cx="12191695" cy="6858000"/>
           </a:xfrm>
           <a:prstGeom prst="rect">
             <a:avLst/>
           </a:prstGeom>
-          <a:noFill/>
-        </p:spPr>
-        <p:txBody>
-          <a:bodyPr wrap="square">
-            <a:spAutoFit/>
-          </a:bodyPr>
-          <a:lstStyle/>
-          <a:p>
-            <a:pPr>
-              <a:defRPr sz="1100" b="1">
-                <a:solidFill>
-                  <a:srgbClr val="D97706"/>
-                </a:solidFill>
-              </a:defRPr>
-            </a:pPr>
-            <a:r>
-              <a:t>SYSTEM ARCHITECTURE</a:t>
-            </a:r>
-          </a:p>
-        </p:txBody>
-      </p:sp>
-      <p:sp>
-        <p:nvSpPr>
-          <p:cNvPr id="3" name="TextBox 2"/>
-          <p:cNvSpPr txBox="1"/>
-          <p:nvPr/>
-        </p:nvSpPr>
-        <p:spPr>
-          <a:xfrm>
-            <a:off x="731520" y="685800"/>
-            <a:ext cx="10698480" cy="502920"/>
-          </a:xfrm>
-          <a:prstGeom prst="rect">
-            <a:avLst/>
-          </a:prstGeom>
-          <a:noFill/>
-        </p:spPr>
-        <p:txBody>
-          <a:bodyPr wrap="square">
-            <a:spAutoFit/>
-          </a:bodyPr>
-          <a:lstStyle/>
-          <a:p>
-            <a:pPr>
-              <a:defRPr sz="2200" b="1">
-                <a:solidFill>
-                  <a:srgbClr val="0F172A"/>
-                </a:solidFill>
-              </a:defRPr>
-            </a:pPr>
-            <a:r>
-              <a:t>Modern, Modular, and Privacy-Preserving Stack</a:t>
-            </a:r>
-          </a:p>
-        </p:txBody>
-      </p:sp>
-      <p:sp>
-        <p:nvSpPr>
-          <p:cNvPr id="4" name="TextBox 3"/>
-          <p:cNvSpPr txBox="1"/>
-          <p:nvPr/>
-        </p:nvSpPr>
-        <p:spPr>
-          <a:xfrm>
-            <a:off x="731520" y="1188720"/>
-            <a:ext cx="10698480" cy="365760"/>
-          </a:xfrm>
-          <a:prstGeom prst="rect">
-            <a:avLst/>
-          </a:prstGeom>
-          <a:noFill/>
-        </p:spPr>
-        <p:txBody>
-          <a:bodyPr wrap="square">
-            <a:spAutoFit/>
-          </a:bodyPr>
-          <a:lstStyle/>
-          <a:p>
-            <a:pPr>
-              <a:defRPr sz="1200">
-                <a:solidFill>
-                  <a:srgbClr val="64748B"/>
-                </a:solidFill>
-              </a:defRPr>
-            </a:pPr>
-            <a:r>
-              <a:t>Engineered for speed, mathematical correctness, and complete citizen data sovereignty</a:t>
-            </a:r>
-          </a:p>
-        </p:txBody>
-      </p:sp>
-      <p:sp>
-        <p:nvSpPr>
-          <p:cNvPr id="5" name="TextBox 4"/>
-          <p:cNvSpPr txBox="1"/>
-          <p:nvPr/>
-        </p:nvSpPr>
-        <p:spPr>
-          <a:xfrm>
-            <a:off x="731520" y="6446520"/>
-            <a:ext cx="10698480" cy="274320"/>
-          </a:xfrm>
-          <a:prstGeom prst="rect">
-            <a:avLst/>
-          </a:prstGeom>
-          <a:noFill/>
-        </p:spPr>
-        <p:txBody>
-          <a:bodyPr wrap="none">
-            <a:spAutoFit/>
-          </a:bodyPr>
-          <a:lstStyle/>
-          <a:p>
-            <a:pPr>
-              <a:defRPr sz="950">
-                <a:solidFill>
-                  <a:srgbClr val="94A3B8"/>
-                </a:solidFill>
-              </a:defRPr>
-            </a:pPr>
-            <a:r>
-              <a:t>JanMitra: Understand. Discover. Apply.  |  Slide 7 of 10</a:t>
-            </a:r>
-          </a:p>
-        </p:txBody>
-      </p:sp>
-      <p:sp>
-        <p:nvSpPr>
-          <p:cNvPr id="6" name="Rounded Rectangle 5"/>
-          <p:cNvSpPr/>
-          <p:nvPr/>
-        </p:nvSpPr>
-        <p:spPr>
-          <a:xfrm>
-            <a:off x="731520" y="1737360"/>
-            <a:ext cx="10698480" cy="960120"/>
-          </a:xfrm>
-          <a:prstGeom prst="roundRect">
-            <a:avLst/>
-          </a:prstGeom>
           <a:solidFill>
-            <a:srgbClr val="FFFFFF"/>
+            <a:srgbClr val="0F172A"/>
           </a:solidFill>
           <a:ln>
-            <a:solidFill>
-              <a:srgbClr val="E2E8F0"/>
-            </a:solidFill>
+            <a:noFill/>
           </a:ln>
         </p:spPr>
         <p:style>
@@ -8600,14 +7244,14 @@
       </p:sp>
       <p:sp>
         <p:nvSpPr>
-          <p:cNvPr id="7" name="TextBox 6"/>
+          <p:cNvPr id="3" name="TextBox 2"/>
           <p:cNvSpPr txBox="1"/>
           <p:nvPr/>
         </p:nvSpPr>
         <p:spPr>
           <a:xfrm>
-            <a:off x="914400" y="1847088"/>
-            <a:ext cx="10332720" cy="731520"/>
+            <a:off x="1097280" y="731520"/>
+            <a:ext cx="9966960" cy="1097280"/>
           </a:xfrm>
           <a:prstGeom prst="rect">
             <a:avLst/>
@@ -8621,58 +7265,53 @@
           <a:lstStyle/>
           <a:p>
             <a:pPr>
-              <a:defRPr sz="1300" b="1">
-                <a:solidFill>
-                  <a:srgbClr val="1E3A8A"/>
-                </a:solidFill>
-              </a:defRPr>
-            </a:pPr>
-            <a:r>
-              <a:t>Frontend &amp; UI Engine:  </a:t>
-            </a:r>
-            <a:r>
-              <a:rPr b="1">
-                <a:solidFill>
-                  <a:srgbClr val="D97706"/>
-                </a:solidFill>
-              </a:rPr>
-              <a:t>React 18 + TypeScript + Vite + Tailwind CSS</a:t>
-            </a:r>
-          </a:p>
-          <a:p>
-            <a:pPr>
-              <a:defRPr sz="1100">
-                <a:solidFill>
-                  <a:srgbClr val="64748B"/>
-                </a:solidFill>
-              </a:defRPr>
-            </a:pPr>
-            <a:r>
-              <a:t>Sub-second load times, accessible typography (Inter &amp; Noto Sans Devanagari), responsive mobile bottom navigation.</a:t>
-            </a:r>
-          </a:p>
-        </p:txBody>
-      </p:sp>
-      <p:sp>
-        <p:nvSpPr>
-          <p:cNvPr id="8" name="Rounded Rectangle 7"/>
+              <a:defRPr sz="1200" b="1">
+                <a:solidFill>
+                  <a:srgbClr val="F59E0B"/>
+                </a:solidFill>
+              </a:defRPr>
+            </a:pPr>
+            <a:r>
+              <a:t>TRANSFORMATIVE CITIZEN IMPACT  •  FROM IDEA TO IMPACT</a:t>
+            </a:r>
+          </a:p>
+          <a:p>
+            <a:pPr>
+              <a:spcBef>
+                <a:spcPts val="400"/>
+              </a:spcBef>
+              <a:defRPr sz="3000" b="1">
+                <a:solidFill>
+                  <a:srgbClr val="FFFFFF"/>
+                </a:solidFill>
+              </a:defRPr>
+            </a:pPr>
+            <a:r>
+              <a:t>Transforming Public Welfare into an Everyday Reality</a:t>
+            </a:r>
+          </a:p>
+        </p:txBody>
+      </p:sp>
+      <p:sp>
+        <p:nvSpPr>
+          <p:cNvPr id="4" name="Rounded Rectangle 3"/>
           <p:cNvSpPr/>
           <p:nvPr/>
         </p:nvSpPr>
         <p:spPr>
           <a:xfrm>
-            <a:off x="731520" y="2834639"/>
-            <a:ext cx="10698480" cy="960120"/>
+            <a:off x="1097280" y="2011680"/>
+            <a:ext cx="2377440" cy="1463040"/>
           </a:xfrm>
           <a:prstGeom prst="roundRect">
             <a:avLst/>
           </a:prstGeom>
           <a:solidFill>
-            <a:srgbClr val="FFFFFF"/>
+            <a:srgbClr val="1E293B"/>
           </a:solidFill>
           <a:ln>
             <a:solidFill>
-              <a:srgbClr val="E2E8F0"/>
+              <a:srgbClr val="334155"/>
             </a:solidFill>
           </a:ln>
         </p:spPr>
@@ -8700,14 +7339,14 @@
       </p:sp>
       <p:sp>
         <p:nvSpPr>
-          <p:cNvPr id="9" name="TextBox 8"/>
+          <p:cNvPr id="5" name="TextBox 4"/>
           <p:cNvSpPr txBox="1"/>
           <p:nvPr/>
         </p:nvSpPr>
         <p:spPr>
           <a:xfrm>
-            <a:off x="914400" y="2944367"/>
-            <a:ext cx="10332720" cy="731520"/>
+            <a:off x="1234440" y="2103120"/>
+            <a:ext cx="2103120" cy="1280160"/>
           </a:xfrm>
           <a:prstGeom prst="rect">
             <a:avLst/>
@@ -8721,58 +7360,65 @@
           <a:lstStyle/>
           <a:p>
             <a:pPr>
-              <a:defRPr sz="1300" b="1">
-                <a:solidFill>
-                  <a:srgbClr val="1E3A8A"/>
-                </a:solidFill>
-              </a:defRPr>
-            </a:pPr>
-            <a:r>
-              <a:t>Deterministic Matching Engine:  </a:t>
-            </a:r>
-            <a:r>
-              <a:rPr b="1">
-                <a:solidFill>
-                  <a:srgbClr val="D97706"/>
-                </a:solidFill>
-              </a:rPr>
-              <a:t>Custom TypeScript Rule Evaluator</a:t>
-            </a:r>
-          </a:p>
-          <a:p>
-            <a:pPr>
-              <a:defRPr sz="1100">
-                <a:solidFill>
-                  <a:srgbClr val="64748B"/>
-                </a:solidFill>
-              </a:defRPr>
-            </a:pPr>
-            <a:r>
-              <a:t>Evaluates multi-variable eligibility rules (Age, Domicile, Income caps, Social Category, Land records) in real time with zero hallucination.</a:t>
-            </a:r>
-          </a:p>
-        </p:txBody>
-      </p:sp>
-      <p:sp>
-        <p:nvSpPr>
-          <p:cNvPr id="10" name="Rounded Rectangle 9"/>
+              <a:defRPr sz="2400" b="1">
+                <a:solidFill>
+                  <a:srgbClr val="F59E0B"/>
+                </a:solidFill>
+              </a:defRPr>
+            </a:pPr>
+            <a:r>
+              <a:t>70%</a:t>
+            </a:r>
+          </a:p>
+          <a:p>
+            <a:pPr>
+              <a:spcBef>
+                <a:spcPts val="200"/>
+              </a:spcBef>
+              <a:defRPr sz="1100" b="1">
+                <a:solidFill>
+                  <a:srgbClr val="FFFFFF"/>
+                </a:solidFill>
+              </a:defRPr>
+            </a:pPr>
+            <a:r>
+              <a:t>Drop in Application Rejections</a:t>
+            </a:r>
+          </a:p>
+          <a:p>
+            <a:pPr>
+              <a:defRPr sz="950">
+                <a:solidFill>
+                  <a:srgbClr val="94A3B8"/>
+                </a:solidFill>
+              </a:defRPr>
+            </a:pPr>
+            <a:r>
+              <a:t>Correct documents prepared before applying</a:t>
+            </a:r>
+          </a:p>
+        </p:txBody>
+      </p:sp>
+      <p:sp>
+        <p:nvSpPr>
+          <p:cNvPr id="6" name="Rounded Rectangle 5"/>
           <p:cNvSpPr/>
           <p:nvPr/>
         </p:nvSpPr>
         <p:spPr>
           <a:xfrm>
-            <a:off x="731520" y="3931920"/>
-            <a:ext cx="10698480" cy="960120"/>
+            <a:off x="3611880" y="2011680"/>
+            <a:ext cx="2377440" cy="1463040"/>
           </a:xfrm>
           <a:prstGeom prst="roundRect">
             <a:avLst/>
           </a:prstGeom>
           <a:solidFill>
-            <a:srgbClr val="FFFFFF"/>
+            <a:srgbClr val="1E293B"/>
           </a:solidFill>
           <a:ln>
             <a:solidFill>
-              <a:srgbClr val="E2E8F0"/>
+              <a:srgbClr val="334155"/>
             </a:solidFill>
           </a:ln>
         </p:spPr>
@@ -8800,14 +7446,14 @@
       </p:sp>
       <p:sp>
         <p:nvSpPr>
-          <p:cNvPr id="11" name="TextBox 10"/>
+          <p:cNvPr id="7" name="TextBox 6"/>
           <p:cNvSpPr txBox="1"/>
           <p:nvPr/>
         </p:nvSpPr>
         <p:spPr>
           <a:xfrm>
-            <a:off x="914400" y="4041648"/>
-            <a:ext cx="10332720" cy="731520"/>
+            <a:off x="3749040" y="2103120"/>
+            <a:ext cx="2103120" cy="1280160"/>
           </a:xfrm>
           <a:prstGeom prst="rect">
             <a:avLst/>
@@ -8821,58 +7467,65 @@
           <a:lstStyle/>
           <a:p>
             <a:pPr>
-              <a:defRPr sz="1300" b="1">
-                <a:solidFill>
-                  <a:srgbClr val="1E3A8A"/>
-                </a:solidFill>
-              </a:defRPr>
-            </a:pPr>
-            <a:r>
-              <a:t>Explain &amp; Translation Layer:  </a:t>
-            </a:r>
-            <a:r>
-              <a:rPr b="1">
-                <a:solidFill>
-                  <a:srgbClr val="D97706"/>
-                </a:solidFill>
-              </a:rPr>
-              <a:t>Constrained Statutory NLP Models</a:t>
-            </a:r>
-          </a:p>
-          <a:p>
-            <a:pPr>
-              <a:defRPr sz="1100">
-                <a:solidFill>
-                  <a:srgbClr val="64748B"/>
-                </a:solidFill>
-              </a:defRPr>
-            </a:pPr>
-            <a:r>
-              <a:t>Translates dense circular excerpts into 4-step human checklists with strict anti-hallucination guardrails.</a:t>
-            </a:r>
-          </a:p>
-        </p:txBody>
-      </p:sp>
-      <p:sp>
-        <p:nvSpPr>
-          <p:cNvPr id="12" name="Rounded Rectangle 11"/>
+              <a:defRPr sz="2400" b="1">
+                <a:solidFill>
+                  <a:srgbClr val="F59E0B"/>
+                </a:solidFill>
+              </a:defRPr>
+            </a:pPr>
+            <a:r>
+              <a:t>₹5 Lakh+</a:t>
+            </a:r>
+          </a:p>
+          <a:p>
+            <a:pPr>
+              <a:spcBef>
+                <a:spcPts val="200"/>
+              </a:spcBef>
+              <a:defRPr sz="1100" b="1">
+                <a:solidFill>
+                  <a:srgbClr val="FFFFFF"/>
+                </a:solidFill>
+              </a:defRPr>
+            </a:pPr>
+            <a:r>
+              <a:t>Welfare Unlocked per Family</a:t>
+            </a:r>
+          </a:p>
+          <a:p>
+            <a:pPr>
+              <a:defRPr sz="950">
+                <a:solidFill>
+                  <a:srgbClr val="94A3B8"/>
+                </a:solidFill>
+              </a:defRPr>
+            </a:pPr>
+            <a:r>
+              <a:t>Cashless healthcare and fee waivers</a:t>
+            </a:r>
+          </a:p>
+        </p:txBody>
+      </p:sp>
+      <p:sp>
+        <p:nvSpPr>
+          <p:cNvPr id="8" name="Rounded Rectangle 7"/>
           <p:cNvSpPr/>
           <p:nvPr/>
         </p:nvSpPr>
         <p:spPr>
           <a:xfrm>
-            <a:off x="731520" y="5029200"/>
-            <a:ext cx="10698480" cy="960120"/>
+            <a:off x="6126480" y="2011680"/>
+            <a:ext cx="2377440" cy="1463040"/>
           </a:xfrm>
           <a:prstGeom prst="roundRect">
             <a:avLst/>
           </a:prstGeom>
           <a:solidFill>
-            <a:srgbClr val="FFFFFF"/>
+            <a:srgbClr val="1E293B"/>
           </a:solidFill>
           <a:ln>
             <a:solidFill>
-              <a:srgbClr val="E2E8F0"/>
+              <a:srgbClr val="334155"/>
             </a:solidFill>
           </a:ln>
         </p:spPr>
@@ -8900,14 +7553,14 @@
       </p:sp>
       <p:sp>
         <p:nvSpPr>
-          <p:cNvPr id="13" name="TextBox 12"/>
+          <p:cNvPr id="9" name="TextBox 8"/>
           <p:cNvSpPr txBox="1"/>
           <p:nvPr/>
         </p:nvSpPr>
         <p:spPr>
           <a:xfrm>
-            <a:off x="914400" y="5138928"/>
-            <a:ext cx="10332720" cy="731520"/>
+            <a:off x="6263640" y="2103120"/>
+            <a:ext cx="2103120" cy="1280160"/>
           </a:xfrm>
           <a:prstGeom prst="rect">
             <a:avLst/>
@@ -8921,182 +7574,31 @@
           <a:lstStyle/>
           <a:p>
             <a:pPr>
-              <a:defRPr sz="1300" b="1">
-                <a:solidFill>
-                  <a:srgbClr val="1E3A8A"/>
-                </a:solidFill>
-              </a:defRPr>
-            </a:pPr>
-            <a:r>
-              <a:t>Citizen Data Sovereignty:  </a:t>
-            </a:r>
-            <a:r>
-              <a:rPr b="1">
-                <a:solidFill>
-                  <a:srgbClr val="D97706"/>
-                </a:solidFill>
-              </a:rPr>
-              <a:t>Local-First Vault (LocalStorage + JSON Export)</a:t>
-            </a:r>
-          </a:p>
-          <a:p>
-            <a:pPr>
-              <a:defRPr sz="1100">
-                <a:solidFill>
-                  <a:srgbClr val="64748B"/>
-                </a:solidFill>
-              </a:defRPr>
-            </a:pPr>
-            <a:r>
-              <a:t>Zero cloud tracking of citizen credentials. One-click JSON data export and total data wipe capabilities.</a:t>
-            </a:r>
-          </a:p>
-        </p:txBody>
-      </p:sp>
-    </p:spTree>
-  </p:cSld>
-  <p:clrMapOvr>
-    <a:masterClrMapping/>
-  </p:clrMapOvr>
-</p:sld>
-</file>
-
-<file path=ppt/slides/slide8.xml><?xml version="1.0" encoding="utf-8"?>
-<p:sld xmlns:a="http://schemas.openxmlformats.org/drawingml/2006/main" xmlns:p="http://schemas.openxmlformats.org/presentationml/2006/main" xmlns:r="http://schemas.openxmlformats.org/officeDocument/2006/relationships">
-  <p:cSld>
-    <p:spTree>
-      <p:nvGrpSpPr>
-        <p:cNvPr id="1" name=""/>
-        <p:cNvGrpSpPr/>
-        <p:nvPr/>
-      </p:nvGrpSpPr>
-      <p:grpSpPr/>
-      <p:sp>
-        <p:nvSpPr>
-          <p:cNvPr id="2" name="TextBox 1"/>
-          <p:cNvSpPr txBox="1"/>
-          <p:nvPr/>
-        </p:nvSpPr>
-        <p:spPr>
-          <a:xfrm>
-            <a:off x="731520" y="365760"/>
-            <a:ext cx="10698480" cy="320040"/>
-          </a:xfrm>
-          <a:prstGeom prst="rect">
-            <a:avLst/>
-          </a:prstGeom>
-          <a:noFill/>
-        </p:spPr>
-        <p:txBody>
-          <a:bodyPr wrap="square">
-            <a:spAutoFit/>
-          </a:bodyPr>
-          <a:lstStyle/>
-          <a:p>
-            <a:pPr>
+              <a:defRPr sz="2400" b="1">
+                <a:solidFill>
+                  <a:srgbClr val="F59E0B"/>
+                </a:solidFill>
+              </a:defRPr>
+            </a:pPr>
+            <a:r>
+              <a:t>100%</a:t>
+            </a:r>
+          </a:p>
+          <a:p>
+            <a:pPr>
+              <a:spcBef>
+                <a:spcPts val="200"/>
+              </a:spcBef>
               <a:defRPr sz="1100" b="1">
                 <a:solidFill>
-                  <a:srgbClr val="D97706"/>
-                </a:solidFill>
-              </a:defRPr>
-            </a:pPr>
-            <a:r>
-              <a:t>TRUST &amp; VERIFICATION ENGINE</a:t>
-            </a:r>
-          </a:p>
-        </p:txBody>
-      </p:sp>
-      <p:sp>
-        <p:nvSpPr>
-          <p:cNvPr id="3" name="TextBox 2"/>
-          <p:cNvSpPr txBox="1"/>
-          <p:nvPr/>
-        </p:nvSpPr>
-        <p:spPr>
-          <a:xfrm>
-            <a:off x="731520" y="685800"/>
-            <a:ext cx="10698480" cy="502920"/>
-          </a:xfrm>
-          <a:prstGeom prst="rect">
-            <a:avLst/>
-          </a:prstGeom>
-          <a:noFill/>
-        </p:spPr>
-        <p:txBody>
-          <a:bodyPr wrap="square">
-            <a:spAutoFit/>
-          </a:bodyPr>
-          <a:lstStyle/>
-          <a:p>
-            <a:pPr>
-              <a:defRPr sz="2200" b="1">
-                <a:solidFill>
-                  <a:srgbClr val="0F172A"/>
-                </a:solidFill>
-              </a:defRPr>
-            </a:pPr>
-            <a:r>
-              <a:t>Evidence-First Provenance &amp; Dependency Graphs</a:t>
-            </a:r>
-          </a:p>
-        </p:txBody>
-      </p:sp>
-      <p:sp>
-        <p:nvSpPr>
-          <p:cNvPr id="4" name="TextBox 3"/>
-          <p:cNvSpPr txBox="1"/>
-          <p:nvPr/>
-        </p:nvSpPr>
-        <p:spPr>
-          <a:xfrm>
-            <a:off x="731520" y="1188720"/>
-            <a:ext cx="10698480" cy="365760"/>
-          </a:xfrm>
-          <a:prstGeom prst="rect">
-            <a:avLst/>
-          </a:prstGeom>
-          <a:noFill/>
-        </p:spPr>
-        <p:txBody>
-          <a:bodyPr wrap="square">
-            <a:spAutoFit/>
-          </a:bodyPr>
-          <a:lstStyle/>
-          <a:p>
-            <a:pPr>
-              <a:defRPr sz="1200">
-                <a:solidFill>
-                  <a:srgbClr val="64748B"/>
-                </a:solidFill>
-              </a:defRPr>
-            </a:pPr>
-            <a:r>
-              <a:t>How JanMitra guarantees absolute accuracy without misleading citizens</a:t>
-            </a:r>
-          </a:p>
-        </p:txBody>
-      </p:sp>
-      <p:sp>
-        <p:nvSpPr>
-          <p:cNvPr id="5" name="TextBox 4"/>
-          <p:cNvSpPr txBox="1"/>
-          <p:nvPr/>
-        </p:nvSpPr>
-        <p:spPr>
-          <a:xfrm>
-            <a:off x="731520" y="6446520"/>
-            <a:ext cx="10698480" cy="274320"/>
-          </a:xfrm>
-          <a:prstGeom prst="rect">
-            <a:avLst/>
-          </a:prstGeom>
-          <a:noFill/>
-        </p:spPr>
-        <p:txBody>
-          <a:bodyPr wrap="none">
-            <a:spAutoFit/>
-          </a:bodyPr>
-          <a:lstStyle/>
+                  <a:srgbClr val="FFFFFF"/>
+                </a:solidFill>
+              </a:defRPr>
+            </a:pPr>
+            <a:r>
+              <a:t>Evidence-First Transparency</a:t>
+            </a:r>
+          </a:p>
           <a:p>
             <a:pPr>
               <a:defRPr sz="950">
@@ -9106,31 +7608,31 @@
               </a:defRPr>
             </a:pPr>
             <a:r>
-              <a:t>JanMitra: Understand. Discover. Apply.  |  Slide 8 of 10</a:t>
-            </a:r>
-          </a:p>
-        </p:txBody>
-      </p:sp>
-      <p:sp>
-        <p:nvSpPr>
-          <p:cNvPr id="6" name="Rounded Rectangle 5"/>
+              <a:t>Zero hallucinated rules or dead URLs</a:t>
+            </a:r>
+          </a:p>
+        </p:txBody>
+      </p:sp>
+      <p:sp>
+        <p:nvSpPr>
+          <p:cNvPr id="10" name="Rounded Rectangle 9"/>
           <p:cNvSpPr/>
           <p:nvPr/>
         </p:nvSpPr>
         <p:spPr>
           <a:xfrm>
-            <a:off x="731520" y="1737360"/>
-            <a:ext cx="5120640" cy="1920240"/>
+            <a:off x="8641080" y="2011680"/>
+            <a:ext cx="2377440" cy="1463040"/>
           </a:xfrm>
           <a:prstGeom prst="roundRect">
             <a:avLst/>
           </a:prstGeom>
           <a:solidFill>
-            <a:srgbClr val="F8FAFC"/>
+            <a:srgbClr val="1E293B"/>
           </a:solidFill>
           <a:ln>
             <a:solidFill>
-              <a:srgbClr val="E2E8F0"/>
+              <a:srgbClr val="334155"/>
             </a:solidFill>
           </a:ln>
         </p:spPr>
@@ -9158,14 +7660,14 @@
       </p:sp>
       <p:sp>
         <p:nvSpPr>
-          <p:cNvPr id="7" name="TextBox 6"/>
+          <p:cNvPr id="11" name="TextBox 10"/>
           <p:cNvSpPr txBox="1"/>
           <p:nvPr/>
         </p:nvSpPr>
         <p:spPr>
           <a:xfrm>
-            <a:off x="1005840" y="1920240"/>
-            <a:ext cx="4572000" cy="1554480"/>
+            <a:off x="8778240" y="2103120"/>
+            <a:ext cx="2103120" cy="1280160"/>
           </a:xfrm>
           <a:prstGeom prst="rect">
             <a:avLst/>
@@ -9179,53 +7681,65 @@
           <a:lstStyle/>
           <a:p>
             <a:pPr>
-              <a:defRPr sz="1500" b="1">
-                <a:solidFill>
-                  <a:srgbClr val="D97706"/>
-                </a:solidFill>
-              </a:defRPr>
-            </a:pPr>
-            <a:r>
-              <a:t>“Why is JanMitra saying this?” Provenance</a:t>
+              <a:defRPr sz="2400" b="1">
+                <a:solidFill>
+                  <a:srgbClr val="F59E0B"/>
+                </a:solidFill>
+              </a:defRPr>
+            </a:pPr>
+            <a:r>
+              <a:t>100% Free</a:t>
             </a:r>
           </a:p>
           <a:p>
             <a:pPr>
               <a:spcBef>
-                <a:spcPts val="600"/>
+                <a:spcPts val="200"/>
               </a:spcBef>
-              <a:defRPr sz="1150">
-                <a:solidFill>
-                  <a:srgbClr val="64748B"/>
-                </a:solidFill>
-              </a:defRPr>
-            </a:pPr>
-            <a:r>
-              <a:t>Every procedural statement and eligibility rule contains an expandable audit drawer citing: (1) Issuing Government Department, (2) Gazette Notification Number, (3) Date Published, and (4) Last Verified Audit Date.</a:t>
-            </a:r>
-          </a:p>
-        </p:txBody>
-      </p:sp>
-      <p:sp>
-        <p:nvSpPr>
-          <p:cNvPr id="8" name="Rounded Rectangle 7"/>
+              <a:defRPr sz="1100" b="1">
+                <a:solidFill>
+                  <a:srgbClr val="FFFFFF"/>
+                </a:solidFill>
+              </a:defRPr>
+            </a:pPr>
+            <a:r>
+              <a:t>Open Civic-Tech Innovation</a:t>
+            </a:r>
+          </a:p>
+          <a:p>
+            <a:pPr>
+              <a:defRPr sz="950">
+                <a:solidFill>
+                  <a:srgbClr val="94A3B8"/>
+                </a:solidFill>
+              </a:defRPr>
+            </a:pPr>
+            <a:r>
+              <a:t>Zero cloud tracking of citizen credentials</a:t>
+            </a:r>
+          </a:p>
+        </p:txBody>
+      </p:sp>
+      <p:sp>
+        <p:nvSpPr>
+          <p:cNvPr id="12" name="Rounded Rectangle 11"/>
           <p:cNvSpPr/>
           <p:nvPr/>
         </p:nvSpPr>
         <p:spPr>
           <a:xfrm>
-            <a:off x="6126480" y="1737360"/>
-            <a:ext cx="5120640" cy="1920240"/>
+            <a:off x="1097280" y="3749039"/>
+            <a:ext cx="9966960" cy="1645920"/>
           </a:xfrm>
           <a:prstGeom prst="roundRect">
             <a:avLst/>
           </a:prstGeom>
           <a:solidFill>
-            <a:srgbClr val="F8FAFC"/>
+            <a:srgbClr val="1E293B"/>
           </a:solidFill>
-          <a:ln>
+          <a:ln w="19050">
             <a:solidFill>
-              <a:srgbClr val="E2E8F0"/>
+              <a:srgbClr val="D97706"/>
             </a:solidFill>
           </a:ln>
         </p:spPr>
@@ -9253,14 +7767,14 @@
       </p:sp>
       <p:sp>
         <p:nvSpPr>
-          <p:cNvPr id="9" name="TextBox 8"/>
+          <p:cNvPr id="13" name="TextBox 12"/>
           <p:cNvSpPr txBox="1"/>
           <p:nvPr/>
         </p:nvSpPr>
         <p:spPr>
           <a:xfrm>
-            <a:off x="6400800" y="1920240"/>
-            <a:ext cx="4572000" cy="1554480"/>
+            <a:off x="1371600" y="3931920"/>
+            <a:ext cx="9418320" cy="1280160"/>
           </a:xfrm>
           <a:prstGeom prst="rect">
             <a:avLst/>
@@ -9274,88 +7788,28 @@
           <a:lstStyle/>
           <a:p>
             <a:pPr>
-              <a:defRPr sz="1500" b="1">
-                <a:solidFill>
-                  <a:srgbClr val="D97706"/>
-                </a:solidFill>
-              </a:defRPr>
-            </a:pPr>
-            <a:r>
-              <a:t>Government Service Dependency Graph</a:t>
-            </a:r>
-          </a:p>
-          <a:p>
-            <a:pPr>
-              <a:spcBef>
-                <a:spcPts val="600"/>
-              </a:spcBef>
-              <a:defRPr sz="1150">
-                <a:solidFill>
-                  <a:srgbClr val="64748B"/>
-                </a:solidFill>
-              </a:defRPr>
-            </a:pPr>
-            <a:r>
-              <a:t>Visual interactive hierarchy mapping hidden prerequisite chains (e.g. UP Scholarship requires Income Certificate which requires Lekhpal field check). Citizens clear roadblocks before submitting.</a:t>
-            </a:r>
-          </a:p>
-        </p:txBody>
-      </p:sp>
-      <p:sp>
-        <p:nvSpPr>
-          <p:cNvPr id="10" name="Rounded Rectangle 9"/>
-          <p:cNvSpPr/>
-          <p:nvPr/>
-        </p:nvSpPr>
-        <p:spPr>
-          <a:xfrm>
-            <a:off x="731520" y="3931920"/>
-            <a:ext cx="5120640" cy="1920240"/>
-          </a:xfrm>
-          <a:prstGeom prst="roundRect">
-            <a:avLst/>
-          </a:prstGeom>
-          <a:solidFill>
-            <a:srgbClr val="F8FAFC"/>
-          </a:solidFill>
-          <a:ln>
-            <a:solidFill>
-              <a:srgbClr val="E2E8F0"/>
-            </a:solidFill>
-          </a:ln>
-        </p:spPr>
-        <p:style>
-          <a:lnRef idx="1">
-            <a:schemeClr val="accent1"/>
-          </a:lnRef>
-          <a:fillRef idx="3">
-            <a:schemeClr val="accent1"/>
-          </a:fillRef>
-          <a:effectRef idx="2">
-            <a:schemeClr val="accent1"/>
-          </a:effectRef>
-          <a:fontRef idx="minor">
-            <a:schemeClr val="lt1"/>
-          </a:fontRef>
-        </p:style>
-        <p:txBody>
-          <a:bodyPr rtlCol="0" anchor="ctr"/>
-          <a:lstStyle/>
-          <a:p>
-            <a:pPr algn="ctr"/>
-          </a:p>
-        </p:txBody>
-      </p:sp>
-      <p:sp>
-        <p:nvSpPr>
-          <p:cNvPr id="11" name="TextBox 10"/>
+              <a:defRPr sz="1700" b="1">
+                <a:solidFill>
+                  <a:srgbClr val="FFFFFF"/>
+                </a:solidFill>
+              </a:defRPr>
+            </a:pPr>
+            <a:r>
+              <a:t>“When public services become as simple to understand as sending a text message, government welfare transforms from an elusive bureaucratic maze into a lived constitutional right for every citizen.”</a:t>
+            </a:r>
+          </a:p>
+        </p:txBody>
+      </p:sp>
+      <p:sp>
+        <p:nvSpPr>
+          <p:cNvPr id="14" name="TextBox 13"/>
           <p:cNvSpPr txBox="1"/>
           <p:nvPr/>
         </p:nvSpPr>
         <p:spPr>
           <a:xfrm>
-            <a:off x="1005840" y="4114800"/>
-            <a:ext cx="4572000" cy="1554480"/>
+            <a:off x="1097280" y="5577840"/>
+            <a:ext cx="9966960" cy="731520"/>
           </a:xfrm>
           <a:prstGeom prst="rect">
             <a:avLst/>
@@ -9369,662 +7823,14 @@
           <a:lstStyle/>
           <a:p>
             <a:pPr>
-              <a:defRPr sz="1500" b="1">
-                <a:solidFill>
-                  <a:srgbClr val="D97706"/>
-                </a:solidFill>
-              </a:defRPr>
-            </a:pPr>
-            <a:r>
-              <a:t>Responsible Legal Guardrails</a:t>
-            </a:r>
-          </a:p>
-          <a:p>
-            <a:pPr>
-              <a:spcBef>
-                <a:spcPts val="600"/>
-              </a:spcBef>
-              <a:defRPr sz="1150">
-                <a:solidFill>
-                  <a:srgbClr val="64748B"/>
-                </a:solidFill>
-              </a:defRPr>
-            </a:pPr>
-            <a:r>
-              <a:t>Strict ethical UX: Never displays 'JanMitra approved you'. Uses transparent statutory phrasing: 'Your information appears consistent with published criteria. Authorities make final decisions.'</a:t>
-            </a:r>
-          </a:p>
-        </p:txBody>
-      </p:sp>
-      <p:sp>
-        <p:nvSpPr>
-          <p:cNvPr id="12" name="Rounded Rectangle 11"/>
-          <p:cNvSpPr/>
-          <p:nvPr/>
-        </p:nvSpPr>
-        <p:spPr>
-          <a:xfrm>
-            <a:off x="6126480" y="3931920"/>
-            <a:ext cx="5120640" cy="1920240"/>
-          </a:xfrm>
-          <a:prstGeom prst="roundRect">
-            <a:avLst/>
-          </a:prstGeom>
-          <a:solidFill>
-            <a:srgbClr val="F8FAFC"/>
-          </a:solidFill>
-          <a:ln>
-            <a:solidFill>
-              <a:srgbClr val="E2E8F0"/>
-            </a:solidFill>
-          </a:ln>
-        </p:spPr>
-        <p:style>
-          <a:lnRef idx="1">
-            <a:schemeClr val="accent1"/>
-          </a:lnRef>
-          <a:fillRef idx="3">
-            <a:schemeClr val="accent1"/>
-          </a:fillRef>
-          <a:effectRef idx="2">
-            <a:schemeClr val="accent1"/>
-          </a:effectRef>
-          <a:fontRef idx="minor">
-            <a:schemeClr val="lt1"/>
-          </a:fontRef>
-        </p:style>
-        <p:txBody>
-          <a:bodyPr rtlCol="0" anchor="ctr"/>
-          <a:lstStyle/>
-          <a:p>
-            <a:pPr algn="ctr"/>
-          </a:p>
-        </p:txBody>
-      </p:sp>
-      <p:sp>
-        <p:nvSpPr>
-          <p:cNvPr id="13" name="TextBox 12"/>
-          <p:cNvSpPr txBox="1"/>
-          <p:nvPr/>
-        </p:nvSpPr>
-        <p:spPr>
-          <a:xfrm>
-            <a:off x="6400800" y="4114800"/>
-            <a:ext cx="4572000" cy="1554480"/>
-          </a:xfrm>
-          <a:prstGeom prst="rect">
-            <a:avLst/>
-          </a:prstGeom>
-          <a:noFill/>
-        </p:spPr>
-        <p:txBody>
-          <a:bodyPr wrap="square">
-            <a:spAutoFit/>
-          </a:bodyPr>
-          <a:lstStyle/>
-          <a:p>
-            <a:pPr>
-              <a:defRPr sz="1500" b="1">
-                <a:solidFill>
-                  <a:srgbClr val="D97706"/>
-                </a:solidFill>
-              </a:defRPr>
-            </a:pPr>
-            <a:r>
-              <a:t>Zero Document Fabrication</a:t>
-            </a:r>
-          </a:p>
-          <a:p>
-            <a:pPr>
-              <a:spcBef>
-                <a:spcPts val="600"/>
-              </a:spcBef>
-              <a:defRPr sz="1150">
-                <a:solidFill>
-                  <a:srgbClr val="64748B"/>
-                </a:solidFill>
-              </a:defRPr>
-            </a:pPr>
-            <a:r>
-              <a:t>Locker conducts preliminary formatting checks only. Never claims to legally certify documents, preserving state sovereignty and citizen trust.</a:t>
-            </a:r>
-          </a:p>
-        </p:txBody>
-      </p:sp>
-    </p:spTree>
-  </p:cSld>
-  <p:clrMapOvr>
-    <a:masterClrMapping/>
-  </p:clrMapOvr>
-</p:sld>
-</file>
-
-<file path=ppt/slides/slide9.xml><?xml version="1.0" encoding="utf-8"?>
-<p:sld xmlns:a="http://schemas.openxmlformats.org/drawingml/2006/main" xmlns:p="http://schemas.openxmlformats.org/presentationml/2006/main" xmlns:r="http://schemas.openxmlformats.org/officeDocument/2006/relationships">
-  <p:cSld>
-    <p:spTree>
-      <p:nvGrpSpPr>
-        <p:cNvPr id="1" name=""/>
-        <p:cNvGrpSpPr/>
-        <p:nvPr/>
-      </p:nvGrpSpPr>
-      <p:grpSpPr/>
-      <p:sp>
-        <p:nvSpPr>
-          <p:cNvPr id="2" name="TextBox 1"/>
-          <p:cNvSpPr txBox="1"/>
-          <p:nvPr/>
-        </p:nvSpPr>
-        <p:spPr>
-          <a:xfrm>
-            <a:off x="731520" y="365760"/>
-            <a:ext cx="10698480" cy="320040"/>
-          </a:xfrm>
-          <a:prstGeom prst="rect">
-            <a:avLst/>
-          </a:prstGeom>
-          <a:noFill/>
-        </p:spPr>
-        <p:txBody>
-          <a:bodyPr wrap="square">
-            <a:spAutoFit/>
-          </a:bodyPr>
-          <a:lstStyle/>
-          <a:p>
-            <a:pPr>
-              <a:defRPr sz="1100" b="1">
-                <a:solidFill>
-                  <a:srgbClr val="D97706"/>
-                </a:solidFill>
-              </a:defRPr>
-            </a:pPr>
-            <a:r>
-              <a:t>IMPLEMENTATION ROADMAP</a:t>
-            </a:r>
-          </a:p>
-        </p:txBody>
-      </p:sp>
-      <p:sp>
-        <p:nvSpPr>
-          <p:cNvPr id="3" name="TextBox 2"/>
-          <p:cNvSpPr txBox="1"/>
-          <p:nvPr/>
-        </p:nvSpPr>
-        <p:spPr>
-          <a:xfrm>
-            <a:off x="731520" y="685800"/>
-            <a:ext cx="10698480" cy="502920"/>
-          </a:xfrm>
-          <a:prstGeom prst="rect">
-            <a:avLst/>
-          </a:prstGeom>
-          <a:noFill/>
-        </p:spPr>
-        <p:txBody>
-          <a:bodyPr wrap="square">
-            <a:spAutoFit/>
-          </a:bodyPr>
-          <a:lstStyle/>
-          <a:p>
-            <a:pPr>
-              <a:defRPr sz="2200" b="1">
-                <a:solidFill>
-                  <a:srgbClr val="0F172A"/>
-                </a:solidFill>
-              </a:defRPr>
-            </a:pPr>
-            <a:r>
-              <a:t>Feasibility, India Stack Integration &amp; National Scale</a:t>
-            </a:r>
-          </a:p>
-        </p:txBody>
-      </p:sp>
-      <p:sp>
-        <p:nvSpPr>
-          <p:cNvPr id="4" name="TextBox 3"/>
-          <p:cNvSpPr txBox="1"/>
-          <p:nvPr/>
-        </p:nvSpPr>
-        <p:spPr>
-          <a:xfrm>
-            <a:off x="731520" y="1188720"/>
-            <a:ext cx="10698480" cy="365760"/>
-          </a:xfrm>
-          <a:prstGeom prst="rect">
-            <a:avLst/>
-          </a:prstGeom>
-          <a:noFill/>
-        </p:spPr>
-        <p:txBody>
-          <a:bodyPr wrap="square">
-            <a:spAutoFit/>
-          </a:bodyPr>
-          <a:lstStyle/>
-          <a:p>
-            <a:pPr>
-              <a:defRPr sz="1200">
-                <a:solidFill>
-                  <a:srgbClr val="64748B"/>
-                </a:solidFill>
-              </a:defRPr>
-            </a:pPr>
-            <a:r>
-              <a:t>Phased deployment strategy from Uttar Pradesh pilot to national citizen infrastructure</a:t>
-            </a:r>
-          </a:p>
-        </p:txBody>
-      </p:sp>
-      <p:sp>
-        <p:nvSpPr>
-          <p:cNvPr id="5" name="TextBox 4"/>
-          <p:cNvSpPr txBox="1"/>
-          <p:nvPr/>
-        </p:nvSpPr>
-        <p:spPr>
-          <a:xfrm>
-            <a:off x="731520" y="6446520"/>
-            <a:ext cx="10698480" cy="274320"/>
-          </a:xfrm>
-          <a:prstGeom prst="rect">
-            <a:avLst/>
-          </a:prstGeom>
-          <a:noFill/>
-        </p:spPr>
-        <p:txBody>
-          <a:bodyPr wrap="none">
-            <a:spAutoFit/>
-          </a:bodyPr>
-          <a:lstStyle/>
-          <a:p>
-            <a:pPr>
-              <a:defRPr sz="950">
-                <a:solidFill>
-                  <a:srgbClr val="94A3B8"/>
-                </a:solidFill>
-              </a:defRPr>
-            </a:pPr>
-            <a:r>
-              <a:t>JanMitra: Understand. Discover. Apply.  |  Slide 9 of 10</a:t>
-            </a:r>
-          </a:p>
-        </p:txBody>
-      </p:sp>
-      <p:sp>
-        <p:nvSpPr>
-          <p:cNvPr id="6" name="Rounded Rectangle 5"/>
-          <p:cNvSpPr/>
-          <p:nvPr/>
-        </p:nvSpPr>
-        <p:spPr>
-          <a:xfrm>
-            <a:off x="731520" y="1737360"/>
-            <a:ext cx="5120640" cy="1920240"/>
-          </a:xfrm>
-          <a:prstGeom prst="roundRect">
-            <a:avLst/>
-          </a:prstGeom>
-          <a:solidFill>
-            <a:srgbClr val="FFFFFF"/>
-          </a:solidFill>
-          <a:ln>
-            <a:solidFill>
-              <a:srgbClr val="E2E8F0"/>
-            </a:solidFill>
-          </a:ln>
-        </p:spPr>
-        <p:style>
-          <a:lnRef idx="1">
-            <a:schemeClr val="accent1"/>
-          </a:lnRef>
-          <a:fillRef idx="3">
-            <a:schemeClr val="accent1"/>
-          </a:fillRef>
-          <a:effectRef idx="2">
-            <a:schemeClr val="accent1"/>
-          </a:effectRef>
-          <a:fontRef idx="minor">
-            <a:schemeClr val="lt1"/>
-          </a:fontRef>
-        </p:style>
-        <p:txBody>
-          <a:bodyPr rtlCol="0" anchor="ctr"/>
-          <a:lstStyle/>
-          <a:p>
-            <a:pPr algn="ctr"/>
-          </a:p>
-        </p:txBody>
-      </p:sp>
-      <p:sp>
-        <p:nvSpPr>
-          <p:cNvPr id="7" name="TextBox 6"/>
-          <p:cNvSpPr txBox="1"/>
-          <p:nvPr/>
-        </p:nvSpPr>
-        <p:spPr>
-          <a:xfrm>
-            <a:off x="1005840" y="1920240"/>
-            <a:ext cx="4572000" cy="1554480"/>
-          </a:xfrm>
-          <a:prstGeom prst="rect">
-            <a:avLst/>
-          </a:prstGeom>
-          <a:noFill/>
-        </p:spPr>
-        <p:txBody>
-          <a:bodyPr wrap="square">
-            <a:spAutoFit/>
-          </a:bodyPr>
-          <a:lstStyle/>
-          <a:p>
-            <a:pPr>
-              <a:defRPr sz="1500" b="1">
-                <a:solidFill>
-                  <a:srgbClr val="059669"/>
-                </a:solidFill>
-              </a:defRPr>
-            </a:pPr>
-            <a:r>
-              <a:t>Phase 1: Working Prototype (Current)</a:t>
-            </a:r>
-          </a:p>
-          <a:p>
-            <a:pPr>
-              <a:spcBef>
-                <a:spcPts val="600"/>
-              </a:spcBef>
-              <a:defRPr sz="1150">
-                <a:solidFill>
-                  <a:srgbClr val="64748B"/>
-                </a:solidFill>
-              </a:defRPr>
-            </a:pPr>
-            <a:r>
-              <a:t>Completed high-fidelity system covering 12+ UP/Central schemes, 8+ public services, 16+ documents, and 4 test drive scenarios with zero build errors.</a:t>
-            </a:r>
-          </a:p>
-        </p:txBody>
-      </p:sp>
-      <p:sp>
-        <p:nvSpPr>
-          <p:cNvPr id="8" name="Rounded Rectangle 7"/>
-          <p:cNvSpPr/>
-          <p:nvPr/>
-        </p:nvSpPr>
-        <p:spPr>
-          <a:xfrm>
-            <a:off x="6126480" y="1737360"/>
-            <a:ext cx="5120640" cy="1920240"/>
-          </a:xfrm>
-          <a:prstGeom prst="roundRect">
-            <a:avLst/>
-          </a:prstGeom>
-          <a:solidFill>
-            <a:srgbClr val="FFFFFF"/>
-          </a:solidFill>
-          <a:ln>
-            <a:solidFill>
-              <a:srgbClr val="E2E8F0"/>
-            </a:solidFill>
-          </a:ln>
-        </p:spPr>
-        <p:style>
-          <a:lnRef idx="1">
-            <a:schemeClr val="accent1"/>
-          </a:lnRef>
-          <a:fillRef idx="3">
-            <a:schemeClr val="accent1"/>
-          </a:fillRef>
-          <a:effectRef idx="2">
-            <a:schemeClr val="accent1"/>
-          </a:effectRef>
-          <a:fontRef idx="minor">
-            <a:schemeClr val="lt1"/>
-          </a:fontRef>
-        </p:style>
-        <p:txBody>
-          <a:bodyPr rtlCol="0" anchor="ctr"/>
-          <a:lstStyle/>
-          <a:p>
-            <a:pPr algn="ctr"/>
-          </a:p>
-        </p:txBody>
-      </p:sp>
-      <p:sp>
-        <p:nvSpPr>
-          <p:cNvPr id="9" name="TextBox 8"/>
-          <p:cNvSpPr txBox="1"/>
-          <p:nvPr/>
-        </p:nvSpPr>
-        <p:spPr>
-          <a:xfrm>
-            <a:off x="6400800" y="1920240"/>
-            <a:ext cx="4572000" cy="1554480"/>
-          </a:xfrm>
-          <a:prstGeom prst="rect">
-            <a:avLst/>
-          </a:prstGeom>
-          <a:noFill/>
-        </p:spPr>
-        <p:txBody>
-          <a:bodyPr wrap="square">
-            <a:spAutoFit/>
-          </a:bodyPr>
-          <a:lstStyle/>
-          <a:p>
-            <a:pPr>
-              <a:defRPr sz="1500" b="1">
-                <a:solidFill>
-                  <a:srgbClr val="059669"/>
-                </a:solidFill>
-              </a:defRPr>
-            </a:pPr>
-            <a:r>
-              <a:t>Phase 2: Digital Public Infrastructure (DPI)</a:t>
-            </a:r>
-          </a:p>
-          <a:p>
-            <a:pPr>
-              <a:spcBef>
-                <a:spcPts val="600"/>
-              </a:spcBef>
-              <a:defRPr sz="1150">
-                <a:solidFill>
-                  <a:srgbClr val="64748B"/>
-                </a:solidFill>
-              </a:defRPr>
-            </a:pPr>
-            <a:r>
-              <a:t>Integrate with India Stack APIs: DigiLocker document fetch, UMANG public service registry, MeriPehchaan (National SSO), and UP eDistrict webhooks.</a:t>
-            </a:r>
-          </a:p>
-        </p:txBody>
-      </p:sp>
-      <p:sp>
-        <p:nvSpPr>
-          <p:cNvPr id="10" name="Rounded Rectangle 9"/>
-          <p:cNvSpPr/>
-          <p:nvPr/>
-        </p:nvSpPr>
-        <p:spPr>
-          <a:xfrm>
-            <a:off x="731520" y="3931920"/>
-            <a:ext cx="5120640" cy="1920240"/>
-          </a:xfrm>
-          <a:prstGeom prst="roundRect">
-            <a:avLst/>
-          </a:prstGeom>
-          <a:solidFill>
-            <a:srgbClr val="FFFFFF"/>
-          </a:solidFill>
-          <a:ln>
-            <a:solidFill>
-              <a:srgbClr val="E2E8F0"/>
-            </a:solidFill>
-          </a:ln>
-        </p:spPr>
-        <p:style>
-          <a:lnRef idx="1">
-            <a:schemeClr val="accent1"/>
-          </a:lnRef>
-          <a:fillRef idx="3">
-            <a:schemeClr val="accent1"/>
-          </a:fillRef>
-          <a:effectRef idx="2">
-            <a:schemeClr val="accent1"/>
-          </a:effectRef>
-          <a:fontRef idx="minor">
-            <a:schemeClr val="lt1"/>
-          </a:fontRef>
-        </p:style>
-        <p:txBody>
-          <a:bodyPr rtlCol="0" anchor="ctr"/>
-          <a:lstStyle/>
-          <a:p>
-            <a:pPr algn="ctr"/>
-          </a:p>
-        </p:txBody>
-      </p:sp>
-      <p:sp>
-        <p:nvSpPr>
-          <p:cNvPr id="11" name="TextBox 10"/>
-          <p:cNvSpPr txBox="1"/>
-          <p:nvPr/>
-        </p:nvSpPr>
-        <p:spPr>
-          <a:xfrm>
-            <a:off x="1005840" y="4114800"/>
-            <a:ext cx="4572000" cy="1554480"/>
-          </a:xfrm>
-          <a:prstGeom prst="rect">
-            <a:avLst/>
-          </a:prstGeom>
-          <a:noFill/>
-        </p:spPr>
-        <p:txBody>
-          <a:bodyPr wrap="square">
-            <a:spAutoFit/>
-          </a:bodyPr>
-          <a:lstStyle/>
-          <a:p>
-            <a:pPr>
-              <a:defRPr sz="1500" b="1">
-                <a:solidFill>
-                  <a:srgbClr val="059669"/>
-                </a:solidFill>
-              </a:defRPr>
-            </a:pPr>
-            <a:r>
-              <a:t>Phase 3: Assisted Physical Access</a:t>
-            </a:r>
-          </a:p>
-          <a:p>
-            <a:pPr>
-              <a:spcBef>
-                <a:spcPts val="600"/>
-              </a:spcBef>
-              <a:defRPr sz="1150">
-                <a:solidFill>
-                  <a:srgbClr val="64748B"/>
-                </a:solidFill>
-              </a:defRPr>
-            </a:pPr>
-            <a:r>
-              <a:t>Operator-assisted mode for Common Service Center (CSC) / Jan Seva Kendra operators and Village Development Officers (VDOs) at the Gram Panchayat level.</a:t>
-            </a:r>
-          </a:p>
-        </p:txBody>
-      </p:sp>
-      <p:sp>
-        <p:nvSpPr>
-          <p:cNvPr id="12" name="Rounded Rectangle 11"/>
-          <p:cNvSpPr/>
-          <p:nvPr/>
-        </p:nvSpPr>
-        <p:spPr>
-          <a:xfrm>
-            <a:off x="6126480" y="3931920"/>
-            <a:ext cx="5120640" cy="1920240"/>
-          </a:xfrm>
-          <a:prstGeom prst="roundRect">
-            <a:avLst/>
-          </a:prstGeom>
-          <a:solidFill>
-            <a:srgbClr val="FFFFFF"/>
-          </a:solidFill>
-          <a:ln>
-            <a:solidFill>
-              <a:srgbClr val="E2E8F0"/>
-            </a:solidFill>
-          </a:ln>
-        </p:spPr>
-        <p:style>
-          <a:lnRef idx="1">
-            <a:schemeClr val="accent1"/>
-          </a:lnRef>
-          <a:fillRef idx="3">
-            <a:schemeClr val="accent1"/>
-          </a:fillRef>
-          <a:effectRef idx="2">
-            <a:schemeClr val="accent1"/>
-          </a:effectRef>
-          <a:fontRef idx="minor">
-            <a:schemeClr val="lt1"/>
-          </a:fontRef>
-        </p:style>
-        <p:txBody>
-          <a:bodyPr rtlCol="0" anchor="ctr"/>
-          <a:lstStyle/>
-          <a:p>
-            <a:pPr algn="ctr"/>
-          </a:p>
-        </p:txBody>
-      </p:sp>
-      <p:sp>
-        <p:nvSpPr>
-          <p:cNvPr id="13" name="TextBox 12"/>
-          <p:cNvSpPr txBox="1"/>
-          <p:nvPr/>
-        </p:nvSpPr>
-        <p:spPr>
-          <a:xfrm>
-            <a:off x="6400800" y="4114800"/>
-            <a:ext cx="4572000" cy="1554480"/>
-          </a:xfrm>
-          <a:prstGeom prst="rect">
-            <a:avLst/>
-          </a:prstGeom>
-          <a:noFill/>
-        </p:spPr>
-        <p:txBody>
-          <a:bodyPr wrap="square">
-            <a:spAutoFit/>
-          </a:bodyPr>
-          <a:lstStyle/>
-          <a:p>
-            <a:pPr>
-              <a:defRPr sz="1500" b="1">
-                <a:solidFill>
-                  <a:srgbClr val="059669"/>
-                </a:solidFill>
-              </a:defRPr>
-            </a:pPr>
-            <a:r>
-              <a:t>Cost &amp; Infrastructure Scalability</a:t>
-            </a:r>
-          </a:p>
-          <a:p>
-            <a:pPr>
-              <a:spcBef>
-                <a:spcPts val="600"/>
-              </a:spcBef>
-              <a:defRPr sz="1150">
-                <a:solidFill>
-                  <a:srgbClr val="64748B"/>
-                </a:solidFill>
-              </a:defRPr>
-            </a:pPr>
-            <a:r>
-              <a:t>Static edge-hosted architecture delivers near-zero server maintenance costs. Scalable to millions of concurrent citizens with sub-50ms latency.</a:t>
+              <a:defRPr sz="1200" b="1">
+                <a:solidFill>
+                  <a:srgbClr val="BFDBFE"/>
+                </a:solidFill>
+              </a:defRPr>
+            </a:pPr>
+            <a:r>
+              <a:t>Live Prototype &amp; Code Repository: https://github.com/samenthamassey127-hue/JanMitra</a:t>
             </a:r>
           </a:p>
         </p:txBody>

--- a/JanMitra_Presentation.pptx
+++ b/JanMitra_Presentation.pptx
@@ -3145,7 +3145,7 @@
         </p:nvSpPr>
         <p:spPr>
           <a:xfrm>
-            <a:off x="1097280" y="1097280"/>
+            <a:off x="1097280" y="1188720"/>
             <a:ext cx="9966960" cy="2926080"/>
           </a:xfrm>
           <a:prstGeom prst="rect">
@@ -3160,59 +3160,44 @@
           <a:lstStyle/>
           <a:p>
             <a:pPr>
-              <a:defRPr sz="1200" b="1">
-                <a:solidFill>
-                  <a:srgbClr val="F59E0B"/>
-                </a:solidFill>
-              </a:defRPr>
-            </a:pPr>
-            <a:r>
-              <a:t>CIVIC-TECH INNOVATION  •  INDIA &amp; UTTAR PRADESH PROTOTYPE</a:t>
+              <a:defRPr sz="4800" b="1">
+                <a:solidFill>
+                  <a:srgbClr val="FFFFFF"/>
+                </a:solidFill>
+              </a:defRPr>
+            </a:pPr>
+            <a:r>
+              <a:t>JanMitra (जनमित्र)</a:t>
             </a:r>
           </a:p>
           <a:p>
             <a:pPr>
               <a:spcBef>
-                <a:spcPts val="800"/>
+                <a:spcPts val="600"/>
               </a:spcBef>
-              <a:defRPr sz="4600" b="1">
-                <a:solidFill>
-                  <a:srgbClr val="FFFFFF"/>
-                </a:solidFill>
-              </a:defRPr>
-            </a:pPr>
-            <a:r>
-              <a:t>JanMitra (जनमित्र)</a:t>
+              <a:defRPr sz="2200">
+                <a:solidFill>
+                  <a:srgbClr val="BFDBFE"/>
+                </a:solidFill>
+              </a:defRPr>
+            </a:pPr>
+            <a:r>
+              <a:t>“Understand. Discover. Apply.”</a:t>
             </a:r>
           </a:p>
           <a:p>
             <a:pPr>
               <a:spcBef>
-                <a:spcPts val="400"/>
+                <a:spcPts val="1000"/>
               </a:spcBef>
-              <a:defRPr sz="2000">
-                <a:solidFill>
-                  <a:srgbClr val="BFDBFE"/>
-                </a:solidFill>
-              </a:defRPr>
-            </a:pPr>
-            <a:r>
-              <a:t>“Understand. Discover. Apply.”</a:t>
-            </a:r>
-          </a:p>
-          <a:p>
-            <a:pPr>
-              <a:spcBef>
-                <a:spcPts val="800"/>
-              </a:spcBef>
-              <a:defRPr sz="1400">
+              <a:defRPr sz="1500">
                 <a:solidFill>
                   <a:srgbClr val="CBD5E1"/>
                 </a:solidFill>
               </a:defRPr>
             </a:pPr>
             <a:r>
-              <a:t>A personalized civic navigation platform that transforms everyday citizen problems into evidence-backed government action plans.</a:t>
+              <a:t>A citizen-first digital navigator that turns real-life situations into evidence-backed government action plans.</a:t>
             </a:r>
           </a:p>
         </p:txBody>
@@ -3338,8 +3323,8 @@
         </p:nvSpPr>
         <p:spPr>
           <a:xfrm>
-            <a:off x="731520" y="365760"/>
-            <a:ext cx="10698480" cy="320040"/>
+            <a:off x="731520" y="502920"/>
+            <a:ext cx="10698480" cy="548640"/>
           </a:xfrm>
           <a:prstGeom prst="rect">
             <a:avLst/>
@@ -3353,14 +3338,14 @@
           <a:lstStyle/>
           <a:p>
             <a:pPr>
-              <a:defRPr sz="1100" b="1">
-                <a:solidFill>
-                  <a:srgbClr val="D97706"/>
-                </a:solidFill>
-              </a:defRPr>
-            </a:pPr>
-            <a:r>
-              <a:t>THE CITIZEN CHALLENGE</a:t>
+              <a:defRPr sz="2400" b="1">
+                <a:solidFill>
+                  <a:srgbClr val="0F172A"/>
+                </a:solidFill>
+              </a:defRPr>
+            </a:pPr>
+            <a:r>
+              <a:t>The Reality of Accessing Government Welfare in India</a:t>
             </a:r>
           </a:p>
         </p:txBody>
@@ -3373,8 +3358,8 @@
         </p:nvSpPr>
         <p:spPr>
           <a:xfrm>
-            <a:off x="731520" y="685800"/>
-            <a:ext cx="10698480" cy="502920"/>
+            <a:off x="731520" y="1051560"/>
+            <a:ext cx="10698480" cy="411480"/>
           </a:xfrm>
           <a:prstGeom prst="rect">
             <a:avLst/>
@@ -3388,14 +3373,14 @@
           <a:lstStyle/>
           <a:p>
             <a:pPr>
-              <a:defRPr sz="2200" b="1">
-                <a:solidFill>
-                  <a:srgbClr val="0F172A"/>
-                </a:solidFill>
-              </a:defRPr>
-            </a:pPr>
-            <a:r>
-              <a:t>The Reality of Accessing Government Welfare in India</a:t>
+              <a:defRPr sz="1300">
+                <a:solidFill>
+                  <a:srgbClr val="64748B"/>
+                </a:solidFill>
+              </a:defRPr>
+            </a:pPr>
+            <a:r>
+              <a:t>Why billions in public welfare budgets remain unutilized by eligible citizens</a:t>
             </a:r>
           </a:p>
         </p:txBody>
@@ -3403,41 +3388,6 @@
       <p:sp>
         <p:nvSpPr>
           <p:cNvPr id="4" name="TextBox 3"/>
-          <p:cNvSpPr txBox="1"/>
-          <p:nvPr/>
-        </p:nvSpPr>
-        <p:spPr>
-          <a:xfrm>
-            <a:off x="731520" y="1188720"/>
-            <a:ext cx="10698480" cy="365760"/>
-          </a:xfrm>
-          <a:prstGeom prst="rect">
-            <a:avLst/>
-          </a:prstGeom>
-          <a:noFill/>
-        </p:spPr>
-        <p:txBody>
-          <a:bodyPr wrap="square">
-            <a:spAutoFit/>
-          </a:bodyPr>
-          <a:lstStyle/>
-          <a:p>
-            <a:pPr>
-              <a:defRPr sz="1200">
-                <a:solidFill>
-                  <a:srgbClr val="64748B"/>
-                </a:solidFill>
-              </a:defRPr>
-            </a:pPr>
-            <a:r>
-              <a:t>Why billions in public welfare budgets remain unutilized by eligible citizens</a:t>
-            </a:r>
-          </a:p>
-        </p:txBody>
-      </p:sp>
-      <p:sp>
-        <p:nvSpPr>
-          <p:cNvPr id="5" name="TextBox 4"/>
           <p:cNvSpPr txBox="1"/>
           <p:nvPr/>
         </p:nvSpPr>
@@ -3465,21 +3415,21 @@
               </a:defRPr>
             </a:pPr>
             <a:r>
-              <a:t>JanMitra: Understand. Discover. Apply.  |  Slide 2 of 7</a:t>
-            </a:r>
-          </a:p>
-        </p:txBody>
-      </p:sp>
-      <p:sp>
-        <p:nvSpPr>
-          <p:cNvPr id="6" name="Rounded Rectangle 5"/>
+              <a:t>JanMitra  •  Slide 2 of 7</a:t>
+            </a:r>
+          </a:p>
+        </p:txBody>
+      </p:sp>
+      <p:sp>
+        <p:nvSpPr>
+          <p:cNvPr id="5" name="Rounded Rectangle 4"/>
           <p:cNvSpPr/>
           <p:nvPr/>
         </p:nvSpPr>
         <p:spPr>
           <a:xfrm>
-            <a:off x="731520" y="1737360"/>
-            <a:ext cx="5120640" cy="1920240"/>
+            <a:off x="731520" y="1691640"/>
+            <a:ext cx="5120640" cy="1965960"/>
           </a:xfrm>
           <a:prstGeom prst="roundRect">
             <a:avLst/>
@@ -3517,14 +3467,14 @@
       </p:sp>
       <p:sp>
         <p:nvSpPr>
-          <p:cNvPr id="7" name="TextBox 6"/>
+          <p:cNvPr id="6" name="TextBox 5"/>
           <p:cNvSpPr txBox="1"/>
           <p:nvPr/>
         </p:nvSpPr>
         <p:spPr>
           <a:xfrm>
-            <a:off x="1005840" y="1920240"/>
-            <a:ext cx="4572000" cy="1554480"/>
+            <a:off x="1005840" y="1874520"/>
+            <a:ext cx="4572000" cy="1600200"/>
           </a:xfrm>
           <a:prstGeom prst="rect">
             <a:avLst/>
@@ -3560,21 +3510,21 @@
               </a:defRPr>
             </a:pPr>
             <a:r>
-              <a:t>Schemes are siloed across hundreds of separate department portals. Citizens must already know the scheme acronym (PMAY, MMYSY, NFSA) to search.</a:t>
-            </a:r>
-          </a:p>
-        </p:txBody>
-      </p:sp>
-      <p:sp>
-        <p:nvSpPr>
-          <p:cNvPr id="8" name="Rounded Rectangle 7"/>
+              <a:t>Schemes are siloed across hundreds of separate department portals. Citizens must already know the scheme acronym (PMAY, MMYSY, NFSA) before searching.</a:t>
+            </a:r>
+          </a:p>
+        </p:txBody>
+      </p:sp>
+      <p:sp>
+        <p:nvSpPr>
+          <p:cNvPr id="7" name="Rounded Rectangle 6"/>
           <p:cNvSpPr/>
           <p:nvPr/>
         </p:nvSpPr>
         <p:spPr>
           <a:xfrm>
-            <a:off x="6126480" y="1737360"/>
-            <a:ext cx="5120640" cy="1920240"/>
+            <a:off x="6126480" y="1691640"/>
+            <a:ext cx="5120640" cy="1965960"/>
           </a:xfrm>
           <a:prstGeom prst="roundRect">
             <a:avLst/>
@@ -3612,14 +3562,14 @@
       </p:sp>
       <p:sp>
         <p:nvSpPr>
-          <p:cNvPr id="9" name="TextBox 8"/>
+          <p:cNvPr id="8" name="TextBox 7"/>
           <p:cNvSpPr txBox="1"/>
           <p:nvPr/>
         </p:nvSpPr>
         <p:spPr>
           <a:xfrm>
-            <a:off x="6400800" y="1920240"/>
-            <a:ext cx="4572000" cy="1554480"/>
+            <a:off x="6400800" y="1874520"/>
+            <a:ext cx="4572000" cy="1600200"/>
           </a:xfrm>
           <a:prstGeom prst="rect">
             <a:avLst/>
@@ -3655,21 +3605,21 @@
               </a:defRPr>
             </a:pPr>
             <a:r>
-              <a:t>Official circulars, affidavits, and gazette notices are written in dense bureaucratic prose that excludes first-time digital and rural citizens.</a:t>
-            </a:r>
-          </a:p>
-        </p:txBody>
-      </p:sp>
-      <p:sp>
-        <p:nvSpPr>
-          <p:cNvPr id="10" name="Rounded Rectangle 9"/>
+              <a:t>Official circulars, affidavits, and gazette notices use dense bureaucratic prose that intimidates first-time digital and rural citizens.</a:t>
+            </a:r>
+          </a:p>
+        </p:txBody>
+      </p:sp>
+      <p:sp>
+        <p:nvSpPr>
+          <p:cNvPr id="9" name="Rounded Rectangle 8"/>
           <p:cNvSpPr/>
           <p:nvPr/>
         </p:nvSpPr>
         <p:spPr>
           <a:xfrm>
             <a:off x="731520" y="3931920"/>
-            <a:ext cx="5120640" cy="1920240"/>
+            <a:ext cx="5120640" cy="1965960"/>
           </a:xfrm>
           <a:prstGeom prst="roundRect">
             <a:avLst/>
@@ -3707,14 +3657,14 @@
       </p:sp>
       <p:sp>
         <p:nvSpPr>
-          <p:cNvPr id="11" name="TextBox 10"/>
+          <p:cNvPr id="10" name="TextBox 9"/>
           <p:cNvSpPr txBox="1"/>
           <p:nvPr/>
         </p:nvSpPr>
         <p:spPr>
           <a:xfrm>
             <a:off x="1005840" y="4114800"/>
-            <a:ext cx="4572000" cy="1554480"/>
+            <a:ext cx="4572000" cy="1600200"/>
           </a:xfrm>
           <a:prstGeom prst="rect">
             <a:avLst/>
@@ -3757,14 +3707,14 @@
       </p:sp>
       <p:sp>
         <p:nvSpPr>
-          <p:cNvPr id="12" name="Rounded Rectangle 11"/>
+          <p:cNvPr id="11" name="Rounded Rectangle 10"/>
           <p:cNvSpPr/>
           <p:nvPr/>
         </p:nvSpPr>
         <p:spPr>
           <a:xfrm>
             <a:off x="6126480" y="3931920"/>
-            <a:ext cx="5120640" cy="1920240"/>
+            <a:ext cx="5120640" cy="1965960"/>
           </a:xfrm>
           <a:prstGeom prst="roundRect">
             <a:avLst/>
@@ -3802,14 +3752,14 @@
       </p:sp>
       <p:sp>
         <p:nvSpPr>
-          <p:cNvPr id="13" name="TextBox 12"/>
+          <p:cNvPr id="12" name="TextBox 11"/>
           <p:cNvSpPr txBox="1"/>
           <p:nvPr/>
         </p:nvSpPr>
         <p:spPr>
           <a:xfrm>
             <a:off x="6400800" y="4114800"/>
-            <a:ext cx="4572000" cy="1554480"/>
+            <a:ext cx="4572000" cy="1600200"/>
           </a:xfrm>
           <a:prstGeom prst="rect">
             <a:avLst/>
@@ -3845,7 +3795,7 @@
               </a:defRPr>
             </a:pPr>
             <a:r>
-              <a:t>Citizens are forced to rely on unverified touts, while generic AI chatbots hallucinate fake URLs, wrong deadlines, and non-existent rules.</a:t>
+              <a:t>Citizens are forced to pay unverified touts, while generic AI chatbots hallucinate fake URLs, wrong deadlines, and non-existent rules.</a:t>
             </a:r>
           </a:p>
         </p:txBody>
@@ -3876,8 +3826,8 @@
         </p:nvSpPr>
         <p:spPr>
           <a:xfrm>
-            <a:off x="731520" y="365760"/>
-            <a:ext cx="10698480" cy="320040"/>
+            <a:off x="731520" y="502920"/>
+            <a:ext cx="10698480" cy="548640"/>
           </a:xfrm>
           <a:prstGeom prst="rect">
             <a:avLst/>
@@ -3891,14 +3841,14 @@
           <a:lstStyle/>
           <a:p>
             <a:pPr>
-              <a:defRPr sz="1100" b="1">
-                <a:solidFill>
-                  <a:srgbClr val="D97706"/>
-                </a:solidFill>
-              </a:defRPr>
-            </a:pPr>
-            <a:r>
-              <a:t>COMPETITIVE BENCHMARKING</a:t>
+              <a:defRPr sz="2400" b="1">
+                <a:solidFill>
+                  <a:srgbClr val="0F172A"/>
+                </a:solidFill>
+              </a:defRPr>
+            </a:pPr>
+            <a:r>
+              <a:t>Traditional Portals vs. Generic AI vs. JanMitra</a:t>
             </a:r>
           </a:p>
         </p:txBody>
@@ -3911,8 +3861,8 @@
         </p:nvSpPr>
         <p:spPr>
           <a:xfrm>
-            <a:off x="731520" y="685800"/>
-            <a:ext cx="10698480" cy="502920"/>
+            <a:off x="731520" y="1051560"/>
+            <a:ext cx="10698480" cy="411480"/>
           </a:xfrm>
           <a:prstGeom prst="rect">
             <a:avLst/>
@@ -3926,14 +3876,14 @@
           <a:lstStyle/>
           <a:p>
             <a:pPr>
-              <a:defRPr sz="2200" b="1">
-                <a:solidFill>
-                  <a:srgbClr val="0F172A"/>
-                </a:solidFill>
-              </a:defRPr>
-            </a:pPr>
-            <a:r>
-              <a:t>Traditional Portals vs. Generic AI vs. JanMitra</a:t>
+              <a:defRPr sz="1300">
+                <a:solidFill>
+                  <a:srgbClr val="64748B"/>
+                </a:solidFill>
+              </a:defRPr>
+            </a:pPr>
+            <a:r>
+              <a:t>Why JanMitra is fundamentally superior to both search portals and generic AI chatbots</a:t>
             </a:r>
           </a:p>
         </p:txBody>
@@ -3941,41 +3891,6 @@
       <p:sp>
         <p:nvSpPr>
           <p:cNvPr id="4" name="TextBox 3"/>
-          <p:cNvSpPr txBox="1"/>
-          <p:nvPr/>
-        </p:nvSpPr>
-        <p:spPr>
-          <a:xfrm>
-            <a:off x="731520" y="1188720"/>
-            <a:ext cx="10698480" cy="365760"/>
-          </a:xfrm>
-          <a:prstGeom prst="rect">
-            <a:avLst/>
-          </a:prstGeom>
-          <a:noFill/>
-        </p:spPr>
-        <p:txBody>
-          <a:bodyPr wrap="square">
-            <a:spAutoFit/>
-          </a:bodyPr>
-          <a:lstStyle/>
-          <a:p>
-            <a:pPr>
-              <a:defRPr sz="1200">
-                <a:solidFill>
-                  <a:srgbClr val="64748B"/>
-                </a:solidFill>
-              </a:defRPr>
-            </a:pPr>
-            <a:r>
-              <a:t>Why JanMitra is fundamentally superior to both search portals and generic AI chatbots</a:t>
-            </a:r>
-          </a:p>
-        </p:txBody>
-      </p:sp>
-      <p:sp>
-        <p:nvSpPr>
-          <p:cNvPr id="5" name="TextBox 4"/>
           <p:cNvSpPr txBox="1"/>
           <p:nvPr/>
         </p:nvSpPr>
@@ -4003,21 +3918,21 @@
               </a:defRPr>
             </a:pPr>
             <a:r>
-              <a:t>JanMitra: Understand. Discover. Apply.  |  Slide 3 of 7</a:t>
-            </a:r>
-          </a:p>
-        </p:txBody>
-      </p:sp>
-      <p:sp>
-        <p:nvSpPr>
-          <p:cNvPr id="6" name="Rounded Rectangle 5"/>
+              <a:t>JanMitra  •  Slide 3 of 7</a:t>
+            </a:r>
+          </a:p>
+        </p:txBody>
+      </p:sp>
+      <p:sp>
+        <p:nvSpPr>
+          <p:cNvPr id="5" name="Rounded Rectangle 4"/>
           <p:cNvSpPr/>
           <p:nvPr/>
         </p:nvSpPr>
         <p:spPr>
           <a:xfrm>
-            <a:off x="731520" y="1691640"/>
-            <a:ext cx="3474720" cy="4572000"/>
+            <a:off x="731520" y="1645920"/>
+            <a:ext cx="3474720" cy="4617720"/>
           </a:xfrm>
           <a:prstGeom prst="roundRect">
             <a:avLst/>
@@ -4055,14 +3970,14 @@
       </p:sp>
       <p:sp>
         <p:nvSpPr>
-          <p:cNvPr id="7" name="TextBox 6"/>
+          <p:cNvPr id="6" name="TextBox 5"/>
           <p:cNvSpPr txBox="1"/>
           <p:nvPr/>
         </p:nvSpPr>
         <p:spPr>
           <a:xfrm>
-            <a:off x="914400" y="1783080"/>
-            <a:ext cx="3108960" cy="4297680"/>
+            <a:off x="914400" y="1737360"/>
+            <a:ext cx="3108960" cy="4343400"/>
           </a:xfrm>
           <a:prstGeom prst="rect">
             <a:avLst/>
@@ -4255,14 +4170,14 @@
       </p:sp>
       <p:sp>
         <p:nvSpPr>
-          <p:cNvPr id="8" name="Rounded Rectangle 7"/>
+          <p:cNvPr id="7" name="Rounded Rectangle 6"/>
           <p:cNvSpPr/>
           <p:nvPr/>
         </p:nvSpPr>
         <p:spPr>
           <a:xfrm>
-            <a:off x="4343400" y="1691640"/>
-            <a:ext cx="3474720" cy="4572000"/>
+            <a:off x="4343400" y="1645920"/>
+            <a:ext cx="3474720" cy="4617720"/>
           </a:xfrm>
           <a:prstGeom prst="roundRect">
             <a:avLst/>
@@ -4300,14 +4215,14 @@
       </p:sp>
       <p:sp>
         <p:nvSpPr>
-          <p:cNvPr id="9" name="TextBox 8"/>
+          <p:cNvPr id="8" name="TextBox 7"/>
           <p:cNvSpPr txBox="1"/>
           <p:nvPr/>
         </p:nvSpPr>
         <p:spPr>
           <a:xfrm>
-            <a:off x="4526280" y="1783080"/>
-            <a:ext cx="3108960" cy="4297680"/>
+            <a:off x="4526280" y="1737360"/>
+            <a:ext cx="3108960" cy="4343400"/>
           </a:xfrm>
           <a:prstGeom prst="rect">
             <a:avLst/>
@@ -4500,14 +4415,14 @@
       </p:sp>
       <p:sp>
         <p:nvSpPr>
-          <p:cNvPr id="10" name="Rounded Rectangle 9"/>
+          <p:cNvPr id="9" name="Rounded Rectangle 8"/>
           <p:cNvSpPr/>
           <p:nvPr/>
         </p:nvSpPr>
         <p:spPr>
           <a:xfrm>
-            <a:off x="7955280" y="1691640"/>
-            <a:ext cx="3474720" cy="4572000"/>
+            <a:off x="7955280" y="1645920"/>
+            <a:ext cx="3474720" cy="4617720"/>
           </a:xfrm>
           <a:prstGeom prst="roundRect">
             <a:avLst/>
@@ -4545,14 +4460,14 @@
       </p:sp>
       <p:sp>
         <p:nvSpPr>
-          <p:cNvPr id="11" name="TextBox 10"/>
+          <p:cNvPr id="10" name="TextBox 9"/>
           <p:cNvSpPr txBox="1"/>
           <p:nvPr/>
         </p:nvSpPr>
         <p:spPr>
           <a:xfrm>
-            <a:off x="8138160" y="1783080"/>
-            <a:ext cx="3108960" cy="4297680"/>
+            <a:off x="8138160" y="1737360"/>
+            <a:ext cx="3108960" cy="4343400"/>
           </a:xfrm>
           <a:prstGeom prst="rect">
             <a:avLst/>
@@ -4769,8 +4684,8 @@
         </p:nvSpPr>
         <p:spPr>
           <a:xfrm>
-            <a:off x="731520" y="365760"/>
-            <a:ext cx="10698480" cy="320040"/>
+            <a:off x="731520" y="502920"/>
+            <a:ext cx="10698480" cy="548640"/>
           </a:xfrm>
           <a:prstGeom prst="rect">
             <a:avLst/>
@@ -4784,14 +4699,14 @@
           <a:lstStyle/>
           <a:p>
             <a:pPr>
-              <a:defRPr sz="1100" b="1">
-                <a:solidFill>
-                  <a:srgbClr val="D97706"/>
-                </a:solidFill>
-              </a:defRPr>
-            </a:pPr>
-            <a:r>
-              <a:t>FROM IDEA TO IMPACT</a:t>
+              <a:defRPr sz="2400" b="1">
+                <a:solidFill>
+                  <a:srgbClr val="0F172A"/>
+                </a:solidFill>
+              </a:defRPr>
+            </a:pPr>
+            <a:r>
+              <a:t>The Paradigm Shift &amp; The 8-Stage Action Loop</a:t>
             </a:r>
           </a:p>
         </p:txBody>
@@ -4804,8 +4719,8 @@
         </p:nvSpPr>
         <p:spPr>
           <a:xfrm>
-            <a:off x="731520" y="685800"/>
-            <a:ext cx="10698480" cy="502920"/>
+            <a:off x="731520" y="1051560"/>
+            <a:ext cx="10698480" cy="411480"/>
           </a:xfrm>
           <a:prstGeom prst="rect">
             <a:avLst/>
@@ -4819,14 +4734,14 @@
           <a:lstStyle/>
           <a:p>
             <a:pPr>
-              <a:defRPr sz="2200" b="1">
-                <a:solidFill>
-                  <a:srgbClr val="0F172A"/>
-                </a:solidFill>
-              </a:defRPr>
-            </a:pPr>
-            <a:r>
-              <a:t>The Paradigm Shift &amp; The 8-Stage Action Loop</a:t>
+              <a:defRPr sz="1300">
+                <a:solidFill>
+                  <a:srgbClr val="64748B"/>
+                </a:solidFill>
+              </a:defRPr>
+            </a:pPr>
+            <a:r>
+              <a:t>Transforming ambiguous citizen dilemmas into completed government sanctions</a:t>
             </a:r>
           </a:p>
         </p:txBody>
@@ -4834,41 +4749,6 @@
       <p:sp>
         <p:nvSpPr>
           <p:cNvPr id="4" name="TextBox 3"/>
-          <p:cNvSpPr txBox="1"/>
-          <p:nvPr/>
-        </p:nvSpPr>
-        <p:spPr>
-          <a:xfrm>
-            <a:off x="731520" y="1188720"/>
-            <a:ext cx="10698480" cy="365760"/>
-          </a:xfrm>
-          <a:prstGeom prst="rect">
-            <a:avLst/>
-          </a:prstGeom>
-          <a:noFill/>
-        </p:spPr>
-        <p:txBody>
-          <a:bodyPr wrap="square">
-            <a:spAutoFit/>
-          </a:bodyPr>
-          <a:lstStyle/>
-          <a:p>
-            <a:pPr>
-              <a:defRPr sz="1200">
-                <a:solidFill>
-                  <a:srgbClr val="64748B"/>
-                </a:solidFill>
-              </a:defRPr>
-            </a:pPr>
-            <a:r>
-              <a:t>Transforming ambiguous citizen dilemmas into completed government sanctions</a:t>
-            </a:r>
-          </a:p>
-        </p:txBody>
-      </p:sp>
-      <p:sp>
-        <p:nvSpPr>
-          <p:cNvPr id="5" name="TextBox 4"/>
           <p:cNvSpPr txBox="1"/>
           <p:nvPr/>
         </p:nvSpPr>
@@ -4896,20 +4776,20 @@
               </a:defRPr>
             </a:pPr>
             <a:r>
-              <a:t>JanMitra: Understand. Discover. Apply.  |  Slide 4 of 7</a:t>
-            </a:r>
-          </a:p>
-        </p:txBody>
-      </p:sp>
-      <p:sp>
-        <p:nvSpPr>
-          <p:cNvPr id="6" name="Rounded Rectangle 5"/>
+              <a:t>JanMitra  •  Slide 4 of 7</a:t>
+            </a:r>
+          </a:p>
+        </p:txBody>
+      </p:sp>
+      <p:sp>
+        <p:nvSpPr>
+          <p:cNvPr id="5" name="Rounded Rectangle 4"/>
           <p:cNvSpPr/>
           <p:nvPr/>
         </p:nvSpPr>
         <p:spPr>
           <a:xfrm>
-            <a:off x="731520" y="1691640"/>
+            <a:off x="731520" y="1645920"/>
             <a:ext cx="10698480" cy="1280160"/>
           </a:xfrm>
           <a:prstGeom prst="roundRect">
@@ -4948,13 +4828,13 @@
       </p:sp>
       <p:sp>
         <p:nvSpPr>
-          <p:cNvPr id="7" name="TextBox 6"/>
+          <p:cNvPr id="6" name="TextBox 5"/>
           <p:cNvSpPr txBox="1"/>
           <p:nvPr/>
         </p:nvSpPr>
         <p:spPr>
           <a:xfrm>
-            <a:off x="914400" y="1783080"/>
+            <a:off x="914400" y="1737360"/>
             <a:ext cx="10332720" cy="1097280"/>
           </a:xfrm>
           <a:prstGeom prst="rect">
@@ -5013,13 +4893,13 @@
       </p:sp>
       <p:sp>
         <p:nvSpPr>
-          <p:cNvPr id="8" name="Rounded Rectangle 7"/>
+          <p:cNvPr id="7" name="Rounded Rectangle 6"/>
           <p:cNvSpPr/>
           <p:nvPr/>
         </p:nvSpPr>
         <p:spPr>
           <a:xfrm>
-            <a:off x="731520" y="3154680"/>
+            <a:off x="731520" y="3108960"/>
             <a:ext cx="2560320" cy="1371600"/>
           </a:xfrm>
           <a:prstGeom prst="roundRect">
@@ -5058,13 +4938,13 @@
       </p:sp>
       <p:sp>
         <p:nvSpPr>
-          <p:cNvPr id="9" name="TextBox 8"/>
+          <p:cNvPr id="8" name="TextBox 7"/>
           <p:cNvSpPr txBox="1"/>
           <p:nvPr/>
         </p:nvSpPr>
         <p:spPr>
           <a:xfrm>
-            <a:off x="914400" y="3264408"/>
+            <a:off x="914400" y="3218688"/>
             <a:ext cx="2194560" cy="1097280"/>
           </a:xfrm>
           <a:prstGeom prst="rect">
@@ -5120,13 +5000,13 @@
       </p:sp>
       <p:sp>
         <p:nvSpPr>
-          <p:cNvPr id="10" name="Rounded Rectangle 9"/>
+          <p:cNvPr id="9" name="Rounded Rectangle 8"/>
           <p:cNvSpPr/>
           <p:nvPr/>
         </p:nvSpPr>
         <p:spPr>
           <a:xfrm>
-            <a:off x="3429000" y="3154680"/>
+            <a:off x="3429000" y="3108960"/>
             <a:ext cx="2560320" cy="1371600"/>
           </a:xfrm>
           <a:prstGeom prst="roundRect">
@@ -5165,13 +5045,13 @@
       </p:sp>
       <p:sp>
         <p:nvSpPr>
-          <p:cNvPr id="11" name="TextBox 10"/>
+          <p:cNvPr id="10" name="TextBox 9"/>
           <p:cNvSpPr txBox="1"/>
           <p:nvPr/>
         </p:nvSpPr>
         <p:spPr>
           <a:xfrm>
-            <a:off x="3611880" y="3264408"/>
+            <a:off x="3611880" y="3218688"/>
             <a:ext cx="2194560" cy="1097280"/>
           </a:xfrm>
           <a:prstGeom prst="rect">
@@ -5227,13 +5107,13 @@
       </p:sp>
       <p:sp>
         <p:nvSpPr>
-          <p:cNvPr id="12" name="Rounded Rectangle 11"/>
+          <p:cNvPr id="11" name="Rounded Rectangle 10"/>
           <p:cNvSpPr/>
           <p:nvPr/>
         </p:nvSpPr>
         <p:spPr>
           <a:xfrm>
-            <a:off x="6126480" y="3154680"/>
+            <a:off x="6126480" y="3108960"/>
             <a:ext cx="2560320" cy="1371600"/>
           </a:xfrm>
           <a:prstGeom prst="roundRect">
@@ -5272,13 +5152,13 @@
       </p:sp>
       <p:sp>
         <p:nvSpPr>
-          <p:cNvPr id="13" name="TextBox 12"/>
+          <p:cNvPr id="12" name="TextBox 11"/>
           <p:cNvSpPr txBox="1"/>
           <p:nvPr/>
         </p:nvSpPr>
         <p:spPr>
           <a:xfrm>
-            <a:off x="6309360" y="3264408"/>
+            <a:off x="6309360" y="3218688"/>
             <a:ext cx="2194560" cy="1097280"/>
           </a:xfrm>
           <a:prstGeom prst="rect">
@@ -5334,13 +5214,13 @@
       </p:sp>
       <p:sp>
         <p:nvSpPr>
-          <p:cNvPr id="14" name="Rounded Rectangle 13"/>
+          <p:cNvPr id="13" name="Rounded Rectangle 12"/>
           <p:cNvSpPr/>
           <p:nvPr/>
         </p:nvSpPr>
         <p:spPr>
           <a:xfrm>
-            <a:off x="8823960" y="3154680"/>
+            <a:off x="8823960" y="3108960"/>
             <a:ext cx="2560320" cy="1371600"/>
           </a:xfrm>
           <a:prstGeom prst="roundRect">
@@ -5379,13 +5259,13 @@
       </p:sp>
       <p:sp>
         <p:nvSpPr>
-          <p:cNvPr id="15" name="TextBox 14"/>
+          <p:cNvPr id="14" name="TextBox 13"/>
           <p:cNvSpPr txBox="1"/>
           <p:nvPr/>
         </p:nvSpPr>
         <p:spPr>
           <a:xfrm>
-            <a:off x="9006840" y="3264408"/>
+            <a:off x="9006840" y="3218688"/>
             <a:ext cx="2194560" cy="1097280"/>
           </a:xfrm>
           <a:prstGeom prst="rect">
@@ -5441,13 +5321,13 @@
       </p:sp>
       <p:sp>
         <p:nvSpPr>
-          <p:cNvPr id="16" name="Rounded Rectangle 15"/>
+          <p:cNvPr id="15" name="Rounded Rectangle 14"/>
           <p:cNvSpPr/>
           <p:nvPr/>
         </p:nvSpPr>
         <p:spPr>
           <a:xfrm>
-            <a:off x="731520" y="4709160"/>
+            <a:off x="731520" y="4663440"/>
             <a:ext cx="2560320" cy="1371600"/>
           </a:xfrm>
           <a:prstGeom prst="roundRect">
@@ -5486,13 +5366,13 @@
       </p:sp>
       <p:sp>
         <p:nvSpPr>
-          <p:cNvPr id="17" name="TextBox 16"/>
+          <p:cNvPr id="16" name="TextBox 15"/>
           <p:cNvSpPr txBox="1"/>
           <p:nvPr/>
         </p:nvSpPr>
         <p:spPr>
           <a:xfrm>
-            <a:off x="914400" y="4818888"/>
+            <a:off x="914400" y="4773168"/>
             <a:ext cx="2194560" cy="1097280"/>
           </a:xfrm>
           <a:prstGeom prst="rect">
@@ -5548,13 +5428,13 @@
       </p:sp>
       <p:sp>
         <p:nvSpPr>
-          <p:cNvPr id="18" name="Rounded Rectangle 17"/>
+          <p:cNvPr id="17" name="Rounded Rectangle 16"/>
           <p:cNvSpPr/>
           <p:nvPr/>
         </p:nvSpPr>
         <p:spPr>
           <a:xfrm>
-            <a:off x="3429000" y="4709160"/>
+            <a:off x="3429000" y="4663440"/>
             <a:ext cx="2560320" cy="1371600"/>
           </a:xfrm>
           <a:prstGeom prst="roundRect">
@@ -5593,13 +5473,13 @@
       </p:sp>
       <p:sp>
         <p:nvSpPr>
-          <p:cNvPr id="19" name="TextBox 18"/>
+          <p:cNvPr id="18" name="TextBox 17"/>
           <p:cNvSpPr txBox="1"/>
           <p:nvPr/>
         </p:nvSpPr>
         <p:spPr>
           <a:xfrm>
-            <a:off x="3611880" y="4818888"/>
+            <a:off x="3611880" y="4773168"/>
             <a:ext cx="2194560" cy="1097280"/>
           </a:xfrm>
           <a:prstGeom prst="rect">
@@ -5655,13 +5535,13 @@
       </p:sp>
       <p:sp>
         <p:nvSpPr>
-          <p:cNvPr id="20" name="Rounded Rectangle 19"/>
+          <p:cNvPr id="19" name="Rounded Rectangle 18"/>
           <p:cNvSpPr/>
           <p:nvPr/>
         </p:nvSpPr>
         <p:spPr>
           <a:xfrm>
-            <a:off x="6126480" y="4709160"/>
+            <a:off x="6126480" y="4663440"/>
             <a:ext cx="2560320" cy="1371600"/>
           </a:xfrm>
           <a:prstGeom prst="roundRect">
@@ -5700,13 +5580,13 @@
       </p:sp>
       <p:sp>
         <p:nvSpPr>
-          <p:cNvPr id="21" name="TextBox 20"/>
+          <p:cNvPr id="20" name="TextBox 19"/>
           <p:cNvSpPr txBox="1"/>
           <p:nvPr/>
         </p:nvSpPr>
         <p:spPr>
           <a:xfrm>
-            <a:off x="6309360" y="4818888"/>
+            <a:off x="6309360" y="4773168"/>
             <a:ext cx="2194560" cy="1097280"/>
           </a:xfrm>
           <a:prstGeom prst="rect">
@@ -5762,13 +5642,13 @@
       </p:sp>
       <p:sp>
         <p:nvSpPr>
-          <p:cNvPr id="22" name="Rounded Rectangle 21"/>
+          <p:cNvPr id="21" name="Rounded Rectangle 20"/>
           <p:cNvSpPr/>
           <p:nvPr/>
         </p:nvSpPr>
         <p:spPr>
           <a:xfrm>
-            <a:off x="8823960" y="4709160"/>
+            <a:off x="8823960" y="4663440"/>
             <a:ext cx="2560320" cy="1371600"/>
           </a:xfrm>
           <a:prstGeom prst="roundRect">
@@ -5807,13 +5687,13 @@
       </p:sp>
       <p:sp>
         <p:nvSpPr>
-          <p:cNvPr id="23" name="TextBox 22"/>
+          <p:cNvPr id="22" name="TextBox 21"/>
           <p:cNvSpPr txBox="1"/>
           <p:nvPr/>
         </p:nvSpPr>
         <p:spPr>
           <a:xfrm>
-            <a:off x="9006840" y="4818888"/>
+            <a:off x="9006840" y="4773168"/>
             <a:ext cx="2194560" cy="1097280"/>
           </a:xfrm>
           <a:prstGeom prst="rect">
@@ -5893,8 +5773,8 @@
         </p:nvSpPr>
         <p:spPr>
           <a:xfrm>
-            <a:off x="731520" y="365760"/>
-            <a:ext cx="10698480" cy="320040"/>
+            <a:off x="731520" y="502920"/>
+            <a:ext cx="10698480" cy="548640"/>
           </a:xfrm>
           <a:prstGeom prst="rect">
             <a:avLst/>
@@ -5908,14 +5788,14 @@
           <a:lstStyle/>
           <a:p>
             <a:pPr>
-              <a:defRPr sz="1100" b="1">
-                <a:solidFill>
-                  <a:srgbClr val="D97706"/>
-                </a:solidFill>
-              </a:defRPr>
-            </a:pPr>
-            <a:r>
-              <a:t>PROTOTYPE CAPABILITIES</a:t>
+              <a:defRPr sz="2400" b="1">
+                <a:solidFill>
+                  <a:srgbClr val="0F172A"/>
+                </a:solidFill>
+              </a:defRPr>
+            </a:pPr>
+            <a:r>
+              <a:t>Core Platform Features &amp; Live User Workflows</a:t>
             </a:r>
           </a:p>
         </p:txBody>
@@ -5928,8 +5808,8 @@
         </p:nvSpPr>
         <p:spPr>
           <a:xfrm>
-            <a:off x="731520" y="685800"/>
-            <a:ext cx="10698480" cy="502920"/>
+            <a:off x="731520" y="1051560"/>
+            <a:ext cx="10698480" cy="411480"/>
           </a:xfrm>
           <a:prstGeom prst="rect">
             <a:avLst/>
@@ -5943,14 +5823,14 @@
           <a:lstStyle/>
           <a:p>
             <a:pPr>
-              <a:defRPr sz="2200" b="1">
-                <a:solidFill>
-                  <a:srgbClr val="0F172A"/>
-                </a:solidFill>
-              </a:defRPr>
-            </a:pPr>
-            <a:r>
-              <a:t>Core Platform Features &amp; Live User Workflows</a:t>
+              <a:defRPr sz="1300">
+                <a:solidFill>
+                  <a:srgbClr val="64748B"/>
+                </a:solidFill>
+              </a:defRPr>
+            </a:pPr>
+            <a:r>
+              <a:t>Demonstrated and tested across 12+ schemes, 8+ public services, and 16+ credentials</a:t>
             </a:r>
           </a:p>
         </p:txBody>
@@ -5958,41 +5838,6 @@
       <p:sp>
         <p:nvSpPr>
           <p:cNvPr id="4" name="TextBox 3"/>
-          <p:cNvSpPr txBox="1"/>
-          <p:nvPr/>
-        </p:nvSpPr>
-        <p:spPr>
-          <a:xfrm>
-            <a:off x="731520" y="1188720"/>
-            <a:ext cx="10698480" cy="365760"/>
-          </a:xfrm>
-          <a:prstGeom prst="rect">
-            <a:avLst/>
-          </a:prstGeom>
-          <a:noFill/>
-        </p:spPr>
-        <p:txBody>
-          <a:bodyPr wrap="square">
-            <a:spAutoFit/>
-          </a:bodyPr>
-          <a:lstStyle/>
-          <a:p>
-            <a:pPr>
-              <a:defRPr sz="1200">
-                <a:solidFill>
-                  <a:srgbClr val="64748B"/>
-                </a:solidFill>
-              </a:defRPr>
-            </a:pPr>
-            <a:r>
-              <a:t>Demonstrated and tested across 12+ schemes, 8+ public services, and 16+ credentials</a:t>
-            </a:r>
-          </a:p>
-        </p:txBody>
-      </p:sp>
-      <p:sp>
-        <p:nvSpPr>
-          <p:cNvPr id="5" name="TextBox 4"/>
           <p:cNvSpPr txBox="1"/>
           <p:nvPr/>
         </p:nvSpPr>
@@ -6020,21 +5865,21 @@
               </a:defRPr>
             </a:pPr>
             <a:r>
-              <a:t>JanMitra: Understand. Discover. Apply.  |  Slide 5 of 7</a:t>
-            </a:r>
-          </a:p>
-        </p:txBody>
-      </p:sp>
-      <p:sp>
-        <p:nvSpPr>
-          <p:cNvPr id="6" name="Rounded Rectangle 5"/>
+              <a:t>JanMitra  •  Slide 5 of 7</a:t>
+            </a:r>
+          </a:p>
+        </p:txBody>
+      </p:sp>
+      <p:sp>
+        <p:nvSpPr>
+          <p:cNvPr id="5" name="Rounded Rectangle 4"/>
           <p:cNvSpPr/>
           <p:nvPr/>
         </p:nvSpPr>
         <p:spPr>
           <a:xfrm>
-            <a:off x="731520" y="1737360"/>
-            <a:ext cx="3429000" cy="1920240"/>
+            <a:off x="731520" y="1691640"/>
+            <a:ext cx="3429000" cy="1965960"/>
           </a:xfrm>
           <a:prstGeom prst="roundRect">
             <a:avLst/>
@@ -6072,14 +5917,14 @@
       </p:sp>
       <p:sp>
         <p:nvSpPr>
-          <p:cNvPr id="7" name="TextBox 6"/>
+          <p:cNvPr id="6" name="TextBox 5"/>
           <p:cNvSpPr txBox="1"/>
           <p:nvPr/>
         </p:nvSpPr>
         <p:spPr>
           <a:xfrm>
-            <a:off x="914400" y="1874520"/>
-            <a:ext cx="3063240" cy="1645920"/>
+            <a:off x="914400" y="1828800"/>
+            <a:ext cx="3063240" cy="1691640"/>
           </a:xfrm>
           <a:prstGeom prst="rect">
             <a:avLst/>
@@ -6122,14 +5967,14 @@
       </p:sp>
       <p:sp>
         <p:nvSpPr>
-          <p:cNvPr id="8" name="Rounded Rectangle 7"/>
+          <p:cNvPr id="7" name="Rounded Rectangle 6"/>
           <p:cNvSpPr/>
           <p:nvPr/>
         </p:nvSpPr>
         <p:spPr>
           <a:xfrm>
-            <a:off x="4343400" y="1737360"/>
-            <a:ext cx="3429000" cy="1920240"/>
+            <a:off x="4343400" y="1691640"/>
+            <a:ext cx="3429000" cy="1965960"/>
           </a:xfrm>
           <a:prstGeom prst="roundRect">
             <a:avLst/>
@@ -6167,14 +6012,14 @@
       </p:sp>
       <p:sp>
         <p:nvSpPr>
-          <p:cNvPr id="9" name="TextBox 8"/>
+          <p:cNvPr id="8" name="TextBox 7"/>
           <p:cNvSpPr txBox="1"/>
           <p:nvPr/>
         </p:nvSpPr>
         <p:spPr>
           <a:xfrm>
-            <a:off x="4526280" y="1874520"/>
-            <a:ext cx="3063240" cy="1645920"/>
+            <a:off x="4526280" y="1828800"/>
+            <a:ext cx="3063240" cy="1691640"/>
           </a:xfrm>
           <a:prstGeom prst="rect">
             <a:avLst/>
@@ -6217,14 +6062,14 @@
       </p:sp>
       <p:sp>
         <p:nvSpPr>
-          <p:cNvPr id="10" name="Rounded Rectangle 9"/>
+          <p:cNvPr id="9" name="Rounded Rectangle 8"/>
           <p:cNvSpPr/>
           <p:nvPr/>
         </p:nvSpPr>
         <p:spPr>
           <a:xfrm>
-            <a:off x="7955280" y="1737360"/>
-            <a:ext cx="3429000" cy="1920240"/>
+            <a:off x="7955280" y="1691640"/>
+            <a:ext cx="3429000" cy="1965960"/>
           </a:xfrm>
           <a:prstGeom prst="roundRect">
             <a:avLst/>
@@ -6262,14 +6107,14 @@
       </p:sp>
       <p:sp>
         <p:nvSpPr>
-          <p:cNvPr id="11" name="TextBox 10"/>
+          <p:cNvPr id="10" name="TextBox 9"/>
           <p:cNvSpPr txBox="1"/>
           <p:nvPr/>
         </p:nvSpPr>
         <p:spPr>
           <a:xfrm>
-            <a:off x="8138160" y="1874520"/>
-            <a:ext cx="3063240" cy="1645920"/>
+            <a:off x="8138160" y="1828800"/>
+            <a:ext cx="3063240" cy="1691640"/>
           </a:xfrm>
           <a:prstGeom prst="rect">
             <a:avLst/>
@@ -6312,14 +6157,14 @@
       </p:sp>
       <p:sp>
         <p:nvSpPr>
-          <p:cNvPr id="12" name="Rounded Rectangle 11"/>
+          <p:cNvPr id="11" name="Rounded Rectangle 10"/>
           <p:cNvSpPr/>
           <p:nvPr/>
         </p:nvSpPr>
         <p:spPr>
           <a:xfrm>
-            <a:off x="731520" y="3840479"/>
-            <a:ext cx="3429000" cy="1920240"/>
+            <a:off x="731520" y="3840480"/>
+            <a:ext cx="3429000" cy="1965960"/>
           </a:xfrm>
           <a:prstGeom prst="roundRect">
             <a:avLst/>
@@ -6357,14 +6202,14 @@
       </p:sp>
       <p:sp>
         <p:nvSpPr>
-          <p:cNvPr id="13" name="TextBox 12"/>
+          <p:cNvPr id="12" name="TextBox 11"/>
           <p:cNvSpPr txBox="1"/>
           <p:nvPr/>
         </p:nvSpPr>
         <p:spPr>
           <a:xfrm>
-            <a:off x="914400" y="3977639"/>
-            <a:ext cx="3063240" cy="1645920"/>
+            <a:off x="914400" y="3977640"/>
+            <a:ext cx="3063240" cy="1691640"/>
           </a:xfrm>
           <a:prstGeom prst="rect">
             <a:avLst/>
@@ -6407,14 +6252,14 @@
       </p:sp>
       <p:sp>
         <p:nvSpPr>
-          <p:cNvPr id="14" name="Rounded Rectangle 13"/>
+          <p:cNvPr id="13" name="Rounded Rectangle 12"/>
           <p:cNvSpPr/>
           <p:nvPr/>
         </p:nvSpPr>
         <p:spPr>
           <a:xfrm>
-            <a:off x="4343400" y="3840479"/>
-            <a:ext cx="3429000" cy="1920240"/>
+            <a:off x="4343400" y="3840480"/>
+            <a:ext cx="3429000" cy="1965960"/>
           </a:xfrm>
           <a:prstGeom prst="roundRect">
             <a:avLst/>
@@ -6452,14 +6297,14 @@
       </p:sp>
       <p:sp>
         <p:nvSpPr>
-          <p:cNvPr id="15" name="TextBox 14"/>
+          <p:cNvPr id="14" name="TextBox 13"/>
           <p:cNvSpPr txBox="1"/>
           <p:nvPr/>
         </p:nvSpPr>
         <p:spPr>
           <a:xfrm>
-            <a:off x="4526280" y="3977639"/>
-            <a:ext cx="3063240" cy="1645920"/>
+            <a:off x="4526280" y="3977640"/>
+            <a:ext cx="3063240" cy="1691640"/>
           </a:xfrm>
           <a:prstGeom prst="rect">
             <a:avLst/>
@@ -6502,14 +6347,14 @@
       </p:sp>
       <p:sp>
         <p:nvSpPr>
-          <p:cNvPr id="16" name="Rounded Rectangle 15"/>
+          <p:cNvPr id="15" name="Rounded Rectangle 14"/>
           <p:cNvSpPr/>
           <p:nvPr/>
         </p:nvSpPr>
         <p:spPr>
           <a:xfrm>
-            <a:off x="7955280" y="3840479"/>
-            <a:ext cx="3429000" cy="1920240"/>
+            <a:off x="7955280" y="3840480"/>
+            <a:ext cx="3429000" cy="1965960"/>
           </a:xfrm>
           <a:prstGeom prst="roundRect">
             <a:avLst/>
@@ -6547,14 +6392,14 @@
       </p:sp>
       <p:sp>
         <p:nvSpPr>
-          <p:cNvPr id="17" name="TextBox 16"/>
+          <p:cNvPr id="16" name="TextBox 15"/>
           <p:cNvSpPr txBox="1"/>
           <p:nvPr/>
         </p:nvSpPr>
         <p:spPr>
           <a:xfrm>
-            <a:off x="8138160" y="3977639"/>
-            <a:ext cx="3063240" cy="1645920"/>
+            <a:off x="8138160" y="3977640"/>
+            <a:ext cx="3063240" cy="1691640"/>
           </a:xfrm>
           <a:prstGeom prst="rect">
             <a:avLst/>
@@ -6621,8 +6466,8 @@
         </p:nvSpPr>
         <p:spPr>
           <a:xfrm>
-            <a:off x="731520" y="365760"/>
-            <a:ext cx="10698480" cy="320040"/>
+            <a:off x="731520" y="502920"/>
+            <a:ext cx="10698480" cy="548640"/>
           </a:xfrm>
           <a:prstGeom prst="rect">
             <a:avLst/>
@@ -6636,14 +6481,14 @@
           <a:lstStyle/>
           <a:p>
             <a:pPr>
-              <a:defRPr sz="1100" b="1">
-                <a:solidFill>
-                  <a:srgbClr val="D97706"/>
-                </a:solidFill>
-              </a:defRPr>
-            </a:pPr>
-            <a:r>
-              <a:t>ARCHITECTURE &amp; TRUST ENGINE</a:t>
+              <a:defRPr sz="2400" b="1">
+                <a:solidFill>
+                  <a:srgbClr val="0F172A"/>
+                </a:solidFill>
+              </a:defRPr>
+            </a:pPr>
+            <a:r>
+              <a:t>Technical Stack, Evidence-First Trust &amp; Implementation</a:t>
             </a:r>
           </a:p>
         </p:txBody>
@@ -6656,8 +6501,8 @@
         </p:nvSpPr>
         <p:spPr>
           <a:xfrm>
-            <a:off x="731520" y="685800"/>
-            <a:ext cx="10698480" cy="502920"/>
+            <a:off x="731520" y="1051560"/>
+            <a:ext cx="10698480" cy="411480"/>
           </a:xfrm>
           <a:prstGeom prst="rect">
             <a:avLst/>
@@ -6671,14 +6516,14 @@
           <a:lstStyle/>
           <a:p>
             <a:pPr>
-              <a:defRPr sz="2200" b="1">
-                <a:solidFill>
-                  <a:srgbClr val="0F172A"/>
-                </a:solidFill>
-              </a:defRPr>
-            </a:pPr>
-            <a:r>
-              <a:t>Technical Stack, Evidence-First Provenance &amp; DPI Integration</a:t>
+              <a:defRPr sz="1300">
+                <a:solidFill>
+                  <a:srgbClr val="64748B"/>
+                </a:solidFill>
+              </a:defRPr>
+            </a:pPr>
+            <a:r>
+              <a:t>Engineered for speed, mathematical correctness, privacy sovereignty, and national scale</a:t>
             </a:r>
           </a:p>
         </p:txBody>
@@ -6686,41 +6531,6 @@
       <p:sp>
         <p:nvSpPr>
           <p:cNvPr id="4" name="TextBox 3"/>
-          <p:cNvSpPr txBox="1"/>
-          <p:nvPr/>
-        </p:nvSpPr>
-        <p:spPr>
-          <a:xfrm>
-            <a:off x="731520" y="1188720"/>
-            <a:ext cx="10698480" cy="365760"/>
-          </a:xfrm>
-          <a:prstGeom prst="rect">
-            <a:avLst/>
-          </a:prstGeom>
-          <a:noFill/>
-        </p:spPr>
-        <p:txBody>
-          <a:bodyPr wrap="square">
-            <a:spAutoFit/>
-          </a:bodyPr>
-          <a:lstStyle/>
-          <a:p>
-            <a:pPr>
-              <a:defRPr sz="1200">
-                <a:solidFill>
-                  <a:srgbClr val="64748B"/>
-                </a:solidFill>
-              </a:defRPr>
-            </a:pPr>
-            <a:r>
-              <a:t>Engineered for speed, mathematical correctness, privacy sovereignty, and national scale</a:t>
-            </a:r>
-          </a:p>
-        </p:txBody>
-      </p:sp>
-      <p:sp>
-        <p:nvSpPr>
-          <p:cNvPr id="5" name="TextBox 4"/>
           <p:cNvSpPr txBox="1"/>
           <p:nvPr/>
         </p:nvSpPr>
@@ -6748,21 +6558,21 @@
               </a:defRPr>
             </a:pPr>
             <a:r>
-              <a:t>JanMitra: Understand. Discover. Apply.  |  Slide 6 of 7</a:t>
-            </a:r>
-          </a:p>
-        </p:txBody>
-      </p:sp>
-      <p:sp>
-        <p:nvSpPr>
-          <p:cNvPr id="6" name="Rounded Rectangle 5"/>
+              <a:t>JanMitra  •  Slide 6 of 7</a:t>
+            </a:r>
+          </a:p>
+        </p:txBody>
+      </p:sp>
+      <p:sp>
+        <p:nvSpPr>
+          <p:cNvPr id="5" name="Rounded Rectangle 4"/>
           <p:cNvSpPr/>
           <p:nvPr/>
         </p:nvSpPr>
         <p:spPr>
           <a:xfrm>
-            <a:off x="731520" y="1737360"/>
-            <a:ext cx="5120640" cy="1920240"/>
+            <a:off x="731520" y="1691640"/>
+            <a:ext cx="5120640" cy="1965960"/>
           </a:xfrm>
           <a:prstGeom prst="roundRect">
             <a:avLst/>
@@ -6800,14 +6610,14 @@
       </p:sp>
       <p:sp>
         <p:nvSpPr>
-          <p:cNvPr id="7" name="TextBox 6"/>
+          <p:cNvPr id="6" name="TextBox 5"/>
           <p:cNvSpPr txBox="1"/>
           <p:nvPr/>
         </p:nvSpPr>
         <p:spPr>
           <a:xfrm>
-            <a:off x="1005840" y="1874520"/>
-            <a:ext cx="4572000" cy="1645920"/>
+            <a:off x="1005840" y="1828800"/>
+            <a:ext cx="4572000" cy="1691640"/>
           </a:xfrm>
           <a:prstGeom prst="rect">
             <a:avLst/>
@@ -6862,14 +6672,14 @@
       </p:sp>
       <p:sp>
         <p:nvSpPr>
-          <p:cNvPr id="8" name="Rounded Rectangle 7"/>
+          <p:cNvPr id="7" name="Rounded Rectangle 6"/>
           <p:cNvSpPr/>
           <p:nvPr/>
         </p:nvSpPr>
         <p:spPr>
           <a:xfrm>
-            <a:off x="6126480" y="1737360"/>
-            <a:ext cx="5120640" cy="1920240"/>
+            <a:off x="6126480" y="1691640"/>
+            <a:ext cx="5120640" cy="1965960"/>
           </a:xfrm>
           <a:prstGeom prst="roundRect">
             <a:avLst/>
@@ -6907,14 +6717,14 @@
       </p:sp>
       <p:sp>
         <p:nvSpPr>
-          <p:cNvPr id="9" name="TextBox 8"/>
+          <p:cNvPr id="8" name="TextBox 7"/>
           <p:cNvSpPr txBox="1"/>
           <p:nvPr/>
         </p:nvSpPr>
         <p:spPr>
           <a:xfrm>
-            <a:off x="6400800" y="1874520"/>
-            <a:ext cx="4572000" cy="1645920"/>
+            <a:off x="6400800" y="1828800"/>
+            <a:ext cx="4572000" cy="1691640"/>
           </a:xfrm>
           <a:prstGeom prst="rect">
             <a:avLst/>
@@ -6969,14 +6779,14 @@
       </p:sp>
       <p:sp>
         <p:nvSpPr>
-          <p:cNvPr id="10" name="Rounded Rectangle 9"/>
+          <p:cNvPr id="9" name="Rounded Rectangle 8"/>
           <p:cNvSpPr/>
           <p:nvPr/>
         </p:nvSpPr>
         <p:spPr>
           <a:xfrm>
             <a:off x="731520" y="3931920"/>
-            <a:ext cx="5120640" cy="1920240"/>
+            <a:ext cx="5120640" cy="1965960"/>
           </a:xfrm>
           <a:prstGeom prst="roundRect">
             <a:avLst/>
@@ -7014,14 +6824,14 @@
       </p:sp>
       <p:sp>
         <p:nvSpPr>
-          <p:cNvPr id="11" name="TextBox 10"/>
+          <p:cNvPr id="10" name="TextBox 9"/>
           <p:cNvSpPr txBox="1"/>
           <p:nvPr/>
         </p:nvSpPr>
         <p:spPr>
           <a:xfrm>
             <a:off x="1005840" y="4069080"/>
-            <a:ext cx="4572000" cy="1645920"/>
+            <a:ext cx="4572000" cy="1691640"/>
           </a:xfrm>
           <a:prstGeom prst="rect">
             <a:avLst/>
@@ -7076,14 +6886,14 @@
       </p:sp>
       <p:sp>
         <p:nvSpPr>
-          <p:cNvPr id="12" name="Rounded Rectangle 11"/>
+          <p:cNvPr id="11" name="Rounded Rectangle 10"/>
           <p:cNvSpPr/>
           <p:nvPr/>
         </p:nvSpPr>
         <p:spPr>
           <a:xfrm>
             <a:off x="6126480" y="3931920"/>
-            <a:ext cx="5120640" cy="1920240"/>
+            <a:ext cx="5120640" cy="1965960"/>
           </a:xfrm>
           <a:prstGeom prst="roundRect">
             <a:avLst/>
@@ -7121,14 +6931,14 @@
       </p:sp>
       <p:sp>
         <p:nvSpPr>
-          <p:cNvPr id="13" name="TextBox 12"/>
+          <p:cNvPr id="12" name="TextBox 11"/>
           <p:cNvSpPr txBox="1"/>
           <p:nvPr/>
         </p:nvSpPr>
         <p:spPr>
           <a:xfrm>
             <a:off x="6400800" y="4069080"/>
-            <a:ext cx="4572000" cy="1645920"/>
+            <a:ext cx="4572000" cy="1691640"/>
           </a:xfrm>
           <a:prstGeom prst="rect">
             <a:avLst/>
@@ -7265,22 +7075,7 @@
           <a:lstStyle/>
           <a:p>
             <a:pPr>
-              <a:defRPr sz="1200" b="1">
-                <a:solidFill>
-                  <a:srgbClr val="F59E0B"/>
-                </a:solidFill>
-              </a:defRPr>
-            </a:pPr>
-            <a:r>
-              <a:t>TRANSFORMATIVE CITIZEN IMPACT  •  FROM IDEA TO IMPACT</a:t>
-            </a:r>
-          </a:p>
-          <a:p>
-            <a:pPr>
-              <a:spcBef>
-                <a:spcPts val="400"/>
-              </a:spcBef>
-              <a:defRPr sz="3000" b="1">
+              <a:defRPr sz="3200" b="1">
                 <a:solidFill>
                   <a:srgbClr val="FFFFFF"/>
                 </a:solidFill>
